--- a/assets/presentations/diaporamas/F1-la-logique-pedagogique.pptx
+++ b/assets/presentations/diaporamas/F1-la-logique-pedagogique.pptx
@@ -20,6 +20,7 @@
     <p:sldId id="268" r:id="rId20"/>
     <p:sldId id="269" r:id="rId21"/>
     <p:sldId id="270" r:id="rId22"/>
+    <p:sldId id="271" r:id="rId23"/>
   </p:sldIdLst>
   <p:sldSz cx="12191695" cy="6858000" type="screen4x3"/>
   <p:notesSz cx="6858000" cy="9144000"/>
@@ -586,7 +587,7 @@
           <a:lstStyle/>
           <a:p>
             <a:r>
-              <a:t>La phrase porteuse est le détail que les enseignants relèvent : c'est exactement ce qu'ils font en classe quand ils refusent de faire répéter un mot seul.</a:t>
+              <a:t>Le point que les enseignants comprennent le plus vite : un élève adulte qui sait qu'on l'observe ne s'enregistre pas. Celui qui sait que personne n'écoute recommence jusqu'à être content.</a:t>
             </a:r>
           </a:p>
         </p:txBody>
@@ -656,7 +657,7 @@
           <a:lstStyle/>
           <a:p>
             <a:r>
-              <a:t>Deux moteurs de mémorisation feraient deux progressions qui divergent. Et reconnaître n'est pas savoir : on écrit.</a:t>
+              <a:t>La phrase porteuse est le détail que les enseignants relèvent : c'est exactement ce qu'ils font en classe quand ils refusent de faire répéter un mot seul.</a:t>
             </a:r>
           </a:p>
         </p:txBody>
@@ -726,7 +727,7 @@
           <a:lstStyle/>
           <a:p>
             <a:r>
-              <a:t>Ces trois refus sont écrits dans les consignes envoyées au modèle, pas dans une politique d'usage. Si on demande à voir, on peut montrer le fichier.</a:t>
+              <a:t>Deux moteurs de mémorisation feraient deux progressions qui divergent. Et reconnaître n'est pas savoir : on écrit.</a:t>
             </a:r>
           </a:p>
         </p:txBody>
@@ -796,7 +797,7 @@
           <a:lstStyle/>
           <a:p>
             <a:r>
-              <a:t>À dire fermement : ce n'est pas une fonctionnalité manquante. Diagnostiquer est le métier, et une machine qui range des élèves dans des cases se trompe sur ceux qui en ont le plus besoin.</a:t>
+              <a:t>Ces trois refus sont écrits dans les consignes envoyées au modèle, pas dans une politique d'usage. Si on demande à voir, on peut montrer le fichier.</a:t>
             </a:r>
           </a:p>
         </p:txBody>
@@ -866,7 +867,7 @@
           <a:lstStyle/>
           <a:p>
             <a:r>
-              <a:t>Cette diapositive répond d'avance à « vous remplacez le professeur ». Ne pas la sauter même si personne n'a posé la question — surtout si personne ne l'a posée.</a:t>
+              <a:t>À dire fermement : ce n'est pas une fonctionnalité manquante. Diagnostiquer est le métier, et une machine qui range des élèves dans des cases se trompe sur ceux qui en ont le plus besoin.</a:t>
             </a:r>
           </a:p>
         </p:txBody>
@@ -936,6 +937,76 @@
           <a:lstStyle/>
           <a:p>
             <a:r>
+              <a:t>Cette diapositive répond d'avance à « vous remplacez le professeur ». Ne pas la sauter même si personne n'a posé la question — surtout si personne ne l'a posée.</a:t>
+            </a:r>
+          </a:p>
+        </p:txBody>
+      </p:sp>
+      <p:sp>
+        <p:nvSpPr>
+          <p:cNvPr id="4" name="Slide Number Placeholder 3"/>
+          <p:cNvSpPr>
+            <a:spLocks noGrp="1"/>
+          </p:cNvSpPr>
+          <p:nvPr>
+            <p:ph type="sldNum" idx="5" sz="quarter"/>
+          </p:nvPr>
+        </p:nvSpPr>
+        <p:spPr/>
+      </p:sp>
+    </p:spTree>
+  </p:cSld>
+  <p:clrMapOvr>
+    <a:masterClrMapping/>
+  </p:clrMapOvr>
+</p:notes>
+</file>
+
+<file path=ppt/notesSlides/notesSlide16.xml><?xml version="1.0" encoding="utf-8"?>
+<p:notes xmlns:a="http://schemas.openxmlformats.org/drawingml/2006/main" xmlns:p="http://schemas.openxmlformats.org/presentationml/2006/main" xmlns:r="http://schemas.openxmlformats.org/officeDocument/2006/relationships">
+  <p:cSld>
+    <p:spTree>
+      <p:nvGrpSpPr>
+        <p:cNvPr id="1" name=""/>
+        <p:cNvGrpSpPr/>
+        <p:nvPr/>
+      </p:nvGrpSpPr>
+      <p:grpSpPr>
+        <a:xfrm>
+          <a:off x="0" y="0"/>
+          <a:ext cx="0" cy="0"/>
+          <a:chOff x="0" y="0"/>
+          <a:chExt cx="0" cy="0"/>
+        </a:xfrm>
+      </p:grpSpPr>
+      <p:sp>
+        <p:nvSpPr>
+          <p:cNvPr id="2" name="Slide Image Placeholder 1"/>
+          <p:cNvSpPr>
+            <a:spLocks noGrp="1"/>
+          </p:cNvSpPr>
+          <p:nvPr>
+            <p:ph type="sldImg" idx="2"/>
+          </p:nvPr>
+        </p:nvSpPr>
+        <p:spPr/>
+      </p:sp>
+      <p:sp>
+        <p:nvSpPr>
+          <p:cNvPr id="3" name="Notes Placeholder 2"/>
+          <p:cNvSpPr>
+            <a:spLocks noGrp="1"/>
+          </p:cNvSpPr>
+          <p:nvPr>
+            <p:ph type="body" idx="3" sz="quarter"/>
+          </p:nvPr>
+        </p:nvSpPr>
+        <p:spPr/>
+        <p:txBody>
+          <a:bodyPr/>
+          <a:lstStyle/>
+          <a:p>
+            <a:r>
               <a:t>Terminer là-dessus et se taire. C'est la seule diapositive du diaporama qui ne contient aucun chiffre, et c'est voulu.</a:t>
             </a:r>
           </a:p>
@@ -1356,7 +1427,7 @@
           <a:lstStyle/>
           <a:p>
             <a:r>
-              <a:t>C'est la décision la plus discutée du projet, et la plus facile à défendre en salle : demander qui, dans la salle, se souvient d'une règle apprise avant d'en avoir eu besoin.</a:t>
+              <a:t>La contrainte a été tenue sur les 87 modules et les huit niveaux. Elle coûte cher à l'écriture — il faut faire entrer une intention dans une forme existante — et c'est l'élève qui encaisse la différence quand on ne la tient pas. Les sept sont montrées en images dans l'annexe A2.</a:t>
             </a:r>
           </a:p>
         </p:txBody>
@@ -1426,7 +1497,7 @@
           <a:lstStyle/>
           <a:p>
             <a:r>
-              <a:t>Dire que c'est une correction, pas une intention initiale. Un projet qui raconte n'avoir jamais eu tort n'est pas crédible devant des praticiens.</a:t>
+              <a:t>C'est la décision la plus discutée du projet, et la plus facile à défendre en salle : demander qui, dans la salle, se souvient d'une règle apprise avant d'en avoir eu besoin.</a:t>
             </a:r>
           </a:p>
         </p:txBody>
@@ -1496,7 +1567,7 @@
           <a:lstStyle/>
           <a:p>
             <a:r>
-              <a:t>Le point que les enseignants comprennent le plus vite : un élève adulte qui sait qu'on l'observe ne s'enregistre pas. Celui qui sait que personne n'écoute recommence jusqu'à être content.</a:t>
+              <a:t>Dire que c'est une correction, pas une intention initiale. Un projet qui raconte n'avoir jamais eu tort n'est pas crédible devant des praticiens.</a:t>
             </a:r>
           </a:p>
         </p:txBody>
@@ -4918,64 +4989,110 @@
                 </a:solidFill>
                 <a:latin typeface="Verdana"/>
               </a:rPr>
-              <a:t>ÉCOUTER</a:t>
-            </a:r>
-          </a:p>
-        </p:txBody>
-      </p:sp>
-      <p:sp>
-        <p:nvSpPr>
-          <p:cNvPr id="6" name="TextBox 5"/>
-          <p:cNvSpPr txBox="1"/>
-          <p:nvPr/>
-        </p:nvSpPr>
-        <p:spPr>
-          <a:xfrm>
-            <a:off x="566928" y="749808"/>
-            <a:ext cx="11057839" cy="877824"/>
-          </a:xfrm>
-          <a:prstGeom prst="rect">
-            <a:avLst/>
-          </a:prstGeom>
-          <a:noFill/>
-        </p:spPr>
-        <p:txBody>
-          <a:bodyPr wrap="square" lIns="0" rIns="0" tIns="0" bIns="0" anchor="t">
-            <a:spAutoFit/>
-          </a:bodyPr>
-          <a:lstStyle/>
-          <a:p>
-            <a:pPr algn="l">
-              <a:lnSpc>
-                <a:spcPct val="115000"/>
-              </a:lnSpc>
-            </a:pPr>
-            <a:r>
-              <a:rPr sz="2900" b="1" i="0">
-                <a:solidFill>
-                  <a:srgbClr val="17181A"/>
-                </a:solidFill>
-                <a:latin typeface="Verdana"/>
-              </a:rPr>
-              <a:t>Ce qu'il a fallu pour que l'oral serve à quelque chose</a:t>
-            </a:r>
-          </a:p>
-        </p:txBody>
-      </p:sp>
-      <p:sp>
-        <p:nvSpPr>
-          <p:cNvPr id="7" name="Rounded Rectangle 6"/>
+              <a:t>LA CORRECTION ET L'ENVOI</a:t>
+            </a:r>
+          </a:p>
+        </p:txBody>
+      </p:sp>
+      <p:sp>
+        <p:nvSpPr>
+          <p:cNvPr id="6" name="Rounded Rectangle 5"/>
           <p:cNvSpPr/>
           <p:nvPr/>
         </p:nvSpPr>
         <p:spPr>
           <a:xfrm>
-            <a:off x="566928" y="1810512"/>
-            <a:ext cx="5446623" cy="2052828"/>
+            <a:off x="566928" y="1225296"/>
+            <a:ext cx="11057839" cy="1967991"/>
           </a:xfrm>
           <a:prstGeom prst="roundRect">
             <a:avLst>
-              <a:gd name="adj" fmla="val 7126"/>
+              <a:gd name="adj" fmla="val 7434"/>
+            </a:avLst>
+          </a:prstGeom>
+          <a:solidFill>
+            <a:srgbClr val="FCE9F0"/>
+          </a:solidFill>
+          <a:ln w="12700">
+            <a:solidFill>
+              <a:srgbClr val="EAEAE8"/>
+            </a:solidFill>
+          </a:ln>
+          <a:effectLst/>
+        </p:spPr>
+        <p:style>
+          <a:lnRef idx="1">
+            <a:schemeClr val="accent1"/>
+          </a:lnRef>
+          <a:fillRef idx="3">
+            <a:schemeClr val="accent1"/>
+          </a:fillRef>
+          <a:effectRef idx="2">
+            <a:schemeClr val="accent1"/>
+          </a:effectRef>
+          <a:fontRef idx="minor">
+            <a:schemeClr val="lt1"/>
+          </a:fontRef>
+        </p:style>
+        <p:txBody>
+          <a:bodyPr rtlCol="0" anchor="ctr"/>
+          <a:lstStyle/>
+          <a:p/>
+        </p:txBody>
+      </p:sp>
+      <p:sp>
+        <p:nvSpPr>
+          <p:cNvPr id="7" name="TextBox 6"/>
+          <p:cNvSpPr txBox="1"/>
+          <p:nvPr/>
+        </p:nvSpPr>
+        <p:spPr>
+          <a:xfrm>
+            <a:off x="1298448" y="1682496"/>
+            <a:ext cx="9594799" cy="1145032"/>
+          </a:xfrm>
+          <a:prstGeom prst="rect">
+            <a:avLst/>
+          </a:prstGeom>
+          <a:noFill/>
+        </p:spPr>
+        <p:txBody>
+          <a:bodyPr wrap="square" lIns="0" rIns="0" tIns="0" bIns="0" anchor="t">
+            <a:spAutoFit/>
+          </a:bodyPr>
+          <a:lstStyle/>
+          <a:p>
+            <a:pPr algn="l">
+              <a:lnSpc>
+                <a:spcPct val="122000"/>
+              </a:lnSpc>
+            </a:pPr>
+            <a:r>
+              <a:rPr sz="3400" b="1" i="0">
+                <a:solidFill>
+                  <a:srgbClr val="17181A"/>
+                </a:solidFill>
+                <a:latin typeface="Verdana"/>
+              </a:rPr>
+              <a:t>La correction est privée. L'envoi est un geste.</a:t>
+            </a:r>
+          </a:p>
+        </p:txBody>
+      </p:sp>
+      <p:sp>
+        <p:nvSpPr>
+          <p:cNvPr id="8" name="Rounded Rectangle 7"/>
+          <p:cNvSpPr/>
+          <p:nvPr/>
+        </p:nvSpPr>
+        <p:spPr>
+          <a:xfrm>
+            <a:off x="566928" y="3467607"/>
+            <a:ext cx="11057839" cy="1671827"/>
+          </a:xfrm>
+          <a:prstGeom prst="roundRect">
+            <a:avLst>
+              <a:gd name="adj" fmla="val 8751"/>
             </a:avLst>
           </a:prstGeom>
           <a:solidFill>
@@ -5010,14 +5127,14 @@
       </p:sp>
       <p:sp>
         <p:nvSpPr>
-          <p:cNvPr id="8" name="TextBox 7"/>
-          <p:cNvSpPr txBox="1"/>
-          <p:nvPr/>
-        </p:nvSpPr>
-        <p:spPr>
-          <a:xfrm>
-            <a:off x="886968" y="2084831"/>
-            <a:ext cx="4806543" cy="387096"/>
+          <p:cNvPr id="9" name="TextBox 8"/>
+          <p:cNvSpPr txBox="1"/>
+          <p:nvPr/>
+        </p:nvSpPr>
+        <p:spPr>
+          <a:xfrm>
+            <a:off x="969264" y="3741927"/>
+            <a:ext cx="10234879" cy="1214627"/>
           </a:xfrm>
           <a:prstGeom prst="rect">
             <a:avLst/>
@@ -5032,428 +5149,17 @@
           <a:p>
             <a:pPr algn="l">
               <a:lnSpc>
-                <a:spcPct val="118000"/>
-              </a:lnSpc>
-            </a:pPr>
-            <a:r>
-              <a:rPr sz="2400" b="1" i="0">
-                <a:solidFill>
-                  <a:srgbClr val="A5335F"/>
-                </a:solidFill>
-                <a:latin typeface="Verdana"/>
-              </a:rPr>
-              <a:t>Une voix par personnage</a:t>
-            </a:r>
-          </a:p>
-        </p:txBody>
-      </p:sp>
-      <p:sp>
-        <p:nvSpPr>
-          <p:cNvPr id="9" name="TextBox 8"/>
-          <p:cNvSpPr txBox="1"/>
-          <p:nvPr/>
-        </p:nvSpPr>
-        <p:spPr>
-          <a:xfrm>
-            <a:off x="886968" y="2499360"/>
-            <a:ext cx="4806543" cy="1089660"/>
-          </a:xfrm>
-          <a:prstGeom prst="rect">
-            <a:avLst/>
-          </a:prstGeom>
-          <a:noFill/>
-        </p:spPr>
-        <p:txBody>
-          <a:bodyPr wrap="square" lIns="0" rIns="0" tIns="0" bIns="0" anchor="t">
-            <a:spAutoFit/>
-          </a:bodyPr>
-          <a:lstStyle/>
-          <a:p>
-            <a:pPr algn="l">
-              <a:lnSpc>
-                <a:spcPct val="142000"/>
-              </a:lnSpc>
-            </a:pPr>
-            <a:r>
-              <a:rPr sz="1800" b="0" i="0">
-                <a:solidFill>
-                  <a:srgbClr val="3A3D40"/>
-                </a:solidFill>
-                <a:latin typeface="Verdana"/>
-              </a:rPr>
-              <a:t>Oksana et Bertrand ne sonnent pas pareil. Sans ça, l'élève ne sait pas qui parle et n'entend qu'un texte lu.</a:t>
-            </a:r>
-          </a:p>
-        </p:txBody>
-      </p:sp>
-      <p:sp>
-        <p:nvSpPr>
-          <p:cNvPr id="10" name="Rounded Rectangle 9"/>
-          <p:cNvSpPr/>
-          <p:nvPr/>
-        </p:nvSpPr>
-        <p:spPr>
-          <a:xfrm>
-            <a:off x="6178143" y="1810512"/>
-            <a:ext cx="5446623" cy="2052828"/>
-          </a:xfrm>
-          <a:prstGeom prst="roundRect">
-            <a:avLst>
-              <a:gd name="adj" fmla="val 7126"/>
-            </a:avLst>
-          </a:prstGeom>
-          <a:solidFill>
-            <a:srgbClr val="FFFFFF"/>
-          </a:solidFill>
-          <a:ln w="12700">
-            <a:solidFill>
-              <a:srgbClr val="EAEAE8"/>
-            </a:solidFill>
-          </a:ln>
-          <a:effectLst/>
-        </p:spPr>
-        <p:style>
-          <a:lnRef idx="1">
-            <a:schemeClr val="accent1"/>
-          </a:lnRef>
-          <a:fillRef idx="3">
-            <a:schemeClr val="accent1"/>
-          </a:fillRef>
-          <a:effectRef idx="2">
-            <a:schemeClr val="accent1"/>
-          </a:effectRef>
-          <a:fontRef idx="minor">
-            <a:schemeClr val="lt1"/>
-          </a:fontRef>
-        </p:style>
-        <p:txBody>
-          <a:bodyPr rtlCol="0" anchor="ctr"/>
-          <a:lstStyle/>
-          <a:p/>
-        </p:txBody>
-      </p:sp>
-      <p:sp>
-        <p:nvSpPr>
-          <p:cNvPr id="11" name="TextBox 10"/>
-          <p:cNvSpPr txBox="1"/>
-          <p:nvPr/>
-        </p:nvSpPr>
-        <p:spPr>
-          <a:xfrm>
-            <a:off x="6498183" y="2084831"/>
-            <a:ext cx="4806543" cy="387096"/>
-          </a:xfrm>
-          <a:prstGeom prst="rect">
-            <a:avLst/>
-          </a:prstGeom>
-          <a:noFill/>
-        </p:spPr>
-        <p:txBody>
-          <a:bodyPr wrap="square" lIns="0" rIns="0" tIns="0" bIns="0" anchor="t">
-            <a:spAutoFit/>
-          </a:bodyPr>
-          <a:lstStyle/>
-          <a:p>
-            <a:pPr algn="l">
-              <a:lnSpc>
-                <a:spcPct val="118000"/>
-              </a:lnSpc>
-            </a:pPr>
-            <a:r>
-              <a:rPr sz="2400" b="1" i="0">
-                <a:solidFill>
-                  <a:srgbClr val="A5335F"/>
-                </a:solidFill>
-                <a:latin typeface="Verdana"/>
-              </a:rPr>
-              <a:t>Un débit ralenti à la source</a:t>
-            </a:r>
-          </a:p>
-        </p:txBody>
-      </p:sp>
-      <p:sp>
-        <p:nvSpPr>
-          <p:cNvPr id="12" name="TextBox 11"/>
-          <p:cNvSpPr txBox="1"/>
-          <p:nvPr/>
-        </p:nvSpPr>
-        <p:spPr>
-          <a:xfrm>
-            <a:off x="6498183" y="2499360"/>
-            <a:ext cx="4806543" cy="1089660"/>
-          </a:xfrm>
-          <a:prstGeom prst="rect">
-            <a:avLst/>
-          </a:prstGeom>
-          <a:noFill/>
-        </p:spPr>
-        <p:txBody>
-          <a:bodyPr wrap="square" lIns="0" rIns="0" tIns="0" bIns="0" anchor="t">
-            <a:spAutoFit/>
-          </a:bodyPr>
-          <a:lstStyle/>
-          <a:p>
-            <a:pPr algn="l">
-              <a:lnSpc>
-                <a:spcPct val="142000"/>
-              </a:lnSpc>
-            </a:pPr>
-            <a:r>
-              <a:rPr sz="1800" b="0" i="0">
-                <a:solidFill>
-                  <a:srgbClr val="3A3D40"/>
-                </a:solidFill>
-                <a:latin typeface="Verdana"/>
-              </a:rPr>
-              <a:t>La voix enseignante est synthétisée plus lentement, pas étirée après coup — l'étirement dégrade le son et s'entend.</a:t>
-            </a:r>
-          </a:p>
-        </p:txBody>
-      </p:sp>
-      <p:sp>
-        <p:nvSpPr>
-          <p:cNvPr id="13" name="Rounded Rectangle 12"/>
-          <p:cNvSpPr/>
-          <p:nvPr/>
-        </p:nvSpPr>
-        <p:spPr>
-          <a:xfrm>
-            <a:off x="566928" y="4027932"/>
-            <a:ext cx="5446623" cy="2052828"/>
-          </a:xfrm>
-          <a:prstGeom prst="roundRect">
-            <a:avLst>
-              <a:gd name="adj" fmla="val 7126"/>
-            </a:avLst>
-          </a:prstGeom>
-          <a:solidFill>
-            <a:srgbClr val="FFFFFF"/>
-          </a:solidFill>
-          <a:ln w="12700">
-            <a:solidFill>
-              <a:srgbClr val="EAEAE8"/>
-            </a:solidFill>
-          </a:ln>
-          <a:effectLst/>
-        </p:spPr>
-        <p:style>
-          <a:lnRef idx="1">
-            <a:schemeClr val="accent1"/>
-          </a:lnRef>
-          <a:fillRef idx="3">
-            <a:schemeClr val="accent1"/>
-          </a:fillRef>
-          <a:effectRef idx="2">
-            <a:schemeClr val="accent1"/>
-          </a:effectRef>
-          <a:fontRef idx="minor">
-            <a:schemeClr val="lt1"/>
-          </a:fontRef>
-        </p:style>
-        <p:txBody>
-          <a:bodyPr rtlCol="0" anchor="ctr"/>
-          <a:lstStyle/>
-          <a:p/>
-        </p:txBody>
-      </p:sp>
-      <p:sp>
-        <p:nvSpPr>
-          <p:cNvPr id="14" name="TextBox 13"/>
-          <p:cNvSpPr txBox="1"/>
-          <p:nvPr/>
-        </p:nvSpPr>
-        <p:spPr>
-          <a:xfrm>
-            <a:off x="886968" y="4302252"/>
-            <a:ext cx="4806543" cy="387096"/>
-          </a:xfrm>
-          <a:prstGeom prst="rect">
-            <a:avLst/>
-          </a:prstGeom>
-          <a:noFill/>
-        </p:spPr>
-        <p:txBody>
-          <a:bodyPr wrap="square" lIns="0" rIns="0" tIns="0" bIns="0" anchor="t">
-            <a:spAutoFit/>
-          </a:bodyPr>
-          <a:lstStyle/>
-          <a:p>
-            <a:pPr algn="l">
-              <a:lnSpc>
-                <a:spcPct val="118000"/>
-              </a:lnSpc>
-            </a:pPr>
-            <a:r>
-              <a:rPr sz="2400" b="1" i="0">
-                <a:solidFill>
-                  <a:srgbClr val="A5335F"/>
-                </a:solidFill>
-                <a:latin typeface="Verdana"/>
-              </a:rPr>
-              <a:t>Réécouter ne coûte rien</a:t>
-            </a:r>
-          </a:p>
-        </p:txBody>
-      </p:sp>
-      <p:sp>
-        <p:nvSpPr>
-          <p:cNvPr id="15" name="TextBox 14"/>
-          <p:cNvSpPr txBox="1"/>
-          <p:nvPr/>
-        </p:nvSpPr>
-        <p:spPr>
-          <a:xfrm>
-            <a:off x="886968" y="4716780"/>
-            <a:ext cx="4806543" cy="1089660"/>
-          </a:xfrm>
-          <a:prstGeom prst="rect">
-            <a:avLst/>
-          </a:prstGeom>
-          <a:noFill/>
-        </p:spPr>
-        <p:txBody>
-          <a:bodyPr wrap="square" lIns="0" rIns="0" tIns="0" bIns="0" anchor="t">
-            <a:spAutoFit/>
-          </a:bodyPr>
-          <a:lstStyle/>
-          <a:p>
-            <a:pPr algn="l">
-              <a:lnSpc>
-                <a:spcPct val="142000"/>
-              </a:lnSpc>
-            </a:pPr>
-            <a:r>
-              <a:rPr sz="1800" b="0" i="0">
-                <a:solidFill>
-                  <a:srgbClr val="3A3D40"/>
-                </a:solidFill>
-                <a:latin typeface="Verdana"/>
-              </a:rPr>
-              <a:t>21 403 pistes audio, dans le module. L'élève réécoute une réplique quinze fois sans user la patience de personne.</a:t>
-            </a:r>
-          </a:p>
-        </p:txBody>
-      </p:sp>
-      <p:sp>
-        <p:nvSpPr>
-          <p:cNvPr id="16" name="Rounded Rectangle 15"/>
-          <p:cNvSpPr/>
-          <p:nvPr/>
-        </p:nvSpPr>
-        <p:spPr>
-          <a:xfrm>
-            <a:off x="6178143" y="4027932"/>
-            <a:ext cx="5446623" cy="2052828"/>
-          </a:xfrm>
-          <a:prstGeom prst="roundRect">
-            <a:avLst>
-              <a:gd name="adj" fmla="val 7126"/>
-            </a:avLst>
-          </a:prstGeom>
-          <a:solidFill>
-            <a:srgbClr val="FFFFFF"/>
-          </a:solidFill>
-          <a:ln w="12700">
-            <a:solidFill>
-              <a:srgbClr val="EAEAE8"/>
-            </a:solidFill>
-          </a:ln>
-          <a:effectLst/>
-        </p:spPr>
-        <p:style>
-          <a:lnRef idx="1">
-            <a:schemeClr val="accent1"/>
-          </a:lnRef>
-          <a:fillRef idx="3">
-            <a:schemeClr val="accent1"/>
-          </a:fillRef>
-          <a:effectRef idx="2">
-            <a:schemeClr val="accent1"/>
-          </a:effectRef>
-          <a:fontRef idx="minor">
-            <a:schemeClr val="lt1"/>
-          </a:fontRef>
-        </p:style>
-        <p:txBody>
-          <a:bodyPr rtlCol="0" anchor="ctr"/>
-          <a:lstStyle/>
-          <a:p/>
-        </p:txBody>
-      </p:sp>
-      <p:sp>
-        <p:nvSpPr>
-          <p:cNvPr id="17" name="TextBox 16"/>
-          <p:cNvSpPr txBox="1"/>
-          <p:nvPr/>
-        </p:nvSpPr>
-        <p:spPr>
-          <a:xfrm>
-            <a:off x="6498183" y="4302252"/>
-            <a:ext cx="4806543" cy="387096"/>
-          </a:xfrm>
-          <a:prstGeom prst="rect">
-            <a:avLst/>
-          </a:prstGeom>
-          <a:noFill/>
-        </p:spPr>
-        <p:txBody>
-          <a:bodyPr wrap="square" lIns="0" rIns="0" tIns="0" bIns="0" anchor="t">
-            <a:spAutoFit/>
-          </a:bodyPr>
-          <a:lstStyle/>
-          <a:p>
-            <a:pPr algn="l">
-              <a:lnSpc>
-                <a:spcPct val="118000"/>
-              </a:lnSpc>
-            </a:pPr>
-            <a:r>
-              <a:rPr sz="2400" b="1" i="0">
-                <a:solidFill>
-                  <a:srgbClr val="A5335F"/>
-                </a:solidFill>
-                <a:latin typeface="Verdana"/>
-              </a:rPr>
-              <a:t>Le mot dans une phrase</a:t>
-            </a:r>
-          </a:p>
-        </p:txBody>
-      </p:sp>
-      <p:sp>
-        <p:nvSpPr>
-          <p:cNvPr id="18" name="TextBox 17"/>
-          <p:cNvSpPr txBox="1"/>
-          <p:nvPr/>
-        </p:nvSpPr>
-        <p:spPr>
-          <a:xfrm>
-            <a:off x="6498183" y="4716780"/>
-            <a:ext cx="4806543" cy="1089660"/>
-          </a:xfrm>
-          <a:prstGeom prst="rect">
-            <a:avLst/>
-          </a:prstGeom>
-          <a:noFill/>
-        </p:spPr>
-        <p:txBody>
-          <a:bodyPr wrap="square" lIns="0" rIns="0" tIns="0" bIns="0" anchor="t">
-            <a:spAutoFit/>
-          </a:bodyPr>
-          <a:lstStyle/>
-          <a:p>
-            <a:pPr algn="l">
-              <a:lnSpc>
-                <a:spcPct val="142000"/>
-              </a:lnSpc>
-            </a:pPr>
-            <a:r>
-              <a:rPr sz="1800" b="0" i="0">
-                <a:solidFill>
-                  <a:srgbClr val="3A3D40"/>
-                </a:solidFill>
-                <a:latin typeface="Verdana"/>
-              </a:rPr>
-              <a:t>Un mot isolé se prononce mal et s'oublie. Chaque mot du vocabulaire est enregistré dans une phrase porteuse.</a:t>
+                <a:spcPct val="145000"/>
+              </a:lnSpc>
+            </a:pPr>
+            <a:r>
+              <a:rPr sz="2000" b="0" i="0">
+                <a:solidFill>
+                  <a:srgbClr val="4B4F52"/>
+                </a:solidFill>
+                <a:latin typeface="Verdana"/>
+              </a:rPr>
+              <a:t>Quand un élève fait relire son texte ou son enregistrement, rien n'est gardé et rien ne part. L'enseignant reçoit ce que l'élève décide de lui envoyer, quand il le décide. C'est ce qui permet de recommencer douze fois.</a:t>
             </a:r>
           </a:p>
         </p:txBody>
@@ -5630,110 +5336,64 @@
                 </a:solidFill>
                 <a:latin typeface="Verdana"/>
               </a:rPr>
-              <a:t>LE VOCABULAIRE</a:t>
-            </a:r>
-          </a:p>
-        </p:txBody>
-      </p:sp>
-      <p:sp>
-        <p:nvSpPr>
-          <p:cNvPr id="6" name="Rounded Rectangle 5"/>
+              <a:t>ÉCOUTER</a:t>
+            </a:r>
+          </a:p>
+        </p:txBody>
+      </p:sp>
+      <p:sp>
+        <p:nvSpPr>
+          <p:cNvPr id="6" name="TextBox 5"/>
+          <p:cNvSpPr txBox="1"/>
+          <p:nvPr/>
+        </p:nvSpPr>
+        <p:spPr>
+          <a:xfrm>
+            <a:off x="566928" y="749808"/>
+            <a:ext cx="11057839" cy="877824"/>
+          </a:xfrm>
+          <a:prstGeom prst="rect">
+            <a:avLst/>
+          </a:prstGeom>
+          <a:noFill/>
+        </p:spPr>
+        <p:txBody>
+          <a:bodyPr wrap="square" lIns="0" rIns="0" tIns="0" bIns="0" anchor="t">
+            <a:spAutoFit/>
+          </a:bodyPr>
+          <a:lstStyle/>
+          <a:p>
+            <a:pPr algn="l">
+              <a:lnSpc>
+                <a:spcPct val="115000"/>
+              </a:lnSpc>
+            </a:pPr>
+            <a:r>
+              <a:rPr sz="2900" b="1" i="0">
+                <a:solidFill>
+                  <a:srgbClr val="17181A"/>
+                </a:solidFill>
+                <a:latin typeface="Verdana"/>
+              </a:rPr>
+              <a:t>Ce qu'il a fallu pour que l'oral serve à quelque chose</a:t>
+            </a:r>
+          </a:p>
+        </p:txBody>
+      </p:sp>
+      <p:sp>
+        <p:nvSpPr>
+          <p:cNvPr id="7" name="Rounded Rectangle 6"/>
           <p:cNvSpPr/>
           <p:nvPr/>
         </p:nvSpPr>
         <p:spPr>
           <a:xfrm>
-            <a:off x="566928" y="1225296"/>
-            <a:ext cx="11057839" cy="1967991"/>
+            <a:off x="566928" y="1810512"/>
+            <a:ext cx="5446623" cy="2052828"/>
           </a:xfrm>
           <a:prstGeom prst="roundRect">
             <a:avLst>
-              <a:gd name="adj" fmla="val 7434"/>
-            </a:avLst>
-          </a:prstGeom>
-          <a:solidFill>
-            <a:srgbClr val="FCE9F0"/>
-          </a:solidFill>
-          <a:ln w="12700">
-            <a:solidFill>
-              <a:srgbClr val="EAEAE8"/>
-            </a:solidFill>
-          </a:ln>
-          <a:effectLst/>
-        </p:spPr>
-        <p:style>
-          <a:lnRef idx="1">
-            <a:schemeClr val="accent1"/>
-          </a:lnRef>
-          <a:fillRef idx="3">
-            <a:schemeClr val="accent1"/>
-          </a:fillRef>
-          <a:effectRef idx="2">
-            <a:schemeClr val="accent1"/>
-          </a:effectRef>
-          <a:fontRef idx="minor">
-            <a:schemeClr val="lt1"/>
-          </a:fontRef>
-        </p:style>
-        <p:txBody>
-          <a:bodyPr rtlCol="0" anchor="ctr"/>
-          <a:lstStyle/>
-          <a:p/>
-        </p:txBody>
-      </p:sp>
-      <p:sp>
-        <p:nvSpPr>
-          <p:cNvPr id="7" name="TextBox 6"/>
-          <p:cNvSpPr txBox="1"/>
-          <p:nvPr/>
-        </p:nvSpPr>
-        <p:spPr>
-          <a:xfrm>
-            <a:off x="1298448" y="1682496"/>
-            <a:ext cx="9594799" cy="1145032"/>
-          </a:xfrm>
-          <a:prstGeom prst="rect">
-            <a:avLst/>
-          </a:prstGeom>
-          <a:noFill/>
-        </p:spPr>
-        <p:txBody>
-          <a:bodyPr wrap="square" lIns="0" rIns="0" tIns="0" bIns="0" anchor="t">
-            <a:spAutoFit/>
-          </a:bodyPr>
-          <a:lstStyle/>
-          <a:p>
-            <a:pPr algn="l">
-              <a:lnSpc>
-                <a:spcPct val="122000"/>
-              </a:lnSpc>
-            </a:pPr>
-            <a:r>
-              <a:rPr sz="3400" b="1" i="0">
-                <a:solidFill>
-                  <a:srgbClr val="17181A"/>
-                </a:solidFill>
-                <a:latin typeface="Verdana"/>
-              </a:rPr>
-              <a:t>Une seule porte d'entrée dans la progression.</a:t>
-            </a:r>
-          </a:p>
-        </p:txBody>
-      </p:sp>
-      <p:sp>
-        <p:nvSpPr>
-          <p:cNvPr id="8" name="Rounded Rectangle 7"/>
-          <p:cNvSpPr/>
-          <p:nvPr/>
-        </p:nvSpPr>
-        <p:spPr>
-          <a:xfrm>
-            <a:off x="566928" y="3467607"/>
-            <a:ext cx="11057839" cy="2040128"/>
-          </a:xfrm>
-          <a:prstGeom prst="roundRect">
-            <a:avLst>
-              <a:gd name="adj" fmla="val 7171"/>
+              <a:gd name="adj" fmla="val 7126"/>
             </a:avLst>
           </a:prstGeom>
           <a:solidFill>
@@ -5768,14 +5428,53 @@
       </p:sp>
       <p:sp>
         <p:nvSpPr>
+          <p:cNvPr id="8" name="TextBox 7"/>
+          <p:cNvSpPr txBox="1"/>
+          <p:nvPr/>
+        </p:nvSpPr>
+        <p:spPr>
+          <a:xfrm>
+            <a:off x="886968" y="2084831"/>
+            <a:ext cx="4806543" cy="387096"/>
+          </a:xfrm>
+          <a:prstGeom prst="rect">
+            <a:avLst/>
+          </a:prstGeom>
+          <a:noFill/>
+        </p:spPr>
+        <p:txBody>
+          <a:bodyPr wrap="square" lIns="0" rIns="0" tIns="0" bIns="0" anchor="t">
+            <a:spAutoFit/>
+          </a:bodyPr>
+          <a:lstStyle/>
+          <a:p>
+            <a:pPr algn="l">
+              <a:lnSpc>
+                <a:spcPct val="118000"/>
+              </a:lnSpc>
+            </a:pPr>
+            <a:r>
+              <a:rPr sz="2400" b="1" i="0">
+                <a:solidFill>
+                  <a:srgbClr val="A5335F"/>
+                </a:solidFill>
+                <a:latin typeface="Verdana"/>
+              </a:rPr>
+              <a:t>Une voix par personnage</a:t>
+            </a:r>
+          </a:p>
+        </p:txBody>
+      </p:sp>
+      <p:sp>
+        <p:nvSpPr>
           <p:cNvPr id="9" name="TextBox 8"/>
           <p:cNvSpPr txBox="1"/>
           <p:nvPr/>
         </p:nvSpPr>
         <p:spPr>
           <a:xfrm>
-            <a:off x="969264" y="3741927"/>
-            <a:ext cx="10234879" cy="1582928"/>
+            <a:off x="886968" y="2499360"/>
+            <a:ext cx="4806543" cy="1089660"/>
           </a:xfrm>
           <a:prstGeom prst="rect">
             <a:avLst/>
@@ -5790,17 +5489,389 @@
           <a:p>
             <a:pPr algn="l">
               <a:lnSpc>
-                <a:spcPct val="145000"/>
-              </a:lnSpc>
-            </a:pPr>
-            <a:r>
-              <a:rPr sz="2000" b="0" i="0">
-                <a:solidFill>
-                  <a:srgbClr val="4B4F52"/>
-                </a:solidFill>
-                <a:latin typeface="Verdana"/>
-              </a:rPr>
-              <a:t>La section « Je retiens des mots » d'un module n'enregistre rien : elle fait travailler. C'est l'atelier de cartes mémoire, en répétition espacée, qui fait monter un mot d'une boîte à l'autre — et l'élève y **écrit** le mot, il ne le reconnaît pas dans une liste.</a:t>
+                <a:spcPct val="142000"/>
+              </a:lnSpc>
+            </a:pPr>
+            <a:r>
+              <a:rPr sz="1800" b="0" i="0">
+                <a:solidFill>
+                  <a:srgbClr val="3A3D40"/>
+                </a:solidFill>
+                <a:latin typeface="Verdana"/>
+              </a:rPr>
+              <a:t>Oksana et Bertrand ne sonnent pas pareil. Sans ça, l'élève ne sait pas qui parle et n'entend qu'un texte lu.</a:t>
+            </a:r>
+          </a:p>
+        </p:txBody>
+      </p:sp>
+      <p:sp>
+        <p:nvSpPr>
+          <p:cNvPr id="10" name="Rounded Rectangle 9"/>
+          <p:cNvSpPr/>
+          <p:nvPr/>
+        </p:nvSpPr>
+        <p:spPr>
+          <a:xfrm>
+            <a:off x="6178143" y="1810512"/>
+            <a:ext cx="5446623" cy="2052828"/>
+          </a:xfrm>
+          <a:prstGeom prst="roundRect">
+            <a:avLst>
+              <a:gd name="adj" fmla="val 7126"/>
+            </a:avLst>
+          </a:prstGeom>
+          <a:solidFill>
+            <a:srgbClr val="FFFFFF"/>
+          </a:solidFill>
+          <a:ln w="12700">
+            <a:solidFill>
+              <a:srgbClr val="EAEAE8"/>
+            </a:solidFill>
+          </a:ln>
+          <a:effectLst/>
+        </p:spPr>
+        <p:style>
+          <a:lnRef idx="1">
+            <a:schemeClr val="accent1"/>
+          </a:lnRef>
+          <a:fillRef idx="3">
+            <a:schemeClr val="accent1"/>
+          </a:fillRef>
+          <a:effectRef idx="2">
+            <a:schemeClr val="accent1"/>
+          </a:effectRef>
+          <a:fontRef idx="minor">
+            <a:schemeClr val="lt1"/>
+          </a:fontRef>
+        </p:style>
+        <p:txBody>
+          <a:bodyPr rtlCol="0" anchor="ctr"/>
+          <a:lstStyle/>
+          <a:p/>
+        </p:txBody>
+      </p:sp>
+      <p:sp>
+        <p:nvSpPr>
+          <p:cNvPr id="11" name="TextBox 10"/>
+          <p:cNvSpPr txBox="1"/>
+          <p:nvPr/>
+        </p:nvSpPr>
+        <p:spPr>
+          <a:xfrm>
+            <a:off x="6498183" y="2084831"/>
+            <a:ext cx="4806543" cy="387096"/>
+          </a:xfrm>
+          <a:prstGeom prst="rect">
+            <a:avLst/>
+          </a:prstGeom>
+          <a:noFill/>
+        </p:spPr>
+        <p:txBody>
+          <a:bodyPr wrap="square" lIns="0" rIns="0" tIns="0" bIns="0" anchor="t">
+            <a:spAutoFit/>
+          </a:bodyPr>
+          <a:lstStyle/>
+          <a:p>
+            <a:pPr algn="l">
+              <a:lnSpc>
+                <a:spcPct val="118000"/>
+              </a:lnSpc>
+            </a:pPr>
+            <a:r>
+              <a:rPr sz="2400" b="1" i="0">
+                <a:solidFill>
+                  <a:srgbClr val="A5335F"/>
+                </a:solidFill>
+                <a:latin typeface="Verdana"/>
+              </a:rPr>
+              <a:t>Un débit ralenti à la source</a:t>
+            </a:r>
+          </a:p>
+        </p:txBody>
+      </p:sp>
+      <p:sp>
+        <p:nvSpPr>
+          <p:cNvPr id="12" name="TextBox 11"/>
+          <p:cNvSpPr txBox="1"/>
+          <p:nvPr/>
+        </p:nvSpPr>
+        <p:spPr>
+          <a:xfrm>
+            <a:off x="6498183" y="2499360"/>
+            <a:ext cx="4806543" cy="1089660"/>
+          </a:xfrm>
+          <a:prstGeom prst="rect">
+            <a:avLst/>
+          </a:prstGeom>
+          <a:noFill/>
+        </p:spPr>
+        <p:txBody>
+          <a:bodyPr wrap="square" lIns="0" rIns="0" tIns="0" bIns="0" anchor="t">
+            <a:spAutoFit/>
+          </a:bodyPr>
+          <a:lstStyle/>
+          <a:p>
+            <a:pPr algn="l">
+              <a:lnSpc>
+                <a:spcPct val="142000"/>
+              </a:lnSpc>
+            </a:pPr>
+            <a:r>
+              <a:rPr sz="1800" b="0" i="0">
+                <a:solidFill>
+                  <a:srgbClr val="3A3D40"/>
+                </a:solidFill>
+                <a:latin typeface="Verdana"/>
+              </a:rPr>
+              <a:t>La voix enseignante est synthétisée plus lentement, pas étirée après coup — l'étirement dégrade le son et s'entend.</a:t>
+            </a:r>
+          </a:p>
+        </p:txBody>
+      </p:sp>
+      <p:sp>
+        <p:nvSpPr>
+          <p:cNvPr id="13" name="Rounded Rectangle 12"/>
+          <p:cNvSpPr/>
+          <p:nvPr/>
+        </p:nvSpPr>
+        <p:spPr>
+          <a:xfrm>
+            <a:off x="566928" y="4027932"/>
+            <a:ext cx="5446623" cy="2052828"/>
+          </a:xfrm>
+          <a:prstGeom prst="roundRect">
+            <a:avLst>
+              <a:gd name="adj" fmla="val 7126"/>
+            </a:avLst>
+          </a:prstGeom>
+          <a:solidFill>
+            <a:srgbClr val="FFFFFF"/>
+          </a:solidFill>
+          <a:ln w="12700">
+            <a:solidFill>
+              <a:srgbClr val="EAEAE8"/>
+            </a:solidFill>
+          </a:ln>
+          <a:effectLst/>
+        </p:spPr>
+        <p:style>
+          <a:lnRef idx="1">
+            <a:schemeClr val="accent1"/>
+          </a:lnRef>
+          <a:fillRef idx="3">
+            <a:schemeClr val="accent1"/>
+          </a:fillRef>
+          <a:effectRef idx="2">
+            <a:schemeClr val="accent1"/>
+          </a:effectRef>
+          <a:fontRef idx="minor">
+            <a:schemeClr val="lt1"/>
+          </a:fontRef>
+        </p:style>
+        <p:txBody>
+          <a:bodyPr rtlCol="0" anchor="ctr"/>
+          <a:lstStyle/>
+          <a:p/>
+        </p:txBody>
+      </p:sp>
+      <p:sp>
+        <p:nvSpPr>
+          <p:cNvPr id="14" name="TextBox 13"/>
+          <p:cNvSpPr txBox="1"/>
+          <p:nvPr/>
+        </p:nvSpPr>
+        <p:spPr>
+          <a:xfrm>
+            <a:off x="886968" y="4302252"/>
+            <a:ext cx="4806543" cy="387096"/>
+          </a:xfrm>
+          <a:prstGeom prst="rect">
+            <a:avLst/>
+          </a:prstGeom>
+          <a:noFill/>
+        </p:spPr>
+        <p:txBody>
+          <a:bodyPr wrap="square" lIns="0" rIns="0" tIns="0" bIns="0" anchor="t">
+            <a:spAutoFit/>
+          </a:bodyPr>
+          <a:lstStyle/>
+          <a:p>
+            <a:pPr algn="l">
+              <a:lnSpc>
+                <a:spcPct val="118000"/>
+              </a:lnSpc>
+            </a:pPr>
+            <a:r>
+              <a:rPr sz="2400" b="1" i="0">
+                <a:solidFill>
+                  <a:srgbClr val="A5335F"/>
+                </a:solidFill>
+                <a:latin typeface="Verdana"/>
+              </a:rPr>
+              <a:t>Réécouter ne coûte rien</a:t>
+            </a:r>
+          </a:p>
+        </p:txBody>
+      </p:sp>
+      <p:sp>
+        <p:nvSpPr>
+          <p:cNvPr id="15" name="TextBox 14"/>
+          <p:cNvSpPr txBox="1"/>
+          <p:nvPr/>
+        </p:nvSpPr>
+        <p:spPr>
+          <a:xfrm>
+            <a:off x="886968" y="4716780"/>
+            <a:ext cx="4806543" cy="1089660"/>
+          </a:xfrm>
+          <a:prstGeom prst="rect">
+            <a:avLst/>
+          </a:prstGeom>
+          <a:noFill/>
+        </p:spPr>
+        <p:txBody>
+          <a:bodyPr wrap="square" lIns="0" rIns="0" tIns="0" bIns="0" anchor="t">
+            <a:spAutoFit/>
+          </a:bodyPr>
+          <a:lstStyle/>
+          <a:p>
+            <a:pPr algn="l">
+              <a:lnSpc>
+                <a:spcPct val="142000"/>
+              </a:lnSpc>
+            </a:pPr>
+            <a:r>
+              <a:rPr sz="1800" b="0" i="0">
+                <a:solidFill>
+                  <a:srgbClr val="3A3D40"/>
+                </a:solidFill>
+                <a:latin typeface="Verdana"/>
+              </a:rPr>
+              <a:t>21 403 pistes audio, dans le module. L'élève réécoute une réplique quinze fois sans user la patience de personne.</a:t>
+            </a:r>
+          </a:p>
+        </p:txBody>
+      </p:sp>
+      <p:sp>
+        <p:nvSpPr>
+          <p:cNvPr id="16" name="Rounded Rectangle 15"/>
+          <p:cNvSpPr/>
+          <p:nvPr/>
+        </p:nvSpPr>
+        <p:spPr>
+          <a:xfrm>
+            <a:off x="6178143" y="4027932"/>
+            <a:ext cx="5446623" cy="2052828"/>
+          </a:xfrm>
+          <a:prstGeom prst="roundRect">
+            <a:avLst>
+              <a:gd name="adj" fmla="val 7126"/>
+            </a:avLst>
+          </a:prstGeom>
+          <a:solidFill>
+            <a:srgbClr val="FFFFFF"/>
+          </a:solidFill>
+          <a:ln w="12700">
+            <a:solidFill>
+              <a:srgbClr val="EAEAE8"/>
+            </a:solidFill>
+          </a:ln>
+          <a:effectLst/>
+        </p:spPr>
+        <p:style>
+          <a:lnRef idx="1">
+            <a:schemeClr val="accent1"/>
+          </a:lnRef>
+          <a:fillRef idx="3">
+            <a:schemeClr val="accent1"/>
+          </a:fillRef>
+          <a:effectRef idx="2">
+            <a:schemeClr val="accent1"/>
+          </a:effectRef>
+          <a:fontRef idx="minor">
+            <a:schemeClr val="lt1"/>
+          </a:fontRef>
+        </p:style>
+        <p:txBody>
+          <a:bodyPr rtlCol="0" anchor="ctr"/>
+          <a:lstStyle/>
+          <a:p/>
+        </p:txBody>
+      </p:sp>
+      <p:sp>
+        <p:nvSpPr>
+          <p:cNvPr id="17" name="TextBox 16"/>
+          <p:cNvSpPr txBox="1"/>
+          <p:nvPr/>
+        </p:nvSpPr>
+        <p:spPr>
+          <a:xfrm>
+            <a:off x="6498183" y="4302252"/>
+            <a:ext cx="4806543" cy="387096"/>
+          </a:xfrm>
+          <a:prstGeom prst="rect">
+            <a:avLst/>
+          </a:prstGeom>
+          <a:noFill/>
+        </p:spPr>
+        <p:txBody>
+          <a:bodyPr wrap="square" lIns="0" rIns="0" tIns="0" bIns="0" anchor="t">
+            <a:spAutoFit/>
+          </a:bodyPr>
+          <a:lstStyle/>
+          <a:p>
+            <a:pPr algn="l">
+              <a:lnSpc>
+                <a:spcPct val="118000"/>
+              </a:lnSpc>
+            </a:pPr>
+            <a:r>
+              <a:rPr sz="2400" b="1" i="0">
+                <a:solidFill>
+                  <a:srgbClr val="A5335F"/>
+                </a:solidFill>
+                <a:latin typeface="Verdana"/>
+              </a:rPr>
+              <a:t>Le mot dans une phrase</a:t>
+            </a:r>
+          </a:p>
+        </p:txBody>
+      </p:sp>
+      <p:sp>
+        <p:nvSpPr>
+          <p:cNvPr id="18" name="TextBox 17"/>
+          <p:cNvSpPr txBox="1"/>
+          <p:nvPr/>
+        </p:nvSpPr>
+        <p:spPr>
+          <a:xfrm>
+            <a:off x="6498183" y="4716780"/>
+            <a:ext cx="4806543" cy="1089660"/>
+          </a:xfrm>
+          <a:prstGeom prst="rect">
+            <a:avLst/>
+          </a:prstGeom>
+          <a:noFill/>
+        </p:spPr>
+        <p:txBody>
+          <a:bodyPr wrap="square" lIns="0" rIns="0" tIns="0" bIns="0" anchor="t">
+            <a:spAutoFit/>
+          </a:bodyPr>
+          <a:lstStyle/>
+          <a:p>
+            <a:pPr algn="l">
+              <a:lnSpc>
+                <a:spcPct val="142000"/>
+              </a:lnSpc>
+            </a:pPr>
+            <a:r>
+              <a:rPr sz="1800" b="0" i="0">
+                <a:solidFill>
+                  <a:srgbClr val="3A3D40"/>
+                </a:solidFill>
+                <a:latin typeface="Verdana"/>
+              </a:rPr>
+              <a:t>Un mot isolé se prononce mal et s'oublie. Chaque mot du vocabulaire est enregistré dans une phrase porteuse.</a:t>
             </a:r>
           </a:p>
         </p:txBody>
@@ -5977,72 +6048,33 @@
                 </a:solidFill>
                 <a:latin typeface="Verdana"/>
               </a:rPr>
-              <a:t>LA QUESTION QUI VIENT TOUJOURS</a:t>
-            </a:r>
-          </a:p>
-        </p:txBody>
-      </p:sp>
-      <p:sp>
-        <p:nvSpPr>
-          <p:cNvPr id="6" name="TextBox 5"/>
-          <p:cNvSpPr txBox="1"/>
-          <p:nvPr/>
-        </p:nvSpPr>
-        <p:spPr>
-          <a:xfrm>
-            <a:off x="566928" y="749808"/>
-            <a:ext cx="11057839" cy="877824"/>
-          </a:xfrm>
-          <a:prstGeom prst="rect">
-            <a:avLst/>
-          </a:prstGeom>
-          <a:noFill/>
-        </p:spPr>
-        <p:txBody>
-          <a:bodyPr wrap="square" lIns="0" rIns="0" tIns="0" bIns="0" anchor="t">
-            <a:spAutoFit/>
-          </a:bodyPr>
-          <a:lstStyle/>
-          <a:p>
-            <a:pPr algn="l">
-              <a:lnSpc>
-                <a:spcPct val="115000"/>
-              </a:lnSpc>
-            </a:pPr>
-            <a:r>
-              <a:rPr sz="3400" b="1" i="0">
-                <a:solidFill>
-                  <a:srgbClr val="17181A"/>
-                </a:solidFill>
-                <a:latin typeface="Verdana"/>
-              </a:rPr>
-              <a:t>Le piège le plus fréquent</a:t>
-            </a:r>
-          </a:p>
-        </p:txBody>
-      </p:sp>
-      <p:sp>
-        <p:nvSpPr>
-          <p:cNvPr id="7" name="Rounded Rectangle 6"/>
+              <a:t>LE VOCABULAIRE</a:t>
+            </a:r>
+          </a:p>
+        </p:txBody>
+      </p:sp>
+      <p:sp>
+        <p:nvSpPr>
+          <p:cNvPr id="6" name="Rounded Rectangle 5"/>
           <p:cNvSpPr/>
           <p:nvPr/>
         </p:nvSpPr>
         <p:spPr>
           <a:xfrm>
-            <a:off x="566928" y="1856232"/>
-            <a:ext cx="5428335" cy="2331720"/>
+            <a:off x="566928" y="1225296"/>
+            <a:ext cx="11057839" cy="1967991"/>
           </a:xfrm>
           <a:prstGeom prst="roundRect">
             <a:avLst>
-              <a:gd name="adj" fmla="val 6274"/>
+              <a:gd name="adj" fmla="val 7434"/>
             </a:avLst>
           </a:prstGeom>
           <a:solidFill>
-            <a:srgbClr val="FFF6F5"/>
+            <a:srgbClr val="FCE9F0"/>
           </a:solidFill>
           <a:ln w="12700">
             <a:solidFill>
-              <a:srgbClr val="DC2626"/>
+              <a:srgbClr val="EAEAE8"/>
             </a:solidFill>
           </a:ln>
           <a:effectLst/>
@@ -6069,14 +6101,14 @@
       </p:sp>
       <p:sp>
         <p:nvSpPr>
-          <p:cNvPr id="8" name="TextBox 7"/>
-          <p:cNvSpPr txBox="1"/>
-          <p:nvPr/>
-        </p:nvSpPr>
-        <p:spPr>
-          <a:xfrm>
-            <a:off x="932688" y="2130552"/>
-            <a:ext cx="4696815" cy="274320"/>
+          <p:cNvPr id="7" name="TextBox 6"/>
+          <p:cNvSpPr txBox="1"/>
+          <p:nvPr/>
+        </p:nvSpPr>
+        <p:spPr>
+          <a:xfrm>
+            <a:off x="1298448" y="1682496"/>
+            <a:ext cx="9594799" cy="1145032"/>
           </a:xfrm>
           <a:prstGeom prst="rect">
             <a:avLst/>
@@ -6091,198 +6123,35 @@
           <a:p>
             <a:pPr algn="l">
               <a:lnSpc>
-                <a:spcPct val="135000"/>
-              </a:lnSpc>
-            </a:pPr>
-            <a:r>
-              <a:rPr sz="1300" b="1" i="0" spc="156">
-                <a:solidFill>
-                  <a:srgbClr val="B91C1C"/>
-                </a:solidFill>
-                <a:latin typeface="Verdana"/>
-              </a:rPr>
-              <a:t>ON ENTEND SOUVENT</a:t>
-            </a:r>
-          </a:p>
-        </p:txBody>
-      </p:sp>
-      <p:sp>
-        <p:nvSpPr>
-          <p:cNvPr id="9" name="TextBox 8"/>
-          <p:cNvSpPr txBox="1"/>
-          <p:nvPr/>
-        </p:nvSpPr>
-        <p:spPr>
-          <a:xfrm>
-            <a:off x="932688" y="2569464"/>
-            <a:ext cx="4696815" cy="1417320"/>
-          </a:xfrm>
-          <a:prstGeom prst="rect">
-            <a:avLst/>
-          </a:prstGeom>
-          <a:noFill/>
-        </p:spPr>
-        <p:txBody>
-          <a:bodyPr wrap="square" lIns="0" rIns="0" tIns="0" bIns="0" anchor="t">
-            <a:spAutoFit/>
-          </a:bodyPr>
-          <a:lstStyle/>
-          <a:p>
-            <a:pPr algn="l">
-              <a:lnSpc>
-                <a:spcPct val="130000"/>
-              </a:lnSpc>
-            </a:pPr>
-            <a:r>
-              <a:rPr sz="2500" b="1" i="0">
+                <a:spcPct val="122000"/>
+              </a:lnSpc>
+            </a:pPr>
+            <a:r>
+              <a:rPr sz="3400" b="1" i="0">
                 <a:solidFill>
                   <a:srgbClr val="17181A"/>
                 </a:solidFill>
                 <a:latin typeface="Verdana"/>
               </a:rPr>
-              <a:t>« Votre assistant va faire les exercices à leur place. »</a:t>
-            </a:r>
-          </a:p>
-        </p:txBody>
-      </p:sp>
-      <p:sp>
-        <p:nvSpPr>
-          <p:cNvPr id="10" name="Rounded Rectangle 9"/>
+              <a:t>Une seule porte d'entrée dans la progression.</a:t>
+            </a:r>
+          </a:p>
+        </p:txBody>
+      </p:sp>
+      <p:sp>
+        <p:nvSpPr>
+          <p:cNvPr id="8" name="Rounded Rectangle 7"/>
           <p:cNvSpPr/>
           <p:nvPr/>
         </p:nvSpPr>
         <p:spPr>
           <a:xfrm>
-            <a:off x="6196431" y="1856232"/>
-            <a:ext cx="5428335" cy="2331720"/>
+            <a:off x="566928" y="3467607"/>
+            <a:ext cx="11057839" cy="2040128"/>
           </a:xfrm>
           <a:prstGeom prst="roundRect">
             <a:avLst>
-              <a:gd name="adj" fmla="val 6274"/>
-            </a:avLst>
-          </a:prstGeom>
-          <a:solidFill>
-            <a:srgbClr val="E6F5EE"/>
-          </a:solidFill>
-          <a:ln w="12700">
-            <a:solidFill>
-              <a:srgbClr val="0A8F5B"/>
-            </a:solidFill>
-          </a:ln>
-          <a:effectLst/>
-        </p:spPr>
-        <p:style>
-          <a:lnRef idx="1">
-            <a:schemeClr val="accent1"/>
-          </a:lnRef>
-          <a:fillRef idx="3">
-            <a:schemeClr val="accent1"/>
-          </a:fillRef>
-          <a:effectRef idx="2">
-            <a:schemeClr val="accent1"/>
-          </a:effectRef>
-          <a:fontRef idx="minor">
-            <a:schemeClr val="lt1"/>
-          </a:fontRef>
-        </p:style>
-        <p:txBody>
-          <a:bodyPr rtlCol="0" anchor="ctr"/>
-          <a:lstStyle/>
-          <a:p/>
-        </p:txBody>
-      </p:sp>
-      <p:sp>
-        <p:nvSpPr>
-          <p:cNvPr id="11" name="TextBox 10"/>
-          <p:cNvSpPr txBox="1"/>
-          <p:nvPr/>
-        </p:nvSpPr>
-        <p:spPr>
-          <a:xfrm>
-            <a:off x="6562191" y="2130552"/>
-            <a:ext cx="4696815" cy="274320"/>
-          </a:xfrm>
-          <a:prstGeom prst="rect">
-            <a:avLst/>
-          </a:prstGeom>
-          <a:noFill/>
-        </p:spPr>
-        <p:txBody>
-          <a:bodyPr wrap="square" lIns="0" rIns="0" tIns="0" bIns="0" anchor="t">
-            <a:spAutoFit/>
-          </a:bodyPr>
-          <a:lstStyle/>
-          <a:p>
-            <a:pPr algn="l">
-              <a:lnSpc>
-                <a:spcPct val="135000"/>
-              </a:lnSpc>
-            </a:pPr>
-            <a:r>
-              <a:rPr sz="1300" b="1" i="0" spc="156">
-                <a:solidFill>
-                  <a:srgbClr val="07734A"/>
-                </a:solidFill>
-                <a:latin typeface="Verdana"/>
-              </a:rPr>
-              <a:t>IL FAUT DIRE PLUTÔT</a:t>
-            </a:r>
-          </a:p>
-        </p:txBody>
-      </p:sp>
-      <p:sp>
-        <p:nvSpPr>
-          <p:cNvPr id="12" name="TextBox 11"/>
-          <p:cNvSpPr txBox="1"/>
-          <p:nvPr/>
-        </p:nvSpPr>
-        <p:spPr>
-          <a:xfrm>
-            <a:off x="6562191" y="2569464"/>
-            <a:ext cx="4696815" cy="1417320"/>
-          </a:xfrm>
-          <a:prstGeom prst="rect">
-            <a:avLst/>
-          </a:prstGeom>
-          <a:noFill/>
-        </p:spPr>
-        <p:txBody>
-          <a:bodyPr wrap="square" lIns="0" rIns="0" tIns="0" bIns="0" anchor="t">
-            <a:spAutoFit/>
-          </a:bodyPr>
-          <a:lstStyle/>
-          <a:p>
-            <a:pPr algn="l">
-              <a:lnSpc>
-                <a:spcPct val="130000"/>
-              </a:lnSpc>
-            </a:pPr>
-            <a:r>
-              <a:rPr sz="2500" b="1" i="0">
-                <a:solidFill>
-                  <a:srgbClr val="17181A"/>
-                </a:solidFill>
-                <a:latin typeface="Verdana"/>
-              </a:rPr>
-              <a:t>« Il a interdiction de donner une réponse. »</a:t>
-            </a:r>
-          </a:p>
-        </p:txBody>
-      </p:sp>
-      <p:sp>
-        <p:nvSpPr>
-          <p:cNvPr id="13" name="Rounded Rectangle 12"/>
-          <p:cNvSpPr/>
-          <p:nvPr/>
-        </p:nvSpPr>
-        <p:spPr>
-          <a:xfrm>
-            <a:off x="566928" y="4462272"/>
-            <a:ext cx="11057839" cy="1618487"/>
-          </a:xfrm>
-          <a:prstGeom prst="roundRect">
-            <a:avLst>
-              <a:gd name="adj" fmla="val 9039"/>
+              <a:gd name="adj" fmla="val 7171"/>
             </a:avLst>
           </a:prstGeom>
           <a:solidFill>
@@ -6317,14 +6186,14 @@
       </p:sp>
       <p:sp>
         <p:nvSpPr>
-          <p:cNvPr id="14" name="TextBox 13"/>
-          <p:cNvSpPr txBox="1"/>
-          <p:nvPr/>
-        </p:nvSpPr>
-        <p:spPr>
-          <a:xfrm>
-            <a:off x="969264" y="4736592"/>
-            <a:ext cx="10234879" cy="1150620"/>
+          <p:cNvPr id="9" name="TextBox 8"/>
+          <p:cNvSpPr txBox="1"/>
+          <p:nvPr/>
+        </p:nvSpPr>
+        <p:spPr>
+          <a:xfrm>
+            <a:off x="969264" y="3741927"/>
+            <a:ext cx="10234879" cy="1582928"/>
           </a:xfrm>
           <a:prstGeom prst="rect">
             <a:avLst/>
@@ -6349,7 +6218,7 @@
                 </a:solidFill>
                 <a:latin typeface="Verdana"/>
               </a:rPr>
-              <a:t>Il cite la phrase du dialogue où se trouve l'information, puis repose une question plus facile. La traduction s'ajoute sous le français et ne le remplace jamais ; « simplifier » reformule en français, il ne traduit pas.</a:t>
+              <a:t>La section « Je retiens des mots » d'un module n'enregistre rien : elle fait travailler. C'est l'atelier de cartes mémoire, en répétition espacée, qui fait monter un mot d'une boîte à l'autre — et l'élève y **écrit** le mot, il ne le reconnaît pas dans une liste.</a:t>
             </a:r>
           </a:p>
         </p:txBody>
@@ -6526,33 +6395,72 @@
                 </a:solidFill>
                 <a:latin typeface="Verdana"/>
               </a:rPr>
-              <a:t>QUI DÉCIDE</a:t>
-            </a:r>
-          </a:p>
-        </p:txBody>
-      </p:sp>
-      <p:sp>
-        <p:nvSpPr>
-          <p:cNvPr id="6" name="Rounded Rectangle 5"/>
+              <a:t>LA QUESTION QUI VIENT TOUJOURS</a:t>
+            </a:r>
+          </a:p>
+        </p:txBody>
+      </p:sp>
+      <p:sp>
+        <p:nvSpPr>
+          <p:cNvPr id="6" name="TextBox 5"/>
+          <p:cNvSpPr txBox="1"/>
+          <p:nvPr/>
+        </p:nvSpPr>
+        <p:spPr>
+          <a:xfrm>
+            <a:off x="566928" y="749808"/>
+            <a:ext cx="11057839" cy="877824"/>
+          </a:xfrm>
+          <a:prstGeom prst="rect">
+            <a:avLst/>
+          </a:prstGeom>
+          <a:noFill/>
+        </p:spPr>
+        <p:txBody>
+          <a:bodyPr wrap="square" lIns="0" rIns="0" tIns="0" bIns="0" anchor="t">
+            <a:spAutoFit/>
+          </a:bodyPr>
+          <a:lstStyle/>
+          <a:p>
+            <a:pPr algn="l">
+              <a:lnSpc>
+                <a:spcPct val="115000"/>
+              </a:lnSpc>
+            </a:pPr>
+            <a:r>
+              <a:rPr sz="3400" b="1" i="0">
+                <a:solidFill>
+                  <a:srgbClr val="17181A"/>
+                </a:solidFill>
+                <a:latin typeface="Verdana"/>
+              </a:rPr>
+              <a:t>Le piège le plus fréquent</a:t>
+            </a:r>
+          </a:p>
+        </p:txBody>
+      </p:sp>
+      <p:sp>
+        <p:nvSpPr>
+          <p:cNvPr id="7" name="Rounded Rectangle 6"/>
           <p:cNvSpPr/>
           <p:nvPr/>
         </p:nvSpPr>
         <p:spPr>
           <a:xfrm>
-            <a:off x="566928" y="1225296"/>
-            <a:ext cx="11057839" cy="1967991"/>
+            <a:off x="566928" y="1856232"/>
+            <a:ext cx="5428335" cy="2331720"/>
           </a:xfrm>
           <a:prstGeom prst="roundRect">
             <a:avLst>
-              <a:gd name="adj" fmla="val 7434"/>
+              <a:gd name="adj" fmla="val 6274"/>
             </a:avLst>
           </a:prstGeom>
           <a:solidFill>
-            <a:srgbClr val="FCE9F0"/>
+            <a:srgbClr val="FFF6F5"/>
           </a:solidFill>
           <a:ln w="12700">
             <a:solidFill>
-              <a:srgbClr val="EAEAE8"/>
+              <a:srgbClr val="DC2626"/>
             </a:solidFill>
           </a:ln>
           <a:effectLst/>
@@ -6579,14 +6487,14 @@
       </p:sp>
       <p:sp>
         <p:nvSpPr>
-          <p:cNvPr id="7" name="TextBox 6"/>
-          <p:cNvSpPr txBox="1"/>
-          <p:nvPr/>
-        </p:nvSpPr>
-        <p:spPr>
-          <a:xfrm>
-            <a:off x="1298448" y="1682496"/>
-            <a:ext cx="9594799" cy="1145032"/>
+          <p:cNvPr id="8" name="TextBox 7"/>
+          <p:cNvSpPr txBox="1"/>
+          <p:nvPr/>
+        </p:nvSpPr>
+        <p:spPr>
+          <a:xfrm>
+            <a:off x="932688" y="2130552"/>
+            <a:ext cx="4696815" cy="274320"/>
           </a:xfrm>
           <a:prstGeom prst="rect">
             <a:avLst/>
@@ -6601,35 +6509,198 @@
           <a:p>
             <a:pPr algn="l">
               <a:lnSpc>
-                <a:spcPct val="122000"/>
-              </a:lnSpc>
-            </a:pPr>
-            <a:r>
-              <a:rPr sz="3400" b="1" i="0">
+                <a:spcPct val="135000"/>
+              </a:lnSpc>
+            </a:pPr>
+            <a:r>
+              <a:rPr sz="1300" b="1" i="0" spc="156">
+                <a:solidFill>
+                  <a:srgbClr val="B91C1C"/>
+                </a:solidFill>
+                <a:latin typeface="Verdana"/>
+              </a:rPr>
+              <a:t>ON ENTEND SOUVENT</a:t>
+            </a:r>
+          </a:p>
+        </p:txBody>
+      </p:sp>
+      <p:sp>
+        <p:nvSpPr>
+          <p:cNvPr id="9" name="TextBox 8"/>
+          <p:cNvSpPr txBox="1"/>
+          <p:nvPr/>
+        </p:nvSpPr>
+        <p:spPr>
+          <a:xfrm>
+            <a:off x="932688" y="2569464"/>
+            <a:ext cx="4696815" cy="1417320"/>
+          </a:xfrm>
+          <a:prstGeom prst="rect">
+            <a:avLst/>
+          </a:prstGeom>
+          <a:noFill/>
+        </p:spPr>
+        <p:txBody>
+          <a:bodyPr wrap="square" lIns="0" rIns="0" tIns="0" bIns="0" anchor="t">
+            <a:spAutoFit/>
+          </a:bodyPr>
+          <a:lstStyle/>
+          <a:p>
+            <a:pPr algn="l">
+              <a:lnSpc>
+                <a:spcPct val="130000"/>
+              </a:lnSpc>
+            </a:pPr>
+            <a:r>
+              <a:rPr sz="2500" b="1" i="0">
                 <a:solidFill>
                   <a:srgbClr val="17181A"/>
                 </a:solidFill>
                 <a:latin typeface="Verdana"/>
               </a:rPr>
-              <a:t>Aucun parcours n'est suggéré automatiquement à un élève.</a:t>
-            </a:r>
-          </a:p>
-        </p:txBody>
-      </p:sp>
-      <p:sp>
-        <p:nvSpPr>
-          <p:cNvPr id="8" name="Rounded Rectangle 7"/>
+              <a:t>« Votre assistant va faire les exercices à leur place. »</a:t>
+            </a:r>
+          </a:p>
+        </p:txBody>
+      </p:sp>
+      <p:sp>
+        <p:nvSpPr>
+          <p:cNvPr id="10" name="Rounded Rectangle 9"/>
           <p:cNvSpPr/>
           <p:nvPr/>
         </p:nvSpPr>
         <p:spPr>
           <a:xfrm>
-            <a:off x="566928" y="3467607"/>
-            <a:ext cx="11057839" cy="1671827"/>
+            <a:off x="6196431" y="1856232"/>
+            <a:ext cx="5428335" cy="2331720"/>
           </a:xfrm>
           <a:prstGeom prst="roundRect">
             <a:avLst>
-              <a:gd name="adj" fmla="val 8751"/>
+              <a:gd name="adj" fmla="val 6274"/>
+            </a:avLst>
+          </a:prstGeom>
+          <a:solidFill>
+            <a:srgbClr val="E6F5EE"/>
+          </a:solidFill>
+          <a:ln w="12700">
+            <a:solidFill>
+              <a:srgbClr val="0A8F5B"/>
+            </a:solidFill>
+          </a:ln>
+          <a:effectLst/>
+        </p:spPr>
+        <p:style>
+          <a:lnRef idx="1">
+            <a:schemeClr val="accent1"/>
+          </a:lnRef>
+          <a:fillRef idx="3">
+            <a:schemeClr val="accent1"/>
+          </a:fillRef>
+          <a:effectRef idx="2">
+            <a:schemeClr val="accent1"/>
+          </a:effectRef>
+          <a:fontRef idx="minor">
+            <a:schemeClr val="lt1"/>
+          </a:fontRef>
+        </p:style>
+        <p:txBody>
+          <a:bodyPr rtlCol="0" anchor="ctr"/>
+          <a:lstStyle/>
+          <a:p/>
+        </p:txBody>
+      </p:sp>
+      <p:sp>
+        <p:nvSpPr>
+          <p:cNvPr id="11" name="TextBox 10"/>
+          <p:cNvSpPr txBox="1"/>
+          <p:nvPr/>
+        </p:nvSpPr>
+        <p:spPr>
+          <a:xfrm>
+            <a:off x="6562191" y="2130552"/>
+            <a:ext cx="4696815" cy="274320"/>
+          </a:xfrm>
+          <a:prstGeom prst="rect">
+            <a:avLst/>
+          </a:prstGeom>
+          <a:noFill/>
+        </p:spPr>
+        <p:txBody>
+          <a:bodyPr wrap="square" lIns="0" rIns="0" tIns="0" bIns="0" anchor="t">
+            <a:spAutoFit/>
+          </a:bodyPr>
+          <a:lstStyle/>
+          <a:p>
+            <a:pPr algn="l">
+              <a:lnSpc>
+                <a:spcPct val="135000"/>
+              </a:lnSpc>
+            </a:pPr>
+            <a:r>
+              <a:rPr sz="1300" b="1" i="0" spc="156">
+                <a:solidFill>
+                  <a:srgbClr val="07734A"/>
+                </a:solidFill>
+                <a:latin typeface="Verdana"/>
+              </a:rPr>
+              <a:t>IL FAUT DIRE PLUTÔT</a:t>
+            </a:r>
+          </a:p>
+        </p:txBody>
+      </p:sp>
+      <p:sp>
+        <p:nvSpPr>
+          <p:cNvPr id="12" name="TextBox 11"/>
+          <p:cNvSpPr txBox="1"/>
+          <p:nvPr/>
+        </p:nvSpPr>
+        <p:spPr>
+          <a:xfrm>
+            <a:off x="6562191" y="2569464"/>
+            <a:ext cx="4696815" cy="1417320"/>
+          </a:xfrm>
+          <a:prstGeom prst="rect">
+            <a:avLst/>
+          </a:prstGeom>
+          <a:noFill/>
+        </p:spPr>
+        <p:txBody>
+          <a:bodyPr wrap="square" lIns="0" rIns="0" tIns="0" bIns="0" anchor="t">
+            <a:spAutoFit/>
+          </a:bodyPr>
+          <a:lstStyle/>
+          <a:p>
+            <a:pPr algn="l">
+              <a:lnSpc>
+                <a:spcPct val="130000"/>
+              </a:lnSpc>
+            </a:pPr>
+            <a:r>
+              <a:rPr sz="2500" b="1" i="0">
+                <a:solidFill>
+                  <a:srgbClr val="17181A"/>
+                </a:solidFill>
+                <a:latin typeface="Verdana"/>
+              </a:rPr>
+              <a:t>« Il a interdiction de donner une réponse. »</a:t>
+            </a:r>
+          </a:p>
+        </p:txBody>
+      </p:sp>
+      <p:sp>
+        <p:nvSpPr>
+          <p:cNvPr id="13" name="Rounded Rectangle 12"/>
+          <p:cNvSpPr/>
+          <p:nvPr/>
+        </p:nvSpPr>
+        <p:spPr>
+          <a:xfrm>
+            <a:off x="566928" y="4462272"/>
+            <a:ext cx="11057839" cy="1618487"/>
+          </a:xfrm>
+          <a:prstGeom prst="roundRect">
+            <a:avLst>
+              <a:gd name="adj" fmla="val 9039"/>
             </a:avLst>
           </a:prstGeom>
           <a:solidFill>
@@ -6664,14 +6735,14 @@
       </p:sp>
       <p:sp>
         <p:nvSpPr>
-          <p:cNvPr id="9" name="TextBox 8"/>
-          <p:cNvSpPr txBox="1"/>
-          <p:nvPr/>
-        </p:nvSpPr>
-        <p:spPr>
-          <a:xfrm>
-            <a:off x="969264" y="3741927"/>
-            <a:ext cx="10234879" cy="1214627"/>
+          <p:cNvPr id="14" name="TextBox 13"/>
+          <p:cNvSpPr txBox="1"/>
+          <p:nvPr/>
+        </p:nvSpPr>
+        <p:spPr>
+          <a:xfrm>
+            <a:off x="969264" y="4736592"/>
+            <a:ext cx="10234879" cy="1150620"/>
           </a:xfrm>
           <a:prstGeom prst="rect">
             <a:avLst/>
@@ -6696,7 +6767,7 @@
                 </a:solidFill>
                 <a:latin typeface="Verdana"/>
               </a:rPr>
-              <a:t>Le portail dit ce qu'un élève a fait et où il s'est trompé. Il ne conclut rien et ne propose rien. C'est l'enseignant qui envoie une mini-leçon de dix minutes à qui en a besoin — un choix, pas une étape transitoire vers l'automatisation.</a:t>
+              <a:t>Il cite la phrase du dialogue où se trouve l'information, puis repose une question plus facile. La traduction s'ajoute sous le français et ne le remplace jamais ; « simplifier » reformule en français, il ne traduit pas.</a:t>
             </a:r>
           </a:p>
         </p:txBody>
@@ -6873,64 +6944,110 @@
                 </a:solidFill>
                 <a:latin typeface="Verdana"/>
               </a:rPr>
-              <a:t>CE QU'ON N'A PAS RETIRÉ</a:t>
-            </a:r>
-          </a:p>
-        </p:txBody>
-      </p:sp>
-      <p:sp>
-        <p:nvSpPr>
-          <p:cNvPr id="6" name="TextBox 5"/>
-          <p:cNvSpPr txBox="1"/>
-          <p:nvPr/>
-        </p:nvSpPr>
-        <p:spPr>
-          <a:xfrm>
-            <a:off x="566928" y="749808"/>
-            <a:ext cx="11057839" cy="877824"/>
-          </a:xfrm>
-          <a:prstGeom prst="rect">
-            <a:avLst/>
-          </a:prstGeom>
-          <a:noFill/>
-        </p:spPr>
-        <p:txBody>
-          <a:bodyPr wrap="square" lIns="0" rIns="0" tIns="0" bIns="0" anchor="t">
-            <a:spAutoFit/>
-          </a:bodyPr>
-          <a:lstStyle/>
-          <a:p>
-            <a:pPr algn="l">
-              <a:lnSpc>
-                <a:spcPct val="115000"/>
-              </a:lnSpc>
-            </a:pPr>
-            <a:r>
-              <a:rPr sz="3400" b="1" i="0">
-                <a:solidFill>
-                  <a:srgbClr val="17181A"/>
-                </a:solidFill>
-                <a:latin typeface="Verdana"/>
-              </a:rPr>
-              <a:t>Quatre choses qui restent, et c'est délibéré</a:t>
-            </a:r>
-          </a:p>
-        </p:txBody>
-      </p:sp>
-      <p:sp>
-        <p:nvSpPr>
-          <p:cNvPr id="7" name="Rounded Rectangle 6"/>
+              <a:t>QUI DÉCIDE</a:t>
+            </a:r>
+          </a:p>
+        </p:txBody>
+      </p:sp>
+      <p:sp>
+        <p:nvSpPr>
+          <p:cNvPr id="6" name="Rounded Rectangle 5"/>
           <p:cNvSpPr/>
           <p:nvPr/>
         </p:nvSpPr>
         <p:spPr>
           <a:xfrm>
-            <a:off x="566928" y="1810512"/>
-            <a:ext cx="5446623" cy="2052828"/>
+            <a:off x="566928" y="1225296"/>
+            <a:ext cx="11057839" cy="1967991"/>
           </a:xfrm>
           <a:prstGeom prst="roundRect">
             <a:avLst>
-              <a:gd name="adj" fmla="val 7126"/>
+              <a:gd name="adj" fmla="val 7434"/>
+            </a:avLst>
+          </a:prstGeom>
+          <a:solidFill>
+            <a:srgbClr val="FCE9F0"/>
+          </a:solidFill>
+          <a:ln w="12700">
+            <a:solidFill>
+              <a:srgbClr val="EAEAE8"/>
+            </a:solidFill>
+          </a:ln>
+          <a:effectLst/>
+        </p:spPr>
+        <p:style>
+          <a:lnRef idx="1">
+            <a:schemeClr val="accent1"/>
+          </a:lnRef>
+          <a:fillRef idx="3">
+            <a:schemeClr val="accent1"/>
+          </a:fillRef>
+          <a:effectRef idx="2">
+            <a:schemeClr val="accent1"/>
+          </a:effectRef>
+          <a:fontRef idx="minor">
+            <a:schemeClr val="lt1"/>
+          </a:fontRef>
+        </p:style>
+        <p:txBody>
+          <a:bodyPr rtlCol="0" anchor="ctr"/>
+          <a:lstStyle/>
+          <a:p/>
+        </p:txBody>
+      </p:sp>
+      <p:sp>
+        <p:nvSpPr>
+          <p:cNvPr id="7" name="TextBox 6"/>
+          <p:cNvSpPr txBox="1"/>
+          <p:nvPr/>
+        </p:nvSpPr>
+        <p:spPr>
+          <a:xfrm>
+            <a:off x="1298448" y="1682496"/>
+            <a:ext cx="9594799" cy="1145032"/>
+          </a:xfrm>
+          <a:prstGeom prst="rect">
+            <a:avLst/>
+          </a:prstGeom>
+          <a:noFill/>
+        </p:spPr>
+        <p:txBody>
+          <a:bodyPr wrap="square" lIns="0" rIns="0" tIns="0" bIns="0" anchor="t">
+            <a:spAutoFit/>
+          </a:bodyPr>
+          <a:lstStyle/>
+          <a:p>
+            <a:pPr algn="l">
+              <a:lnSpc>
+                <a:spcPct val="122000"/>
+              </a:lnSpc>
+            </a:pPr>
+            <a:r>
+              <a:rPr sz="3400" b="1" i="0">
+                <a:solidFill>
+                  <a:srgbClr val="17181A"/>
+                </a:solidFill>
+                <a:latin typeface="Verdana"/>
+              </a:rPr>
+              <a:t>Aucun parcours n'est suggéré automatiquement à un élève.</a:t>
+            </a:r>
+          </a:p>
+        </p:txBody>
+      </p:sp>
+      <p:sp>
+        <p:nvSpPr>
+          <p:cNvPr id="8" name="Rounded Rectangle 7"/>
+          <p:cNvSpPr/>
+          <p:nvPr/>
+        </p:nvSpPr>
+        <p:spPr>
+          <a:xfrm>
+            <a:off x="566928" y="3467607"/>
+            <a:ext cx="11057839" cy="1671827"/>
+          </a:xfrm>
+          <a:prstGeom prst="roundRect">
+            <a:avLst>
+              <a:gd name="adj" fmla="val 8751"/>
             </a:avLst>
           </a:prstGeom>
           <a:solidFill>
@@ -6965,14 +7082,14 @@
       </p:sp>
       <p:sp>
         <p:nvSpPr>
-          <p:cNvPr id="8" name="TextBox 7"/>
-          <p:cNvSpPr txBox="1"/>
-          <p:nvPr/>
-        </p:nvSpPr>
-        <p:spPr>
-          <a:xfrm>
-            <a:off x="886968" y="2084831"/>
-            <a:ext cx="4806543" cy="387096"/>
+          <p:cNvPr id="9" name="TextBox 8"/>
+          <p:cNvSpPr txBox="1"/>
+          <p:nvPr/>
+        </p:nvSpPr>
+        <p:spPr>
+          <a:xfrm>
+            <a:off x="969264" y="3741927"/>
+            <a:ext cx="10234879" cy="1214627"/>
           </a:xfrm>
           <a:prstGeom prst="rect">
             <a:avLst/>
@@ -6987,428 +7104,17 @@
           <a:p>
             <a:pPr algn="l">
               <a:lnSpc>
-                <a:spcPct val="118000"/>
-              </a:lnSpc>
-            </a:pPr>
-            <a:r>
-              <a:rPr sz="2400" b="1" i="0">
-                <a:solidFill>
-                  <a:srgbClr val="A5335F"/>
-                </a:solidFill>
-                <a:latin typeface="Verdana"/>
-              </a:rPr>
-              <a:t>L'enseignant</a:t>
-            </a:r>
-          </a:p>
-        </p:txBody>
-      </p:sp>
-      <p:sp>
-        <p:nvSpPr>
-          <p:cNvPr id="9" name="TextBox 8"/>
-          <p:cNvSpPr txBox="1"/>
-          <p:nvPr/>
-        </p:nvSpPr>
-        <p:spPr>
-          <a:xfrm>
-            <a:off x="886968" y="2499360"/>
-            <a:ext cx="4806543" cy="1089660"/>
-          </a:xfrm>
-          <a:prstGeom prst="rect">
-            <a:avLst/>
-          </a:prstGeom>
-          <a:noFill/>
-        </p:spPr>
-        <p:txBody>
-          <a:bodyPr wrap="square" lIns="0" rIns="0" tIns="0" bIns="0" anchor="t">
-            <a:spAutoFit/>
-          </a:bodyPr>
-          <a:lstStyle/>
-          <a:p>
-            <a:pPr algn="l">
-              <a:lnSpc>
-                <a:spcPct val="142000"/>
-              </a:lnSpc>
-            </a:pPr>
-            <a:r>
-              <a:rPr sz="1800" b="0" i="0">
-                <a:solidFill>
-                  <a:srgbClr val="3A3D40"/>
-                </a:solidFill>
-                <a:latin typeface="Verdana"/>
-              </a:rPr>
-              <a:t>Rien ne s'ouvre tout seul à un élève. C'est l'enseignant qui date un module, choisit la séance, lit les productions.</a:t>
-            </a:r>
-          </a:p>
-        </p:txBody>
-      </p:sp>
-      <p:sp>
-        <p:nvSpPr>
-          <p:cNvPr id="10" name="Rounded Rectangle 9"/>
-          <p:cNvSpPr/>
-          <p:nvPr/>
-        </p:nvSpPr>
-        <p:spPr>
-          <a:xfrm>
-            <a:off x="6178143" y="1810512"/>
-            <a:ext cx="5446623" cy="2052828"/>
-          </a:xfrm>
-          <a:prstGeom prst="roundRect">
-            <a:avLst>
-              <a:gd name="adj" fmla="val 7126"/>
-            </a:avLst>
-          </a:prstGeom>
-          <a:solidFill>
-            <a:srgbClr val="FFFFFF"/>
-          </a:solidFill>
-          <a:ln w="12700">
-            <a:solidFill>
-              <a:srgbClr val="EAEAE8"/>
-            </a:solidFill>
-          </a:ln>
-          <a:effectLst/>
-        </p:spPr>
-        <p:style>
-          <a:lnRef idx="1">
-            <a:schemeClr val="accent1"/>
-          </a:lnRef>
-          <a:fillRef idx="3">
-            <a:schemeClr val="accent1"/>
-          </a:fillRef>
-          <a:effectRef idx="2">
-            <a:schemeClr val="accent1"/>
-          </a:effectRef>
-          <a:fontRef idx="minor">
-            <a:schemeClr val="lt1"/>
-          </a:fontRef>
-        </p:style>
-        <p:txBody>
-          <a:bodyPr rtlCol="0" anchor="ctr"/>
-          <a:lstStyle/>
-          <a:p/>
-        </p:txBody>
-      </p:sp>
-      <p:sp>
-        <p:nvSpPr>
-          <p:cNvPr id="11" name="TextBox 10"/>
-          <p:cNvSpPr txBox="1"/>
-          <p:nvPr/>
-        </p:nvSpPr>
-        <p:spPr>
-          <a:xfrm>
-            <a:off x="6498183" y="2084831"/>
-            <a:ext cx="4806543" cy="387096"/>
-          </a:xfrm>
-          <a:prstGeom prst="rect">
-            <a:avLst/>
-          </a:prstGeom>
-          <a:noFill/>
-        </p:spPr>
-        <p:txBody>
-          <a:bodyPr wrap="square" lIns="0" rIns="0" tIns="0" bIns="0" anchor="t">
-            <a:spAutoFit/>
-          </a:bodyPr>
-          <a:lstStyle/>
-          <a:p>
-            <a:pPr algn="l">
-              <a:lnSpc>
-                <a:spcPct val="118000"/>
-              </a:lnSpc>
-            </a:pPr>
-            <a:r>
-              <a:rPr sz="2400" b="1" i="0">
-                <a:solidFill>
-                  <a:srgbClr val="A5335F"/>
-                </a:solidFill>
-                <a:latin typeface="Verdana"/>
-              </a:rPr>
-              <a:t>Le papier</a:t>
-            </a:r>
-          </a:p>
-        </p:txBody>
-      </p:sp>
-      <p:sp>
-        <p:nvSpPr>
-          <p:cNvPr id="12" name="TextBox 11"/>
-          <p:cNvSpPr txBox="1"/>
-          <p:nvPr/>
-        </p:nvSpPr>
-        <p:spPr>
-          <a:xfrm>
-            <a:off x="6498183" y="2499360"/>
-            <a:ext cx="4806543" cy="1089660"/>
-          </a:xfrm>
-          <a:prstGeom prst="rect">
-            <a:avLst/>
-          </a:prstGeom>
-          <a:noFill/>
-        </p:spPr>
-        <p:txBody>
-          <a:bodyPr wrap="square" lIns="0" rIns="0" tIns="0" bIns="0" anchor="t">
-            <a:spAutoFit/>
-          </a:bodyPr>
-          <a:lstStyle/>
-          <a:p>
-            <a:pPr algn="l">
-              <a:lnSpc>
-                <a:spcPct val="142000"/>
-              </a:lnSpc>
-            </a:pPr>
-            <a:r>
-              <a:rPr sz="1800" b="0" i="0">
-                <a:solidFill>
-                  <a:srgbClr val="3A3D40"/>
-                </a:solidFill>
-                <a:latin typeface="Verdana"/>
-              </a:rPr>
-              <a:t>1 264 fiches imprimables, noir et blanc. Un élève sans appareil fait la séance quand même.</a:t>
-            </a:r>
-          </a:p>
-        </p:txBody>
-      </p:sp>
-      <p:sp>
-        <p:nvSpPr>
-          <p:cNvPr id="13" name="Rounded Rectangle 12"/>
-          <p:cNvSpPr/>
-          <p:nvPr/>
-        </p:nvSpPr>
-        <p:spPr>
-          <a:xfrm>
-            <a:off x="566928" y="4027932"/>
-            <a:ext cx="5446623" cy="2052828"/>
-          </a:xfrm>
-          <a:prstGeom prst="roundRect">
-            <a:avLst>
-              <a:gd name="adj" fmla="val 7126"/>
-            </a:avLst>
-          </a:prstGeom>
-          <a:solidFill>
-            <a:srgbClr val="FFFFFF"/>
-          </a:solidFill>
-          <a:ln w="12700">
-            <a:solidFill>
-              <a:srgbClr val="EAEAE8"/>
-            </a:solidFill>
-          </a:ln>
-          <a:effectLst/>
-        </p:spPr>
-        <p:style>
-          <a:lnRef idx="1">
-            <a:schemeClr val="accent1"/>
-          </a:lnRef>
-          <a:fillRef idx="3">
-            <a:schemeClr val="accent1"/>
-          </a:fillRef>
-          <a:effectRef idx="2">
-            <a:schemeClr val="accent1"/>
-          </a:effectRef>
-          <a:fontRef idx="minor">
-            <a:schemeClr val="lt1"/>
-          </a:fontRef>
-        </p:style>
-        <p:txBody>
-          <a:bodyPr rtlCol="0" anchor="ctr"/>
-          <a:lstStyle/>
-          <a:p/>
-        </p:txBody>
-      </p:sp>
-      <p:sp>
-        <p:nvSpPr>
-          <p:cNvPr id="14" name="TextBox 13"/>
-          <p:cNvSpPr txBox="1"/>
-          <p:nvPr/>
-        </p:nvSpPr>
-        <p:spPr>
-          <a:xfrm>
-            <a:off x="886968" y="4302252"/>
-            <a:ext cx="4806543" cy="387096"/>
-          </a:xfrm>
-          <a:prstGeom prst="rect">
-            <a:avLst/>
-          </a:prstGeom>
-          <a:noFill/>
-        </p:spPr>
-        <p:txBody>
-          <a:bodyPr wrap="square" lIns="0" rIns="0" tIns="0" bIns="0" anchor="t">
-            <a:spAutoFit/>
-          </a:bodyPr>
-          <a:lstStyle/>
-          <a:p>
-            <a:pPr algn="l">
-              <a:lnSpc>
-                <a:spcPct val="118000"/>
-              </a:lnSpc>
-            </a:pPr>
-            <a:r>
-              <a:rPr sz="2400" b="1" i="0">
-                <a:solidFill>
-                  <a:srgbClr val="A5335F"/>
-                </a:solidFill>
-                <a:latin typeface="Verdana"/>
-              </a:rPr>
-              <a:t>La classe</a:t>
-            </a:r>
-          </a:p>
-        </p:txBody>
-      </p:sp>
-      <p:sp>
-        <p:nvSpPr>
-          <p:cNvPr id="15" name="TextBox 14"/>
-          <p:cNvSpPr txBox="1"/>
-          <p:nvPr/>
-        </p:nvSpPr>
-        <p:spPr>
-          <a:xfrm>
-            <a:off x="886968" y="4716780"/>
-            <a:ext cx="4806543" cy="1089660"/>
-          </a:xfrm>
-          <a:prstGeom prst="rect">
-            <a:avLst/>
-          </a:prstGeom>
-          <a:noFill/>
-        </p:spPr>
-        <p:txBody>
-          <a:bodyPr wrap="square" lIns="0" rIns="0" tIns="0" bIns="0" anchor="t">
-            <a:spAutoFit/>
-          </a:bodyPr>
-          <a:lstStyle/>
-          <a:p>
-            <a:pPr algn="l">
-              <a:lnSpc>
-                <a:spcPct val="142000"/>
-              </a:lnSpc>
-            </a:pPr>
-            <a:r>
-              <a:rPr sz="1800" b="0" i="0">
-                <a:solidFill>
-                  <a:srgbClr val="3A3D40"/>
-                </a:solidFill>
-                <a:latin typeface="Verdana"/>
-              </a:rPr>
-              <a:t>Le jeu de rôle a une moitié qui se joue à deux, en salle. Elle ne disparaît pas quand l'assistant est fermé.</a:t>
-            </a:r>
-          </a:p>
-        </p:txBody>
-      </p:sp>
-      <p:sp>
-        <p:nvSpPr>
-          <p:cNvPr id="16" name="Rounded Rectangle 15"/>
-          <p:cNvSpPr/>
-          <p:nvPr/>
-        </p:nvSpPr>
-        <p:spPr>
-          <a:xfrm>
-            <a:off x="6178143" y="4027932"/>
-            <a:ext cx="5446623" cy="2052828"/>
-          </a:xfrm>
-          <a:prstGeom prst="roundRect">
-            <a:avLst>
-              <a:gd name="adj" fmla="val 7126"/>
-            </a:avLst>
-          </a:prstGeom>
-          <a:solidFill>
-            <a:srgbClr val="FFFFFF"/>
-          </a:solidFill>
-          <a:ln w="12700">
-            <a:solidFill>
-              <a:srgbClr val="EAEAE8"/>
-            </a:solidFill>
-          </a:ln>
-          <a:effectLst/>
-        </p:spPr>
-        <p:style>
-          <a:lnRef idx="1">
-            <a:schemeClr val="accent1"/>
-          </a:lnRef>
-          <a:fillRef idx="3">
-            <a:schemeClr val="accent1"/>
-          </a:fillRef>
-          <a:effectRef idx="2">
-            <a:schemeClr val="accent1"/>
-          </a:effectRef>
-          <a:fontRef idx="minor">
-            <a:schemeClr val="lt1"/>
-          </a:fontRef>
-        </p:style>
-        <p:txBody>
-          <a:bodyPr rtlCol="0" anchor="ctr"/>
-          <a:lstStyle/>
-          <a:p/>
-        </p:txBody>
-      </p:sp>
-      <p:sp>
-        <p:nvSpPr>
-          <p:cNvPr id="17" name="TextBox 16"/>
-          <p:cNvSpPr txBox="1"/>
-          <p:nvPr/>
-        </p:nvSpPr>
-        <p:spPr>
-          <a:xfrm>
-            <a:off x="6498183" y="4302252"/>
-            <a:ext cx="4806543" cy="387096"/>
-          </a:xfrm>
-          <a:prstGeom prst="rect">
-            <a:avLst/>
-          </a:prstGeom>
-          <a:noFill/>
-        </p:spPr>
-        <p:txBody>
-          <a:bodyPr wrap="square" lIns="0" rIns="0" tIns="0" bIns="0" anchor="t">
-            <a:spAutoFit/>
-          </a:bodyPr>
-          <a:lstStyle/>
-          <a:p>
-            <a:pPr algn="l">
-              <a:lnSpc>
-                <a:spcPct val="118000"/>
-              </a:lnSpc>
-            </a:pPr>
-            <a:r>
-              <a:rPr sz="2400" b="1" i="0">
-                <a:solidFill>
-                  <a:srgbClr val="A5335F"/>
-                </a:solidFill>
-                <a:latin typeface="Verdana"/>
-              </a:rPr>
-              <a:t>Le droit de refuser</a:t>
-            </a:r>
-          </a:p>
-        </p:txBody>
-      </p:sp>
-      <p:sp>
-        <p:nvSpPr>
-          <p:cNvPr id="18" name="TextBox 17"/>
-          <p:cNvSpPr txBox="1"/>
-          <p:nvPr/>
-        </p:nvSpPr>
-        <p:spPr>
-          <a:xfrm>
-            <a:off x="6498183" y="4716780"/>
-            <a:ext cx="4806543" cy="1089660"/>
-          </a:xfrm>
-          <a:prstGeom prst="rect">
-            <a:avLst/>
-          </a:prstGeom>
-          <a:noFill/>
-        </p:spPr>
-        <p:txBody>
-          <a:bodyPr wrap="square" lIns="0" rIns="0" tIns="0" bIns="0" anchor="t">
-            <a:spAutoFit/>
-          </a:bodyPr>
-          <a:lstStyle/>
-          <a:p>
-            <a:pPr algn="l">
-              <a:lnSpc>
-                <a:spcPct val="142000"/>
-              </a:lnSpc>
-            </a:pPr>
-            <a:r>
-              <a:rPr sz="1800" b="0" i="0">
-                <a:solidFill>
-                  <a:srgbClr val="3A3D40"/>
-                </a:solidFill>
-                <a:latin typeface="Verdana"/>
-              </a:rPr>
-              <a:t>Un centre peut fermer l'assistant. Les 87 modules se replient : ce qui reste est un cours, pas une démo cassée.</a:t>
+                <a:spcPct val="145000"/>
+              </a:lnSpc>
+            </a:pPr>
+            <a:r>
+              <a:rPr sz="2000" b="0" i="0">
+                <a:solidFill>
+                  <a:srgbClr val="4B4F52"/>
+                </a:solidFill>
+                <a:latin typeface="Verdana"/>
+              </a:rPr>
+              <a:t>Le portail dit ce qu'un élève a fait et où il s'est trompé. Il ne conclut rien et ne propose rien. C'est l'enseignant qui envoie une mini-leçon de dix minutes à qui en a besoin — un choix, pas une étape transitoire vers l'automatisation.</a:t>
             </a:r>
           </a:p>
         </p:txBody>
@@ -7553,6 +7259,718 @@
       </p:sp>
       <p:sp>
         <p:nvSpPr>
+          <p:cNvPr id="5" name="TextBox 4"/>
+          <p:cNvSpPr txBox="1"/>
+          <p:nvPr/>
+        </p:nvSpPr>
+        <p:spPr>
+          <a:xfrm>
+            <a:off x="566928" y="420624"/>
+            <a:ext cx="11057839" cy="237744"/>
+          </a:xfrm>
+          <a:prstGeom prst="rect">
+            <a:avLst/>
+          </a:prstGeom>
+          <a:noFill/>
+        </p:spPr>
+        <p:txBody>
+          <a:bodyPr wrap="square" lIns="0" rIns="0" tIns="0" bIns="0" anchor="t">
+            <a:spAutoFit/>
+          </a:bodyPr>
+          <a:lstStyle/>
+          <a:p>
+            <a:pPr algn="l">
+              <a:lnSpc>
+                <a:spcPct val="135000"/>
+              </a:lnSpc>
+            </a:pPr>
+            <a:r>
+              <a:rPr sz="1300" b="1" i="0" spc="156">
+                <a:solidFill>
+                  <a:srgbClr val="A5335F"/>
+                </a:solidFill>
+                <a:latin typeface="Verdana"/>
+              </a:rPr>
+              <a:t>CE QU'ON N'A PAS RETIRÉ</a:t>
+            </a:r>
+          </a:p>
+        </p:txBody>
+      </p:sp>
+      <p:sp>
+        <p:nvSpPr>
+          <p:cNvPr id="6" name="TextBox 5"/>
+          <p:cNvSpPr txBox="1"/>
+          <p:nvPr/>
+        </p:nvSpPr>
+        <p:spPr>
+          <a:xfrm>
+            <a:off x="566928" y="749808"/>
+            <a:ext cx="11057839" cy="877824"/>
+          </a:xfrm>
+          <a:prstGeom prst="rect">
+            <a:avLst/>
+          </a:prstGeom>
+          <a:noFill/>
+        </p:spPr>
+        <p:txBody>
+          <a:bodyPr wrap="square" lIns="0" rIns="0" tIns="0" bIns="0" anchor="t">
+            <a:spAutoFit/>
+          </a:bodyPr>
+          <a:lstStyle/>
+          <a:p>
+            <a:pPr algn="l">
+              <a:lnSpc>
+                <a:spcPct val="115000"/>
+              </a:lnSpc>
+            </a:pPr>
+            <a:r>
+              <a:rPr sz="3400" b="1" i="0">
+                <a:solidFill>
+                  <a:srgbClr val="17181A"/>
+                </a:solidFill>
+                <a:latin typeface="Verdana"/>
+              </a:rPr>
+              <a:t>Quatre choses qui restent, et c'est délibéré</a:t>
+            </a:r>
+          </a:p>
+        </p:txBody>
+      </p:sp>
+      <p:sp>
+        <p:nvSpPr>
+          <p:cNvPr id="7" name="Rounded Rectangle 6"/>
+          <p:cNvSpPr/>
+          <p:nvPr/>
+        </p:nvSpPr>
+        <p:spPr>
+          <a:xfrm>
+            <a:off x="566928" y="1810512"/>
+            <a:ext cx="5446623" cy="2052828"/>
+          </a:xfrm>
+          <a:prstGeom prst="roundRect">
+            <a:avLst>
+              <a:gd name="adj" fmla="val 7126"/>
+            </a:avLst>
+          </a:prstGeom>
+          <a:solidFill>
+            <a:srgbClr val="FFFFFF"/>
+          </a:solidFill>
+          <a:ln w="12700">
+            <a:solidFill>
+              <a:srgbClr val="EAEAE8"/>
+            </a:solidFill>
+          </a:ln>
+          <a:effectLst/>
+        </p:spPr>
+        <p:style>
+          <a:lnRef idx="1">
+            <a:schemeClr val="accent1"/>
+          </a:lnRef>
+          <a:fillRef idx="3">
+            <a:schemeClr val="accent1"/>
+          </a:fillRef>
+          <a:effectRef idx="2">
+            <a:schemeClr val="accent1"/>
+          </a:effectRef>
+          <a:fontRef idx="minor">
+            <a:schemeClr val="lt1"/>
+          </a:fontRef>
+        </p:style>
+        <p:txBody>
+          <a:bodyPr rtlCol="0" anchor="ctr"/>
+          <a:lstStyle/>
+          <a:p/>
+        </p:txBody>
+      </p:sp>
+      <p:sp>
+        <p:nvSpPr>
+          <p:cNvPr id="8" name="TextBox 7"/>
+          <p:cNvSpPr txBox="1"/>
+          <p:nvPr/>
+        </p:nvSpPr>
+        <p:spPr>
+          <a:xfrm>
+            <a:off x="886968" y="2084831"/>
+            <a:ext cx="4806543" cy="387096"/>
+          </a:xfrm>
+          <a:prstGeom prst="rect">
+            <a:avLst/>
+          </a:prstGeom>
+          <a:noFill/>
+        </p:spPr>
+        <p:txBody>
+          <a:bodyPr wrap="square" lIns="0" rIns="0" tIns="0" bIns="0" anchor="t">
+            <a:spAutoFit/>
+          </a:bodyPr>
+          <a:lstStyle/>
+          <a:p>
+            <a:pPr algn="l">
+              <a:lnSpc>
+                <a:spcPct val="118000"/>
+              </a:lnSpc>
+            </a:pPr>
+            <a:r>
+              <a:rPr sz="2400" b="1" i="0">
+                <a:solidFill>
+                  <a:srgbClr val="A5335F"/>
+                </a:solidFill>
+                <a:latin typeface="Verdana"/>
+              </a:rPr>
+              <a:t>L'enseignant</a:t>
+            </a:r>
+          </a:p>
+        </p:txBody>
+      </p:sp>
+      <p:sp>
+        <p:nvSpPr>
+          <p:cNvPr id="9" name="TextBox 8"/>
+          <p:cNvSpPr txBox="1"/>
+          <p:nvPr/>
+        </p:nvSpPr>
+        <p:spPr>
+          <a:xfrm>
+            <a:off x="886968" y="2499360"/>
+            <a:ext cx="4806543" cy="1089660"/>
+          </a:xfrm>
+          <a:prstGeom prst="rect">
+            <a:avLst/>
+          </a:prstGeom>
+          <a:noFill/>
+        </p:spPr>
+        <p:txBody>
+          <a:bodyPr wrap="square" lIns="0" rIns="0" tIns="0" bIns="0" anchor="t">
+            <a:spAutoFit/>
+          </a:bodyPr>
+          <a:lstStyle/>
+          <a:p>
+            <a:pPr algn="l">
+              <a:lnSpc>
+                <a:spcPct val="142000"/>
+              </a:lnSpc>
+            </a:pPr>
+            <a:r>
+              <a:rPr sz="1800" b="0" i="0">
+                <a:solidFill>
+                  <a:srgbClr val="3A3D40"/>
+                </a:solidFill>
+                <a:latin typeface="Verdana"/>
+              </a:rPr>
+              <a:t>Rien ne s'ouvre tout seul à un élève. C'est l'enseignant qui date un module, choisit la séance, lit les productions.</a:t>
+            </a:r>
+          </a:p>
+        </p:txBody>
+      </p:sp>
+      <p:sp>
+        <p:nvSpPr>
+          <p:cNvPr id="10" name="Rounded Rectangle 9"/>
+          <p:cNvSpPr/>
+          <p:nvPr/>
+        </p:nvSpPr>
+        <p:spPr>
+          <a:xfrm>
+            <a:off x="6178143" y="1810512"/>
+            <a:ext cx="5446623" cy="2052828"/>
+          </a:xfrm>
+          <a:prstGeom prst="roundRect">
+            <a:avLst>
+              <a:gd name="adj" fmla="val 7126"/>
+            </a:avLst>
+          </a:prstGeom>
+          <a:solidFill>
+            <a:srgbClr val="FFFFFF"/>
+          </a:solidFill>
+          <a:ln w="12700">
+            <a:solidFill>
+              <a:srgbClr val="EAEAE8"/>
+            </a:solidFill>
+          </a:ln>
+          <a:effectLst/>
+        </p:spPr>
+        <p:style>
+          <a:lnRef idx="1">
+            <a:schemeClr val="accent1"/>
+          </a:lnRef>
+          <a:fillRef idx="3">
+            <a:schemeClr val="accent1"/>
+          </a:fillRef>
+          <a:effectRef idx="2">
+            <a:schemeClr val="accent1"/>
+          </a:effectRef>
+          <a:fontRef idx="minor">
+            <a:schemeClr val="lt1"/>
+          </a:fontRef>
+        </p:style>
+        <p:txBody>
+          <a:bodyPr rtlCol="0" anchor="ctr"/>
+          <a:lstStyle/>
+          <a:p/>
+        </p:txBody>
+      </p:sp>
+      <p:sp>
+        <p:nvSpPr>
+          <p:cNvPr id="11" name="TextBox 10"/>
+          <p:cNvSpPr txBox="1"/>
+          <p:nvPr/>
+        </p:nvSpPr>
+        <p:spPr>
+          <a:xfrm>
+            <a:off x="6498183" y="2084831"/>
+            <a:ext cx="4806543" cy="387096"/>
+          </a:xfrm>
+          <a:prstGeom prst="rect">
+            <a:avLst/>
+          </a:prstGeom>
+          <a:noFill/>
+        </p:spPr>
+        <p:txBody>
+          <a:bodyPr wrap="square" lIns="0" rIns="0" tIns="0" bIns="0" anchor="t">
+            <a:spAutoFit/>
+          </a:bodyPr>
+          <a:lstStyle/>
+          <a:p>
+            <a:pPr algn="l">
+              <a:lnSpc>
+                <a:spcPct val="118000"/>
+              </a:lnSpc>
+            </a:pPr>
+            <a:r>
+              <a:rPr sz="2400" b="1" i="0">
+                <a:solidFill>
+                  <a:srgbClr val="A5335F"/>
+                </a:solidFill>
+                <a:latin typeface="Verdana"/>
+              </a:rPr>
+              <a:t>Le papier</a:t>
+            </a:r>
+          </a:p>
+        </p:txBody>
+      </p:sp>
+      <p:sp>
+        <p:nvSpPr>
+          <p:cNvPr id="12" name="TextBox 11"/>
+          <p:cNvSpPr txBox="1"/>
+          <p:nvPr/>
+        </p:nvSpPr>
+        <p:spPr>
+          <a:xfrm>
+            <a:off x="6498183" y="2499360"/>
+            <a:ext cx="4806543" cy="1089660"/>
+          </a:xfrm>
+          <a:prstGeom prst="rect">
+            <a:avLst/>
+          </a:prstGeom>
+          <a:noFill/>
+        </p:spPr>
+        <p:txBody>
+          <a:bodyPr wrap="square" lIns="0" rIns="0" tIns="0" bIns="0" anchor="t">
+            <a:spAutoFit/>
+          </a:bodyPr>
+          <a:lstStyle/>
+          <a:p>
+            <a:pPr algn="l">
+              <a:lnSpc>
+                <a:spcPct val="142000"/>
+              </a:lnSpc>
+            </a:pPr>
+            <a:r>
+              <a:rPr sz="1800" b="0" i="0">
+                <a:solidFill>
+                  <a:srgbClr val="3A3D40"/>
+                </a:solidFill>
+                <a:latin typeface="Verdana"/>
+              </a:rPr>
+              <a:t>1 264 fiches imprimables, noir et blanc. Un élève sans appareil fait la séance quand même.</a:t>
+            </a:r>
+          </a:p>
+        </p:txBody>
+      </p:sp>
+      <p:sp>
+        <p:nvSpPr>
+          <p:cNvPr id="13" name="Rounded Rectangle 12"/>
+          <p:cNvSpPr/>
+          <p:nvPr/>
+        </p:nvSpPr>
+        <p:spPr>
+          <a:xfrm>
+            <a:off x="566928" y="4027932"/>
+            <a:ext cx="5446623" cy="2052828"/>
+          </a:xfrm>
+          <a:prstGeom prst="roundRect">
+            <a:avLst>
+              <a:gd name="adj" fmla="val 7126"/>
+            </a:avLst>
+          </a:prstGeom>
+          <a:solidFill>
+            <a:srgbClr val="FFFFFF"/>
+          </a:solidFill>
+          <a:ln w="12700">
+            <a:solidFill>
+              <a:srgbClr val="EAEAE8"/>
+            </a:solidFill>
+          </a:ln>
+          <a:effectLst/>
+        </p:spPr>
+        <p:style>
+          <a:lnRef idx="1">
+            <a:schemeClr val="accent1"/>
+          </a:lnRef>
+          <a:fillRef idx="3">
+            <a:schemeClr val="accent1"/>
+          </a:fillRef>
+          <a:effectRef idx="2">
+            <a:schemeClr val="accent1"/>
+          </a:effectRef>
+          <a:fontRef idx="minor">
+            <a:schemeClr val="lt1"/>
+          </a:fontRef>
+        </p:style>
+        <p:txBody>
+          <a:bodyPr rtlCol="0" anchor="ctr"/>
+          <a:lstStyle/>
+          <a:p/>
+        </p:txBody>
+      </p:sp>
+      <p:sp>
+        <p:nvSpPr>
+          <p:cNvPr id="14" name="TextBox 13"/>
+          <p:cNvSpPr txBox="1"/>
+          <p:nvPr/>
+        </p:nvSpPr>
+        <p:spPr>
+          <a:xfrm>
+            <a:off x="886968" y="4302252"/>
+            <a:ext cx="4806543" cy="387096"/>
+          </a:xfrm>
+          <a:prstGeom prst="rect">
+            <a:avLst/>
+          </a:prstGeom>
+          <a:noFill/>
+        </p:spPr>
+        <p:txBody>
+          <a:bodyPr wrap="square" lIns="0" rIns="0" tIns="0" bIns="0" anchor="t">
+            <a:spAutoFit/>
+          </a:bodyPr>
+          <a:lstStyle/>
+          <a:p>
+            <a:pPr algn="l">
+              <a:lnSpc>
+                <a:spcPct val="118000"/>
+              </a:lnSpc>
+            </a:pPr>
+            <a:r>
+              <a:rPr sz="2400" b="1" i="0">
+                <a:solidFill>
+                  <a:srgbClr val="A5335F"/>
+                </a:solidFill>
+                <a:latin typeface="Verdana"/>
+              </a:rPr>
+              <a:t>La classe</a:t>
+            </a:r>
+          </a:p>
+        </p:txBody>
+      </p:sp>
+      <p:sp>
+        <p:nvSpPr>
+          <p:cNvPr id="15" name="TextBox 14"/>
+          <p:cNvSpPr txBox="1"/>
+          <p:nvPr/>
+        </p:nvSpPr>
+        <p:spPr>
+          <a:xfrm>
+            <a:off x="886968" y="4716780"/>
+            <a:ext cx="4806543" cy="1089660"/>
+          </a:xfrm>
+          <a:prstGeom prst="rect">
+            <a:avLst/>
+          </a:prstGeom>
+          <a:noFill/>
+        </p:spPr>
+        <p:txBody>
+          <a:bodyPr wrap="square" lIns="0" rIns="0" tIns="0" bIns="0" anchor="t">
+            <a:spAutoFit/>
+          </a:bodyPr>
+          <a:lstStyle/>
+          <a:p>
+            <a:pPr algn="l">
+              <a:lnSpc>
+                <a:spcPct val="142000"/>
+              </a:lnSpc>
+            </a:pPr>
+            <a:r>
+              <a:rPr sz="1800" b="0" i="0">
+                <a:solidFill>
+                  <a:srgbClr val="3A3D40"/>
+                </a:solidFill>
+                <a:latin typeface="Verdana"/>
+              </a:rPr>
+              <a:t>Le jeu de rôle a une moitié qui se joue à deux, en salle. Elle ne disparaît pas quand l'assistant est fermé.</a:t>
+            </a:r>
+          </a:p>
+        </p:txBody>
+      </p:sp>
+      <p:sp>
+        <p:nvSpPr>
+          <p:cNvPr id="16" name="Rounded Rectangle 15"/>
+          <p:cNvSpPr/>
+          <p:nvPr/>
+        </p:nvSpPr>
+        <p:spPr>
+          <a:xfrm>
+            <a:off x="6178143" y="4027932"/>
+            <a:ext cx="5446623" cy="2052828"/>
+          </a:xfrm>
+          <a:prstGeom prst="roundRect">
+            <a:avLst>
+              <a:gd name="adj" fmla="val 7126"/>
+            </a:avLst>
+          </a:prstGeom>
+          <a:solidFill>
+            <a:srgbClr val="FFFFFF"/>
+          </a:solidFill>
+          <a:ln w="12700">
+            <a:solidFill>
+              <a:srgbClr val="EAEAE8"/>
+            </a:solidFill>
+          </a:ln>
+          <a:effectLst/>
+        </p:spPr>
+        <p:style>
+          <a:lnRef idx="1">
+            <a:schemeClr val="accent1"/>
+          </a:lnRef>
+          <a:fillRef idx="3">
+            <a:schemeClr val="accent1"/>
+          </a:fillRef>
+          <a:effectRef idx="2">
+            <a:schemeClr val="accent1"/>
+          </a:effectRef>
+          <a:fontRef idx="minor">
+            <a:schemeClr val="lt1"/>
+          </a:fontRef>
+        </p:style>
+        <p:txBody>
+          <a:bodyPr rtlCol="0" anchor="ctr"/>
+          <a:lstStyle/>
+          <a:p/>
+        </p:txBody>
+      </p:sp>
+      <p:sp>
+        <p:nvSpPr>
+          <p:cNvPr id="17" name="TextBox 16"/>
+          <p:cNvSpPr txBox="1"/>
+          <p:nvPr/>
+        </p:nvSpPr>
+        <p:spPr>
+          <a:xfrm>
+            <a:off x="6498183" y="4302252"/>
+            <a:ext cx="4806543" cy="387096"/>
+          </a:xfrm>
+          <a:prstGeom prst="rect">
+            <a:avLst/>
+          </a:prstGeom>
+          <a:noFill/>
+        </p:spPr>
+        <p:txBody>
+          <a:bodyPr wrap="square" lIns="0" rIns="0" tIns="0" bIns="0" anchor="t">
+            <a:spAutoFit/>
+          </a:bodyPr>
+          <a:lstStyle/>
+          <a:p>
+            <a:pPr algn="l">
+              <a:lnSpc>
+                <a:spcPct val="118000"/>
+              </a:lnSpc>
+            </a:pPr>
+            <a:r>
+              <a:rPr sz="2400" b="1" i="0">
+                <a:solidFill>
+                  <a:srgbClr val="A5335F"/>
+                </a:solidFill>
+                <a:latin typeface="Verdana"/>
+              </a:rPr>
+              <a:t>Le droit de refuser</a:t>
+            </a:r>
+          </a:p>
+        </p:txBody>
+      </p:sp>
+      <p:sp>
+        <p:nvSpPr>
+          <p:cNvPr id="18" name="TextBox 17"/>
+          <p:cNvSpPr txBox="1"/>
+          <p:nvPr/>
+        </p:nvSpPr>
+        <p:spPr>
+          <a:xfrm>
+            <a:off x="6498183" y="4716780"/>
+            <a:ext cx="4806543" cy="1089660"/>
+          </a:xfrm>
+          <a:prstGeom prst="rect">
+            <a:avLst/>
+          </a:prstGeom>
+          <a:noFill/>
+        </p:spPr>
+        <p:txBody>
+          <a:bodyPr wrap="square" lIns="0" rIns="0" tIns="0" bIns="0" anchor="t">
+            <a:spAutoFit/>
+          </a:bodyPr>
+          <a:lstStyle/>
+          <a:p>
+            <a:pPr algn="l">
+              <a:lnSpc>
+                <a:spcPct val="142000"/>
+              </a:lnSpc>
+            </a:pPr>
+            <a:r>
+              <a:rPr sz="1800" b="0" i="0">
+                <a:solidFill>
+                  <a:srgbClr val="3A3D40"/>
+                </a:solidFill>
+                <a:latin typeface="Verdana"/>
+              </a:rPr>
+              <a:t>Un centre peut fermer l'assistant. Les 87 modules se replient : ce qui reste est un cours, pas une démo cassée.</a:t>
+            </a:r>
+          </a:p>
+        </p:txBody>
+      </p:sp>
+    </p:spTree>
+  </p:cSld>
+  <p:clrMapOvr>
+    <a:masterClrMapping/>
+  </p:clrMapOvr>
+</p:sld>
+</file>
+
+<file path=ppt/slides/slide16.xml><?xml version="1.0" encoding="utf-8"?>
+<p:sld xmlns:a="http://schemas.openxmlformats.org/drawingml/2006/main" xmlns:p="http://schemas.openxmlformats.org/presentationml/2006/main" xmlns:r="http://schemas.openxmlformats.org/officeDocument/2006/relationships">
+  <p:cSld>
+    <p:spTree>
+      <p:nvGrpSpPr>
+        <p:cNvPr id="1" name=""/>
+        <p:cNvGrpSpPr/>
+        <p:nvPr/>
+      </p:nvGrpSpPr>
+      <p:grpSpPr/>
+      <p:sp>
+        <p:nvSpPr>
+          <p:cNvPr id="2" name="Rectangle 1"/>
+          <p:cNvSpPr/>
+          <p:nvPr/>
+        </p:nvSpPr>
+        <p:spPr>
+          <a:xfrm>
+            <a:off x="0" y="0"/>
+            <a:ext cx="12191695" cy="6858000"/>
+          </a:xfrm>
+          <a:prstGeom prst="rect">
+            <a:avLst/>
+          </a:prstGeom>
+          <a:solidFill>
+            <a:srgbClr val="F7F7F5"/>
+          </a:solidFill>
+          <a:ln>
+            <a:noFill/>
+          </a:ln>
+          <a:effectLst/>
+        </p:spPr>
+        <p:style>
+          <a:lnRef idx="1">
+            <a:schemeClr val="accent1"/>
+          </a:lnRef>
+          <a:fillRef idx="3">
+            <a:schemeClr val="accent1"/>
+          </a:fillRef>
+          <a:effectRef idx="2">
+            <a:schemeClr val="accent1"/>
+          </a:effectRef>
+          <a:fontRef idx="minor">
+            <a:schemeClr val="lt1"/>
+          </a:fontRef>
+        </p:style>
+        <p:txBody>
+          <a:bodyPr rtlCol="0" anchor="ctr"/>
+          <a:lstStyle/>
+          <a:p/>
+        </p:txBody>
+      </p:sp>
+      <p:sp>
+        <p:nvSpPr>
+          <p:cNvPr id="3" name="TextBox 2"/>
+          <p:cNvSpPr txBox="1"/>
+          <p:nvPr/>
+        </p:nvSpPr>
+        <p:spPr>
+          <a:xfrm>
+            <a:off x="566928" y="6355080"/>
+            <a:ext cx="6400800" cy="219456"/>
+          </a:xfrm>
+          <a:prstGeom prst="rect">
+            <a:avLst/>
+          </a:prstGeom>
+          <a:noFill/>
+        </p:spPr>
+        <p:txBody>
+          <a:bodyPr wrap="square" lIns="0" rIns="0" tIns="0" bIns="0" anchor="t">
+            <a:spAutoFit/>
+          </a:bodyPr>
+          <a:lstStyle/>
+          <a:p>
+            <a:pPr algn="l">
+              <a:lnSpc>
+                <a:spcPct val="135000"/>
+              </a:lnSpc>
+            </a:pPr>
+            <a:r>
+              <a:rPr sz="1200" b="0" i="0">
+                <a:solidFill>
+                  <a:srgbClr val="6E7175"/>
+                </a:solidFill>
+                <a:latin typeface="Verdana"/>
+              </a:rPr>
+              <a:t>F1 · francis · présentation</a:t>
+            </a:r>
+          </a:p>
+        </p:txBody>
+      </p:sp>
+      <p:sp>
+        <p:nvSpPr>
+          <p:cNvPr id="4" name="TextBox 3"/>
+          <p:cNvSpPr txBox="1"/>
+          <p:nvPr/>
+        </p:nvSpPr>
+        <p:spPr>
+          <a:xfrm>
+            <a:off x="10710367" y="6355080"/>
+            <a:ext cx="914400" cy="219456"/>
+          </a:xfrm>
+          <a:prstGeom prst="rect">
+            <a:avLst/>
+          </a:prstGeom>
+          <a:noFill/>
+        </p:spPr>
+        <p:txBody>
+          <a:bodyPr wrap="square" lIns="0" rIns="0" tIns="0" bIns="0" anchor="t">
+            <a:spAutoFit/>
+          </a:bodyPr>
+          <a:lstStyle/>
+          <a:p>
+            <a:pPr algn="r">
+              <a:lnSpc>
+                <a:spcPct val="135000"/>
+              </a:lnSpc>
+            </a:pPr>
+            <a:r>
+              <a:rPr sz="1200" b="0" i="0">
+                <a:solidFill>
+                  <a:srgbClr val="6E7175"/>
+                </a:solidFill>
+                <a:latin typeface="Verdana"/>
+              </a:rPr>
+              <a:t>16</a:t>
+            </a:r>
+          </a:p>
+        </p:txBody>
+      </p:sp>
+      <p:sp>
+        <p:nvSpPr>
           <p:cNvPr id="5" name="Rectangle 4"/>
           <p:cNvSpPr/>
           <p:nvPr/>
@@ -11581,7 +11999,7 @@
                 </a:solidFill>
                 <a:latin typeface="Verdana"/>
               </a:rPr>
-              <a:t>LE MOMENT DE LA RÈGLE</a:t>
+              <a:t>LA FORME DES EXERCICES</a:t>
             </a:r>
           </a:p>
         </p:txBody>
@@ -11595,11 +12013,11 @@
         <p:spPr>
           <a:xfrm>
             <a:off x="566928" y="1225296"/>
-            <a:ext cx="11057839" cy="1967991"/>
+            <a:ext cx="11057839" cy="1441196"/>
           </a:xfrm>
           <a:prstGeom prst="roundRect">
             <a:avLst>
-              <a:gd name="adj" fmla="val 7434"/>
+              <a:gd name="adj" fmla="val 10151"/>
             </a:avLst>
           </a:prstGeom>
           <a:solidFill>
@@ -11641,7 +12059,7 @@
         <p:spPr>
           <a:xfrm>
             <a:off x="1298448" y="1682496"/>
-            <a:ext cx="9594799" cy="1145032"/>
+            <a:ext cx="9594799" cy="618235"/>
           </a:xfrm>
           <a:prstGeom prst="rect">
             <a:avLst/>
@@ -11666,7 +12084,7 @@
                 </a:solidFill>
                 <a:latin typeface="Verdana"/>
               </a:rPr>
-              <a:t>La règle arrive quand l'élève s'est trompé, jamais avant.</a:t>
+              <a:t>Sept familles, pas une de plus.</a:t>
             </a:r>
           </a:p>
         </p:txBody>
@@ -11679,12 +12097,12 @@
         </p:nvSpPr>
         <p:spPr>
           <a:xfrm>
-            <a:off x="566928" y="3467607"/>
-            <a:ext cx="11057839" cy="1671827"/>
+            <a:off x="566928" y="2940812"/>
+            <a:ext cx="11057839" cy="2040128"/>
           </a:xfrm>
           <a:prstGeom prst="roundRect">
             <a:avLst>
-              <a:gd name="adj" fmla="val 8751"/>
+              <a:gd name="adj" fmla="val 7171"/>
             </a:avLst>
           </a:prstGeom>
           <a:solidFill>
@@ -11725,8 +12143,8 @@
         </p:nvSpPr>
         <p:spPr>
           <a:xfrm>
-            <a:off x="969264" y="3741927"/>
-            <a:ext cx="10234879" cy="1214627"/>
+            <a:off x="969264" y="3215132"/>
+            <a:ext cx="10234879" cy="1582928"/>
           </a:xfrm>
           <a:prstGeom prst="rect">
             <a:avLst/>
@@ -11751,7 +12169,7 @@
                 </a:solidFill>
                 <a:latin typeface="Verdana"/>
               </a:rPr>
-              <a:t>Les mini-leçons ne sont pas en tête de module : elles s'ouvrent depuis l'exercice, au moment de l'erreur. Une règle lue avant d'en avoir eu besoin ne se retient pas — elle se recopie.</a:t>
+              <a:t>Vrai ou faux, associer, des cases à écrire, un texte à trous, des images, une question ouverte, un tableau. Un élève de francisation dépense beaucoup d'énergie à comprendre ce qu'on lui demande : il l'apprend une fois, puis il ne pense plus qu'au français.</a:t>
             </a:r>
           </a:p>
         </p:txBody>
@@ -11928,72 +12346,33 @@
                 </a:solidFill>
                 <a:latin typeface="Verdana"/>
               </a:rPr>
-              <a:t>CE QU'ON NOUS DIT</a:t>
-            </a:r>
-          </a:p>
-        </p:txBody>
-      </p:sp>
-      <p:sp>
-        <p:nvSpPr>
-          <p:cNvPr id="6" name="TextBox 5"/>
-          <p:cNvSpPr txBox="1"/>
-          <p:nvPr/>
-        </p:nvSpPr>
-        <p:spPr>
-          <a:xfrm>
-            <a:off x="566928" y="749808"/>
-            <a:ext cx="11057839" cy="877824"/>
-          </a:xfrm>
-          <a:prstGeom prst="rect">
-            <a:avLst/>
-          </a:prstGeom>
-          <a:noFill/>
-        </p:spPr>
-        <p:txBody>
-          <a:bodyPr wrap="square" lIns="0" rIns="0" tIns="0" bIns="0" anchor="t">
-            <a:spAutoFit/>
-          </a:bodyPr>
-          <a:lstStyle/>
-          <a:p>
-            <a:pPr algn="l">
-              <a:lnSpc>
-                <a:spcPct val="115000"/>
-              </a:lnSpc>
-            </a:pPr>
-            <a:r>
-              <a:rPr sz="3400" b="1" i="0">
-                <a:solidFill>
-                  <a:srgbClr val="17181A"/>
-                </a:solidFill>
-                <a:latin typeface="Verdana"/>
-              </a:rPr>
-              <a:t>Le piège le plus fréquent</a:t>
-            </a:r>
-          </a:p>
-        </p:txBody>
-      </p:sp>
-      <p:sp>
-        <p:nvSpPr>
-          <p:cNvPr id="7" name="Rounded Rectangle 6"/>
+              <a:t>LE MOMENT DE LA RÈGLE</a:t>
+            </a:r>
+          </a:p>
+        </p:txBody>
+      </p:sp>
+      <p:sp>
+        <p:nvSpPr>
+          <p:cNvPr id="6" name="Rounded Rectangle 5"/>
           <p:cNvSpPr/>
           <p:nvPr/>
         </p:nvSpPr>
         <p:spPr>
           <a:xfrm>
-            <a:off x="566928" y="1856232"/>
-            <a:ext cx="5428335" cy="2331720"/>
+            <a:off x="566928" y="1225296"/>
+            <a:ext cx="11057839" cy="1967991"/>
           </a:xfrm>
           <a:prstGeom prst="roundRect">
             <a:avLst>
-              <a:gd name="adj" fmla="val 6274"/>
+              <a:gd name="adj" fmla="val 7434"/>
             </a:avLst>
           </a:prstGeom>
           <a:solidFill>
-            <a:srgbClr val="FFF6F5"/>
+            <a:srgbClr val="FCE9F0"/>
           </a:solidFill>
           <a:ln w="12700">
             <a:solidFill>
-              <a:srgbClr val="DC2626"/>
+              <a:srgbClr val="EAEAE8"/>
             </a:solidFill>
           </a:ln>
           <a:effectLst/>
@@ -12020,14 +12399,14 @@
       </p:sp>
       <p:sp>
         <p:nvSpPr>
-          <p:cNvPr id="8" name="TextBox 7"/>
-          <p:cNvSpPr txBox="1"/>
-          <p:nvPr/>
-        </p:nvSpPr>
-        <p:spPr>
-          <a:xfrm>
-            <a:off x="932688" y="2130552"/>
-            <a:ext cx="4696815" cy="274320"/>
+          <p:cNvPr id="7" name="TextBox 6"/>
+          <p:cNvSpPr txBox="1"/>
+          <p:nvPr/>
+        </p:nvSpPr>
+        <p:spPr>
+          <a:xfrm>
+            <a:off x="1298448" y="1682496"/>
+            <a:ext cx="9594799" cy="1145032"/>
           </a:xfrm>
           <a:prstGeom prst="rect">
             <a:avLst/>
@@ -12042,198 +12421,35 @@
           <a:p>
             <a:pPr algn="l">
               <a:lnSpc>
-                <a:spcPct val="135000"/>
-              </a:lnSpc>
-            </a:pPr>
-            <a:r>
-              <a:rPr sz="1300" b="1" i="0" spc="156">
-                <a:solidFill>
-                  <a:srgbClr val="B91C1C"/>
-                </a:solidFill>
-                <a:latin typeface="Verdana"/>
-              </a:rPr>
-              <a:t>ON ENTEND SOUVENT</a:t>
-            </a:r>
-          </a:p>
-        </p:txBody>
-      </p:sp>
-      <p:sp>
-        <p:nvSpPr>
-          <p:cNvPr id="9" name="TextBox 8"/>
-          <p:cNvSpPr txBox="1"/>
-          <p:nvPr/>
-        </p:nvSpPr>
-        <p:spPr>
-          <a:xfrm>
-            <a:off x="932688" y="2569464"/>
-            <a:ext cx="4696815" cy="1417320"/>
-          </a:xfrm>
-          <a:prstGeom prst="rect">
-            <a:avLst/>
-          </a:prstGeom>
-          <a:noFill/>
-        </p:spPr>
-        <p:txBody>
-          <a:bodyPr wrap="square" lIns="0" rIns="0" tIns="0" bIns="0" anchor="t">
-            <a:spAutoFit/>
-          </a:bodyPr>
-          <a:lstStyle/>
-          <a:p>
-            <a:pPr algn="l">
-              <a:lnSpc>
-                <a:spcPct val="130000"/>
-              </a:lnSpc>
-            </a:pPr>
-            <a:r>
-              <a:rPr sz="2500" b="1" i="0">
+                <a:spcPct val="122000"/>
+              </a:lnSpc>
+            </a:pPr>
+            <a:r>
+              <a:rPr sz="3400" b="1" i="0">
                 <a:solidFill>
                   <a:srgbClr val="17181A"/>
                 </a:solidFill>
                 <a:latin typeface="Verdana"/>
               </a:rPr>
-              <a:t>« Si la machine corrige tout de suite, l'élève ne cherche plus. »</a:t>
-            </a:r>
-          </a:p>
-        </p:txBody>
-      </p:sp>
-      <p:sp>
-        <p:nvSpPr>
-          <p:cNvPr id="10" name="Rounded Rectangle 9"/>
+              <a:t>La règle arrive quand l'élève s'est trompé, jamais avant.</a:t>
+            </a:r>
+          </a:p>
+        </p:txBody>
+      </p:sp>
+      <p:sp>
+        <p:nvSpPr>
+          <p:cNvPr id="8" name="Rounded Rectangle 7"/>
           <p:cNvSpPr/>
           <p:nvPr/>
         </p:nvSpPr>
         <p:spPr>
           <a:xfrm>
-            <a:off x="6196431" y="1856232"/>
-            <a:ext cx="5428335" cy="2331720"/>
+            <a:off x="566928" y="3467607"/>
+            <a:ext cx="11057839" cy="1671827"/>
           </a:xfrm>
           <a:prstGeom prst="roundRect">
             <a:avLst>
-              <a:gd name="adj" fmla="val 6274"/>
-            </a:avLst>
-          </a:prstGeom>
-          <a:solidFill>
-            <a:srgbClr val="E6F5EE"/>
-          </a:solidFill>
-          <a:ln w="12700">
-            <a:solidFill>
-              <a:srgbClr val="0A8F5B"/>
-            </a:solidFill>
-          </a:ln>
-          <a:effectLst/>
-        </p:spPr>
-        <p:style>
-          <a:lnRef idx="1">
-            <a:schemeClr val="accent1"/>
-          </a:lnRef>
-          <a:fillRef idx="3">
-            <a:schemeClr val="accent1"/>
-          </a:fillRef>
-          <a:effectRef idx="2">
-            <a:schemeClr val="accent1"/>
-          </a:effectRef>
-          <a:fontRef idx="minor">
-            <a:schemeClr val="lt1"/>
-          </a:fontRef>
-        </p:style>
-        <p:txBody>
-          <a:bodyPr rtlCol="0" anchor="ctr"/>
-          <a:lstStyle/>
-          <a:p/>
-        </p:txBody>
-      </p:sp>
-      <p:sp>
-        <p:nvSpPr>
-          <p:cNvPr id="11" name="TextBox 10"/>
-          <p:cNvSpPr txBox="1"/>
-          <p:nvPr/>
-        </p:nvSpPr>
-        <p:spPr>
-          <a:xfrm>
-            <a:off x="6562191" y="2130552"/>
-            <a:ext cx="4696815" cy="274320"/>
-          </a:xfrm>
-          <a:prstGeom prst="rect">
-            <a:avLst/>
-          </a:prstGeom>
-          <a:noFill/>
-        </p:spPr>
-        <p:txBody>
-          <a:bodyPr wrap="square" lIns="0" rIns="0" tIns="0" bIns="0" anchor="t">
-            <a:spAutoFit/>
-          </a:bodyPr>
-          <a:lstStyle/>
-          <a:p>
-            <a:pPr algn="l">
-              <a:lnSpc>
-                <a:spcPct val="135000"/>
-              </a:lnSpc>
-            </a:pPr>
-            <a:r>
-              <a:rPr sz="1300" b="1" i="0" spc="156">
-                <a:solidFill>
-                  <a:srgbClr val="07734A"/>
-                </a:solidFill>
-                <a:latin typeface="Verdana"/>
-              </a:rPr>
-              <a:t>IL FAUT DIRE PLUTÔT</a:t>
-            </a:r>
-          </a:p>
-        </p:txBody>
-      </p:sp>
-      <p:sp>
-        <p:nvSpPr>
-          <p:cNvPr id="12" name="TextBox 11"/>
-          <p:cNvSpPr txBox="1"/>
-          <p:nvPr/>
-        </p:nvSpPr>
-        <p:spPr>
-          <a:xfrm>
-            <a:off x="6562191" y="2569464"/>
-            <a:ext cx="4696815" cy="1417320"/>
-          </a:xfrm>
-          <a:prstGeom prst="rect">
-            <a:avLst/>
-          </a:prstGeom>
-          <a:noFill/>
-        </p:spPr>
-        <p:txBody>
-          <a:bodyPr wrap="square" lIns="0" rIns="0" tIns="0" bIns="0" anchor="t">
-            <a:spAutoFit/>
-          </a:bodyPr>
-          <a:lstStyle/>
-          <a:p>
-            <a:pPr algn="l">
-              <a:lnSpc>
-                <a:spcPct val="130000"/>
-              </a:lnSpc>
-            </a:pPr>
-            <a:r>
-              <a:rPr sz="2500" b="1" i="0">
-                <a:solidFill>
-                  <a:srgbClr val="17181A"/>
-                </a:solidFill>
-                <a:latin typeface="Verdana"/>
-              </a:rPr>
-              <a:t>« Elle ne donne pas la réponse au premier essai. »</a:t>
-            </a:r>
-          </a:p>
-        </p:txBody>
-      </p:sp>
-      <p:sp>
-        <p:nvSpPr>
-          <p:cNvPr id="13" name="Rounded Rectangle 12"/>
-          <p:cNvSpPr/>
-          <p:nvPr/>
-        </p:nvSpPr>
-        <p:spPr>
-          <a:xfrm>
-            <a:off x="566928" y="4462272"/>
-            <a:ext cx="11057839" cy="1618487"/>
-          </a:xfrm>
-          <a:prstGeom prst="roundRect">
-            <a:avLst>
-              <a:gd name="adj" fmla="val 9039"/>
+              <a:gd name="adj" fmla="val 8751"/>
             </a:avLst>
           </a:prstGeom>
           <a:solidFill>
@@ -12268,14 +12484,14 @@
       </p:sp>
       <p:sp>
         <p:nvSpPr>
-          <p:cNvPr id="14" name="TextBox 13"/>
-          <p:cNvSpPr txBox="1"/>
-          <p:nvPr/>
-        </p:nvSpPr>
-        <p:spPr>
-          <a:xfrm>
-            <a:off x="969264" y="4736592"/>
-            <a:ext cx="10234879" cy="1518920"/>
+          <p:cNvPr id="9" name="TextBox 8"/>
+          <p:cNvSpPr txBox="1"/>
+          <p:nvPr/>
+        </p:nvSpPr>
+        <p:spPr>
+          <a:xfrm>
+            <a:off x="969264" y="3741927"/>
+            <a:ext cx="10234879" cy="1214627"/>
           </a:xfrm>
           <a:prstGeom prst="rect">
             <a:avLst/>
@@ -12300,7 +12516,7 @@
                 </a:solidFill>
                 <a:latin typeface="Verdana"/>
               </a:rPr>
-              <a:t>Une réponse ouverte demande deux tentatives avant que la réponse attendue s'affiche. C'était une correction, pas un réglage d'origine : la première version donnait tout du premier coup, et on voyait des élèves valider n'importe quoi pour lire la solution.</a:t>
+              <a:t>Les mini-leçons ne sont pas en tête de module : elles s'ouvrent depuis l'exercice, au moment de l'erreur. Une règle lue avant d'en avoir eu besoin ne se retient pas — elle se recopie.</a:t>
             </a:r>
           </a:p>
         </p:txBody>
@@ -12477,33 +12693,72 @@
                 </a:solidFill>
                 <a:latin typeface="Verdana"/>
               </a:rPr>
-              <a:t>LA CORRECTION ET L'ENVOI</a:t>
-            </a:r>
-          </a:p>
-        </p:txBody>
-      </p:sp>
-      <p:sp>
-        <p:nvSpPr>
-          <p:cNvPr id="6" name="Rounded Rectangle 5"/>
+              <a:t>CE QU'ON NOUS DIT</a:t>
+            </a:r>
+          </a:p>
+        </p:txBody>
+      </p:sp>
+      <p:sp>
+        <p:nvSpPr>
+          <p:cNvPr id="6" name="TextBox 5"/>
+          <p:cNvSpPr txBox="1"/>
+          <p:nvPr/>
+        </p:nvSpPr>
+        <p:spPr>
+          <a:xfrm>
+            <a:off x="566928" y="749808"/>
+            <a:ext cx="11057839" cy="877824"/>
+          </a:xfrm>
+          <a:prstGeom prst="rect">
+            <a:avLst/>
+          </a:prstGeom>
+          <a:noFill/>
+        </p:spPr>
+        <p:txBody>
+          <a:bodyPr wrap="square" lIns="0" rIns="0" tIns="0" bIns="0" anchor="t">
+            <a:spAutoFit/>
+          </a:bodyPr>
+          <a:lstStyle/>
+          <a:p>
+            <a:pPr algn="l">
+              <a:lnSpc>
+                <a:spcPct val="115000"/>
+              </a:lnSpc>
+            </a:pPr>
+            <a:r>
+              <a:rPr sz="3400" b="1" i="0">
+                <a:solidFill>
+                  <a:srgbClr val="17181A"/>
+                </a:solidFill>
+                <a:latin typeface="Verdana"/>
+              </a:rPr>
+              <a:t>Le piège le plus fréquent</a:t>
+            </a:r>
+          </a:p>
+        </p:txBody>
+      </p:sp>
+      <p:sp>
+        <p:nvSpPr>
+          <p:cNvPr id="7" name="Rounded Rectangle 6"/>
           <p:cNvSpPr/>
           <p:nvPr/>
         </p:nvSpPr>
         <p:spPr>
           <a:xfrm>
-            <a:off x="566928" y="1225296"/>
-            <a:ext cx="11057839" cy="1967991"/>
+            <a:off x="566928" y="1856232"/>
+            <a:ext cx="5428335" cy="2331720"/>
           </a:xfrm>
           <a:prstGeom prst="roundRect">
             <a:avLst>
-              <a:gd name="adj" fmla="val 7434"/>
+              <a:gd name="adj" fmla="val 6274"/>
             </a:avLst>
           </a:prstGeom>
           <a:solidFill>
-            <a:srgbClr val="FCE9F0"/>
+            <a:srgbClr val="FFF6F5"/>
           </a:solidFill>
           <a:ln w="12700">
             <a:solidFill>
-              <a:srgbClr val="EAEAE8"/>
+              <a:srgbClr val="DC2626"/>
             </a:solidFill>
           </a:ln>
           <a:effectLst/>
@@ -12530,14 +12785,14 @@
       </p:sp>
       <p:sp>
         <p:nvSpPr>
-          <p:cNvPr id="7" name="TextBox 6"/>
-          <p:cNvSpPr txBox="1"/>
-          <p:nvPr/>
-        </p:nvSpPr>
-        <p:spPr>
-          <a:xfrm>
-            <a:off x="1298448" y="1682496"/>
-            <a:ext cx="9594799" cy="1145032"/>
+          <p:cNvPr id="8" name="TextBox 7"/>
+          <p:cNvSpPr txBox="1"/>
+          <p:nvPr/>
+        </p:nvSpPr>
+        <p:spPr>
+          <a:xfrm>
+            <a:off x="932688" y="2130552"/>
+            <a:ext cx="4696815" cy="274320"/>
           </a:xfrm>
           <a:prstGeom prst="rect">
             <a:avLst/>
@@ -12552,35 +12807,198 @@
           <a:p>
             <a:pPr algn="l">
               <a:lnSpc>
-                <a:spcPct val="122000"/>
-              </a:lnSpc>
-            </a:pPr>
-            <a:r>
-              <a:rPr sz="3400" b="1" i="0">
+                <a:spcPct val="135000"/>
+              </a:lnSpc>
+            </a:pPr>
+            <a:r>
+              <a:rPr sz="1300" b="1" i="0" spc="156">
+                <a:solidFill>
+                  <a:srgbClr val="B91C1C"/>
+                </a:solidFill>
+                <a:latin typeface="Verdana"/>
+              </a:rPr>
+              <a:t>ON ENTEND SOUVENT</a:t>
+            </a:r>
+          </a:p>
+        </p:txBody>
+      </p:sp>
+      <p:sp>
+        <p:nvSpPr>
+          <p:cNvPr id="9" name="TextBox 8"/>
+          <p:cNvSpPr txBox="1"/>
+          <p:nvPr/>
+        </p:nvSpPr>
+        <p:spPr>
+          <a:xfrm>
+            <a:off x="932688" y="2569464"/>
+            <a:ext cx="4696815" cy="1417320"/>
+          </a:xfrm>
+          <a:prstGeom prst="rect">
+            <a:avLst/>
+          </a:prstGeom>
+          <a:noFill/>
+        </p:spPr>
+        <p:txBody>
+          <a:bodyPr wrap="square" lIns="0" rIns="0" tIns="0" bIns="0" anchor="t">
+            <a:spAutoFit/>
+          </a:bodyPr>
+          <a:lstStyle/>
+          <a:p>
+            <a:pPr algn="l">
+              <a:lnSpc>
+                <a:spcPct val="130000"/>
+              </a:lnSpc>
+            </a:pPr>
+            <a:r>
+              <a:rPr sz="2500" b="1" i="0">
                 <a:solidFill>
                   <a:srgbClr val="17181A"/>
                 </a:solidFill>
                 <a:latin typeface="Verdana"/>
               </a:rPr>
-              <a:t>La correction est privée. L'envoi est un geste.</a:t>
-            </a:r>
-          </a:p>
-        </p:txBody>
-      </p:sp>
-      <p:sp>
-        <p:nvSpPr>
-          <p:cNvPr id="8" name="Rounded Rectangle 7"/>
+              <a:t>« Si la machine corrige tout de suite, l'élève ne cherche plus. »</a:t>
+            </a:r>
+          </a:p>
+        </p:txBody>
+      </p:sp>
+      <p:sp>
+        <p:nvSpPr>
+          <p:cNvPr id="10" name="Rounded Rectangle 9"/>
           <p:cNvSpPr/>
           <p:nvPr/>
         </p:nvSpPr>
         <p:spPr>
           <a:xfrm>
-            <a:off x="566928" y="3467607"/>
-            <a:ext cx="11057839" cy="1671827"/>
+            <a:off x="6196431" y="1856232"/>
+            <a:ext cx="5428335" cy="2331720"/>
           </a:xfrm>
           <a:prstGeom prst="roundRect">
             <a:avLst>
-              <a:gd name="adj" fmla="val 8751"/>
+              <a:gd name="adj" fmla="val 6274"/>
+            </a:avLst>
+          </a:prstGeom>
+          <a:solidFill>
+            <a:srgbClr val="E6F5EE"/>
+          </a:solidFill>
+          <a:ln w="12700">
+            <a:solidFill>
+              <a:srgbClr val="0A8F5B"/>
+            </a:solidFill>
+          </a:ln>
+          <a:effectLst/>
+        </p:spPr>
+        <p:style>
+          <a:lnRef idx="1">
+            <a:schemeClr val="accent1"/>
+          </a:lnRef>
+          <a:fillRef idx="3">
+            <a:schemeClr val="accent1"/>
+          </a:fillRef>
+          <a:effectRef idx="2">
+            <a:schemeClr val="accent1"/>
+          </a:effectRef>
+          <a:fontRef idx="minor">
+            <a:schemeClr val="lt1"/>
+          </a:fontRef>
+        </p:style>
+        <p:txBody>
+          <a:bodyPr rtlCol="0" anchor="ctr"/>
+          <a:lstStyle/>
+          <a:p/>
+        </p:txBody>
+      </p:sp>
+      <p:sp>
+        <p:nvSpPr>
+          <p:cNvPr id="11" name="TextBox 10"/>
+          <p:cNvSpPr txBox="1"/>
+          <p:nvPr/>
+        </p:nvSpPr>
+        <p:spPr>
+          <a:xfrm>
+            <a:off x="6562191" y="2130552"/>
+            <a:ext cx="4696815" cy="274320"/>
+          </a:xfrm>
+          <a:prstGeom prst="rect">
+            <a:avLst/>
+          </a:prstGeom>
+          <a:noFill/>
+        </p:spPr>
+        <p:txBody>
+          <a:bodyPr wrap="square" lIns="0" rIns="0" tIns="0" bIns="0" anchor="t">
+            <a:spAutoFit/>
+          </a:bodyPr>
+          <a:lstStyle/>
+          <a:p>
+            <a:pPr algn="l">
+              <a:lnSpc>
+                <a:spcPct val="135000"/>
+              </a:lnSpc>
+            </a:pPr>
+            <a:r>
+              <a:rPr sz="1300" b="1" i="0" spc="156">
+                <a:solidFill>
+                  <a:srgbClr val="07734A"/>
+                </a:solidFill>
+                <a:latin typeface="Verdana"/>
+              </a:rPr>
+              <a:t>IL FAUT DIRE PLUTÔT</a:t>
+            </a:r>
+          </a:p>
+        </p:txBody>
+      </p:sp>
+      <p:sp>
+        <p:nvSpPr>
+          <p:cNvPr id="12" name="TextBox 11"/>
+          <p:cNvSpPr txBox="1"/>
+          <p:nvPr/>
+        </p:nvSpPr>
+        <p:spPr>
+          <a:xfrm>
+            <a:off x="6562191" y="2569464"/>
+            <a:ext cx="4696815" cy="1417320"/>
+          </a:xfrm>
+          <a:prstGeom prst="rect">
+            <a:avLst/>
+          </a:prstGeom>
+          <a:noFill/>
+        </p:spPr>
+        <p:txBody>
+          <a:bodyPr wrap="square" lIns="0" rIns="0" tIns="0" bIns="0" anchor="t">
+            <a:spAutoFit/>
+          </a:bodyPr>
+          <a:lstStyle/>
+          <a:p>
+            <a:pPr algn="l">
+              <a:lnSpc>
+                <a:spcPct val="130000"/>
+              </a:lnSpc>
+            </a:pPr>
+            <a:r>
+              <a:rPr sz="2500" b="1" i="0">
+                <a:solidFill>
+                  <a:srgbClr val="17181A"/>
+                </a:solidFill>
+                <a:latin typeface="Verdana"/>
+              </a:rPr>
+              <a:t>« Elle ne donne pas la réponse au premier essai. »</a:t>
+            </a:r>
+          </a:p>
+        </p:txBody>
+      </p:sp>
+      <p:sp>
+        <p:nvSpPr>
+          <p:cNvPr id="13" name="Rounded Rectangle 12"/>
+          <p:cNvSpPr/>
+          <p:nvPr/>
+        </p:nvSpPr>
+        <p:spPr>
+          <a:xfrm>
+            <a:off x="566928" y="4462272"/>
+            <a:ext cx="11057839" cy="1618487"/>
+          </a:xfrm>
+          <a:prstGeom prst="roundRect">
+            <a:avLst>
+              <a:gd name="adj" fmla="val 9039"/>
             </a:avLst>
           </a:prstGeom>
           <a:solidFill>
@@ -12615,14 +13033,14 @@
       </p:sp>
       <p:sp>
         <p:nvSpPr>
-          <p:cNvPr id="9" name="TextBox 8"/>
-          <p:cNvSpPr txBox="1"/>
-          <p:nvPr/>
-        </p:nvSpPr>
-        <p:spPr>
-          <a:xfrm>
-            <a:off x="969264" y="3741927"/>
-            <a:ext cx="10234879" cy="1214627"/>
+          <p:cNvPr id="14" name="TextBox 13"/>
+          <p:cNvSpPr txBox="1"/>
+          <p:nvPr/>
+        </p:nvSpPr>
+        <p:spPr>
+          <a:xfrm>
+            <a:off x="969264" y="4736592"/>
+            <a:ext cx="10234879" cy="1518920"/>
           </a:xfrm>
           <a:prstGeom prst="rect">
             <a:avLst/>
@@ -12647,7 +13065,7 @@
                 </a:solidFill>
                 <a:latin typeface="Verdana"/>
               </a:rPr>
-              <a:t>Quand un élève fait relire son texte ou son enregistrement, rien n'est gardé et rien ne part. L'enseignant reçoit ce que l'élève décide de lui envoyer, quand il le décide. C'est ce qui permet de recommencer douze fois.</a:t>
+              <a:t>Une réponse ouverte demande deux tentatives avant que la réponse attendue s'affiche. C'était une correction, pas un réglage d'origine : la première version donnait tout du premier coup, et on voyait des élèves valider n'importe quoi pour lire la solution.</a:t>
             </a:r>
           </a:p>
         </p:txBody>

--- a/assets/presentations/diaporamas/F1-la-logique-pedagogique.pptx
+++ b/assets/presentations/diaporamas/F1-la-logique-pedagogique.pptx
@@ -21,6 +21,11 @@
     <p:sldId id="269" r:id="rId21"/>
     <p:sldId id="270" r:id="rId22"/>
     <p:sldId id="271" r:id="rId23"/>
+    <p:sldId id="272" r:id="rId24"/>
+    <p:sldId id="273" r:id="rId25"/>
+    <p:sldId id="274" r:id="rId26"/>
+    <p:sldId id="275" r:id="rId27"/>
+    <p:sldId id="276" r:id="rId28"/>
   </p:sldIdLst>
   <p:sldSz cx="12191695" cy="6858000" type="screen4x3"/>
   <p:notesSz cx="6858000" cy="9144000"/>
@@ -587,7 +592,7 @@
           <a:lstStyle/>
           <a:p>
             <a:r>
-              <a:t>Le point que les enseignants comprennent le plus vite : un élève adulte qui sait qu'on l'observe ne s'enregistre pas. Celui qui sait que personne n'écoute recommence jusqu'à être content.</a:t>
+              <a:t>C'est la décision la plus discutée du projet, et la plus facile à défendre en salle : demander qui, dans la salle, se souvient d'une règle apprise avant d'en avoir eu besoin.</a:t>
             </a:r>
           </a:p>
         </p:txBody>
@@ -657,7 +662,7 @@
           <a:lstStyle/>
           <a:p>
             <a:r>
-              <a:t>La phrase porteuse est le détail que les enseignants relèvent : c'est exactement ce qu'ils font en classe quand ils refusent de faire répéter un mot seul.</a:t>
+              <a:t>Dire que c'est une correction, pas une intention initiale. Un projet qui raconte n'avoir jamais eu tort n'est pas crédible devant des praticiens.</a:t>
             </a:r>
           </a:p>
         </p:txBody>
@@ -727,7 +732,7 @@
           <a:lstStyle/>
           <a:p>
             <a:r>
-              <a:t>Deux moteurs de mémorisation feraient deux progressions qui divergent. Et reconnaître n'est pas savoir : on écrit.</a:t>
+              <a:t>Le point que les enseignants comprennent le plus vite : un élève adulte qui sait qu'on l'observe ne s'enregistre pas. Celui qui sait que personne n'écoute recommence jusqu'à être content.</a:t>
             </a:r>
           </a:p>
         </p:txBody>
@@ -797,7 +802,7 @@
           <a:lstStyle/>
           <a:p>
             <a:r>
-              <a:t>Ces trois refus sont écrits dans les consignes envoyées au modèle, pas dans une politique d'usage. Si on demande à voir, on peut montrer le fichier.</a:t>
+              <a:t>Le point que les enseignants comprennent le plus vite : un adulte qui se sait observé ne s'enregistre pas.</a:t>
             </a:r>
           </a:p>
         </p:txBody>
@@ -867,7 +872,7 @@
           <a:lstStyle/>
           <a:p>
             <a:r>
-              <a:t>À dire fermement : ce n'est pas une fonctionnalité manquante. Diagnostiquer est le métier, et une machine qui range des élèves dans des cases se trompe sur ceux qui en ont le plus besoin.</a:t>
+              <a:t>La phrase porteuse est le détail que les enseignants relèvent : c'est exactement ce qu'ils font en classe quand ils refusent de faire répéter un mot seul.</a:t>
             </a:r>
           </a:p>
         </p:txBody>
@@ -937,7 +942,7 @@
           <a:lstStyle/>
           <a:p>
             <a:r>
-              <a:t>Cette diapositive répond d'avance à « vous remplacez le professeur ». Ne pas la sauter même si personne n'a posé la question — surtout si personne ne l'a posée.</a:t>
+              <a:t>Deux moteurs de mémorisation feraient deux progressions qui divergent. Et reconnaître n'est pas savoir : on écrit.</a:t>
             </a:r>
           </a:p>
         </p:txBody>
@@ -1007,7 +1012,217 @@
           <a:lstStyle/>
           <a:p>
             <a:r>
-              <a:t>Terminer là-dessus et se taire. C'est la seule diapositive du diaporama qui ne contient aucun chiffre, et c'est voulu.</a:t>
+              <a:t>Reconnaître n'est pas savoir. C'est la raison pour laquelle la carte demande d'écrire, ce qui est plus lent et plus coûteux.</a:t>
+            </a:r>
+          </a:p>
+        </p:txBody>
+      </p:sp>
+      <p:sp>
+        <p:nvSpPr>
+          <p:cNvPr id="4" name="Slide Number Placeholder 3"/>
+          <p:cNvSpPr>
+            <a:spLocks noGrp="1"/>
+          </p:cNvSpPr>
+          <p:nvPr>
+            <p:ph type="sldNum" idx="5" sz="quarter"/>
+          </p:nvPr>
+        </p:nvSpPr>
+        <p:spPr/>
+      </p:sp>
+    </p:spTree>
+  </p:cSld>
+  <p:clrMapOvr>
+    <a:masterClrMapping/>
+  </p:clrMapOvr>
+</p:notes>
+</file>
+
+<file path=ppt/notesSlides/notesSlide17.xml><?xml version="1.0" encoding="utf-8"?>
+<p:notes xmlns:a="http://schemas.openxmlformats.org/drawingml/2006/main" xmlns:p="http://schemas.openxmlformats.org/presentationml/2006/main" xmlns:r="http://schemas.openxmlformats.org/officeDocument/2006/relationships">
+  <p:cSld>
+    <p:spTree>
+      <p:nvGrpSpPr>
+        <p:cNvPr id="1" name=""/>
+        <p:cNvGrpSpPr/>
+        <p:nvPr/>
+      </p:nvGrpSpPr>
+      <p:grpSpPr>
+        <a:xfrm>
+          <a:off x="0" y="0"/>
+          <a:ext cx="0" cy="0"/>
+          <a:chOff x="0" y="0"/>
+          <a:chExt cx="0" cy="0"/>
+        </a:xfrm>
+      </p:grpSpPr>
+      <p:sp>
+        <p:nvSpPr>
+          <p:cNvPr id="2" name="Slide Image Placeholder 1"/>
+          <p:cNvSpPr>
+            <a:spLocks noGrp="1"/>
+          </p:cNvSpPr>
+          <p:nvPr>
+            <p:ph type="sldImg" idx="2"/>
+          </p:nvPr>
+        </p:nvSpPr>
+        <p:spPr/>
+      </p:sp>
+      <p:sp>
+        <p:nvSpPr>
+          <p:cNvPr id="3" name="Notes Placeholder 2"/>
+          <p:cNvSpPr>
+            <a:spLocks noGrp="1"/>
+          </p:cNvSpPr>
+          <p:nvPr>
+            <p:ph type="body" idx="3" sz="quarter"/>
+          </p:nvPr>
+        </p:nvSpPr>
+        <p:spPr/>
+        <p:txBody>
+          <a:bodyPr/>
+          <a:lstStyle/>
+          <a:p>
+            <a:r>
+              <a:t>Ces trois refus sont écrits dans les consignes envoyées au modèle, pas dans une politique d'usage. Si on demande à voir, on peut montrer le fichier.</a:t>
+            </a:r>
+          </a:p>
+        </p:txBody>
+      </p:sp>
+      <p:sp>
+        <p:nvSpPr>
+          <p:cNvPr id="4" name="Slide Number Placeholder 3"/>
+          <p:cNvSpPr>
+            <a:spLocks noGrp="1"/>
+          </p:cNvSpPr>
+          <p:nvPr>
+            <p:ph type="sldNum" idx="5" sz="quarter"/>
+          </p:nvPr>
+        </p:nvSpPr>
+        <p:spPr/>
+      </p:sp>
+    </p:spTree>
+  </p:cSld>
+  <p:clrMapOvr>
+    <a:masterClrMapping/>
+  </p:clrMapOvr>
+</p:notes>
+</file>
+
+<file path=ppt/notesSlides/notesSlide18.xml><?xml version="1.0" encoding="utf-8"?>
+<p:notes xmlns:a="http://schemas.openxmlformats.org/drawingml/2006/main" xmlns:p="http://schemas.openxmlformats.org/presentationml/2006/main" xmlns:r="http://schemas.openxmlformats.org/officeDocument/2006/relationships">
+  <p:cSld>
+    <p:spTree>
+      <p:nvGrpSpPr>
+        <p:cNvPr id="1" name=""/>
+        <p:cNvGrpSpPr/>
+        <p:nvPr/>
+      </p:nvGrpSpPr>
+      <p:grpSpPr>
+        <a:xfrm>
+          <a:off x="0" y="0"/>
+          <a:ext cx="0" cy="0"/>
+          <a:chOff x="0" y="0"/>
+          <a:chExt cx="0" cy="0"/>
+        </a:xfrm>
+      </p:grpSpPr>
+      <p:sp>
+        <p:nvSpPr>
+          <p:cNvPr id="2" name="Slide Image Placeholder 1"/>
+          <p:cNvSpPr>
+            <a:spLocks noGrp="1"/>
+          </p:cNvSpPr>
+          <p:nvPr>
+            <p:ph type="sldImg" idx="2"/>
+          </p:nvPr>
+        </p:nvSpPr>
+        <p:spPr/>
+      </p:sp>
+      <p:sp>
+        <p:nvSpPr>
+          <p:cNvPr id="3" name="Notes Placeholder 2"/>
+          <p:cNvSpPr>
+            <a:spLocks noGrp="1"/>
+          </p:cNvSpPr>
+          <p:nvPr>
+            <p:ph type="body" idx="3" sz="quarter"/>
+          </p:nvPr>
+        </p:nvSpPr>
+        <p:spPr/>
+        <p:txBody>
+          <a:bodyPr/>
+          <a:lstStyle/>
+          <a:p>
+            <a:r>
+              <a:t>À dire fermement : ce n'est pas une fonctionnalité manquante. Diagnostiquer est le métier, et une machine qui range des élèves dans des cases se trompe sur ceux qui en ont le plus besoin.</a:t>
+            </a:r>
+          </a:p>
+        </p:txBody>
+      </p:sp>
+      <p:sp>
+        <p:nvSpPr>
+          <p:cNvPr id="4" name="Slide Number Placeholder 3"/>
+          <p:cNvSpPr>
+            <a:spLocks noGrp="1"/>
+          </p:cNvSpPr>
+          <p:nvPr>
+            <p:ph type="sldNum" idx="5" sz="quarter"/>
+          </p:nvPr>
+        </p:nvSpPr>
+        <p:spPr/>
+      </p:sp>
+    </p:spTree>
+  </p:cSld>
+  <p:clrMapOvr>
+    <a:masterClrMapping/>
+  </p:clrMapOvr>
+</p:notes>
+</file>
+
+<file path=ppt/notesSlides/notesSlide19.xml><?xml version="1.0" encoding="utf-8"?>
+<p:notes xmlns:a="http://schemas.openxmlformats.org/drawingml/2006/main" xmlns:p="http://schemas.openxmlformats.org/presentationml/2006/main" xmlns:r="http://schemas.openxmlformats.org/officeDocument/2006/relationships">
+  <p:cSld>
+    <p:spTree>
+      <p:nvGrpSpPr>
+        <p:cNvPr id="1" name=""/>
+        <p:cNvGrpSpPr/>
+        <p:nvPr/>
+      </p:nvGrpSpPr>
+      <p:grpSpPr>
+        <a:xfrm>
+          <a:off x="0" y="0"/>
+          <a:ext cx="0" cy="0"/>
+          <a:chOff x="0" y="0"/>
+          <a:chExt cx="0" cy="0"/>
+        </a:xfrm>
+      </p:grpSpPr>
+      <p:sp>
+        <p:nvSpPr>
+          <p:cNvPr id="2" name="Slide Image Placeholder 1"/>
+          <p:cNvSpPr>
+            <a:spLocks noGrp="1"/>
+          </p:cNvSpPr>
+          <p:nvPr>
+            <p:ph type="sldImg" idx="2"/>
+          </p:nvPr>
+        </p:nvSpPr>
+        <p:spPr/>
+      </p:sp>
+      <p:sp>
+        <p:nvSpPr>
+          <p:cNvPr id="3" name="Notes Placeholder 2"/>
+          <p:cNvSpPr>
+            <a:spLocks noGrp="1"/>
+          </p:cNvSpPr>
+          <p:nvPr>
+            <p:ph type="body" idx="3" sz="quarter"/>
+          </p:nvPr>
+        </p:nvSpPr>
+        <p:spPr/>
+        <p:txBody>
+          <a:bodyPr/>
+          <a:lstStyle/>
+          <a:p>
+            <a:r>
+              <a:t>Insister : rien ici ne propose quoi que ce soit. Le diagnostic est le métier, et c'est un choix, pas une étape transitoire.</a:t>
             </a:r>
           </a:p>
         </p:txBody>
@@ -1102,6 +1317,146 @@
 </p:notes>
 </file>
 
+<file path=ppt/notesSlides/notesSlide20.xml><?xml version="1.0" encoding="utf-8"?>
+<p:notes xmlns:a="http://schemas.openxmlformats.org/drawingml/2006/main" xmlns:p="http://schemas.openxmlformats.org/presentationml/2006/main" xmlns:r="http://schemas.openxmlformats.org/officeDocument/2006/relationships">
+  <p:cSld>
+    <p:spTree>
+      <p:nvGrpSpPr>
+        <p:cNvPr id="1" name=""/>
+        <p:cNvGrpSpPr/>
+        <p:nvPr/>
+      </p:nvGrpSpPr>
+      <p:grpSpPr>
+        <a:xfrm>
+          <a:off x="0" y="0"/>
+          <a:ext cx="0" cy="0"/>
+          <a:chOff x="0" y="0"/>
+          <a:chExt cx="0" cy="0"/>
+        </a:xfrm>
+      </p:grpSpPr>
+      <p:sp>
+        <p:nvSpPr>
+          <p:cNvPr id="2" name="Slide Image Placeholder 1"/>
+          <p:cNvSpPr>
+            <a:spLocks noGrp="1"/>
+          </p:cNvSpPr>
+          <p:nvPr>
+            <p:ph type="sldImg" idx="2"/>
+          </p:nvPr>
+        </p:nvSpPr>
+        <p:spPr/>
+      </p:sp>
+      <p:sp>
+        <p:nvSpPr>
+          <p:cNvPr id="3" name="Notes Placeholder 2"/>
+          <p:cNvSpPr>
+            <a:spLocks noGrp="1"/>
+          </p:cNvSpPr>
+          <p:nvPr>
+            <p:ph type="body" idx="3" sz="quarter"/>
+          </p:nvPr>
+        </p:nvSpPr>
+        <p:spPr/>
+        <p:txBody>
+          <a:bodyPr/>
+          <a:lstStyle/>
+          <a:p>
+            <a:r>
+              <a:t>Cette diapositive répond d'avance à « vous remplacez le professeur ». Ne pas la sauter même si personne n'a posé la question — surtout si personne ne l'a posée.</a:t>
+            </a:r>
+          </a:p>
+        </p:txBody>
+      </p:sp>
+      <p:sp>
+        <p:nvSpPr>
+          <p:cNvPr id="4" name="Slide Number Placeholder 3"/>
+          <p:cNvSpPr>
+            <a:spLocks noGrp="1"/>
+          </p:cNvSpPr>
+          <p:nvPr>
+            <p:ph type="sldNum" idx="5" sz="quarter"/>
+          </p:nvPr>
+        </p:nvSpPr>
+        <p:spPr/>
+      </p:sp>
+    </p:spTree>
+  </p:cSld>
+  <p:clrMapOvr>
+    <a:masterClrMapping/>
+  </p:clrMapOvr>
+</p:notes>
+</file>
+
+<file path=ppt/notesSlides/notesSlide21.xml><?xml version="1.0" encoding="utf-8"?>
+<p:notes xmlns:a="http://schemas.openxmlformats.org/drawingml/2006/main" xmlns:p="http://schemas.openxmlformats.org/presentationml/2006/main" xmlns:r="http://schemas.openxmlformats.org/officeDocument/2006/relationships">
+  <p:cSld>
+    <p:spTree>
+      <p:nvGrpSpPr>
+        <p:cNvPr id="1" name=""/>
+        <p:cNvGrpSpPr/>
+        <p:nvPr/>
+      </p:nvGrpSpPr>
+      <p:grpSpPr>
+        <a:xfrm>
+          <a:off x="0" y="0"/>
+          <a:ext cx="0" cy="0"/>
+          <a:chOff x="0" y="0"/>
+          <a:chExt cx="0" cy="0"/>
+        </a:xfrm>
+      </p:grpSpPr>
+      <p:sp>
+        <p:nvSpPr>
+          <p:cNvPr id="2" name="Slide Image Placeholder 1"/>
+          <p:cNvSpPr>
+            <a:spLocks noGrp="1"/>
+          </p:cNvSpPr>
+          <p:nvPr>
+            <p:ph type="sldImg" idx="2"/>
+          </p:nvPr>
+        </p:nvSpPr>
+        <p:spPr/>
+      </p:sp>
+      <p:sp>
+        <p:nvSpPr>
+          <p:cNvPr id="3" name="Notes Placeholder 2"/>
+          <p:cNvSpPr>
+            <a:spLocks noGrp="1"/>
+          </p:cNvSpPr>
+          <p:nvPr>
+            <p:ph type="body" idx="3" sz="quarter"/>
+          </p:nvPr>
+        </p:nvSpPr>
+        <p:spPr/>
+        <p:txBody>
+          <a:bodyPr/>
+          <a:lstStyle/>
+          <a:p>
+            <a:r>
+              <a:t>Terminer là-dessus et se taire. C'est la seule diapositive du diaporama qui ne contient aucun chiffre, et c'est voulu.</a:t>
+            </a:r>
+          </a:p>
+        </p:txBody>
+      </p:sp>
+      <p:sp>
+        <p:nvSpPr>
+          <p:cNvPr id="4" name="Slide Number Placeholder 3"/>
+          <p:cNvSpPr>
+            <a:spLocks noGrp="1"/>
+          </p:cNvSpPr>
+          <p:nvPr>
+            <p:ph type="sldNum" idx="5" sz="quarter"/>
+          </p:nvPr>
+        </p:nvSpPr>
+        <p:spPr/>
+      </p:sp>
+    </p:spTree>
+  </p:cSld>
+  <p:clrMapOvr>
+    <a:masterClrMapping/>
+  </p:clrMapOvr>
+</p:notes>
+</file>
+
 <file path=ppt/notesSlides/notesSlide3.xml><?xml version="1.0" encoding="utf-8"?>
 <p:notes xmlns:a="http://schemas.openxmlformats.org/drawingml/2006/main" xmlns:p="http://schemas.openxmlformats.org/presentationml/2006/main" xmlns:r="http://schemas.openxmlformats.org/officeDocument/2006/relationships">
   <p:cSld>
@@ -1287,7 +1642,7 @@
           <a:lstStyle/>
           <a:p>
             <a:r>
-              <a:t>C'est l'ordre qui compte, pas la liste. Beaucoup de matériel part du savoir et fabrique une situation autour : ça se voit tout de suite, et les élèves ne s'en servent jamais dehors.</a:t>
+              <a:t>Faire remarquer le bouton de vitesse : c'est ce qui distingue un enregistrement pédagogique d'un texte lu.</a:t>
             </a:r>
           </a:p>
         </p:txBody>
@@ -1357,7 +1712,7 @@
           <a:lstStyle/>
           <a:p>
             <a:r>
-              <a:t>Les mêmes quatre étapes dans les 87 modules, du niveau 1 au niveau 8 : l'élève n'apprend qu'une fois comment un cours fonctionne. La constance est un choix pédagogique, pas une facilité de production — un élève de francisation dépense beaucoup d'énergie à comprendre une interface, et celle-là il la comprend une seule fois.</a:t>
+              <a:t>C'est l'ordre qui compte, pas la liste. Beaucoup de matériel part du savoir et fabrique une situation autour : ça se voit tout de suite, et les élèves ne s'en servent jamais dehors.</a:t>
             </a:r>
           </a:p>
         </p:txBody>
@@ -1427,7 +1782,7 @@
           <a:lstStyle/>
           <a:p>
             <a:r>
-              <a:t>La contrainte a été tenue sur les 87 modules et les huit niveaux. Elle coûte cher à l'écriture — il faut faire entrer une intention dans une forme existante — et c'est l'élève qui encaisse la différence quand on ne la tient pas. Les sept sont montrées en images dans l'annexe A2.</a:t>
+              <a:t>Les mêmes quatre étapes dans les 87 modules, du niveau 1 au niveau 8 : l'élève n'apprend qu'une fois comment un cours fonctionne. La constance est un choix pédagogique, pas une facilité de production — un élève de francisation dépense beaucoup d'énergie à comprendre une interface, et celle-là il la comprend une seule fois.</a:t>
             </a:r>
           </a:p>
         </p:txBody>
@@ -1497,7 +1852,7 @@
           <a:lstStyle/>
           <a:p>
             <a:r>
-              <a:t>C'est la décision la plus discutée du projet, et la plus facile à défendre en salle : demander qui, dans la salle, se souvient d'une règle apprise avant d'en avoir eu besoin.</a:t>
+              <a:t>La contrainte a été tenue sur les 87 modules et les huit niveaux. Elle coûte cher à l'écriture — il faut faire entrer une intention dans une forme existante — et c'est l'élève qui encaisse la différence quand on ne la tient pas. Les sept sont montrées en images dans l'annexe A2.</a:t>
             </a:r>
           </a:p>
         </p:txBody>
@@ -1567,7 +1922,7 @@
           <a:lstStyle/>
           <a:p>
             <a:r>
-              <a:t>Dire que c'est une correction, pas une intention initiale. Un projet qui raconte n'avoir jamais eu tort n'est pas crédible devant des praticiens.</a:t>
+              <a:t>Si on demande à voir les six autres, elles sont en images dans l'annexe A2.</a:t>
             </a:r>
           </a:p>
         </p:txBody>
@@ -4989,7 +5344,7 @@
                 </a:solidFill>
                 <a:latin typeface="Verdana"/>
               </a:rPr>
-              <a:t>LA CORRECTION ET L'ENVOI</a:t>
+              <a:t>LE MOMENT DE LA RÈGLE</a:t>
             </a:r>
           </a:p>
         </p:txBody>
@@ -5074,7 +5429,7 @@
                 </a:solidFill>
                 <a:latin typeface="Verdana"/>
               </a:rPr>
-              <a:t>La correction est privée. L'envoi est un geste.</a:t>
+              <a:t>La règle arrive quand l'élève s'est trompé, jamais avant.</a:t>
             </a:r>
           </a:p>
         </p:txBody>
@@ -5159,7 +5514,7 @@
                 </a:solidFill>
                 <a:latin typeface="Verdana"/>
               </a:rPr>
-              <a:t>Quand un élève fait relire son texte ou son enregistrement, rien n'est gardé et rien ne part. L'enseignant reçoit ce que l'élève décide de lui envoyer, quand il le décide. C'est ce qui permet de recommencer douze fois.</a:t>
+              <a:t>Les mini-leçons ne sont pas en tête de module : elles s'ouvrent depuis l'exercice, au moment de l'erreur. Une règle lue avant d'en avoir eu besoin ne se retient pas — elle se recopie.</a:t>
             </a:r>
           </a:p>
         </p:txBody>
@@ -5336,7 +5691,7 @@
                 </a:solidFill>
                 <a:latin typeface="Verdana"/>
               </a:rPr>
-              <a:t>ÉCOUTER</a:t>
+              <a:t>CE QU'ON NOUS DIT</a:t>
             </a:r>
           </a:p>
         </p:txBody>
@@ -5369,13 +5724,13 @@
               </a:lnSpc>
             </a:pPr>
             <a:r>
-              <a:rPr sz="2900" b="1" i="0">
+              <a:rPr sz="3400" b="1" i="0">
                 <a:solidFill>
                   <a:srgbClr val="17181A"/>
                 </a:solidFill>
                 <a:latin typeface="Verdana"/>
               </a:rPr>
-              <a:t>Ce qu'il a fallu pour que l'oral serve à quelque chose</a:t>
+              <a:t>Le piège le plus fréquent</a:t>
             </a:r>
           </a:p>
         </p:txBody>
@@ -5388,12 +5743,260 @@
         </p:nvSpPr>
         <p:spPr>
           <a:xfrm>
-            <a:off x="566928" y="1810512"/>
-            <a:ext cx="5446623" cy="2052828"/>
+            <a:off x="566928" y="1856232"/>
+            <a:ext cx="5428335" cy="2331720"/>
           </a:xfrm>
           <a:prstGeom prst="roundRect">
             <a:avLst>
-              <a:gd name="adj" fmla="val 7126"/>
+              <a:gd name="adj" fmla="val 6274"/>
+            </a:avLst>
+          </a:prstGeom>
+          <a:solidFill>
+            <a:srgbClr val="FFF6F5"/>
+          </a:solidFill>
+          <a:ln w="12700">
+            <a:solidFill>
+              <a:srgbClr val="DC2626"/>
+            </a:solidFill>
+          </a:ln>
+          <a:effectLst/>
+        </p:spPr>
+        <p:style>
+          <a:lnRef idx="1">
+            <a:schemeClr val="accent1"/>
+          </a:lnRef>
+          <a:fillRef idx="3">
+            <a:schemeClr val="accent1"/>
+          </a:fillRef>
+          <a:effectRef idx="2">
+            <a:schemeClr val="accent1"/>
+          </a:effectRef>
+          <a:fontRef idx="minor">
+            <a:schemeClr val="lt1"/>
+          </a:fontRef>
+        </p:style>
+        <p:txBody>
+          <a:bodyPr rtlCol="0" anchor="ctr"/>
+          <a:lstStyle/>
+          <a:p/>
+        </p:txBody>
+      </p:sp>
+      <p:sp>
+        <p:nvSpPr>
+          <p:cNvPr id="8" name="TextBox 7"/>
+          <p:cNvSpPr txBox="1"/>
+          <p:nvPr/>
+        </p:nvSpPr>
+        <p:spPr>
+          <a:xfrm>
+            <a:off x="932688" y="2130552"/>
+            <a:ext cx="4696815" cy="274320"/>
+          </a:xfrm>
+          <a:prstGeom prst="rect">
+            <a:avLst/>
+          </a:prstGeom>
+          <a:noFill/>
+        </p:spPr>
+        <p:txBody>
+          <a:bodyPr wrap="square" lIns="0" rIns="0" tIns="0" bIns="0" anchor="t">
+            <a:spAutoFit/>
+          </a:bodyPr>
+          <a:lstStyle/>
+          <a:p>
+            <a:pPr algn="l">
+              <a:lnSpc>
+                <a:spcPct val="135000"/>
+              </a:lnSpc>
+            </a:pPr>
+            <a:r>
+              <a:rPr sz="1300" b="1" i="0" spc="156">
+                <a:solidFill>
+                  <a:srgbClr val="B91C1C"/>
+                </a:solidFill>
+                <a:latin typeface="Verdana"/>
+              </a:rPr>
+              <a:t>ON ENTEND SOUVENT</a:t>
+            </a:r>
+          </a:p>
+        </p:txBody>
+      </p:sp>
+      <p:sp>
+        <p:nvSpPr>
+          <p:cNvPr id="9" name="TextBox 8"/>
+          <p:cNvSpPr txBox="1"/>
+          <p:nvPr/>
+        </p:nvSpPr>
+        <p:spPr>
+          <a:xfrm>
+            <a:off x="932688" y="2569464"/>
+            <a:ext cx="4696815" cy="1417320"/>
+          </a:xfrm>
+          <a:prstGeom prst="rect">
+            <a:avLst/>
+          </a:prstGeom>
+          <a:noFill/>
+        </p:spPr>
+        <p:txBody>
+          <a:bodyPr wrap="square" lIns="0" rIns="0" tIns="0" bIns="0" anchor="t">
+            <a:spAutoFit/>
+          </a:bodyPr>
+          <a:lstStyle/>
+          <a:p>
+            <a:pPr algn="l">
+              <a:lnSpc>
+                <a:spcPct val="130000"/>
+              </a:lnSpc>
+            </a:pPr>
+            <a:r>
+              <a:rPr sz="2500" b="1" i="0">
+                <a:solidFill>
+                  <a:srgbClr val="17181A"/>
+                </a:solidFill>
+                <a:latin typeface="Verdana"/>
+              </a:rPr>
+              <a:t>« Si la machine corrige tout de suite, l'élève ne cherche plus. »</a:t>
+            </a:r>
+          </a:p>
+        </p:txBody>
+      </p:sp>
+      <p:sp>
+        <p:nvSpPr>
+          <p:cNvPr id="10" name="Rounded Rectangle 9"/>
+          <p:cNvSpPr/>
+          <p:nvPr/>
+        </p:nvSpPr>
+        <p:spPr>
+          <a:xfrm>
+            <a:off x="6196431" y="1856232"/>
+            <a:ext cx="5428335" cy="2331720"/>
+          </a:xfrm>
+          <a:prstGeom prst="roundRect">
+            <a:avLst>
+              <a:gd name="adj" fmla="val 6274"/>
+            </a:avLst>
+          </a:prstGeom>
+          <a:solidFill>
+            <a:srgbClr val="E6F5EE"/>
+          </a:solidFill>
+          <a:ln w="12700">
+            <a:solidFill>
+              <a:srgbClr val="0A8F5B"/>
+            </a:solidFill>
+          </a:ln>
+          <a:effectLst/>
+        </p:spPr>
+        <p:style>
+          <a:lnRef idx="1">
+            <a:schemeClr val="accent1"/>
+          </a:lnRef>
+          <a:fillRef idx="3">
+            <a:schemeClr val="accent1"/>
+          </a:fillRef>
+          <a:effectRef idx="2">
+            <a:schemeClr val="accent1"/>
+          </a:effectRef>
+          <a:fontRef idx="minor">
+            <a:schemeClr val="lt1"/>
+          </a:fontRef>
+        </p:style>
+        <p:txBody>
+          <a:bodyPr rtlCol="0" anchor="ctr"/>
+          <a:lstStyle/>
+          <a:p/>
+        </p:txBody>
+      </p:sp>
+      <p:sp>
+        <p:nvSpPr>
+          <p:cNvPr id="11" name="TextBox 10"/>
+          <p:cNvSpPr txBox="1"/>
+          <p:nvPr/>
+        </p:nvSpPr>
+        <p:spPr>
+          <a:xfrm>
+            <a:off x="6562191" y="2130552"/>
+            <a:ext cx="4696815" cy="274320"/>
+          </a:xfrm>
+          <a:prstGeom prst="rect">
+            <a:avLst/>
+          </a:prstGeom>
+          <a:noFill/>
+        </p:spPr>
+        <p:txBody>
+          <a:bodyPr wrap="square" lIns="0" rIns="0" tIns="0" bIns="0" anchor="t">
+            <a:spAutoFit/>
+          </a:bodyPr>
+          <a:lstStyle/>
+          <a:p>
+            <a:pPr algn="l">
+              <a:lnSpc>
+                <a:spcPct val="135000"/>
+              </a:lnSpc>
+            </a:pPr>
+            <a:r>
+              <a:rPr sz="1300" b="1" i="0" spc="156">
+                <a:solidFill>
+                  <a:srgbClr val="07734A"/>
+                </a:solidFill>
+                <a:latin typeface="Verdana"/>
+              </a:rPr>
+              <a:t>IL FAUT DIRE PLUTÔT</a:t>
+            </a:r>
+          </a:p>
+        </p:txBody>
+      </p:sp>
+      <p:sp>
+        <p:nvSpPr>
+          <p:cNvPr id="12" name="TextBox 11"/>
+          <p:cNvSpPr txBox="1"/>
+          <p:nvPr/>
+        </p:nvSpPr>
+        <p:spPr>
+          <a:xfrm>
+            <a:off x="6562191" y="2569464"/>
+            <a:ext cx="4696815" cy="1417320"/>
+          </a:xfrm>
+          <a:prstGeom prst="rect">
+            <a:avLst/>
+          </a:prstGeom>
+          <a:noFill/>
+        </p:spPr>
+        <p:txBody>
+          <a:bodyPr wrap="square" lIns="0" rIns="0" tIns="0" bIns="0" anchor="t">
+            <a:spAutoFit/>
+          </a:bodyPr>
+          <a:lstStyle/>
+          <a:p>
+            <a:pPr algn="l">
+              <a:lnSpc>
+                <a:spcPct val="130000"/>
+              </a:lnSpc>
+            </a:pPr>
+            <a:r>
+              <a:rPr sz="2500" b="1" i="0">
+                <a:solidFill>
+                  <a:srgbClr val="17181A"/>
+                </a:solidFill>
+                <a:latin typeface="Verdana"/>
+              </a:rPr>
+              <a:t>« Elle ne donne pas la réponse au premier essai. »</a:t>
+            </a:r>
+          </a:p>
+        </p:txBody>
+      </p:sp>
+      <p:sp>
+        <p:nvSpPr>
+          <p:cNvPr id="13" name="Rounded Rectangle 12"/>
+          <p:cNvSpPr/>
+          <p:nvPr/>
+        </p:nvSpPr>
+        <p:spPr>
+          <a:xfrm>
+            <a:off x="566928" y="4462272"/>
+            <a:ext cx="11057839" cy="1618487"/>
+          </a:xfrm>
+          <a:prstGeom prst="roundRect">
+            <a:avLst>
+              <a:gd name="adj" fmla="val 9039"/>
             </a:avLst>
           </a:prstGeom>
           <a:solidFill>
@@ -5428,14 +6031,14 @@
       </p:sp>
       <p:sp>
         <p:nvSpPr>
-          <p:cNvPr id="8" name="TextBox 7"/>
-          <p:cNvSpPr txBox="1"/>
-          <p:nvPr/>
-        </p:nvSpPr>
-        <p:spPr>
-          <a:xfrm>
-            <a:off x="886968" y="2084831"/>
-            <a:ext cx="4806543" cy="387096"/>
+          <p:cNvPr id="14" name="TextBox 13"/>
+          <p:cNvSpPr txBox="1"/>
+          <p:nvPr/>
+        </p:nvSpPr>
+        <p:spPr>
+          <a:xfrm>
+            <a:off x="969264" y="4736592"/>
+            <a:ext cx="10234879" cy="1518920"/>
           </a:xfrm>
           <a:prstGeom prst="rect">
             <a:avLst/>
@@ -5450,428 +6053,17 @@
           <a:p>
             <a:pPr algn="l">
               <a:lnSpc>
-                <a:spcPct val="118000"/>
-              </a:lnSpc>
-            </a:pPr>
-            <a:r>
-              <a:rPr sz="2400" b="1" i="0">
-                <a:solidFill>
-                  <a:srgbClr val="A5335F"/>
-                </a:solidFill>
-                <a:latin typeface="Verdana"/>
-              </a:rPr>
-              <a:t>Une voix par personnage</a:t>
-            </a:r>
-          </a:p>
-        </p:txBody>
-      </p:sp>
-      <p:sp>
-        <p:nvSpPr>
-          <p:cNvPr id="9" name="TextBox 8"/>
-          <p:cNvSpPr txBox="1"/>
-          <p:nvPr/>
-        </p:nvSpPr>
-        <p:spPr>
-          <a:xfrm>
-            <a:off x="886968" y="2499360"/>
-            <a:ext cx="4806543" cy="1089660"/>
-          </a:xfrm>
-          <a:prstGeom prst="rect">
-            <a:avLst/>
-          </a:prstGeom>
-          <a:noFill/>
-        </p:spPr>
-        <p:txBody>
-          <a:bodyPr wrap="square" lIns="0" rIns="0" tIns="0" bIns="0" anchor="t">
-            <a:spAutoFit/>
-          </a:bodyPr>
-          <a:lstStyle/>
-          <a:p>
-            <a:pPr algn="l">
-              <a:lnSpc>
-                <a:spcPct val="142000"/>
-              </a:lnSpc>
-            </a:pPr>
-            <a:r>
-              <a:rPr sz="1800" b="0" i="0">
-                <a:solidFill>
-                  <a:srgbClr val="3A3D40"/>
-                </a:solidFill>
-                <a:latin typeface="Verdana"/>
-              </a:rPr>
-              <a:t>Oksana et Bertrand ne sonnent pas pareil. Sans ça, l'élève ne sait pas qui parle et n'entend qu'un texte lu.</a:t>
-            </a:r>
-          </a:p>
-        </p:txBody>
-      </p:sp>
-      <p:sp>
-        <p:nvSpPr>
-          <p:cNvPr id="10" name="Rounded Rectangle 9"/>
-          <p:cNvSpPr/>
-          <p:nvPr/>
-        </p:nvSpPr>
-        <p:spPr>
-          <a:xfrm>
-            <a:off x="6178143" y="1810512"/>
-            <a:ext cx="5446623" cy="2052828"/>
-          </a:xfrm>
-          <a:prstGeom prst="roundRect">
-            <a:avLst>
-              <a:gd name="adj" fmla="val 7126"/>
-            </a:avLst>
-          </a:prstGeom>
-          <a:solidFill>
-            <a:srgbClr val="FFFFFF"/>
-          </a:solidFill>
-          <a:ln w="12700">
-            <a:solidFill>
-              <a:srgbClr val="EAEAE8"/>
-            </a:solidFill>
-          </a:ln>
-          <a:effectLst/>
-        </p:spPr>
-        <p:style>
-          <a:lnRef idx="1">
-            <a:schemeClr val="accent1"/>
-          </a:lnRef>
-          <a:fillRef idx="3">
-            <a:schemeClr val="accent1"/>
-          </a:fillRef>
-          <a:effectRef idx="2">
-            <a:schemeClr val="accent1"/>
-          </a:effectRef>
-          <a:fontRef idx="minor">
-            <a:schemeClr val="lt1"/>
-          </a:fontRef>
-        </p:style>
-        <p:txBody>
-          <a:bodyPr rtlCol="0" anchor="ctr"/>
-          <a:lstStyle/>
-          <a:p/>
-        </p:txBody>
-      </p:sp>
-      <p:sp>
-        <p:nvSpPr>
-          <p:cNvPr id="11" name="TextBox 10"/>
-          <p:cNvSpPr txBox="1"/>
-          <p:nvPr/>
-        </p:nvSpPr>
-        <p:spPr>
-          <a:xfrm>
-            <a:off x="6498183" y="2084831"/>
-            <a:ext cx="4806543" cy="387096"/>
-          </a:xfrm>
-          <a:prstGeom prst="rect">
-            <a:avLst/>
-          </a:prstGeom>
-          <a:noFill/>
-        </p:spPr>
-        <p:txBody>
-          <a:bodyPr wrap="square" lIns="0" rIns="0" tIns="0" bIns="0" anchor="t">
-            <a:spAutoFit/>
-          </a:bodyPr>
-          <a:lstStyle/>
-          <a:p>
-            <a:pPr algn="l">
-              <a:lnSpc>
-                <a:spcPct val="118000"/>
-              </a:lnSpc>
-            </a:pPr>
-            <a:r>
-              <a:rPr sz="2400" b="1" i="0">
-                <a:solidFill>
-                  <a:srgbClr val="A5335F"/>
-                </a:solidFill>
-                <a:latin typeface="Verdana"/>
-              </a:rPr>
-              <a:t>Un débit ralenti à la source</a:t>
-            </a:r>
-          </a:p>
-        </p:txBody>
-      </p:sp>
-      <p:sp>
-        <p:nvSpPr>
-          <p:cNvPr id="12" name="TextBox 11"/>
-          <p:cNvSpPr txBox="1"/>
-          <p:nvPr/>
-        </p:nvSpPr>
-        <p:spPr>
-          <a:xfrm>
-            <a:off x="6498183" y="2499360"/>
-            <a:ext cx="4806543" cy="1089660"/>
-          </a:xfrm>
-          <a:prstGeom prst="rect">
-            <a:avLst/>
-          </a:prstGeom>
-          <a:noFill/>
-        </p:spPr>
-        <p:txBody>
-          <a:bodyPr wrap="square" lIns="0" rIns="0" tIns="0" bIns="0" anchor="t">
-            <a:spAutoFit/>
-          </a:bodyPr>
-          <a:lstStyle/>
-          <a:p>
-            <a:pPr algn="l">
-              <a:lnSpc>
-                <a:spcPct val="142000"/>
-              </a:lnSpc>
-            </a:pPr>
-            <a:r>
-              <a:rPr sz="1800" b="0" i="0">
-                <a:solidFill>
-                  <a:srgbClr val="3A3D40"/>
-                </a:solidFill>
-                <a:latin typeface="Verdana"/>
-              </a:rPr>
-              <a:t>La voix enseignante est synthétisée plus lentement, pas étirée après coup — l'étirement dégrade le son et s'entend.</a:t>
-            </a:r>
-          </a:p>
-        </p:txBody>
-      </p:sp>
-      <p:sp>
-        <p:nvSpPr>
-          <p:cNvPr id="13" name="Rounded Rectangle 12"/>
-          <p:cNvSpPr/>
-          <p:nvPr/>
-        </p:nvSpPr>
-        <p:spPr>
-          <a:xfrm>
-            <a:off x="566928" y="4027932"/>
-            <a:ext cx="5446623" cy="2052828"/>
-          </a:xfrm>
-          <a:prstGeom prst="roundRect">
-            <a:avLst>
-              <a:gd name="adj" fmla="val 7126"/>
-            </a:avLst>
-          </a:prstGeom>
-          <a:solidFill>
-            <a:srgbClr val="FFFFFF"/>
-          </a:solidFill>
-          <a:ln w="12700">
-            <a:solidFill>
-              <a:srgbClr val="EAEAE8"/>
-            </a:solidFill>
-          </a:ln>
-          <a:effectLst/>
-        </p:spPr>
-        <p:style>
-          <a:lnRef idx="1">
-            <a:schemeClr val="accent1"/>
-          </a:lnRef>
-          <a:fillRef idx="3">
-            <a:schemeClr val="accent1"/>
-          </a:fillRef>
-          <a:effectRef idx="2">
-            <a:schemeClr val="accent1"/>
-          </a:effectRef>
-          <a:fontRef idx="minor">
-            <a:schemeClr val="lt1"/>
-          </a:fontRef>
-        </p:style>
-        <p:txBody>
-          <a:bodyPr rtlCol="0" anchor="ctr"/>
-          <a:lstStyle/>
-          <a:p/>
-        </p:txBody>
-      </p:sp>
-      <p:sp>
-        <p:nvSpPr>
-          <p:cNvPr id="14" name="TextBox 13"/>
-          <p:cNvSpPr txBox="1"/>
-          <p:nvPr/>
-        </p:nvSpPr>
-        <p:spPr>
-          <a:xfrm>
-            <a:off x="886968" y="4302252"/>
-            <a:ext cx="4806543" cy="387096"/>
-          </a:xfrm>
-          <a:prstGeom prst="rect">
-            <a:avLst/>
-          </a:prstGeom>
-          <a:noFill/>
-        </p:spPr>
-        <p:txBody>
-          <a:bodyPr wrap="square" lIns="0" rIns="0" tIns="0" bIns="0" anchor="t">
-            <a:spAutoFit/>
-          </a:bodyPr>
-          <a:lstStyle/>
-          <a:p>
-            <a:pPr algn="l">
-              <a:lnSpc>
-                <a:spcPct val="118000"/>
-              </a:lnSpc>
-            </a:pPr>
-            <a:r>
-              <a:rPr sz="2400" b="1" i="0">
-                <a:solidFill>
-                  <a:srgbClr val="A5335F"/>
-                </a:solidFill>
-                <a:latin typeface="Verdana"/>
-              </a:rPr>
-              <a:t>Réécouter ne coûte rien</a:t>
-            </a:r>
-          </a:p>
-        </p:txBody>
-      </p:sp>
-      <p:sp>
-        <p:nvSpPr>
-          <p:cNvPr id="15" name="TextBox 14"/>
-          <p:cNvSpPr txBox="1"/>
-          <p:nvPr/>
-        </p:nvSpPr>
-        <p:spPr>
-          <a:xfrm>
-            <a:off x="886968" y="4716780"/>
-            <a:ext cx="4806543" cy="1089660"/>
-          </a:xfrm>
-          <a:prstGeom prst="rect">
-            <a:avLst/>
-          </a:prstGeom>
-          <a:noFill/>
-        </p:spPr>
-        <p:txBody>
-          <a:bodyPr wrap="square" lIns="0" rIns="0" tIns="0" bIns="0" anchor="t">
-            <a:spAutoFit/>
-          </a:bodyPr>
-          <a:lstStyle/>
-          <a:p>
-            <a:pPr algn="l">
-              <a:lnSpc>
-                <a:spcPct val="142000"/>
-              </a:lnSpc>
-            </a:pPr>
-            <a:r>
-              <a:rPr sz="1800" b="0" i="0">
-                <a:solidFill>
-                  <a:srgbClr val="3A3D40"/>
-                </a:solidFill>
-                <a:latin typeface="Verdana"/>
-              </a:rPr>
-              <a:t>21 403 pistes audio, dans le module. L'élève réécoute une réplique quinze fois sans user la patience de personne.</a:t>
-            </a:r>
-          </a:p>
-        </p:txBody>
-      </p:sp>
-      <p:sp>
-        <p:nvSpPr>
-          <p:cNvPr id="16" name="Rounded Rectangle 15"/>
-          <p:cNvSpPr/>
-          <p:nvPr/>
-        </p:nvSpPr>
-        <p:spPr>
-          <a:xfrm>
-            <a:off x="6178143" y="4027932"/>
-            <a:ext cx="5446623" cy="2052828"/>
-          </a:xfrm>
-          <a:prstGeom prst="roundRect">
-            <a:avLst>
-              <a:gd name="adj" fmla="val 7126"/>
-            </a:avLst>
-          </a:prstGeom>
-          <a:solidFill>
-            <a:srgbClr val="FFFFFF"/>
-          </a:solidFill>
-          <a:ln w="12700">
-            <a:solidFill>
-              <a:srgbClr val="EAEAE8"/>
-            </a:solidFill>
-          </a:ln>
-          <a:effectLst/>
-        </p:spPr>
-        <p:style>
-          <a:lnRef idx="1">
-            <a:schemeClr val="accent1"/>
-          </a:lnRef>
-          <a:fillRef idx="3">
-            <a:schemeClr val="accent1"/>
-          </a:fillRef>
-          <a:effectRef idx="2">
-            <a:schemeClr val="accent1"/>
-          </a:effectRef>
-          <a:fontRef idx="minor">
-            <a:schemeClr val="lt1"/>
-          </a:fontRef>
-        </p:style>
-        <p:txBody>
-          <a:bodyPr rtlCol="0" anchor="ctr"/>
-          <a:lstStyle/>
-          <a:p/>
-        </p:txBody>
-      </p:sp>
-      <p:sp>
-        <p:nvSpPr>
-          <p:cNvPr id="17" name="TextBox 16"/>
-          <p:cNvSpPr txBox="1"/>
-          <p:nvPr/>
-        </p:nvSpPr>
-        <p:spPr>
-          <a:xfrm>
-            <a:off x="6498183" y="4302252"/>
-            <a:ext cx="4806543" cy="387096"/>
-          </a:xfrm>
-          <a:prstGeom prst="rect">
-            <a:avLst/>
-          </a:prstGeom>
-          <a:noFill/>
-        </p:spPr>
-        <p:txBody>
-          <a:bodyPr wrap="square" lIns="0" rIns="0" tIns="0" bIns="0" anchor="t">
-            <a:spAutoFit/>
-          </a:bodyPr>
-          <a:lstStyle/>
-          <a:p>
-            <a:pPr algn="l">
-              <a:lnSpc>
-                <a:spcPct val="118000"/>
-              </a:lnSpc>
-            </a:pPr>
-            <a:r>
-              <a:rPr sz="2400" b="1" i="0">
-                <a:solidFill>
-                  <a:srgbClr val="A5335F"/>
-                </a:solidFill>
-                <a:latin typeface="Verdana"/>
-              </a:rPr>
-              <a:t>Le mot dans une phrase</a:t>
-            </a:r>
-          </a:p>
-        </p:txBody>
-      </p:sp>
-      <p:sp>
-        <p:nvSpPr>
-          <p:cNvPr id="18" name="TextBox 17"/>
-          <p:cNvSpPr txBox="1"/>
-          <p:nvPr/>
-        </p:nvSpPr>
-        <p:spPr>
-          <a:xfrm>
-            <a:off x="6498183" y="4716780"/>
-            <a:ext cx="4806543" cy="1089660"/>
-          </a:xfrm>
-          <a:prstGeom prst="rect">
-            <a:avLst/>
-          </a:prstGeom>
-          <a:noFill/>
-        </p:spPr>
-        <p:txBody>
-          <a:bodyPr wrap="square" lIns="0" rIns="0" tIns="0" bIns="0" anchor="t">
-            <a:spAutoFit/>
-          </a:bodyPr>
-          <a:lstStyle/>
-          <a:p>
-            <a:pPr algn="l">
-              <a:lnSpc>
-                <a:spcPct val="142000"/>
-              </a:lnSpc>
-            </a:pPr>
-            <a:r>
-              <a:rPr sz="1800" b="0" i="0">
-                <a:solidFill>
-                  <a:srgbClr val="3A3D40"/>
-                </a:solidFill>
-                <a:latin typeface="Verdana"/>
-              </a:rPr>
-              <a:t>Un mot isolé se prononce mal et s'oublie. Chaque mot du vocabulaire est enregistré dans une phrase porteuse.</a:t>
+                <a:spcPct val="145000"/>
+              </a:lnSpc>
+            </a:pPr>
+            <a:r>
+              <a:rPr sz="2000" b="0" i="0">
+                <a:solidFill>
+                  <a:srgbClr val="4B4F52"/>
+                </a:solidFill>
+                <a:latin typeface="Verdana"/>
+              </a:rPr>
+              <a:t>Une réponse ouverte demande deux tentatives avant que la réponse attendue s'affiche. C'était une correction, pas un réglage d'origine : la première version donnait tout du premier coup, et on voyait des élèves valider n'importe quoi pour lire la solution.</a:t>
             </a:r>
           </a:p>
         </p:txBody>
@@ -6048,7 +6240,7 @@
                 </a:solidFill>
                 <a:latin typeface="Verdana"/>
               </a:rPr>
-              <a:t>LE VOCABULAIRE</a:t>
+              <a:t>LA CORRECTION ET L'ENVOI</a:t>
             </a:r>
           </a:p>
         </p:txBody>
@@ -6133,7 +6325,7 @@
                 </a:solidFill>
                 <a:latin typeface="Verdana"/>
               </a:rPr>
-              <a:t>Une seule porte d'entrée dans la progression.</a:t>
+              <a:t>La correction est privée. L'envoi est un geste.</a:t>
             </a:r>
           </a:p>
         </p:txBody>
@@ -6147,11 +6339,11 @@
         <p:spPr>
           <a:xfrm>
             <a:off x="566928" y="3467607"/>
-            <a:ext cx="11057839" cy="2040128"/>
+            <a:ext cx="11057839" cy="1671827"/>
           </a:xfrm>
           <a:prstGeom prst="roundRect">
             <a:avLst>
-              <a:gd name="adj" fmla="val 7171"/>
+              <a:gd name="adj" fmla="val 8751"/>
             </a:avLst>
           </a:prstGeom>
           <a:solidFill>
@@ -6193,7 +6385,7 @@
         <p:spPr>
           <a:xfrm>
             <a:off x="969264" y="3741927"/>
-            <a:ext cx="10234879" cy="1582928"/>
+            <a:ext cx="10234879" cy="1214627"/>
           </a:xfrm>
           <a:prstGeom prst="rect">
             <a:avLst/>
@@ -6218,7 +6410,7 @@
                 </a:solidFill>
                 <a:latin typeface="Verdana"/>
               </a:rPr>
-              <a:t>La section « Je retiens des mots » d'un module n'enregistre rien : elle fait travailler. C'est l'atelier de cartes mémoire, en répétition espacée, qui fait monter un mot d'une boîte à l'autre — et l'élève y **écrit** le mot, il ne le reconnaît pas dans une liste.</a:t>
+              <a:t>Quand un élève fait relire son texte ou son enregistrement, rien n'est gardé et rien ne part. L'enseignant reçoit ce que l'élève décide de lui envoyer, quand il le décide. C'est ce qui permet de recommencer douze fois.</a:t>
             </a:r>
           </a:p>
         </p:txBody>
@@ -6395,7 +6587,7 @@
                 </a:solidFill>
                 <a:latin typeface="Verdana"/>
               </a:rPr>
-              <a:t>LA QUESTION QUI VIENT TOUJOURS</a:t>
+              <a:t>RIEN NE PART SANS LUI</a:t>
             </a:r>
           </a:p>
         </p:txBody>
@@ -6434,33 +6626,72 @@
                 </a:solidFill>
                 <a:latin typeface="Verdana"/>
               </a:rPr>
-              <a:t>Le piège le plus fréquent</a:t>
-            </a:r>
-          </a:p>
-        </p:txBody>
-      </p:sp>
-      <p:sp>
-        <p:nvSpPr>
-          <p:cNvPr id="7" name="Rounded Rectangle 6"/>
+              <a:t>La relecture, puis l'envoi</a:t>
+            </a:r>
+          </a:p>
+        </p:txBody>
+      </p:sp>
+      <p:sp>
+        <p:nvSpPr>
+          <p:cNvPr id="7" name="TextBox 6"/>
+          <p:cNvSpPr txBox="1"/>
+          <p:nvPr/>
+        </p:nvSpPr>
+        <p:spPr>
+          <a:xfrm>
+            <a:off x="566928" y="1645920"/>
+            <a:ext cx="11057839" cy="617220"/>
+          </a:xfrm>
+          <a:prstGeom prst="rect">
+            <a:avLst/>
+          </a:prstGeom>
+          <a:noFill/>
+        </p:spPr>
+        <p:txBody>
+          <a:bodyPr wrap="square" lIns="0" rIns="0" tIns="0" bIns="0" anchor="t">
+            <a:spAutoFit/>
+          </a:bodyPr>
+          <a:lstStyle/>
+          <a:p>
+            <a:pPr algn="l">
+              <a:lnSpc>
+                <a:spcPct val="135000"/>
+              </a:lnSpc>
+            </a:pPr>
+            <a:r>
+              <a:rPr sz="1800" b="0" i="0">
+                <a:solidFill>
+                  <a:srgbClr val="6E7175"/>
+                </a:solidFill>
+                <a:latin typeface="Verdana"/>
+              </a:rPr>
+              <a:t>La correction s'affiche et n'est gardée nulle part. Le bouton d'envoi est un geste distinct, et il appartient à l'élève.</a:t>
+            </a:r>
+          </a:p>
+        </p:txBody>
+      </p:sp>
+      <p:sp>
+        <p:nvSpPr>
+          <p:cNvPr id="8" name="Rounded Rectangle 7"/>
           <p:cNvSpPr/>
           <p:nvPr/>
         </p:nvSpPr>
         <p:spPr>
           <a:xfrm>
-            <a:off x="566928" y="1856232"/>
-            <a:ext cx="5428335" cy="2331720"/>
+            <a:off x="5325008" y="2372868"/>
+            <a:ext cx="1541678" cy="3799332"/>
           </a:xfrm>
           <a:prstGeom prst="roundRect">
             <a:avLst>
-              <a:gd name="adj" fmla="val 6274"/>
+              <a:gd name="adj" fmla="val 5931"/>
             </a:avLst>
           </a:prstGeom>
           <a:solidFill>
-            <a:srgbClr val="FFF6F5"/>
+            <a:srgbClr val="FFFFFF"/>
           </a:solidFill>
           <a:ln w="12700">
             <a:solidFill>
-              <a:srgbClr val="DC2626"/>
+              <a:srgbClr val="D6D6D2"/>
             </a:solidFill>
           </a:ln>
           <a:effectLst/>
@@ -6485,293 +6716,30 @@
           <a:p/>
         </p:txBody>
       </p:sp>
-      <p:sp>
-        <p:nvSpPr>
-          <p:cNvPr id="8" name="TextBox 7"/>
-          <p:cNvSpPr txBox="1"/>
-          <p:nvPr/>
-        </p:nvSpPr>
-        <p:spPr>
-          <a:xfrm>
-            <a:off x="932688" y="2130552"/>
-            <a:ext cx="4696815" cy="274320"/>
-          </a:xfrm>
-          <a:prstGeom prst="rect">
-            <a:avLst/>
-          </a:prstGeom>
-          <a:noFill/>
-        </p:spPr>
-        <p:txBody>
-          <a:bodyPr wrap="square" lIns="0" rIns="0" tIns="0" bIns="0" anchor="t">
-            <a:spAutoFit/>
-          </a:bodyPr>
-          <a:lstStyle/>
-          <a:p>
-            <a:pPr algn="l">
-              <a:lnSpc>
-                <a:spcPct val="135000"/>
-              </a:lnSpc>
-            </a:pPr>
-            <a:r>
-              <a:rPr sz="1300" b="1" i="0" spc="156">
-                <a:solidFill>
-                  <a:srgbClr val="B91C1C"/>
-                </a:solidFill>
-                <a:latin typeface="Verdana"/>
-              </a:rPr>
-              <a:t>ON ENTEND SOUVENT</a:t>
-            </a:r>
-          </a:p>
-        </p:txBody>
-      </p:sp>
-      <p:sp>
-        <p:nvSpPr>
-          <p:cNvPr id="9" name="TextBox 8"/>
-          <p:cNvSpPr txBox="1"/>
-          <p:nvPr/>
-        </p:nvSpPr>
-        <p:spPr>
-          <a:xfrm>
-            <a:off x="932688" y="2569464"/>
-            <a:ext cx="4696815" cy="1417320"/>
-          </a:xfrm>
-          <a:prstGeom prst="rect">
-            <a:avLst/>
-          </a:prstGeom>
-          <a:noFill/>
-        </p:spPr>
-        <p:txBody>
-          <a:bodyPr wrap="square" lIns="0" rIns="0" tIns="0" bIns="0" anchor="t">
-            <a:spAutoFit/>
-          </a:bodyPr>
-          <a:lstStyle/>
-          <a:p>
-            <a:pPr algn="l">
-              <a:lnSpc>
-                <a:spcPct val="130000"/>
-              </a:lnSpc>
-            </a:pPr>
-            <a:r>
-              <a:rPr sz="2500" b="1" i="0">
-                <a:solidFill>
-                  <a:srgbClr val="17181A"/>
-                </a:solidFill>
-                <a:latin typeface="Verdana"/>
-              </a:rPr>
-              <a:t>« Votre assistant va faire les exercices à leur place. »</a:t>
-            </a:r>
-          </a:p>
-        </p:txBody>
-      </p:sp>
-      <p:sp>
-        <p:nvSpPr>
-          <p:cNvPr id="10" name="Rounded Rectangle 9"/>
-          <p:cNvSpPr/>
-          <p:nvPr/>
-        </p:nvSpPr>
-        <p:spPr>
-          <a:xfrm>
-            <a:off x="6196431" y="1856232"/>
-            <a:ext cx="5428335" cy="2331720"/>
-          </a:xfrm>
-          <a:prstGeom prst="roundRect">
-            <a:avLst>
-              <a:gd name="adj" fmla="val 6274"/>
-            </a:avLst>
-          </a:prstGeom>
-          <a:solidFill>
-            <a:srgbClr val="E6F5EE"/>
-          </a:solidFill>
-          <a:ln w="12700">
-            <a:solidFill>
-              <a:srgbClr val="0A8F5B"/>
-            </a:solidFill>
-          </a:ln>
-          <a:effectLst/>
-        </p:spPr>
-        <p:style>
-          <a:lnRef idx="1">
-            <a:schemeClr val="accent1"/>
-          </a:lnRef>
-          <a:fillRef idx="3">
-            <a:schemeClr val="accent1"/>
-          </a:fillRef>
-          <a:effectRef idx="2">
-            <a:schemeClr val="accent1"/>
-          </a:effectRef>
-          <a:fontRef idx="minor">
-            <a:schemeClr val="lt1"/>
-          </a:fontRef>
-        </p:style>
-        <p:txBody>
-          <a:bodyPr rtlCol="0" anchor="ctr"/>
-          <a:lstStyle/>
-          <a:p/>
-        </p:txBody>
-      </p:sp>
-      <p:sp>
-        <p:nvSpPr>
-          <p:cNvPr id="11" name="TextBox 10"/>
-          <p:cNvSpPr txBox="1"/>
-          <p:nvPr/>
-        </p:nvSpPr>
-        <p:spPr>
-          <a:xfrm>
-            <a:off x="6562191" y="2130552"/>
-            <a:ext cx="4696815" cy="274320"/>
-          </a:xfrm>
-          <a:prstGeom prst="rect">
-            <a:avLst/>
-          </a:prstGeom>
-          <a:noFill/>
-        </p:spPr>
-        <p:txBody>
-          <a:bodyPr wrap="square" lIns="0" rIns="0" tIns="0" bIns="0" anchor="t">
-            <a:spAutoFit/>
-          </a:bodyPr>
-          <a:lstStyle/>
-          <a:p>
-            <a:pPr algn="l">
-              <a:lnSpc>
-                <a:spcPct val="135000"/>
-              </a:lnSpc>
-            </a:pPr>
-            <a:r>
-              <a:rPr sz="1300" b="1" i="0" spc="156">
-                <a:solidFill>
-                  <a:srgbClr val="07734A"/>
-                </a:solidFill>
-                <a:latin typeface="Verdana"/>
-              </a:rPr>
-              <a:t>IL FAUT DIRE PLUTÔT</a:t>
-            </a:r>
-          </a:p>
-        </p:txBody>
-      </p:sp>
-      <p:sp>
-        <p:nvSpPr>
-          <p:cNvPr id="12" name="TextBox 11"/>
-          <p:cNvSpPr txBox="1"/>
-          <p:nvPr/>
-        </p:nvSpPr>
-        <p:spPr>
-          <a:xfrm>
-            <a:off x="6562191" y="2569464"/>
-            <a:ext cx="4696815" cy="1417320"/>
-          </a:xfrm>
-          <a:prstGeom prst="rect">
-            <a:avLst/>
-          </a:prstGeom>
-          <a:noFill/>
-        </p:spPr>
-        <p:txBody>
-          <a:bodyPr wrap="square" lIns="0" rIns="0" tIns="0" bIns="0" anchor="t">
-            <a:spAutoFit/>
-          </a:bodyPr>
-          <a:lstStyle/>
-          <a:p>
-            <a:pPr algn="l">
-              <a:lnSpc>
-                <a:spcPct val="130000"/>
-              </a:lnSpc>
-            </a:pPr>
-            <a:r>
-              <a:rPr sz="2500" b="1" i="0">
-                <a:solidFill>
-                  <a:srgbClr val="17181A"/>
-                </a:solidFill>
-                <a:latin typeface="Verdana"/>
-              </a:rPr>
-              <a:t>« Il a interdiction de donner une réponse. »</a:t>
-            </a:r>
-          </a:p>
-        </p:txBody>
-      </p:sp>
-      <p:sp>
-        <p:nvSpPr>
-          <p:cNvPr id="13" name="Rounded Rectangle 12"/>
-          <p:cNvSpPr/>
-          <p:nvPr/>
-        </p:nvSpPr>
-        <p:spPr>
-          <a:xfrm>
-            <a:off x="566928" y="4462272"/>
-            <a:ext cx="11057839" cy="1618487"/>
-          </a:xfrm>
-          <a:prstGeom prst="roundRect">
-            <a:avLst>
-              <a:gd name="adj" fmla="val 9039"/>
-            </a:avLst>
-          </a:prstGeom>
-          <a:solidFill>
-            <a:srgbClr val="FFFFFF"/>
-          </a:solidFill>
-          <a:ln w="12700">
-            <a:solidFill>
-              <a:srgbClr val="EAEAE8"/>
-            </a:solidFill>
-          </a:ln>
-          <a:effectLst/>
-        </p:spPr>
-        <p:style>
-          <a:lnRef idx="1">
-            <a:schemeClr val="accent1"/>
-          </a:lnRef>
-          <a:fillRef idx="3">
-            <a:schemeClr val="accent1"/>
-          </a:fillRef>
-          <a:effectRef idx="2">
-            <a:schemeClr val="accent1"/>
-          </a:effectRef>
-          <a:fontRef idx="minor">
-            <a:schemeClr val="lt1"/>
-          </a:fontRef>
-        </p:style>
-        <p:txBody>
-          <a:bodyPr rtlCol="0" anchor="ctr"/>
-          <a:lstStyle/>
-          <a:p/>
-        </p:txBody>
-      </p:sp>
-      <p:sp>
-        <p:nvSpPr>
-          <p:cNvPr id="14" name="TextBox 13"/>
-          <p:cNvSpPr txBox="1"/>
-          <p:nvPr/>
-        </p:nvSpPr>
-        <p:spPr>
-          <a:xfrm>
-            <a:off x="969264" y="4736592"/>
-            <a:ext cx="10234879" cy="1150620"/>
-          </a:xfrm>
-          <a:prstGeom prst="rect">
-            <a:avLst/>
-          </a:prstGeom>
-          <a:noFill/>
-        </p:spPr>
-        <p:txBody>
-          <a:bodyPr wrap="square" lIns="0" rIns="0" tIns="0" bIns="0" anchor="t">
-            <a:spAutoFit/>
-          </a:bodyPr>
-          <a:lstStyle/>
-          <a:p>
-            <a:pPr algn="l">
-              <a:lnSpc>
-                <a:spcPct val="145000"/>
-              </a:lnSpc>
-            </a:pPr>
-            <a:r>
-              <a:rPr sz="2000" b="0" i="0">
-                <a:solidFill>
-                  <a:srgbClr val="4B4F52"/>
-                </a:solidFill>
-                <a:latin typeface="Verdana"/>
-              </a:rPr>
-              <a:t>Il cite la phrase du dialogue où se trouve l'information, puis repose une question plus facile. La traduction s'ajoute sous le français et ne le remplace jamais ; « simplifier » reformule en français, il ne traduit pas.</a:t>
-            </a:r>
-          </a:p>
-        </p:txBody>
-      </p:sp>
+      <p:pic>
+        <p:nvPicPr>
+          <p:cNvPr id="9" name="Picture 8" descr="cas-09-production-avec-ia.png"/>
+          <p:cNvPicPr>
+            <a:picLocks noChangeAspect="1"/>
+          </p:cNvPicPr>
+          <p:nvPr/>
+        </p:nvPicPr>
+        <p:blipFill>
+          <a:blip r:embed="rId2"/>
+          <a:stretch>
+            <a:fillRect/>
+          </a:stretch>
+        </p:blipFill>
+        <p:spPr>
+          <a:xfrm>
+            <a:off x="5343296" y="2391156"/>
+            <a:ext cx="1505102" cy="3762756"/>
+          </a:xfrm>
+          <a:prstGeom prst="rect">
+            <a:avLst/>
+          </a:prstGeom>
+        </p:spPr>
+      </p:pic>
     </p:spTree>
   </p:cSld>
   <p:clrMapOvr>
@@ -6944,110 +6912,64 @@
                 </a:solidFill>
                 <a:latin typeface="Verdana"/>
               </a:rPr>
-              <a:t>QUI DÉCIDE</a:t>
-            </a:r>
-          </a:p>
-        </p:txBody>
-      </p:sp>
-      <p:sp>
-        <p:nvSpPr>
-          <p:cNvPr id="6" name="Rounded Rectangle 5"/>
+              <a:t>ÉCOUTER</a:t>
+            </a:r>
+          </a:p>
+        </p:txBody>
+      </p:sp>
+      <p:sp>
+        <p:nvSpPr>
+          <p:cNvPr id="6" name="TextBox 5"/>
+          <p:cNvSpPr txBox="1"/>
+          <p:nvPr/>
+        </p:nvSpPr>
+        <p:spPr>
+          <a:xfrm>
+            <a:off x="566928" y="749808"/>
+            <a:ext cx="11057839" cy="877824"/>
+          </a:xfrm>
+          <a:prstGeom prst="rect">
+            <a:avLst/>
+          </a:prstGeom>
+          <a:noFill/>
+        </p:spPr>
+        <p:txBody>
+          <a:bodyPr wrap="square" lIns="0" rIns="0" tIns="0" bIns="0" anchor="t">
+            <a:spAutoFit/>
+          </a:bodyPr>
+          <a:lstStyle/>
+          <a:p>
+            <a:pPr algn="l">
+              <a:lnSpc>
+                <a:spcPct val="115000"/>
+              </a:lnSpc>
+            </a:pPr>
+            <a:r>
+              <a:rPr sz="2900" b="1" i="0">
+                <a:solidFill>
+                  <a:srgbClr val="17181A"/>
+                </a:solidFill>
+                <a:latin typeface="Verdana"/>
+              </a:rPr>
+              <a:t>Ce qu'il a fallu pour que l'oral serve à quelque chose</a:t>
+            </a:r>
+          </a:p>
+        </p:txBody>
+      </p:sp>
+      <p:sp>
+        <p:nvSpPr>
+          <p:cNvPr id="7" name="Rounded Rectangle 6"/>
           <p:cNvSpPr/>
           <p:nvPr/>
         </p:nvSpPr>
         <p:spPr>
           <a:xfrm>
-            <a:off x="566928" y="1225296"/>
-            <a:ext cx="11057839" cy="1967991"/>
+            <a:off x="566928" y="1810512"/>
+            <a:ext cx="5446623" cy="2052828"/>
           </a:xfrm>
           <a:prstGeom prst="roundRect">
             <a:avLst>
-              <a:gd name="adj" fmla="val 7434"/>
-            </a:avLst>
-          </a:prstGeom>
-          <a:solidFill>
-            <a:srgbClr val="FCE9F0"/>
-          </a:solidFill>
-          <a:ln w="12700">
-            <a:solidFill>
-              <a:srgbClr val="EAEAE8"/>
-            </a:solidFill>
-          </a:ln>
-          <a:effectLst/>
-        </p:spPr>
-        <p:style>
-          <a:lnRef idx="1">
-            <a:schemeClr val="accent1"/>
-          </a:lnRef>
-          <a:fillRef idx="3">
-            <a:schemeClr val="accent1"/>
-          </a:fillRef>
-          <a:effectRef idx="2">
-            <a:schemeClr val="accent1"/>
-          </a:effectRef>
-          <a:fontRef idx="minor">
-            <a:schemeClr val="lt1"/>
-          </a:fontRef>
-        </p:style>
-        <p:txBody>
-          <a:bodyPr rtlCol="0" anchor="ctr"/>
-          <a:lstStyle/>
-          <a:p/>
-        </p:txBody>
-      </p:sp>
-      <p:sp>
-        <p:nvSpPr>
-          <p:cNvPr id="7" name="TextBox 6"/>
-          <p:cNvSpPr txBox="1"/>
-          <p:nvPr/>
-        </p:nvSpPr>
-        <p:spPr>
-          <a:xfrm>
-            <a:off x="1298448" y="1682496"/>
-            <a:ext cx="9594799" cy="1145032"/>
-          </a:xfrm>
-          <a:prstGeom prst="rect">
-            <a:avLst/>
-          </a:prstGeom>
-          <a:noFill/>
-        </p:spPr>
-        <p:txBody>
-          <a:bodyPr wrap="square" lIns="0" rIns="0" tIns="0" bIns="0" anchor="t">
-            <a:spAutoFit/>
-          </a:bodyPr>
-          <a:lstStyle/>
-          <a:p>
-            <a:pPr algn="l">
-              <a:lnSpc>
-                <a:spcPct val="122000"/>
-              </a:lnSpc>
-            </a:pPr>
-            <a:r>
-              <a:rPr sz="3400" b="1" i="0">
-                <a:solidFill>
-                  <a:srgbClr val="17181A"/>
-                </a:solidFill>
-                <a:latin typeface="Verdana"/>
-              </a:rPr>
-              <a:t>Aucun parcours n'est suggéré automatiquement à un élève.</a:t>
-            </a:r>
-          </a:p>
-        </p:txBody>
-      </p:sp>
-      <p:sp>
-        <p:nvSpPr>
-          <p:cNvPr id="8" name="Rounded Rectangle 7"/>
-          <p:cNvSpPr/>
-          <p:nvPr/>
-        </p:nvSpPr>
-        <p:spPr>
-          <a:xfrm>
-            <a:off x="566928" y="3467607"/>
-            <a:ext cx="11057839" cy="1671827"/>
-          </a:xfrm>
-          <a:prstGeom prst="roundRect">
-            <a:avLst>
-              <a:gd name="adj" fmla="val 8751"/>
+              <a:gd name="adj" fmla="val 7126"/>
             </a:avLst>
           </a:prstGeom>
           <a:solidFill>
@@ -7082,14 +7004,53 @@
       </p:sp>
       <p:sp>
         <p:nvSpPr>
+          <p:cNvPr id="8" name="TextBox 7"/>
+          <p:cNvSpPr txBox="1"/>
+          <p:nvPr/>
+        </p:nvSpPr>
+        <p:spPr>
+          <a:xfrm>
+            <a:off x="886968" y="2084831"/>
+            <a:ext cx="4806543" cy="387096"/>
+          </a:xfrm>
+          <a:prstGeom prst="rect">
+            <a:avLst/>
+          </a:prstGeom>
+          <a:noFill/>
+        </p:spPr>
+        <p:txBody>
+          <a:bodyPr wrap="square" lIns="0" rIns="0" tIns="0" bIns="0" anchor="t">
+            <a:spAutoFit/>
+          </a:bodyPr>
+          <a:lstStyle/>
+          <a:p>
+            <a:pPr algn="l">
+              <a:lnSpc>
+                <a:spcPct val="118000"/>
+              </a:lnSpc>
+            </a:pPr>
+            <a:r>
+              <a:rPr sz="2400" b="1" i="0">
+                <a:solidFill>
+                  <a:srgbClr val="A5335F"/>
+                </a:solidFill>
+                <a:latin typeface="Verdana"/>
+              </a:rPr>
+              <a:t>Une voix par personnage</a:t>
+            </a:r>
+          </a:p>
+        </p:txBody>
+      </p:sp>
+      <p:sp>
+        <p:nvSpPr>
           <p:cNvPr id="9" name="TextBox 8"/>
           <p:cNvSpPr txBox="1"/>
           <p:nvPr/>
         </p:nvSpPr>
         <p:spPr>
           <a:xfrm>
-            <a:off x="969264" y="3741927"/>
-            <a:ext cx="10234879" cy="1214627"/>
+            <a:off x="886968" y="2499360"/>
+            <a:ext cx="4806543" cy="1089660"/>
           </a:xfrm>
           <a:prstGeom prst="rect">
             <a:avLst/>
@@ -7104,17 +7065,389 @@
           <a:p>
             <a:pPr algn="l">
               <a:lnSpc>
-                <a:spcPct val="145000"/>
-              </a:lnSpc>
-            </a:pPr>
-            <a:r>
-              <a:rPr sz="2000" b="0" i="0">
-                <a:solidFill>
-                  <a:srgbClr val="4B4F52"/>
-                </a:solidFill>
-                <a:latin typeface="Verdana"/>
-              </a:rPr>
-              <a:t>Le portail dit ce qu'un élève a fait et où il s'est trompé. Il ne conclut rien et ne propose rien. C'est l'enseignant qui envoie une mini-leçon de dix minutes à qui en a besoin — un choix, pas une étape transitoire vers l'automatisation.</a:t>
+                <a:spcPct val="142000"/>
+              </a:lnSpc>
+            </a:pPr>
+            <a:r>
+              <a:rPr sz="1800" b="0" i="0">
+                <a:solidFill>
+                  <a:srgbClr val="3A3D40"/>
+                </a:solidFill>
+                <a:latin typeface="Verdana"/>
+              </a:rPr>
+              <a:t>Oksana et Bertrand ne sonnent pas pareil. Sans ça, l'élève ne sait pas qui parle et n'entend qu'un texte lu.</a:t>
+            </a:r>
+          </a:p>
+        </p:txBody>
+      </p:sp>
+      <p:sp>
+        <p:nvSpPr>
+          <p:cNvPr id="10" name="Rounded Rectangle 9"/>
+          <p:cNvSpPr/>
+          <p:nvPr/>
+        </p:nvSpPr>
+        <p:spPr>
+          <a:xfrm>
+            <a:off x="6178143" y="1810512"/>
+            <a:ext cx="5446623" cy="2052828"/>
+          </a:xfrm>
+          <a:prstGeom prst="roundRect">
+            <a:avLst>
+              <a:gd name="adj" fmla="val 7126"/>
+            </a:avLst>
+          </a:prstGeom>
+          <a:solidFill>
+            <a:srgbClr val="FFFFFF"/>
+          </a:solidFill>
+          <a:ln w="12700">
+            <a:solidFill>
+              <a:srgbClr val="EAEAE8"/>
+            </a:solidFill>
+          </a:ln>
+          <a:effectLst/>
+        </p:spPr>
+        <p:style>
+          <a:lnRef idx="1">
+            <a:schemeClr val="accent1"/>
+          </a:lnRef>
+          <a:fillRef idx="3">
+            <a:schemeClr val="accent1"/>
+          </a:fillRef>
+          <a:effectRef idx="2">
+            <a:schemeClr val="accent1"/>
+          </a:effectRef>
+          <a:fontRef idx="minor">
+            <a:schemeClr val="lt1"/>
+          </a:fontRef>
+        </p:style>
+        <p:txBody>
+          <a:bodyPr rtlCol="0" anchor="ctr"/>
+          <a:lstStyle/>
+          <a:p/>
+        </p:txBody>
+      </p:sp>
+      <p:sp>
+        <p:nvSpPr>
+          <p:cNvPr id="11" name="TextBox 10"/>
+          <p:cNvSpPr txBox="1"/>
+          <p:nvPr/>
+        </p:nvSpPr>
+        <p:spPr>
+          <a:xfrm>
+            <a:off x="6498183" y="2084831"/>
+            <a:ext cx="4806543" cy="387096"/>
+          </a:xfrm>
+          <a:prstGeom prst="rect">
+            <a:avLst/>
+          </a:prstGeom>
+          <a:noFill/>
+        </p:spPr>
+        <p:txBody>
+          <a:bodyPr wrap="square" lIns="0" rIns="0" tIns="0" bIns="0" anchor="t">
+            <a:spAutoFit/>
+          </a:bodyPr>
+          <a:lstStyle/>
+          <a:p>
+            <a:pPr algn="l">
+              <a:lnSpc>
+                <a:spcPct val="118000"/>
+              </a:lnSpc>
+            </a:pPr>
+            <a:r>
+              <a:rPr sz="2400" b="1" i="0">
+                <a:solidFill>
+                  <a:srgbClr val="A5335F"/>
+                </a:solidFill>
+                <a:latin typeface="Verdana"/>
+              </a:rPr>
+              <a:t>Un débit ralenti à la source</a:t>
+            </a:r>
+          </a:p>
+        </p:txBody>
+      </p:sp>
+      <p:sp>
+        <p:nvSpPr>
+          <p:cNvPr id="12" name="TextBox 11"/>
+          <p:cNvSpPr txBox="1"/>
+          <p:nvPr/>
+        </p:nvSpPr>
+        <p:spPr>
+          <a:xfrm>
+            <a:off x="6498183" y="2499360"/>
+            <a:ext cx="4806543" cy="1089660"/>
+          </a:xfrm>
+          <a:prstGeom prst="rect">
+            <a:avLst/>
+          </a:prstGeom>
+          <a:noFill/>
+        </p:spPr>
+        <p:txBody>
+          <a:bodyPr wrap="square" lIns="0" rIns="0" tIns="0" bIns="0" anchor="t">
+            <a:spAutoFit/>
+          </a:bodyPr>
+          <a:lstStyle/>
+          <a:p>
+            <a:pPr algn="l">
+              <a:lnSpc>
+                <a:spcPct val="142000"/>
+              </a:lnSpc>
+            </a:pPr>
+            <a:r>
+              <a:rPr sz="1800" b="0" i="0">
+                <a:solidFill>
+                  <a:srgbClr val="3A3D40"/>
+                </a:solidFill>
+                <a:latin typeface="Verdana"/>
+              </a:rPr>
+              <a:t>La voix enseignante est synthétisée plus lentement, pas étirée après coup — l'étirement dégrade le son et s'entend.</a:t>
+            </a:r>
+          </a:p>
+        </p:txBody>
+      </p:sp>
+      <p:sp>
+        <p:nvSpPr>
+          <p:cNvPr id="13" name="Rounded Rectangle 12"/>
+          <p:cNvSpPr/>
+          <p:nvPr/>
+        </p:nvSpPr>
+        <p:spPr>
+          <a:xfrm>
+            <a:off x="566928" y="4027932"/>
+            <a:ext cx="5446623" cy="2052828"/>
+          </a:xfrm>
+          <a:prstGeom prst="roundRect">
+            <a:avLst>
+              <a:gd name="adj" fmla="val 7126"/>
+            </a:avLst>
+          </a:prstGeom>
+          <a:solidFill>
+            <a:srgbClr val="FFFFFF"/>
+          </a:solidFill>
+          <a:ln w="12700">
+            <a:solidFill>
+              <a:srgbClr val="EAEAE8"/>
+            </a:solidFill>
+          </a:ln>
+          <a:effectLst/>
+        </p:spPr>
+        <p:style>
+          <a:lnRef idx="1">
+            <a:schemeClr val="accent1"/>
+          </a:lnRef>
+          <a:fillRef idx="3">
+            <a:schemeClr val="accent1"/>
+          </a:fillRef>
+          <a:effectRef idx="2">
+            <a:schemeClr val="accent1"/>
+          </a:effectRef>
+          <a:fontRef idx="minor">
+            <a:schemeClr val="lt1"/>
+          </a:fontRef>
+        </p:style>
+        <p:txBody>
+          <a:bodyPr rtlCol="0" anchor="ctr"/>
+          <a:lstStyle/>
+          <a:p/>
+        </p:txBody>
+      </p:sp>
+      <p:sp>
+        <p:nvSpPr>
+          <p:cNvPr id="14" name="TextBox 13"/>
+          <p:cNvSpPr txBox="1"/>
+          <p:nvPr/>
+        </p:nvSpPr>
+        <p:spPr>
+          <a:xfrm>
+            <a:off x="886968" y="4302252"/>
+            <a:ext cx="4806543" cy="387096"/>
+          </a:xfrm>
+          <a:prstGeom prst="rect">
+            <a:avLst/>
+          </a:prstGeom>
+          <a:noFill/>
+        </p:spPr>
+        <p:txBody>
+          <a:bodyPr wrap="square" lIns="0" rIns="0" tIns="0" bIns="0" anchor="t">
+            <a:spAutoFit/>
+          </a:bodyPr>
+          <a:lstStyle/>
+          <a:p>
+            <a:pPr algn="l">
+              <a:lnSpc>
+                <a:spcPct val="118000"/>
+              </a:lnSpc>
+            </a:pPr>
+            <a:r>
+              <a:rPr sz="2400" b="1" i="0">
+                <a:solidFill>
+                  <a:srgbClr val="A5335F"/>
+                </a:solidFill>
+                <a:latin typeface="Verdana"/>
+              </a:rPr>
+              <a:t>Réécouter ne coûte rien</a:t>
+            </a:r>
+          </a:p>
+        </p:txBody>
+      </p:sp>
+      <p:sp>
+        <p:nvSpPr>
+          <p:cNvPr id="15" name="TextBox 14"/>
+          <p:cNvSpPr txBox="1"/>
+          <p:nvPr/>
+        </p:nvSpPr>
+        <p:spPr>
+          <a:xfrm>
+            <a:off x="886968" y="4716780"/>
+            <a:ext cx="4806543" cy="1089660"/>
+          </a:xfrm>
+          <a:prstGeom prst="rect">
+            <a:avLst/>
+          </a:prstGeom>
+          <a:noFill/>
+        </p:spPr>
+        <p:txBody>
+          <a:bodyPr wrap="square" lIns="0" rIns="0" tIns="0" bIns="0" anchor="t">
+            <a:spAutoFit/>
+          </a:bodyPr>
+          <a:lstStyle/>
+          <a:p>
+            <a:pPr algn="l">
+              <a:lnSpc>
+                <a:spcPct val="142000"/>
+              </a:lnSpc>
+            </a:pPr>
+            <a:r>
+              <a:rPr sz="1800" b="0" i="0">
+                <a:solidFill>
+                  <a:srgbClr val="3A3D40"/>
+                </a:solidFill>
+                <a:latin typeface="Verdana"/>
+              </a:rPr>
+              <a:t>21 403 pistes audio, dans le module. L'élève réécoute une réplique quinze fois sans user la patience de personne.</a:t>
+            </a:r>
+          </a:p>
+        </p:txBody>
+      </p:sp>
+      <p:sp>
+        <p:nvSpPr>
+          <p:cNvPr id="16" name="Rounded Rectangle 15"/>
+          <p:cNvSpPr/>
+          <p:nvPr/>
+        </p:nvSpPr>
+        <p:spPr>
+          <a:xfrm>
+            <a:off x="6178143" y="4027932"/>
+            <a:ext cx="5446623" cy="2052828"/>
+          </a:xfrm>
+          <a:prstGeom prst="roundRect">
+            <a:avLst>
+              <a:gd name="adj" fmla="val 7126"/>
+            </a:avLst>
+          </a:prstGeom>
+          <a:solidFill>
+            <a:srgbClr val="FFFFFF"/>
+          </a:solidFill>
+          <a:ln w="12700">
+            <a:solidFill>
+              <a:srgbClr val="EAEAE8"/>
+            </a:solidFill>
+          </a:ln>
+          <a:effectLst/>
+        </p:spPr>
+        <p:style>
+          <a:lnRef idx="1">
+            <a:schemeClr val="accent1"/>
+          </a:lnRef>
+          <a:fillRef idx="3">
+            <a:schemeClr val="accent1"/>
+          </a:fillRef>
+          <a:effectRef idx="2">
+            <a:schemeClr val="accent1"/>
+          </a:effectRef>
+          <a:fontRef idx="minor">
+            <a:schemeClr val="lt1"/>
+          </a:fontRef>
+        </p:style>
+        <p:txBody>
+          <a:bodyPr rtlCol="0" anchor="ctr"/>
+          <a:lstStyle/>
+          <a:p/>
+        </p:txBody>
+      </p:sp>
+      <p:sp>
+        <p:nvSpPr>
+          <p:cNvPr id="17" name="TextBox 16"/>
+          <p:cNvSpPr txBox="1"/>
+          <p:nvPr/>
+        </p:nvSpPr>
+        <p:spPr>
+          <a:xfrm>
+            <a:off x="6498183" y="4302252"/>
+            <a:ext cx="4806543" cy="387096"/>
+          </a:xfrm>
+          <a:prstGeom prst="rect">
+            <a:avLst/>
+          </a:prstGeom>
+          <a:noFill/>
+        </p:spPr>
+        <p:txBody>
+          <a:bodyPr wrap="square" lIns="0" rIns="0" tIns="0" bIns="0" anchor="t">
+            <a:spAutoFit/>
+          </a:bodyPr>
+          <a:lstStyle/>
+          <a:p>
+            <a:pPr algn="l">
+              <a:lnSpc>
+                <a:spcPct val="118000"/>
+              </a:lnSpc>
+            </a:pPr>
+            <a:r>
+              <a:rPr sz="2400" b="1" i="0">
+                <a:solidFill>
+                  <a:srgbClr val="A5335F"/>
+                </a:solidFill>
+                <a:latin typeface="Verdana"/>
+              </a:rPr>
+              <a:t>Le mot dans une phrase</a:t>
+            </a:r>
+          </a:p>
+        </p:txBody>
+      </p:sp>
+      <p:sp>
+        <p:nvSpPr>
+          <p:cNvPr id="18" name="TextBox 17"/>
+          <p:cNvSpPr txBox="1"/>
+          <p:nvPr/>
+        </p:nvSpPr>
+        <p:spPr>
+          <a:xfrm>
+            <a:off x="6498183" y="4716780"/>
+            <a:ext cx="4806543" cy="1089660"/>
+          </a:xfrm>
+          <a:prstGeom prst="rect">
+            <a:avLst/>
+          </a:prstGeom>
+          <a:noFill/>
+        </p:spPr>
+        <p:txBody>
+          <a:bodyPr wrap="square" lIns="0" rIns="0" tIns="0" bIns="0" anchor="t">
+            <a:spAutoFit/>
+          </a:bodyPr>
+          <a:lstStyle/>
+          <a:p>
+            <a:pPr algn="l">
+              <a:lnSpc>
+                <a:spcPct val="142000"/>
+              </a:lnSpc>
+            </a:pPr>
+            <a:r>
+              <a:rPr sz="1800" b="0" i="0">
+                <a:solidFill>
+                  <a:srgbClr val="3A3D40"/>
+                </a:solidFill>
+                <a:latin typeface="Verdana"/>
+              </a:rPr>
+              <a:t>Un mot isolé se prononce mal et s'oublie. Chaque mot du vocabulaire est enregistré dans une phrase porteuse.</a:t>
             </a:r>
           </a:p>
         </p:txBody>
@@ -7291,64 +7624,110 @@
                 </a:solidFill>
                 <a:latin typeface="Verdana"/>
               </a:rPr>
-              <a:t>CE QU'ON N'A PAS RETIRÉ</a:t>
-            </a:r>
-          </a:p>
-        </p:txBody>
-      </p:sp>
-      <p:sp>
-        <p:nvSpPr>
-          <p:cNvPr id="6" name="TextBox 5"/>
-          <p:cNvSpPr txBox="1"/>
-          <p:nvPr/>
-        </p:nvSpPr>
-        <p:spPr>
-          <a:xfrm>
-            <a:off x="566928" y="749808"/>
-            <a:ext cx="11057839" cy="877824"/>
-          </a:xfrm>
-          <a:prstGeom prst="rect">
-            <a:avLst/>
-          </a:prstGeom>
-          <a:noFill/>
-        </p:spPr>
-        <p:txBody>
-          <a:bodyPr wrap="square" lIns="0" rIns="0" tIns="0" bIns="0" anchor="t">
-            <a:spAutoFit/>
-          </a:bodyPr>
-          <a:lstStyle/>
-          <a:p>
-            <a:pPr algn="l">
-              <a:lnSpc>
-                <a:spcPct val="115000"/>
-              </a:lnSpc>
-            </a:pPr>
-            <a:r>
-              <a:rPr sz="3400" b="1" i="0">
-                <a:solidFill>
-                  <a:srgbClr val="17181A"/>
-                </a:solidFill>
-                <a:latin typeface="Verdana"/>
-              </a:rPr>
-              <a:t>Quatre choses qui restent, et c'est délibéré</a:t>
-            </a:r>
-          </a:p>
-        </p:txBody>
-      </p:sp>
-      <p:sp>
-        <p:nvSpPr>
-          <p:cNvPr id="7" name="Rounded Rectangle 6"/>
+              <a:t>LE VOCABULAIRE</a:t>
+            </a:r>
+          </a:p>
+        </p:txBody>
+      </p:sp>
+      <p:sp>
+        <p:nvSpPr>
+          <p:cNvPr id="6" name="Rounded Rectangle 5"/>
           <p:cNvSpPr/>
           <p:nvPr/>
         </p:nvSpPr>
         <p:spPr>
           <a:xfrm>
-            <a:off x="566928" y="1810512"/>
-            <a:ext cx="5446623" cy="2052828"/>
+            <a:off x="566928" y="1225296"/>
+            <a:ext cx="11057839" cy="1967991"/>
           </a:xfrm>
           <a:prstGeom prst="roundRect">
             <a:avLst>
-              <a:gd name="adj" fmla="val 7126"/>
+              <a:gd name="adj" fmla="val 7434"/>
+            </a:avLst>
+          </a:prstGeom>
+          <a:solidFill>
+            <a:srgbClr val="FCE9F0"/>
+          </a:solidFill>
+          <a:ln w="12700">
+            <a:solidFill>
+              <a:srgbClr val="EAEAE8"/>
+            </a:solidFill>
+          </a:ln>
+          <a:effectLst/>
+        </p:spPr>
+        <p:style>
+          <a:lnRef idx="1">
+            <a:schemeClr val="accent1"/>
+          </a:lnRef>
+          <a:fillRef idx="3">
+            <a:schemeClr val="accent1"/>
+          </a:fillRef>
+          <a:effectRef idx="2">
+            <a:schemeClr val="accent1"/>
+          </a:effectRef>
+          <a:fontRef idx="minor">
+            <a:schemeClr val="lt1"/>
+          </a:fontRef>
+        </p:style>
+        <p:txBody>
+          <a:bodyPr rtlCol="0" anchor="ctr"/>
+          <a:lstStyle/>
+          <a:p/>
+        </p:txBody>
+      </p:sp>
+      <p:sp>
+        <p:nvSpPr>
+          <p:cNvPr id="7" name="TextBox 6"/>
+          <p:cNvSpPr txBox="1"/>
+          <p:nvPr/>
+        </p:nvSpPr>
+        <p:spPr>
+          <a:xfrm>
+            <a:off x="1298448" y="1682496"/>
+            <a:ext cx="9594799" cy="1145032"/>
+          </a:xfrm>
+          <a:prstGeom prst="rect">
+            <a:avLst/>
+          </a:prstGeom>
+          <a:noFill/>
+        </p:spPr>
+        <p:txBody>
+          <a:bodyPr wrap="square" lIns="0" rIns="0" tIns="0" bIns="0" anchor="t">
+            <a:spAutoFit/>
+          </a:bodyPr>
+          <a:lstStyle/>
+          <a:p>
+            <a:pPr algn="l">
+              <a:lnSpc>
+                <a:spcPct val="122000"/>
+              </a:lnSpc>
+            </a:pPr>
+            <a:r>
+              <a:rPr sz="3400" b="1" i="0">
+                <a:solidFill>
+                  <a:srgbClr val="17181A"/>
+                </a:solidFill>
+                <a:latin typeface="Verdana"/>
+              </a:rPr>
+              <a:t>Une seule porte d'entrée dans la progression.</a:t>
+            </a:r>
+          </a:p>
+        </p:txBody>
+      </p:sp>
+      <p:sp>
+        <p:nvSpPr>
+          <p:cNvPr id="8" name="Rounded Rectangle 7"/>
+          <p:cNvSpPr/>
+          <p:nvPr/>
+        </p:nvSpPr>
+        <p:spPr>
+          <a:xfrm>
+            <a:off x="566928" y="3467607"/>
+            <a:ext cx="11057839" cy="2040128"/>
+          </a:xfrm>
+          <a:prstGeom prst="roundRect">
+            <a:avLst>
+              <a:gd name="adj" fmla="val 7171"/>
             </a:avLst>
           </a:prstGeom>
           <a:solidFill>
@@ -7383,14 +7762,14 @@
       </p:sp>
       <p:sp>
         <p:nvSpPr>
-          <p:cNvPr id="8" name="TextBox 7"/>
-          <p:cNvSpPr txBox="1"/>
-          <p:nvPr/>
-        </p:nvSpPr>
-        <p:spPr>
-          <a:xfrm>
-            <a:off x="886968" y="2084831"/>
-            <a:ext cx="4806543" cy="387096"/>
+          <p:cNvPr id="9" name="TextBox 8"/>
+          <p:cNvSpPr txBox="1"/>
+          <p:nvPr/>
+        </p:nvSpPr>
+        <p:spPr>
+          <a:xfrm>
+            <a:off x="969264" y="3741927"/>
+            <a:ext cx="10234879" cy="1582928"/>
           </a:xfrm>
           <a:prstGeom prst="rect">
             <a:avLst/>
@@ -7405,428 +7784,17 @@
           <a:p>
             <a:pPr algn="l">
               <a:lnSpc>
-                <a:spcPct val="118000"/>
-              </a:lnSpc>
-            </a:pPr>
-            <a:r>
-              <a:rPr sz="2400" b="1" i="0">
-                <a:solidFill>
-                  <a:srgbClr val="A5335F"/>
-                </a:solidFill>
-                <a:latin typeface="Verdana"/>
-              </a:rPr>
-              <a:t>L'enseignant</a:t>
-            </a:r>
-          </a:p>
-        </p:txBody>
-      </p:sp>
-      <p:sp>
-        <p:nvSpPr>
-          <p:cNvPr id="9" name="TextBox 8"/>
-          <p:cNvSpPr txBox="1"/>
-          <p:nvPr/>
-        </p:nvSpPr>
-        <p:spPr>
-          <a:xfrm>
-            <a:off x="886968" y="2499360"/>
-            <a:ext cx="4806543" cy="1089660"/>
-          </a:xfrm>
-          <a:prstGeom prst="rect">
-            <a:avLst/>
-          </a:prstGeom>
-          <a:noFill/>
-        </p:spPr>
-        <p:txBody>
-          <a:bodyPr wrap="square" lIns="0" rIns="0" tIns="0" bIns="0" anchor="t">
-            <a:spAutoFit/>
-          </a:bodyPr>
-          <a:lstStyle/>
-          <a:p>
-            <a:pPr algn="l">
-              <a:lnSpc>
-                <a:spcPct val="142000"/>
-              </a:lnSpc>
-            </a:pPr>
-            <a:r>
-              <a:rPr sz="1800" b="0" i="0">
-                <a:solidFill>
-                  <a:srgbClr val="3A3D40"/>
-                </a:solidFill>
-                <a:latin typeface="Verdana"/>
-              </a:rPr>
-              <a:t>Rien ne s'ouvre tout seul à un élève. C'est l'enseignant qui date un module, choisit la séance, lit les productions.</a:t>
-            </a:r>
-          </a:p>
-        </p:txBody>
-      </p:sp>
-      <p:sp>
-        <p:nvSpPr>
-          <p:cNvPr id="10" name="Rounded Rectangle 9"/>
-          <p:cNvSpPr/>
-          <p:nvPr/>
-        </p:nvSpPr>
-        <p:spPr>
-          <a:xfrm>
-            <a:off x="6178143" y="1810512"/>
-            <a:ext cx="5446623" cy="2052828"/>
-          </a:xfrm>
-          <a:prstGeom prst="roundRect">
-            <a:avLst>
-              <a:gd name="adj" fmla="val 7126"/>
-            </a:avLst>
-          </a:prstGeom>
-          <a:solidFill>
-            <a:srgbClr val="FFFFFF"/>
-          </a:solidFill>
-          <a:ln w="12700">
-            <a:solidFill>
-              <a:srgbClr val="EAEAE8"/>
-            </a:solidFill>
-          </a:ln>
-          <a:effectLst/>
-        </p:spPr>
-        <p:style>
-          <a:lnRef idx="1">
-            <a:schemeClr val="accent1"/>
-          </a:lnRef>
-          <a:fillRef idx="3">
-            <a:schemeClr val="accent1"/>
-          </a:fillRef>
-          <a:effectRef idx="2">
-            <a:schemeClr val="accent1"/>
-          </a:effectRef>
-          <a:fontRef idx="minor">
-            <a:schemeClr val="lt1"/>
-          </a:fontRef>
-        </p:style>
-        <p:txBody>
-          <a:bodyPr rtlCol="0" anchor="ctr"/>
-          <a:lstStyle/>
-          <a:p/>
-        </p:txBody>
-      </p:sp>
-      <p:sp>
-        <p:nvSpPr>
-          <p:cNvPr id="11" name="TextBox 10"/>
-          <p:cNvSpPr txBox="1"/>
-          <p:nvPr/>
-        </p:nvSpPr>
-        <p:spPr>
-          <a:xfrm>
-            <a:off x="6498183" y="2084831"/>
-            <a:ext cx="4806543" cy="387096"/>
-          </a:xfrm>
-          <a:prstGeom prst="rect">
-            <a:avLst/>
-          </a:prstGeom>
-          <a:noFill/>
-        </p:spPr>
-        <p:txBody>
-          <a:bodyPr wrap="square" lIns="0" rIns="0" tIns="0" bIns="0" anchor="t">
-            <a:spAutoFit/>
-          </a:bodyPr>
-          <a:lstStyle/>
-          <a:p>
-            <a:pPr algn="l">
-              <a:lnSpc>
-                <a:spcPct val="118000"/>
-              </a:lnSpc>
-            </a:pPr>
-            <a:r>
-              <a:rPr sz="2400" b="1" i="0">
-                <a:solidFill>
-                  <a:srgbClr val="A5335F"/>
-                </a:solidFill>
-                <a:latin typeface="Verdana"/>
-              </a:rPr>
-              <a:t>Le papier</a:t>
-            </a:r>
-          </a:p>
-        </p:txBody>
-      </p:sp>
-      <p:sp>
-        <p:nvSpPr>
-          <p:cNvPr id="12" name="TextBox 11"/>
-          <p:cNvSpPr txBox="1"/>
-          <p:nvPr/>
-        </p:nvSpPr>
-        <p:spPr>
-          <a:xfrm>
-            <a:off x="6498183" y="2499360"/>
-            <a:ext cx="4806543" cy="1089660"/>
-          </a:xfrm>
-          <a:prstGeom prst="rect">
-            <a:avLst/>
-          </a:prstGeom>
-          <a:noFill/>
-        </p:spPr>
-        <p:txBody>
-          <a:bodyPr wrap="square" lIns="0" rIns="0" tIns="0" bIns="0" anchor="t">
-            <a:spAutoFit/>
-          </a:bodyPr>
-          <a:lstStyle/>
-          <a:p>
-            <a:pPr algn="l">
-              <a:lnSpc>
-                <a:spcPct val="142000"/>
-              </a:lnSpc>
-            </a:pPr>
-            <a:r>
-              <a:rPr sz="1800" b="0" i="0">
-                <a:solidFill>
-                  <a:srgbClr val="3A3D40"/>
-                </a:solidFill>
-                <a:latin typeface="Verdana"/>
-              </a:rPr>
-              <a:t>1 264 fiches imprimables, noir et blanc. Un élève sans appareil fait la séance quand même.</a:t>
-            </a:r>
-          </a:p>
-        </p:txBody>
-      </p:sp>
-      <p:sp>
-        <p:nvSpPr>
-          <p:cNvPr id="13" name="Rounded Rectangle 12"/>
-          <p:cNvSpPr/>
-          <p:nvPr/>
-        </p:nvSpPr>
-        <p:spPr>
-          <a:xfrm>
-            <a:off x="566928" y="4027932"/>
-            <a:ext cx="5446623" cy="2052828"/>
-          </a:xfrm>
-          <a:prstGeom prst="roundRect">
-            <a:avLst>
-              <a:gd name="adj" fmla="val 7126"/>
-            </a:avLst>
-          </a:prstGeom>
-          <a:solidFill>
-            <a:srgbClr val="FFFFFF"/>
-          </a:solidFill>
-          <a:ln w="12700">
-            <a:solidFill>
-              <a:srgbClr val="EAEAE8"/>
-            </a:solidFill>
-          </a:ln>
-          <a:effectLst/>
-        </p:spPr>
-        <p:style>
-          <a:lnRef idx="1">
-            <a:schemeClr val="accent1"/>
-          </a:lnRef>
-          <a:fillRef idx="3">
-            <a:schemeClr val="accent1"/>
-          </a:fillRef>
-          <a:effectRef idx="2">
-            <a:schemeClr val="accent1"/>
-          </a:effectRef>
-          <a:fontRef idx="minor">
-            <a:schemeClr val="lt1"/>
-          </a:fontRef>
-        </p:style>
-        <p:txBody>
-          <a:bodyPr rtlCol="0" anchor="ctr"/>
-          <a:lstStyle/>
-          <a:p/>
-        </p:txBody>
-      </p:sp>
-      <p:sp>
-        <p:nvSpPr>
-          <p:cNvPr id="14" name="TextBox 13"/>
-          <p:cNvSpPr txBox="1"/>
-          <p:nvPr/>
-        </p:nvSpPr>
-        <p:spPr>
-          <a:xfrm>
-            <a:off x="886968" y="4302252"/>
-            <a:ext cx="4806543" cy="387096"/>
-          </a:xfrm>
-          <a:prstGeom prst="rect">
-            <a:avLst/>
-          </a:prstGeom>
-          <a:noFill/>
-        </p:spPr>
-        <p:txBody>
-          <a:bodyPr wrap="square" lIns="0" rIns="0" tIns="0" bIns="0" anchor="t">
-            <a:spAutoFit/>
-          </a:bodyPr>
-          <a:lstStyle/>
-          <a:p>
-            <a:pPr algn="l">
-              <a:lnSpc>
-                <a:spcPct val="118000"/>
-              </a:lnSpc>
-            </a:pPr>
-            <a:r>
-              <a:rPr sz="2400" b="1" i="0">
-                <a:solidFill>
-                  <a:srgbClr val="A5335F"/>
-                </a:solidFill>
-                <a:latin typeface="Verdana"/>
-              </a:rPr>
-              <a:t>La classe</a:t>
-            </a:r>
-          </a:p>
-        </p:txBody>
-      </p:sp>
-      <p:sp>
-        <p:nvSpPr>
-          <p:cNvPr id="15" name="TextBox 14"/>
-          <p:cNvSpPr txBox="1"/>
-          <p:nvPr/>
-        </p:nvSpPr>
-        <p:spPr>
-          <a:xfrm>
-            <a:off x="886968" y="4716780"/>
-            <a:ext cx="4806543" cy="1089660"/>
-          </a:xfrm>
-          <a:prstGeom prst="rect">
-            <a:avLst/>
-          </a:prstGeom>
-          <a:noFill/>
-        </p:spPr>
-        <p:txBody>
-          <a:bodyPr wrap="square" lIns="0" rIns="0" tIns="0" bIns="0" anchor="t">
-            <a:spAutoFit/>
-          </a:bodyPr>
-          <a:lstStyle/>
-          <a:p>
-            <a:pPr algn="l">
-              <a:lnSpc>
-                <a:spcPct val="142000"/>
-              </a:lnSpc>
-            </a:pPr>
-            <a:r>
-              <a:rPr sz="1800" b="0" i="0">
-                <a:solidFill>
-                  <a:srgbClr val="3A3D40"/>
-                </a:solidFill>
-                <a:latin typeface="Verdana"/>
-              </a:rPr>
-              <a:t>Le jeu de rôle a une moitié qui se joue à deux, en salle. Elle ne disparaît pas quand l'assistant est fermé.</a:t>
-            </a:r>
-          </a:p>
-        </p:txBody>
-      </p:sp>
-      <p:sp>
-        <p:nvSpPr>
-          <p:cNvPr id="16" name="Rounded Rectangle 15"/>
-          <p:cNvSpPr/>
-          <p:nvPr/>
-        </p:nvSpPr>
-        <p:spPr>
-          <a:xfrm>
-            <a:off x="6178143" y="4027932"/>
-            <a:ext cx="5446623" cy="2052828"/>
-          </a:xfrm>
-          <a:prstGeom prst="roundRect">
-            <a:avLst>
-              <a:gd name="adj" fmla="val 7126"/>
-            </a:avLst>
-          </a:prstGeom>
-          <a:solidFill>
-            <a:srgbClr val="FFFFFF"/>
-          </a:solidFill>
-          <a:ln w="12700">
-            <a:solidFill>
-              <a:srgbClr val="EAEAE8"/>
-            </a:solidFill>
-          </a:ln>
-          <a:effectLst/>
-        </p:spPr>
-        <p:style>
-          <a:lnRef idx="1">
-            <a:schemeClr val="accent1"/>
-          </a:lnRef>
-          <a:fillRef idx="3">
-            <a:schemeClr val="accent1"/>
-          </a:fillRef>
-          <a:effectRef idx="2">
-            <a:schemeClr val="accent1"/>
-          </a:effectRef>
-          <a:fontRef idx="minor">
-            <a:schemeClr val="lt1"/>
-          </a:fontRef>
-        </p:style>
-        <p:txBody>
-          <a:bodyPr rtlCol="0" anchor="ctr"/>
-          <a:lstStyle/>
-          <a:p/>
-        </p:txBody>
-      </p:sp>
-      <p:sp>
-        <p:nvSpPr>
-          <p:cNvPr id="17" name="TextBox 16"/>
-          <p:cNvSpPr txBox="1"/>
-          <p:nvPr/>
-        </p:nvSpPr>
-        <p:spPr>
-          <a:xfrm>
-            <a:off x="6498183" y="4302252"/>
-            <a:ext cx="4806543" cy="387096"/>
-          </a:xfrm>
-          <a:prstGeom prst="rect">
-            <a:avLst/>
-          </a:prstGeom>
-          <a:noFill/>
-        </p:spPr>
-        <p:txBody>
-          <a:bodyPr wrap="square" lIns="0" rIns="0" tIns="0" bIns="0" anchor="t">
-            <a:spAutoFit/>
-          </a:bodyPr>
-          <a:lstStyle/>
-          <a:p>
-            <a:pPr algn="l">
-              <a:lnSpc>
-                <a:spcPct val="118000"/>
-              </a:lnSpc>
-            </a:pPr>
-            <a:r>
-              <a:rPr sz="2400" b="1" i="0">
-                <a:solidFill>
-                  <a:srgbClr val="A5335F"/>
-                </a:solidFill>
-                <a:latin typeface="Verdana"/>
-              </a:rPr>
-              <a:t>Le droit de refuser</a:t>
-            </a:r>
-          </a:p>
-        </p:txBody>
-      </p:sp>
-      <p:sp>
-        <p:nvSpPr>
-          <p:cNvPr id="18" name="TextBox 17"/>
-          <p:cNvSpPr txBox="1"/>
-          <p:nvPr/>
-        </p:nvSpPr>
-        <p:spPr>
-          <a:xfrm>
-            <a:off x="6498183" y="4716780"/>
-            <a:ext cx="4806543" cy="1089660"/>
-          </a:xfrm>
-          <a:prstGeom prst="rect">
-            <a:avLst/>
-          </a:prstGeom>
-          <a:noFill/>
-        </p:spPr>
-        <p:txBody>
-          <a:bodyPr wrap="square" lIns="0" rIns="0" tIns="0" bIns="0" anchor="t">
-            <a:spAutoFit/>
-          </a:bodyPr>
-          <a:lstStyle/>
-          <a:p>
-            <a:pPr algn="l">
-              <a:lnSpc>
-                <a:spcPct val="142000"/>
-              </a:lnSpc>
-            </a:pPr>
-            <a:r>
-              <a:rPr sz="1800" b="0" i="0">
-                <a:solidFill>
-                  <a:srgbClr val="3A3D40"/>
-                </a:solidFill>
-                <a:latin typeface="Verdana"/>
-              </a:rPr>
-              <a:t>Un centre peut fermer l'assistant. Les 87 modules se replient : ce qui reste est un cours, pas une démo cassée.</a:t>
+                <a:spcPct val="145000"/>
+              </a:lnSpc>
+            </a:pPr>
+            <a:r>
+              <a:rPr sz="2000" b="0" i="0">
+                <a:solidFill>
+                  <a:srgbClr val="4B4F52"/>
+                </a:solidFill>
+                <a:latin typeface="Verdana"/>
+              </a:rPr>
+              <a:t>La section « Je retiens des mots » d'un module n'enregistre rien : elle fait travailler. C'est l'atelier de cartes mémoire, en répétition espacée, qui fait monter un mot d'une boîte à l'autre — et l'élève y **écrit** le mot, il ne le reconnaît pas dans une liste.</a:t>
             </a:r>
           </a:p>
         </p:txBody>
@@ -7971,7 +7939,212 @@
       </p:sp>
       <p:sp>
         <p:nvSpPr>
-          <p:cNvPr id="5" name="Rectangle 4"/>
+          <p:cNvPr id="5" name="TextBox 4"/>
+          <p:cNvSpPr txBox="1"/>
+          <p:nvPr/>
+        </p:nvSpPr>
+        <p:spPr>
+          <a:xfrm>
+            <a:off x="566928" y="420624"/>
+            <a:ext cx="11057839" cy="237744"/>
+          </a:xfrm>
+          <a:prstGeom prst="rect">
+            <a:avLst/>
+          </a:prstGeom>
+          <a:noFill/>
+        </p:spPr>
+        <p:txBody>
+          <a:bodyPr wrap="square" lIns="0" rIns="0" tIns="0" bIns="0" anchor="t">
+            <a:spAutoFit/>
+          </a:bodyPr>
+          <a:lstStyle/>
+          <a:p>
+            <a:pPr algn="l">
+              <a:lnSpc>
+                <a:spcPct val="135000"/>
+              </a:lnSpc>
+            </a:pPr>
+            <a:r>
+              <a:rPr sz="1300" b="1" i="0" spc="156">
+                <a:solidFill>
+                  <a:srgbClr val="A5335F"/>
+                </a:solidFill>
+                <a:latin typeface="Verdana"/>
+              </a:rPr>
+              <a:t>UNE SEULE PORTE D'ENTRÉE</a:t>
+            </a:r>
+          </a:p>
+        </p:txBody>
+      </p:sp>
+      <p:sp>
+        <p:nvSpPr>
+          <p:cNvPr id="6" name="TextBox 5"/>
+          <p:cNvSpPr txBox="1"/>
+          <p:nvPr/>
+        </p:nvSpPr>
+        <p:spPr>
+          <a:xfrm>
+            <a:off x="566928" y="749808"/>
+            <a:ext cx="11057839" cy="877824"/>
+          </a:xfrm>
+          <a:prstGeom prst="rect">
+            <a:avLst/>
+          </a:prstGeom>
+          <a:noFill/>
+        </p:spPr>
+        <p:txBody>
+          <a:bodyPr wrap="square" lIns="0" rIns="0" tIns="0" bIns="0" anchor="t">
+            <a:spAutoFit/>
+          </a:bodyPr>
+          <a:lstStyle/>
+          <a:p>
+            <a:pPr algn="l">
+              <a:lnSpc>
+                <a:spcPct val="115000"/>
+              </a:lnSpc>
+            </a:pPr>
+            <a:r>
+              <a:rPr sz="3400" b="1" i="0">
+                <a:solidFill>
+                  <a:srgbClr val="17181A"/>
+                </a:solidFill>
+                <a:latin typeface="Verdana"/>
+              </a:rPr>
+              <a:t>Les cartes mémoire</a:t>
+            </a:r>
+          </a:p>
+        </p:txBody>
+      </p:sp>
+      <p:sp>
+        <p:nvSpPr>
+          <p:cNvPr id="7" name="TextBox 6"/>
+          <p:cNvSpPr txBox="1"/>
+          <p:nvPr/>
+        </p:nvSpPr>
+        <p:spPr>
+          <a:xfrm>
+            <a:off x="566928" y="1645920"/>
+            <a:ext cx="11057839" cy="617220"/>
+          </a:xfrm>
+          <a:prstGeom prst="rect">
+            <a:avLst/>
+          </a:prstGeom>
+          <a:noFill/>
+        </p:spPr>
+        <p:txBody>
+          <a:bodyPr wrap="square" lIns="0" rIns="0" tIns="0" bIns="0" anchor="t">
+            <a:spAutoFit/>
+          </a:bodyPr>
+          <a:lstStyle/>
+          <a:p>
+            <a:pPr algn="l">
+              <a:lnSpc>
+                <a:spcPct val="135000"/>
+              </a:lnSpc>
+            </a:pPr>
+            <a:r>
+              <a:rPr sz="1800" b="0" i="0">
+                <a:solidFill>
+                  <a:srgbClr val="6E7175"/>
+                </a:solidFill>
+                <a:latin typeface="Verdana"/>
+              </a:rPr>
+              <a:t>L'élève écrit le mot à partir de sa définition — il ne le reconnaît pas dans une liste. Sept boîtes, en répétition espacée.</a:t>
+            </a:r>
+          </a:p>
+        </p:txBody>
+      </p:sp>
+      <p:sp>
+        <p:nvSpPr>
+          <p:cNvPr id="8" name="Rounded Rectangle 7"/>
+          <p:cNvSpPr/>
+          <p:nvPr/>
+        </p:nvSpPr>
+        <p:spPr>
+          <a:xfrm>
+            <a:off x="5209231" y="2372868"/>
+            <a:ext cx="1773232" cy="3799332"/>
+          </a:xfrm>
+          <a:prstGeom prst="roundRect">
+            <a:avLst>
+              <a:gd name="adj" fmla="val 5156"/>
+            </a:avLst>
+          </a:prstGeom>
+          <a:solidFill>
+            <a:srgbClr val="FFFFFF"/>
+          </a:solidFill>
+          <a:ln w="12700">
+            <a:solidFill>
+              <a:srgbClr val="D6D6D2"/>
+            </a:solidFill>
+          </a:ln>
+          <a:effectLst/>
+        </p:spPr>
+        <p:style>
+          <a:lnRef idx="1">
+            <a:schemeClr val="accent1"/>
+          </a:lnRef>
+          <a:fillRef idx="3">
+            <a:schemeClr val="accent1"/>
+          </a:fillRef>
+          <a:effectRef idx="2">
+            <a:schemeClr val="accent1"/>
+          </a:effectRef>
+          <a:fontRef idx="minor">
+            <a:schemeClr val="lt1"/>
+          </a:fontRef>
+        </p:style>
+        <p:txBody>
+          <a:bodyPr rtlCol="0" anchor="ctr"/>
+          <a:lstStyle/>
+          <a:p/>
+        </p:txBody>
+      </p:sp>
+      <p:pic>
+        <p:nvPicPr>
+          <p:cNvPr id="9" name="Picture 8" descr="tel-15-cartes-memoire.png"/>
+          <p:cNvPicPr>
+            <a:picLocks noChangeAspect="1"/>
+          </p:cNvPicPr>
+          <p:nvPr/>
+        </p:nvPicPr>
+        <p:blipFill>
+          <a:blip r:embed="rId2"/>
+          <a:stretch>
+            <a:fillRect/>
+          </a:stretch>
+        </p:blipFill>
+        <p:spPr>
+          <a:xfrm>
+            <a:off x="5227519" y="2391156"/>
+            <a:ext cx="1736656" cy="3762756"/>
+          </a:xfrm>
+          <a:prstGeom prst="rect">
+            <a:avLst/>
+          </a:prstGeom>
+        </p:spPr>
+      </p:pic>
+    </p:spTree>
+  </p:cSld>
+  <p:clrMapOvr>
+    <a:masterClrMapping/>
+  </p:clrMapOvr>
+</p:sld>
+</file>
+
+<file path=ppt/slides/slide17.xml><?xml version="1.0" encoding="utf-8"?>
+<p:sld xmlns:a="http://schemas.openxmlformats.org/drawingml/2006/main" xmlns:p="http://schemas.openxmlformats.org/presentationml/2006/main" xmlns:r="http://schemas.openxmlformats.org/officeDocument/2006/relationships">
+  <p:cSld>
+    <p:spTree>
+      <p:nvGrpSpPr>
+        <p:cNvPr id="1" name=""/>
+        <p:cNvGrpSpPr/>
+        <p:nvPr/>
+      </p:nvGrpSpPr>
+      <p:grpSpPr/>
+      <p:sp>
+        <p:nvSpPr>
+          <p:cNvPr id="2" name="Rectangle 1"/>
           <p:cNvSpPr/>
           <p:nvPr/>
         </p:nvSpPr>
@@ -7984,7 +8157,7 @@
             <a:avLst/>
           </a:prstGeom>
           <a:solidFill>
-            <a:srgbClr val="17181A"/>
+            <a:srgbClr val="F7F7F5"/>
           </a:solidFill>
           <a:ln>
             <a:noFill/>
@@ -8013,14 +8186,131 @@
       </p:sp>
       <p:sp>
         <p:nvSpPr>
+          <p:cNvPr id="3" name="TextBox 2"/>
+          <p:cNvSpPr txBox="1"/>
+          <p:nvPr/>
+        </p:nvSpPr>
+        <p:spPr>
+          <a:xfrm>
+            <a:off x="566928" y="6355080"/>
+            <a:ext cx="6400800" cy="219456"/>
+          </a:xfrm>
+          <a:prstGeom prst="rect">
+            <a:avLst/>
+          </a:prstGeom>
+          <a:noFill/>
+        </p:spPr>
+        <p:txBody>
+          <a:bodyPr wrap="square" lIns="0" rIns="0" tIns="0" bIns="0" anchor="t">
+            <a:spAutoFit/>
+          </a:bodyPr>
+          <a:lstStyle/>
+          <a:p>
+            <a:pPr algn="l">
+              <a:lnSpc>
+                <a:spcPct val="135000"/>
+              </a:lnSpc>
+            </a:pPr>
+            <a:r>
+              <a:rPr sz="1200" b="0" i="0">
+                <a:solidFill>
+                  <a:srgbClr val="6E7175"/>
+                </a:solidFill>
+                <a:latin typeface="Verdana"/>
+              </a:rPr>
+              <a:t>F1 · francis · présentation</a:t>
+            </a:r>
+          </a:p>
+        </p:txBody>
+      </p:sp>
+      <p:sp>
+        <p:nvSpPr>
+          <p:cNvPr id="4" name="TextBox 3"/>
+          <p:cNvSpPr txBox="1"/>
+          <p:nvPr/>
+        </p:nvSpPr>
+        <p:spPr>
+          <a:xfrm>
+            <a:off x="10710367" y="6355080"/>
+            <a:ext cx="914400" cy="219456"/>
+          </a:xfrm>
+          <a:prstGeom prst="rect">
+            <a:avLst/>
+          </a:prstGeom>
+          <a:noFill/>
+        </p:spPr>
+        <p:txBody>
+          <a:bodyPr wrap="square" lIns="0" rIns="0" tIns="0" bIns="0" anchor="t">
+            <a:spAutoFit/>
+          </a:bodyPr>
+          <a:lstStyle/>
+          <a:p>
+            <a:pPr algn="r">
+              <a:lnSpc>
+                <a:spcPct val="135000"/>
+              </a:lnSpc>
+            </a:pPr>
+            <a:r>
+              <a:rPr sz="1200" b="0" i="0">
+                <a:solidFill>
+                  <a:srgbClr val="6E7175"/>
+                </a:solidFill>
+                <a:latin typeface="Verdana"/>
+              </a:rPr>
+              <a:t>17</a:t>
+            </a:r>
+          </a:p>
+        </p:txBody>
+      </p:sp>
+      <p:sp>
+        <p:nvSpPr>
+          <p:cNvPr id="5" name="TextBox 4"/>
+          <p:cNvSpPr txBox="1"/>
+          <p:nvPr/>
+        </p:nvSpPr>
+        <p:spPr>
+          <a:xfrm>
+            <a:off x="566928" y="420624"/>
+            <a:ext cx="11057839" cy="237744"/>
+          </a:xfrm>
+          <a:prstGeom prst="rect">
+            <a:avLst/>
+          </a:prstGeom>
+          <a:noFill/>
+        </p:spPr>
+        <p:txBody>
+          <a:bodyPr wrap="square" lIns="0" rIns="0" tIns="0" bIns="0" anchor="t">
+            <a:spAutoFit/>
+          </a:bodyPr>
+          <a:lstStyle/>
+          <a:p>
+            <a:pPr algn="l">
+              <a:lnSpc>
+                <a:spcPct val="135000"/>
+              </a:lnSpc>
+            </a:pPr>
+            <a:r>
+              <a:rPr sz="1300" b="1" i="0" spc="156">
+                <a:solidFill>
+                  <a:srgbClr val="A5335F"/>
+                </a:solidFill>
+                <a:latin typeface="Verdana"/>
+              </a:rPr>
+              <a:t>LA QUESTION QUI VIENT TOUJOURS</a:t>
+            </a:r>
+          </a:p>
+        </p:txBody>
+      </p:sp>
+      <p:sp>
+        <p:nvSpPr>
           <p:cNvPr id="6" name="TextBox 5"/>
           <p:cNvSpPr txBox="1"/>
           <p:nvPr/>
         </p:nvSpPr>
         <p:spPr>
           <a:xfrm>
-            <a:off x="566928" y="1051560"/>
-            <a:ext cx="11057839" cy="274320"/>
+            <a:off x="566928" y="749808"/>
+            <a:ext cx="11057839" cy="877824"/>
           </a:xfrm>
           <a:prstGeom prst="rect">
             <a:avLst/>
@@ -8035,78 +8325,388 @@
           <a:p>
             <a:pPr algn="l">
               <a:lnSpc>
-                <a:spcPct val="135000"/>
-              </a:lnSpc>
-            </a:pPr>
-            <a:r>
-              <a:rPr sz="1300" b="1" i="0" spc="156">
-                <a:solidFill>
-                  <a:srgbClr val="FFFFFF"/>
-                </a:solidFill>
-                <a:latin typeface="Verdana"/>
-              </a:rPr>
-              <a:t>BILLET DE SORTIE</a:t>
-            </a:r>
-          </a:p>
-        </p:txBody>
-      </p:sp>
-      <p:sp>
-        <p:nvSpPr>
-          <p:cNvPr id="7" name="TextBox 6"/>
-          <p:cNvSpPr txBox="1"/>
-          <p:nvPr/>
-        </p:nvSpPr>
-        <p:spPr>
-          <a:xfrm>
-            <a:off x="566928" y="1572768"/>
-            <a:ext cx="9777679" cy="2103120"/>
-          </a:xfrm>
-          <a:prstGeom prst="rect">
-            <a:avLst/>
-          </a:prstGeom>
-          <a:noFill/>
-        </p:spPr>
-        <p:txBody>
-          <a:bodyPr wrap="square" lIns="0" rIns="0" tIns="0" bIns="0" anchor="t">
-            <a:spAutoFit/>
-          </a:bodyPr>
-          <a:lstStyle/>
-          <a:p>
-            <a:pPr algn="l">
-              <a:lnSpc>
-                <a:spcPct val="125000"/>
-              </a:lnSpc>
-            </a:pPr>
-            <a:r>
-              <a:rPr sz="3100" b="1" i="0">
-                <a:solidFill>
-                  <a:srgbClr val="FFFFFF"/>
-                </a:solidFill>
-                <a:latin typeface="Verdana"/>
-              </a:rPr>
-              <a:t>La question à laquelle tout ceci essaie de répondre : qu'est-ce qu'un adulte fait, seul, un mardi soir, quand il veut apprendre le français ?</a:t>
-            </a:r>
-          </a:p>
-        </p:txBody>
-      </p:sp>
-      <p:sp>
-        <p:nvSpPr>
-          <p:cNvPr id="8" name="Rounded Rectangle 7"/>
+                <a:spcPct val="115000"/>
+              </a:lnSpc>
+            </a:pPr>
+            <a:r>
+              <a:rPr sz="3400" b="1" i="0">
+                <a:solidFill>
+                  <a:srgbClr val="17181A"/>
+                </a:solidFill>
+                <a:latin typeface="Verdana"/>
+              </a:rPr>
+              <a:t>Le piège le plus fréquent</a:t>
+            </a:r>
+          </a:p>
+        </p:txBody>
+      </p:sp>
+      <p:sp>
+        <p:nvSpPr>
+          <p:cNvPr id="7" name="Rounded Rectangle 6"/>
           <p:cNvSpPr/>
           <p:nvPr/>
         </p:nvSpPr>
         <p:spPr>
           <a:xfrm>
-            <a:off x="566928" y="3931920"/>
-            <a:ext cx="11057839" cy="666496"/>
+            <a:off x="566928" y="1856232"/>
+            <a:ext cx="5428335" cy="2331720"/>
           </a:xfrm>
           <a:prstGeom prst="roundRect">
             <a:avLst>
-              <a:gd name="adj" fmla="val 13719"/>
+              <a:gd name="adj" fmla="val 6274"/>
             </a:avLst>
           </a:prstGeom>
           <a:solidFill>
-            <a:srgbClr val="2A2C2F"/>
+            <a:srgbClr val="FFF6F5"/>
+          </a:solidFill>
+          <a:ln w="12700">
+            <a:solidFill>
+              <a:srgbClr val="DC2626"/>
+            </a:solidFill>
+          </a:ln>
+          <a:effectLst/>
+        </p:spPr>
+        <p:style>
+          <a:lnRef idx="1">
+            <a:schemeClr val="accent1"/>
+          </a:lnRef>
+          <a:fillRef idx="3">
+            <a:schemeClr val="accent1"/>
+          </a:fillRef>
+          <a:effectRef idx="2">
+            <a:schemeClr val="accent1"/>
+          </a:effectRef>
+          <a:fontRef idx="minor">
+            <a:schemeClr val="lt1"/>
+          </a:fontRef>
+        </p:style>
+        <p:txBody>
+          <a:bodyPr rtlCol="0" anchor="ctr"/>
+          <a:lstStyle/>
+          <a:p/>
+        </p:txBody>
+      </p:sp>
+      <p:sp>
+        <p:nvSpPr>
+          <p:cNvPr id="8" name="TextBox 7"/>
+          <p:cNvSpPr txBox="1"/>
+          <p:nvPr/>
+        </p:nvSpPr>
+        <p:spPr>
+          <a:xfrm>
+            <a:off x="932688" y="2130552"/>
+            <a:ext cx="4696815" cy="274320"/>
+          </a:xfrm>
+          <a:prstGeom prst="rect">
+            <a:avLst/>
+          </a:prstGeom>
+          <a:noFill/>
+        </p:spPr>
+        <p:txBody>
+          <a:bodyPr wrap="square" lIns="0" rIns="0" tIns="0" bIns="0" anchor="t">
+            <a:spAutoFit/>
+          </a:bodyPr>
+          <a:lstStyle/>
+          <a:p>
+            <a:pPr algn="l">
+              <a:lnSpc>
+                <a:spcPct val="135000"/>
+              </a:lnSpc>
+            </a:pPr>
+            <a:r>
+              <a:rPr sz="1300" b="1" i="0" spc="156">
+                <a:solidFill>
+                  <a:srgbClr val="B91C1C"/>
+                </a:solidFill>
+                <a:latin typeface="Verdana"/>
+              </a:rPr>
+              <a:t>ON ENTEND SOUVENT</a:t>
+            </a:r>
+          </a:p>
+        </p:txBody>
+      </p:sp>
+      <p:sp>
+        <p:nvSpPr>
+          <p:cNvPr id="9" name="TextBox 8"/>
+          <p:cNvSpPr txBox="1"/>
+          <p:nvPr/>
+        </p:nvSpPr>
+        <p:spPr>
+          <a:xfrm>
+            <a:off x="932688" y="2569464"/>
+            <a:ext cx="4696815" cy="1417320"/>
+          </a:xfrm>
+          <a:prstGeom prst="rect">
+            <a:avLst/>
+          </a:prstGeom>
+          <a:noFill/>
+        </p:spPr>
+        <p:txBody>
+          <a:bodyPr wrap="square" lIns="0" rIns="0" tIns="0" bIns="0" anchor="t">
+            <a:spAutoFit/>
+          </a:bodyPr>
+          <a:lstStyle/>
+          <a:p>
+            <a:pPr algn="l">
+              <a:lnSpc>
+                <a:spcPct val="130000"/>
+              </a:lnSpc>
+            </a:pPr>
+            <a:r>
+              <a:rPr sz="2500" b="1" i="0">
+                <a:solidFill>
+                  <a:srgbClr val="17181A"/>
+                </a:solidFill>
+                <a:latin typeface="Verdana"/>
+              </a:rPr>
+              <a:t>« Votre assistant va faire les exercices à leur place. »</a:t>
+            </a:r>
+          </a:p>
+        </p:txBody>
+      </p:sp>
+      <p:sp>
+        <p:nvSpPr>
+          <p:cNvPr id="10" name="Rounded Rectangle 9"/>
+          <p:cNvSpPr/>
+          <p:nvPr/>
+        </p:nvSpPr>
+        <p:spPr>
+          <a:xfrm>
+            <a:off x="6196431" y="1856232"/>
+            <a:ext cx="5428335" cy="2331720"/>
+          </a:xfrm>
+          <a:prstGeom prst="roundRect">
+            <a:avLst>
+              <a:gd name="adj" fmla="val 6274"/>
+            </a:avLst>
+          </a:prstGeom>
+          <a:solidFill>
+            <a:srgbClr val="E6F5EE"/>
+          </a:solidFill>
+          <a:ln w="12700">
+            <a:solidFill>
+              <a:srgbClr val="0A8F5B"/>
+            </a:solidFill>
+          </a:ln>
+          <a:effectLst/>
+        </p:spPr>
+        <p:style>
+          <a:lnRef idx="1">
+            <a:schemeClr val="accent1"/>
+          </a:lnRef>
+          <a:fillRef idx="3">
+            <a:schemeClr val="accent1"/>
+          </a:fillRef>
+          <a:effectRef idx="2">
+            <a:schemeClr val="accent1"/>
+          </a:effectRef>
+          <a:fontRef idx="minor">
+            <a:schemeClr val="lt1"/>
+          </a:fontRef>
+        </p:style>
+        <p:txBody>
+          <a:bodyPr rtlCol="0" anchor="ctr"/>
+          <a:lstStyle/>
+          <a:p/>
+        </p:txBody>
+      </p:sp>
+      <p:sp>
+        <p:nvSpPr>
+          <p:cNvPr id="11" name="TextBox 10"/>
+          <p:cNvSpPr txBox="1"/>
+          <p:nvPr/>
+        </p:nvSpPr>
+        <p:spPr>
+          <a:xfrm>
+            <a:off x="6562191" y="2130552"/>
+            <a:ext cx="4696815" cy="274320"/>
+          </a:xfrm>
+          <a:prstGeom prst="rect">
+            <a:avLst/>
+          </a:prstGeom>
+          <a:noFill/>
+        </p:spPr>
+        <p:txBody>
+          <a:bodyPr wrap="square" lIns="0" rIns="0" tIns="0" bIns="0" anchor="t">
+            <a:spAutoFit/>
+          </a:bodyPr>
+          <a:lstStyle/>
+          <a:p>
+            <a:pPr algn="l">
+              <a:lnSpc>
+                <a:spcPct val="135000"/>
+              </a:lnSpc>
+            </a:pPr>
+            <a:r>
+              <a:rPr sz="1300" b="1" i="0" spc="156">
+                <a:solidFill>
+                  <a:srgbClr val="07734A"/>
+                </a:solidFill>
+                <a:latin typeface="Verdana"/>
+              </a:rPr>
+              <a:t>IL FAUT DIRE PLUTÔT</a:t>
+            </a:r>
+          </a:p>
+        </p:txBody>
+      </p:sp>
+      <p:sp>
+        <p:nvSpPr>
+          <p:cNvPr id="12" name="TextBox 11"/>
+          <p:cNvSpPr txBox="1"/>
+          <p:nvPr/>
+        </p:nvSpPr>
+        <p:spPr>
+          <a:xfrm>
+            <a:off x="6562191" y="2569464"/>
+            <a:ext cx="4696815" cy="1417320"/>
+          </a:xfrm>
+          <a:prstGeom prst="rect">
+            <a:avLst/>
+          </a:prstGeom>
+          <a:noFill/>
+        </p:spPr>
+        <p:txBody>
+          <a:bodyPr wrap="square" lIns="0" rIns="0" tIns="0" bIns="0" anchor="t">
+            <a:spAutoFit/>
+          </a:bodyPr>
+          <a:lstStyle/>
+          <a:p>
+            <a:pPr algn="l">
+              <a:lnSpc>
+                <a:spcPct val="130000"/>
+              </a:lnSpc>
+            </a:pPr>
+            <a:r>
+              <a:rPr sz="2500" b="1" i="0">
+                <a:solidFill>
+                  <a:srgbClr val="17181A"/>
+                </a:solidFill>
+                <a:latin typeface="Verdana"/>
+              </a:rPr>
+              <a:t>« Il a interdiction de donner une réponse. »</a:t>
+            </a:r>
+          </a:p>
+        </p:txBody>
+      </p:sp>
+      <p:sp>
+        <p:nvSpPr>
+          <p:cNvPr id="13" name="Rounded Rectangle 12"/>
+          <p:cNvSpPr/>
+          <p:nvPr/>
+        </p:nvSpPr>
+        <p:spPr>
+          <a:xfrm>
+            <a:off x="566928" y="4462272"/>
+            <a:ext cx="11057839" cy="1618487"/>
+          </a:xfrm>
+          <a:prstGeom prst="roundRect">
+            <a:avLst>
+              <a:gd name="adj" fmla="val 9039"/>
+            </a:avLst>
+          </a:prstGeom>
+          <a:solidFill>
+            <a:srgbClr val="FFFFFF"/>
+          </a:solidFill>
+          <a:ln w="12700">
+            <a:solidFill>
+              <a:srgbClr val="EAEAE8"/>
+            </a:solidFill>
+          </a:ln>
+          <a:effectLst/>
+        </p:spPr>
+        <p:style>
+          <a:lnRef idx="1">
+            <a:schemeClr val="accent1"/>
+          </a:lnRef>
+          <a:fillRef idx="3">
+            <a:schemeClr val="accent1"/>
+          </a:fillRef>
+          <a:effectRef idx="2">
+            <a:schemeClr val="accent1"/>
+          </a:effectRef>
+          <a:fontRef idx="minor">
+            <a:schemeClr val="lt1"/>
+          </a:fontRef>
+        </p:style>
+        <p:txBody>
+          <a:bodyPr rtlCol="0" anchor="ctr"/>
+          <a:lstStyle/>
+          <a:p/>
+        </p:txBody>
+      </p:sp>
+      <p:sp>
+        <p:nvSpPr>
+          <p:cNvPr id="14" name="TextBox 13"/>
+          <p:cNvSpPr txBox="1"/>
+          <p:nvPr/>
+        </p:nvSpPr>
+        <p:spPr>
+          <a:xfrm>
+            <a:off x="969264" y="4736592"/>
+            <a:ext cx="10234879" cy="1150620"/>
+          </a:xfrm>
+          <a:prstGeom prst="rect">
+            <a:avLst/>
+          </a:prstGeom>
+          <a:noFill/>
+        </p:spPr>
+        <p:txBody>
+          <a:bodyPr wrap="square" lIns="0" rIns="0" tIns="0" bIns="0" anchor="t">
+            <a:spAutoFit/>
+          </a:bodyPr>
+          <a:lstStyle/>
+          <a:p>
+            <a:pPr algn="l">
+              <a:lnSpc>
+                <a:spcPct val="145000"/>
+              </a:lnSpc>
+            </a:pPr>
+            <a:r>
+              <a:rPr sz="2000" b="0" i="0">
+                <a:solidFill>
+                  <a:srgbClr val="4B4F52"/>
+                </a:solidFill>
+                <a:latin typeface="Verdana"/>
+              </a:rPr>
+              <a:t>Il cite la phrase du dialogue où se trouve l'information, puis repose une question plus facile. La traduction s'ajoute sous le français et ne le remplace jamais ; « simplifier » reformule en français, il ne traduit pas.</a:t>
+            </a:r>
+          </a:p>
+        </p:txBody>
+      </p:sp>
+    </p:spTree>
+  </p:cSld>
+  <p:clrMapOvr>
+    <a:masterClrMapping/>
+  </p:clrMapOvr>
+</p:sld>
+</file>
+
+<file path=ppt/slides/slide18.xml><?xml version="1.0" encoding="utf-8"?>
+<p:sld xmlns:a="http://schemas.openxmlformats.org/drawingml/2006/main" xmlns:p="http://schemas.openxmlformats.org/presentationml/2006/main" xmlns:r="http://schemas.openxmlformats.org/officeDocument/2006/relationships">
+  <p:cSld>
+    <p:spTree>
+      <p:nvGrpSpPr>
+        <p:cNvPr id="1" name=""/>
+        <p:cNvGrpSpPr/>
+        <p:nvPr/>
+      </p:nvGrpSpPr>
+      <p:grpSpPr/>
+      <p:sp>
+        <p:nvSpPr>
+          <p:cNvPr id="2" name="Rectangle 1"/>
+          <p:cNvSpPr/>
+          <p:nvPr/>
+        </p:nvSpPr>
+        <p:spPr>
+          <a:xfrm>
+            <a:off x="0" y="0"/>
+            <a:ext cx="12191695" cy="6858000"/>
+          </a:xfrm>
+          <a:prstGeom prst="rect">
+            <a:avLst/>
+          </a:prstGeom>
+          <a:solidFill>
+            <a:srgbClr val="F7F7F5"/>
           </a:solidFill>
           <a:ln>
             <a:noFill/>
@@ -8135,14 +8735,14 @@
       </p:sp>
       <p:sp>
         <p:nvSpPr>
-          <p:cNvPr id="9" name="TextBox 8"/>
-          <p:cNvSpPr txBox="1"/>
-          <p:nvPr/>
-        </p:nvSpPr>
-        <p:spPr>
-          <a:xfrm>
-            <a:off x="932688" y="4087368"/>
-            <a:ext cx="10051999" cy="392176"/>
+          <p:cNvPr id="3" name="TextBox 2"/>
+          <p:cNvSpPr txBox="1"/>
+          <p:nvPr/>
+        </p:nvSpPr>
+        <p:spPr>
+          <a:xfrm>
+            <a:off x="566928" y="6355080"/>
+            <a:ext cx="6400800" cy="219456"/>
           </a:xfrm>
           <a:prstGeom prst="rect">
             <a:avLst/>
@@ -8157,39 +8757,303 @@
           <a:p>
             <a:pPr algn="l">
               <a:lnSpc>
-                <a:spcPct val="140000"/>
-              </a:lnSpc>
-            </a:pPr>
-            <a:r>
-              <a:rPr sz="2000" b="0" i="0">
-                <a:solidFill>
-                  <a:srgbClr val="FFFFFF"/>
-                </a:solidFill>
-                <a:latin typeface="Verdana"/>
-              </a:rPr>
-              <a:t>Il écoute. Il se trompe. Il recommence sans témoin.</a:t>
-            </a:r>
-          </a:p>
-        </p:txBody>
-      </p:sp>
-      <p:sp>
-        <p:nvSpPr>
-          <p:cNvPr id="10" name="Rounded Rectangle 9"/>
+                <a:spcPct val="135000"/>
+              </a:lnSpc>
+            </a:pPr>
+            <a:r>
+              <a:rPr sz="1200" b="0" i="0">
+                <a:solidFill>
+                  <a:srgbClr val="6E7175"/>
+                </a:solidFill>
+                <a:latin typeface="Verdana"/>
+              </a:rPr>
+              <a:t>F1 · francis · présentation</a:t>
+            </a:r>
+          </a:p>
+        </p:txBody>
+      </p:sp>
+      <p:sp>
+        <p:nvSpPr>
+          <p:cNvPr id="4" name="TextBox 3"/>
+          <p:cNvSpPr txBox="1"/>
+          <p:nvPr/>
+        </p:nvSpPr>
+        <p:spPr>
+          <a:xfrm>
+            <a:off x="10710367" y="6355080"/>
+            <a:ext cx="914400" cy="219456"/>
+          </a:xfrm>
+          <a:prstGeom prst="rect">
+            <a:avLst/>
+          </a:prstGeom>
+          <a:noFill/>
+        </p:spPr>
+        <p:txBody>
+          <a:bodyPr wrap="square" lIns="0" rIns="0" tIns="0" bIns="0" anchor="t">
+            <a:spAutoFit/>
+          </a:bodyPr>
+          <a:lstStyle/>
+          <a:p>
+            <a:pPr algn="r">
+              <a:lnSpc>
+                <a:spcPct val="135000"/>
+              </a:lnSpc>
+            </a:pPr>
+            <a:r>
+              <a:rPr sz="1200" b="0" i="0">
+                <a:solidFill>
+                  <a:srgbClr val="6E7175"/>
+                </a:solidFill>
+                <a:latin typeface="Verdana"/>
+              </a:rPr>
+              <a:t>18</a:t>
+            </a:r>
+          </a:p>
+        </p:txBody>
+      </p:sp>
+      <p:sp>
+        <p:nvSpPr>
+          <p:cNvPr id="5" name="TextBox 4"/>
+          <p:cNvSpPr txBox="1"/>
+          <p:nvPr/>
+        </p:nvSpPr>
+        <p:spPr>
+          <a:xfrm>
+            <a:off x="566928" y="420624"/>
+            <a:ext cx="11057839" cy="237744"/>
+          </a:xfrm>
+          <a:prstGeom prst="rect">
+            <a:avLst/>
+          </a:prstGeom>
+          <a:noFill/>
+        </p:spPr>
+        <p:txBody>
+          <a:bodyPr wrap="square" lIns="0" rIns="0" tIns="0" bIns="0" anchor="t">
+            <a:spAutoFit/>
+          </a:bodyPr>
+          <a:lstStyle/>
+          <a:p>
+            <a:pPr algn="l">
+              <a:lnSpc>
+                <a:spcPct val="135000"/>
+              </a:lnSpc>
+            </a:pPr>
+            <a:r>
+              <a:rPr sz="1300" b="1" i="0" spc="156">
+                <a:solidFill>
+                  <a:srgbClr val="A5335F"/>
+                </a:solidFill>
+                <a:latin typeface="Verdana"/>
+              </a:rPr>
+              <a:t>QUI DÉCIDE</a:t>
+            </a:r>
+          </a:p>
+        </p:txBody>
+      </p:sp>
+      <p:sp>
+        <p:nvSpPr>
+          <p:cNvPr id="6" name="Rounded Rectangle 5"/>
           <p:cNvSpPr/>
           <p:nvPr/>
         </p:nvSpPr>
         <p:spPr>
           <a:xfrm>
-            <a:off x="566928" y="4680712"/>
-            <a:ext cx="11057839" cy="666496"/>
+            <a:off x="566928" y="1225296"/>
+            <a:ext cx="11057839" cy="1967991"/>
           </a:xfrm>
           <a:prstGeom prst="roundRect">
             <a:avLst>
-              <a:gd name="adj" fmla="val 13719"/>
+              <a:gd name="adj" fmla="val 7434"/>
             </a:avLst>
           </a:prstGeom>
           <a:solidFill>
-            <a:srgbClr val="2A2C2F"/>
+            <a:srgbClr val="FCE9F0"/>
+          </a:solidFill>
+          <a:ln w="12700">
+            <a:solidFill>
+              <a:srgbClr val="EAEAE8"/>
+            </a:solidFill>
+          </a:ln>
+          <a:effectLst/>
+        </p:spPr>
+        <p:style>
+          <a:lnRef idx="1">
+            <a:schemeClr val="accent1"/>
+          </a:lnRef>
+          <a:fillRef idx="3">
+            <a:schemeClr val="accent1"/>
+          </a:fillRef>
+          <a:effectRef idx="2">
+            <a:schemeClr val="accent1"/>
+          </a:effectRef>
+          <a:fontRef idx="minor">
+            <a:schemeClr val="lt1"/>
+          </a:fontRef>
+        </p:style>
+        <p:txBody>
+          <a:bodyPr rtlCol="0" anchor="ctr"/>
+          <a:lstStyle/>
+          <a:p/>
+        </p:txBody>
+      </p:sp>
+      <p:sp>
+        <p:nvSpPr>
+          <p:cNvPr id="7" name="TextBox 6"/>
+          <p:cNvSpPr txBox="1"/>
+          <p:nvPr/>
+        </p:nvSpPr>
+        <p:spPr>
+          <a:xfrm>
+            <a:off x="1298448" y="1682496"/>
+            <a:ext cx="9594799" cy="1145032"/>
+          </a:xfrm>
+          <a:prstGeom prst="rect">
+            <a:avLst/>
+          </a:prstGeom>
+          <a:noFill/>
+        </p:spPr>
+        <p:txBody>
+          <a:bodyPr wrap="square" lIns="0" rIns="0" tIns="0" bIns="0" anchor="t">
+            <a:spAutoFit/>
+          </a:bodyPr>
+          <a:lstStyle/>
+          <a:p>
+            <a:pPr algn="l">
+              <a:lnSpc>
+                <a:spcPct val="122000"/>
+              </a:lnSpc>
+            </a:pPr>
+            <a:r>
+              <a:rPr sz="3400" b="1" i="0">
+                <a:solidFill>
+                  <a:srgbClr val="17181A"/>
+                </a:solidFill>
+                <a:latin typeface="Verdana"/>
+              </a:rPr>
+              <a:t>Aucun parcours n'est suggéré automatiquement à un élève.</a:t>
+            </a:r>
+          </a:p>
+        </p:txBody>
+      </p:sp>
+      <p:sp>
+        <p:nvSpPr>
+          <p:cNvPr id="8" name="Rounded Rectangle 7"/>
+          <p:cNvSpPr/>
+          <p:nvPr/>
+        </p:nvSpPr>
+        <p:spPr>
+          <a:xfrm>
+            <a:off x="566928" y="3467607"/>
+            <a:ext cx="11057839" cy="1671827"/>
+          </a:xfrm>
+          <a:prstGeom prst="roundRect">
+            <a:avLst>
+              <a:gd name="adj" fmla="val 8751"/>
+            </a:avLst>
+          </a:prstGeom>
+          <a:solidFill>
+            <a:srgbClr val="FFFFFF"/>
+          </a:solidFill>
+          <a:ln w="12700">
+            <a:solidFill>
+              <a:srgbClr val="EAEAE8"/>
+            </a:solidFill>
+          </a:ln>
+          <a:effectLst/>
+        </p:spPr>
+        <p:style>
+          <a:lnRef idx="1">
+            <a:schemeClr val="accent1"/>
+          </a:lnRef>
+          <a:fillRef idx="3">
+            <a:schemeClr val="accent1"/>
+          </a:fillRef>
+          <a:effectRef idx="2">
+            <a:schemeClr val="accent1"/>
+          </a:effectRef>
+          <a:fontRef idx="minor">
+            <a:schemeClr val="lt1"/>
+          </a:fontRef>
+        </p:style>
+        <p:txBody>
+          <a:bodyPr rtlCol="0" anchor="ctr"/>
+          <a:lstStyle/>
+          <a:p/>
+        </p:txBody>
+      </p:sp>
+      <p:sp>
+        <p:nvSpPr>
+          <p:cNvPr id="9" name="TextBox 8"/>
+          <p:cNvSpPr txBox="1"/>
+          <p:nvPr/>
+        </p:nvSpPr>
+        <p:spPr>
+          <a:xfrm>
+            <a:off x="969264" y="3741927"/>
+            <a:ext cx="10234879" cy="1214627"/>
+          </a:xfrm>
+          <a:prstGeom prst="rect">
+            <a:avLst/>
+          </a:prstGeom>
+          <a:noFill/>
+        </p:spPr>
+        <p:txBody>
+          <a:bodyPr wrap="square" lIns="0" rIns="0" tIns="0" bIns="0" anchor="t">
+            <a:spAutoFit/>
+          </a:bodyPr>
+          <a:lstStyle/>
+          <a:p>
+            <a:pPr algn="l">
+              <a:lnSpc>
+                <a:spcPct val="145000"/>
+              </a:lnSpc>
+            </a:pPr>
+            <a:r>
+              <a:rPr sz="2000" b="0" i="0">
+                <a:solidFill>
+                  <a:srgbClr val="4B4F52"/>
+                </a:solidFill>
+                <a:latin typeface="Verdana"/>
+              </a:rPr>
+              <a:t>Le portail dit ce qu'un élève a fait et où il s'est trompé. Il ne conclut rien et ne propose rien. C'est l'enseignant qui envoie une mini-leçon de dix minutes à qui en a besoin — un choix, pas une étape transitoire vers l'automatisation.</a:t>
+            </a:r>
+          </a:p>
+        </p:txBody>
+      </p:sp>
+    </p:spTree>
+  </p:cSld>
+  <p:clrMapOvr>
+    <a:masterClrMapping/>
+  </p:clrMapOvr>
+</p:sld>
+</file>
+
+<file path=ppt/slides/slide19.xml><?xml version="1.0" encoding="utf-8"?>
+<p:sld xmlns:a="http://schemas.openxmlformats.org/drawingml/2006/main" xmlns:p="http://schemas.openxmlformats.org/presentationml/2006/main" xmlns:r="http://schemas.openxmlformats.org/officeDocument/2006/relationships">
+  <p:cSld>
+    <p:spTree>
+      <p:nvGrpSpPr>
+        <p:cNvPr id="1" name=""/>
+        <p:cNvGrpSpPr/>
+        <p:nvPr/>
+      </p:nvGrpSpPr>
+      <p:grpSpPr/>
+      <p:sp>
+        <p:nvSpPr>
+          <p:cNvPr id="2" name="Rectangle 1"/>
+          <p:cNvSpPr/>
+          <p:nvPr/>
+        </p:nvSpPr>
+        <p:spPr>
+          <a:xfrm>
+            <a:off x="0" y="0"/>
+            <a:ext cx="12191695" cy="6858000"/>
+          </a:xfrm>
+          <a:prstGeom prst="rect">
+            <a:avLst/>
+          </a:prstGeom>
+          <a:solidFill>
+            <a:srgbClr val="F7F7F5"/>
           </a:solidFill>
           <a:ln>
             <a:noFill/>
@@ -8218,46 +9082,7 @@
       </p:sp>
       <p:sp>
         <p:nvSpPr>
-          <p:cNvPr id="11" name="TextBox 10"/>
-          <p:cNvSpPr txBox="1"/>
-          <p:nvPr/>
-        </p:nvSpPr>
-        <p:spPr>
-          <a:xfrm>
-            <a:off x="932688" y="4836160"/>
-            <a:ext cx="10051999" cy="392176"/>
-          </a:xfrm>
-          <a:prstGeom prst="rect">
-            <a:avLst/>
-          </a:prstGeom>
-          <a:noFill/>
-        </p:spPr>
-        <p:txBody>
-          <a:bodyPr wrap="square" lIns="0" rIns="0" tIns="0" bIns="0" anchor="t">
-            <a:spAutoFit/>
-          </a:bodyPr>
-          <a:lstStyle/>
-          <a:p>
-            <a:pPr algn="l">
-              <a:lnSpc>
-                <a:spcPct val="140000"/>
-              </a:lnSpc>
-            </a:pPr>
-            <a:r>
-              <a:rPr sz="2000" b="0" i="0">
-                <a:solidFill>
-                  <a:srgbClr val="FFFFFF"/>
-                </a:solidFill>
-                <a:latin typeface="Verdana"/>
-              </a:rPr>
-              <a:t>Le lendemain, quelqu'un regarde ce qu'il a fait.</a:t>
-            </a:r>
-          </a:p>
-        </p:txBody>
-      </p:sp>
-      <p:sp>
-        <p:nvSpPr>
-          <p:cNvPr id="12" name="TextBox 11"/>
+          <p:cNvPr id="3" name="TextBox 2"/>
           <p:cNvSpPr txBox="1"/>
           <p:nvPr/>
         </p:nvSpPr>
@@ -8294,6 +9119,232 @@
           </a:p>
         </p:txBody>
       </p:sp>
+      <p:sp>
+        <p:nvSpPr>
+          <p:cNvPr id="4" name="TextBox 3"/>
+          <p:cNvSpPr txBox="1"/>
+          <p:nvPr/>
+        </p:nvSpPr>
+        <p:spPr>
+          <a:xfrm>
+            <a:off x="10710367" y="6355080"/>
+            <a:ext cx="914400" cy="219456"/>
+          </a:xfrm>
+          <a:prstGeom prst="rect">
+            <a:avLst/>
+          </a:prstGeom>
+          <a:noFill/>
+        </p:spPr>
+        <p:txBody>
+          <a:bodyPr wrap="square" lIns="0" rIns="0" tIns="0" bIns="0" anchor="t">
+            <a:spAutoFit/>
+          </a:bodyPr>
+          <a:lstStyle/>
+          <a:p>
+            <a:pPr algn="r">
+              <a:lnSpc>
+                <a:spcPct val="135000"/>
+              </a:lnSpc>
+            </a:pPr>
+            <a:r>
+              <a:rPr sz="1200" b="0" i="0">
+                <a:solidFill>
+                  <a:srgbClr val="6E7175"/>
+                </a:solidFill>
+                <a:latin typeface="Verdana"/>
+              </a:rPr>
+              <a:t>19</a:t>
+            </a:r>
+          </a:p>
+        </p:txBody>
+      </p:sp>
+      <p:sp>
+        <p:nvSpPr>
+          <p:cNvPr id="5" name="TextBox 4"/>
+          <p:cNvSpPr txBox="1"/>
+          <p:nvPr/>
+        </p:nvSpPr>
+        <p:spPr>
+          <a:xfrm>
+            <a:off x="566928" y="420624"/>
+            <a:ext cx="11057839" cy="237744"/>
+          </a:xfrm>
+          <a:prstGeom prst="rect">
+            <a:avLst/>
+          </a:prstGeom>
+          <a:noFill/>
+        </p:spPr>
+        <p:txBody>
+          <a:bodyPr wrap="square" lIns="0" rIns="0" tIns="0" bIns="0" anchor="t">
+            <a:spAutoFit/>
+          </a:bodyPr>
+          <a:lstStyle/>
+          <a:p>
+            <a:pPr algn="l">
+              <a:lnSpc>
+                <a:spcPct val="135000"/>
+              </a:lnSpc>
+            </a:pPr>
+            <a:r>
+              <a:rPr sz="1300" b="1" i="0" spc="156">
+                <a:solidFill>
+                  <a:srgbClr val="A5335F"/>
+                </a:solidFill>
+                <a:latin typeface="Verdana"/>
+              </a:rPr>
+              <a:t>CE QUE L'ENSEIGNANT VOIT</a:t>
+            </a:r>
+          </a:p>
+        </p:txBody>
+      </p:sp>
+      <p:sp>
+        <p:nvSpPr>
+          <p:cNvPr id="6" name="TextBox 5"/>
+          <p:cNvSpPr txBox="1"/>
+          <p:nvPr/>
+        </p:nvSpPr>
+        <p:spPr>
+          <a:xfrm>
+            <a:off x="566928" y="749808"/>
+            <a:ext cx="11057839" cy="877824"/>
+          </a:xfrm>
+          <a:prstGeom prst="rect">
+            <a:avLst/>
+          </a:prstGeom>
+          <a:noFill/>
+        </p:spPr>
+        <p:txBody>
+          <a:bodyPr wrap="square" lIns="0" rIns="0" tIns="0" bIns="0" anchor="t">
+            <a:spAutoFit/>
+          </a:bodyPr>
+          <a:lstStyle/>
+          <a:p>
+            <a:pPr algn="l">
+              <a:lnSpc>
+                <a:spcPct val="115000"/>
+              </a:lnSpc>
+            </a:pPr>
+            <a:r>
+              <a:rPr sz="3400" b="1" i="0">
+                <a:solidFill>
+                  <a:srgbClr val="17181A"/>
+                </a:solidFill>
+                <a:latin typeface="Verdana"/>
+              </a:rPr>
+              <a:t>Le dossier d'un élève</a:t>
+            </a:r>
+          </a:p>
+        </p:txBody>
+      </p:sp>
+      <p:sp>
+        <p:nvSpPr>
+          <p:cNvPr id="7" name="TextBox 6"/>
+          <p:cNvSpPr txBox="1"/>
+          <p:nvPr/>
+        </p:nvSpPr>
+        <p:spPr>
+          <a:xfrm>
+            <a:off x="566928" y="1645920"/>
+            <a:ext cx="11057839" cy="617220"/>
+          </a:xfrm>
+          <a:prstGeom prst="rect">
+            <a:avLst/>
+          </a:prstGeom>
+          <a:noFill/>
+        </p:spPr>
+        <p:txBody>
+          <a:bodyPr wrap="square" lIns="0" rIns="0" tIns="0" bIns="0" anchor="t">
+            <a:spAutoFit/>
+          </a:bodyPr>
+          <a:lstStyle/>
+          <a:p>
+            <a:pPr algn="l">
+              <a:lnSpc>
+                <a:spcPct val="135000"/>
+              </a:lnSpc>
+            </a:pPr>
+            <a:r>
+              <a:rPr sz="1800" b="0" i="0">
+                <a:solidFill>
+                  <a:srgbClr val="6E7175"/>
+                </a:solidFill>
+                <a:latin typeface="Verdana"/>
+              </a:rPr>
+              <a:t>Où il en est, où il s'est trompé, ce qu'il a remis. Aucune conclusion, aucune suggestion de parcours : c'est lui qui tranche.</a:t>
+            </a:r>
+          </a:p>
+        </p:txBody>
+      </p:sp>
+      <p:sp>
+        <p:nvSpPr>
+          <p:cNvPr id="8" name="Rounded Rectangle 7"/>
+          <p:cNvSpPr/>
+          <p:nvPr/>
+        </p:nvSpPr>
+        <p:spPr>
+          <a:xfrm>
+            <a:off x="4881003" y="2372868"/>
+            <a:ext cx="2429688" cy="3799332"/>
+          </a:xfrm>
+          <a:prstGeom prst="roundRect">
+            <a:avLst>
+              <a:gd name="adj" fmla="val 3763"/>
+            </a:avLst>
+          </a:prstGeom>
+          <a:solidFill>
+            <a:srgbClr val="FFFFFF"/>
+          </a:solidFill>
+          <a:ln w="12700">
+            <a:solidFill>
+              <a:srgbClr val="D6D6D2"/>
+            </a:solidFill>
+          </a:ln>
+          <a:effectLst/>
+        </p:spPr>
+        <p:style>
+          <a:lnRef idx="1">
+            <a:schemeClr val="accent1"/>
+          </a:lnRef>
+          <a:fillRef idx="3">
+            <a:schemeClr val="accent1"/>
+          </a:fillRef>
+          <a:effectRef idx="2">
+            <a:schemeClr val="accent1"/>
+          </a:effectRef>
+          <a:fontRef idx="minor">
+            <a:schemeClr val="lt1"/>
+          </a:fontRef>
+        </p:style>
+        <p:txBody>
+          <a:bodyPr rtlCol="0" anchor="ctr"/>
+          <a:lstStyle/>
+          <a:p/>
+        </p:txBody>
+      </p:sp>
+      <p:pic>
+        <p:nvPicPr>
+          <p:cNvPr id="9" name="Picture 8" descr="cas-03-fiche-eleve.png"/>
+          <p:cNvPicPr>
+            <a:picLocks noChangeAspect="1"/>
+          </p:cNvPicPr>
+          <p:nvPr/>
+        </p:nvPicPr>
+        <p:blipFill>
+          <a:blip r:embed="rId2"/>
+          <a:stretch>
+            <a:fillRect/>
+          </a:stretch>
+        </p:blipFill>
+        <p:spPr>
+          <a:xfrm>
+            <a:off x="4899291" y="2391156"/>
+            <a:ext cx="2393112" cy="3762756"/>
+          </a:xfrm>
+          <a:prstGeom prst="rect">
+            <a:avLst/>
+          </a:prstGeom>
+        </p:spPr>
+      </p:pic>
     </p:spTree>
   </p:cSld>
   <p:clrMapOvr>
@@ -9190,6 +10241,1181 @@
 </p:sld>
 </file>
 
+<file path=ppt/slides/slide20.xml><?xml version="1.0" encoding="utf-8"?>
+<p:sld xmlns:a="http://schemas.openxmlformats.org/drawingml/2006/main" xmlns:p="http://schemas.openxmlformats.org/presentationml/2006/main" xmlns:r="http://schemas.openxmlformats.org/officeDocument/2006/relationships">
+  <p:cSld>
+    <p:spTree>
+      <p:nvGrpSpPr>
+        <p:cNvPr id="1" name=""/>
+        <p:cNvGrpSpPr/>
+        <p:nvPr/>
+      </p:nvGrpSpPr>
+      <p:grpSpPr/>
+      <p:sp>
+        <p:nvSpPr>
+          <p:cNvPr id="2" name="Rectangle 1"/>
+          <p:cNvSpPr/>
+          <p:nvPr/>
+        </p:nvSpPr>
+        <p:spPr>
+          <a:xfrm>
+            <a:off x="0" y="0"/>
+            <a:ext cx="12191695" cy="6858000"/>
+          </a:xfrm>
+          <a:prstGeom prst="rect">
+            <a:avLst/>
+          </a:prstGeom>
+          <a:solidFill>
+            <a:srgbClr val="F7F7F5"/>
+          </a:solidFill>
+          <a:ln>
+            <a:noFill/>
+          </a:ln>
+          <a:effectLst/>
+        </p:spPr>
+        <p:style>
+          <a:lnRef idx="1">
+            <a:schemeClr val="accent1"/>
+          </a:lnRef>
+          <a:fillRef idx="3">
+            <a:schemeClr val="accent1"/>
+          </a:fillRef>
+          <a:effectRef idx="2">
+            <a:schemeClr val="accent1"/>
+          </a:effectRef>
+          <a:fontRef idx="minor">
+            <a:schemeClr val="lt1"/>
+          </a:fontRef>
+        </p:style>
+        <p:txBody>
+          <a:bodyPr rtlCol="0" anchor="ctr"/>
+          <a:lstStyle/>
+          <a:p/>
+        </p:txBody>
+      </p:sp>
+      <p:sp>
+        <p:nvSpPr>
+          <p:cNvPr id="3" name="TextBox 2"/>
+          <p:cNvSpPr txBox="1"/>
+          <p:nvPr/>
+        </p:nvSpPr>
+        <p:spPr>
+          <a:xfrm>
+            <a:off x="566928" y="6355080"/>
+            <a:ext cx="6400800" cy="219456"/>
+          </a:xfrm>
+          <a:prstGeom prst="rect">
+            <a:avLst/>
+          </a:prstGeom>
+          <a:noFill/>
+        </p:spPr>
+        <p:txBody>
+          <a:bodyPr wrap="square" lIns="0" rIns="0" tIns="0" bIns="0" anchor="t">
+            <a:spAutoFit/>
+          </a:bodyPr>
+          <a:lstStyle/>
+          <a:p>
+            <a:pPr algn="l">
+              <a:lnSpc>
+                <a:spcPct val="135000"/>
+              </a:lnSpc>
+            </a:pPr>
+            <a:r>
+              <a:rPr sz="1200" b="0" i="0">
+                <a:solidFill>
+                  <a:srgbClr val="6E7175"/>
+                </a:solidFill>
+                <a:latin typeface="Verdana"/>
+              </a:rPr>
+              <a:t>F1 · francis · présentation</a:t>
+            </a:r>
+          </a:p>
+        </p:txBody>
+      </p:sp>
+      <p:sp>
+        <p:nvSpPr>
+          <p:cNvPr id="4" name="TextBox 3"/>
+          <p:cNvSpPr txBox="1"/>
+          <p:nvPr/>
+        </p:nvSpPr>
+        <p:spPr>
+          <a:xfrm>
+            <a:off x="10710367" y="6355080"/>
+            <a:ext cx="914400" cy="219456"/>
+          </a:xfrm>
+          <a:prstGeom prst="rect">
+            <a:avLst/>
+          </a:prstGeom>
+          <a:noFill/>
+        </p:spPr>
+        <p:txBody>
+          <a:bodyPr wrap="square" lIns="0" rIns="0" tIns="0" bIns="0" anchor="t">
+            <a:spAutoFit/>
+          </a:bodyPr>
+          <a:lstStyle/>
+          <a:p>
+            <a:pPr algn="r">
+              <a:lnSpc>
+                <a:spcPct val="135000"/>
+              </a:lnSpc>
+            </a:pPr>
+            <a:r>
+              <a:rPr sz="1200" b="0" i="0">
+                <a:solidFill>
+                  <a:srgbClr val="6E7175"/>
+                </a:solidFill>
+                <a:latin typeface="Verdana"/>
+              </a:rPr>
+              <a:t>20</a:t>
+            </a:r>
+          </a:p>
+        </p:txBody>
+      </p:sp>
+      <p:sp>
+        <p:nvSpPr>
+          <p:cNvPr id="5" name="TextBox 4"/>
+          <p:cNvSpPr txBox="1"/>
+          <p:nvPr/>
+        </p:nvSpPr>
+        <p:spPr>
+          <a:xfrm>
+            <a:off x="566928" y="420624"/>
+            <a:ext cx="11057839" cy="237744"/>
+          </a:xfrm>
+          <a:prstGeom prst="rect">
+            <a:avLst/>
+          </a:prstGeom>
+          <a:noFill/>
+        </p:spPr>
+        <p:txBody>
+          <a:bodyPr wrap="square" lIns="0" rIns="0" tIns="0" bIns="0" anchor="t">
+            <a:spAutoFit/>
+          </a:bodyPr>
+          <a:lstStyle/>
+          <a:p>
+            <a:pPr algn="l">
+              <a:lnSpc>
+                <a:spcPct val="135000"/>
+              </a:lnSpc>
+            </a:pPr>
+            <a:r>
+              <a:rPr sz="1300" b="1" i="0" spc="156">
+                <a:solidFill>
+                  <a:srgbClr val="A5335F"/>
+                </a:solidFill>
+                <a:latin typeface="Verdana"/>
+              </a:rPr>
+              <a:t>CE QU'ON N'A PAS RETIRÉ</a:t>
+            </a:r>
+          </a:p>
+        </p:txBody>
+      </p:sp>
+      <p:sp>
+        <p:nvSpPr>
+          <p:cNvPr id="6" name="TextBox 5"/>
+          <p:cNvSpPr txBox="1"/>
+          <p:nvPr/>
+        </p:nvSpPr>
+        <p:spPr>
+          <a:xfrm>
+            <a:off x="566928" y="749808"/>
+            <a:ext cx="11057839" cy="877824"/>
+          </a:xfrm>
+          <a:prstGeom prst="rect">
+            <a:avLst/>
+          </a:prstGeom>
+          <a:noFill/>
+        </p:spPr>
+        <p:txBody>
+          <a:bodyPr wrap="square" lIns="0" rIns="0" tIns="0" bIns="0" anchor="t">
+            <a:spAutoFit/>
+          </a:bodyPr>
+          <a:lstStyle/>
+          <a:p>
+            <a:pPr algn="l">
+              <a:lnSpc>
+                <a:spcPct val="115000"/>
+              </a:lnSpc>
+            </a:pPr>
+            <a:r>
+              <a:rPr sz="3400" b="1" i="0">
+                <a:solidFill>
+                  <a:srgbClr val="17181A"/>
+                </a:solidFill>
+                <a:latin typeface="Verdana"/>
+              </a:rPr>
+              <a:t>Quatre choses qui restent, et c'est délibéré</a:t>
+            </a:r>
+          </a:p>
+        </p:txBody>
+      </p:sp>
+      <p:sp>
+        <p:nvSpPr>
+          <p:cNvPr id="7" name="Rounded Rectangle 6"/>
+          <p:cNvSpPr/>
+          <p:nvPr/>
+        </p:nvSpPr>
+        <p:spPr>
+          <a:xfrm>
+            <a:off x="566928" y="1810512"/>
+            <a:ext cx="5446623" cy="2052828"/>
+          </a:xfrm>
+          <a:prstGeom prst="roundRect">
+            <a:avLst>
+              <a:gd name="adj" fmla="val 7126"/>
+            </a:avLst>
+          </a:prstGeom>
+          <a:solidFill>
+            <a:srgbClr val="FFFFFF"/>
+          </a:solidFill>
+          <a:ln w="12700">
+            <a:solidFill>
+              <a:srgbClr val="EAEAE8"/>
+            </a:solidFill>
+          </a:ln>
+          <a:effectLst/>
+        </p:spPr>
+        <p:style>
+          <a:lnRef idx="1">
+            <a:schemeClr val="accent1"/>
+          </a:lnRef>
+          <a:fillRef idx="3">
+            <a:schemeClr val="accent1"/>
+          </a:fillRef>
+          <a:effectRef idx="2">
+            <a:schemeClr val="accent1"/>
+          </a:effectRef>
+          <a:fontRef idx="minor">
+            <a:schemeClr val="lt1"/>
+          </a:fontRef>
+        </p:style>
+        <p:txBody>
+          <a:bodyPr rtlCol="0" anchor="ctr"/>
+          <a:lstStyle/>
+          <a:p/>
+        </p:txBody>
+      </p:sp>
+      <p:sp>
+        <p:nvSpPr>
+          <p:cNvPr id="8" name="TextBox 7"/>
+          <p:cNvSpPr txBox="1"/>
+          <p:nvPr/>
+        </p:nvSpPr>
+        <p:spPr>
+          <a:xfrm>
+            <a:off x="886968" y="2084831"/>
+            <a:ext cx="4806543" cy="387096"/>
+          </a:xfrm>
+          <a:prstGeom prst="rect">
+            <a:avLst/>
+          </a:prstGeom>
+          <a:noFill/>
+        </p:spPr>
+        <p:txBody>
+          <a:bodyPr wrap="square" lIns="0" rIns="0" tIns="0" bIns="0" anchor="t">
+            <a:spAutoFit/>
+          </a:bodyPr>
+          <a:lstStyle/>
+          <a:p>
+            <a:pPr algn="l">
+              <a:lnSpc>
+                <a:spcPct val="118000"/>
+              </a:lnSpc>
+            </a:pPr>
+            <a:r>
+              <a:rPr sz="2400" b="1" i="0">
+                <a:solidFill>
+                  <a:srgbClr val="A5335F"/>
+                </a:solidFill>
+                <a:latin typeface="Verdana"/>
+              </a:rPr>
+              <a:t>L'enseignant</a:t>
+            </a:r>
+          </a:p>
+        </p:txBody>
+      </p:sp>
+      <p:sp>
+        <p:nvSpPr>
+          <p:cNvPr id="9" name="TextBox 8"/>
+          <p:cNvSpPr txBox="1"/>
+          <p:nvPr/>
+        </p:nvSpPr>
+        <p:spPr>
+          <a:xfrm>
+            <a:off x="886968" y="2499360"/>
+            <a:ext cx="4806543" cy="1089660"/>
+          </a:xfrm>
+          <a:prstGeom prst="rect">
+            <a:avLst/>
+          </a:prstGeom>
+          <a:noFill/>
+        </p:spPr>
+        <p:txBody>
+          <a:bodyPr wrap="square" lIns="0" rIns="0" tIns="0" bIns="0" anchor="t">
+            <a:spAutoFit/>
+          </a:bodyPr>
+          <a:lstStyle/>
+          <a:p>
+            <a:pPr algn="l">
+              <a:lnSpc>
+                <a:spcPct val="142000"/>
+              </a:lnSpc>
+            </a:pPr>
+            <a:r>
+              <a:rPr sz="1800" b="0" i="0">
+                <a:solidFill>
+                  <a:srgbClr val="3A3D40"/>
+                </a:solidFill>
+                <a:latin typeface="Verdana"/>
+              </a:rPr>
+              <a:t>Rien ne s'ouvre tout seul à un élève. C'est l'enseignant qui date un module, choisit la séance, lit les productions.</a:t>
+            </a:r>
+          </a:p>
+        </p:txBody>
+      </p:sp>
+      <p:sp>
+        <p:nvSpPr>
+          <p:cNvPr id="10" name="Rounded Rectangle 9"/>
+          <p:cNvSpPr/>
+          <p:nvPr/>
+        </p:nvSpPr>
+        <p:spPr>
+          <a:xfrm>
+            <a:off x="6178143" y="1810512"/>
+            <a:ext cx="5446623" cy="2052828"/>
+          </a:xfrm>
+          <a:prstGeom prst="roundRect">
+            <a:avLst>
+              <a:gd name="adj" fmla="val 7126"/>
+            </a:avLst>
+          </a:prstGeom>
+          <a:solidFill>
+            <a:srgbClr val="FFFFFF"/>
+          </a:solidFill>
+          <a:ln w="12700">
+            <a:solidFill>
+              <a:srgbClr val="EAEAE8"/>
+            </a:solidFill>
+          </a:ln>
+          <a:effectLst/>
+        </p:spPr>
+        <p:style>
+          <a:lnRef idx="1">
+            <a:schemeClr val="accent1"/>
+          </a:lnRef>
+          <a:fillRef idx="3">
+            <a:schemeClr val="accent1"/>
+          </a:fillRef>
+          <a:effectRef idx="2">
+            <a:schemeClr val="accent1"/>
+          </a:effectRef>
+          <a:fontRef idx="minor">
+            <a:schemeClr val="lt1"/>
+          </a:fontRef>
+        </p:style>
+        <p:txBody>
+          <a:bodyPr rtlCol="0" anchor="ctr"/>
+          <a:lstStyle/>
+          <a:p/>
+        </p:txBody>
+      </p:sp>
+      <p:sp>
+        <p:nvSpPr>
+          <p:cNvPr id="11" name="TextBox 10"/>
+          <p:cNvSpPr txBox="1"/>
+          <p:nvPr/>
+        </p:nvSpPr>
+        <p:spPr>
+          <a:xfrm>
+            <a:off x="6498183" y="2084831"/>
+            <a:ext cx="4806543" cy="387096"/>
+          </a:xfrm>
+          <a:prstGeom prst="rect">
+            <a:avLst/>
+          </a:prstGeom>
+          <a:noFill/>
+        </p:spPr>
+        <p:txBody>
+          <a:bodyPr wrap="square" lIns="0" rIns="0" tIns="0" bIns="0" anchor="t">
+            <a:spAutoFit/>
+          </a:bodyPr>
+          <a:lstStyle/>
+          <a:p>
+            <a:pPr algn="l">
+              <a:lnSpc>
+                <a:spcPct val="118000"/>
+              </a:lnSpc>
+            </a:pPr>
+            <a:r>
+              <a:rPr sz="2400" b="1" i="0">
+                <a:solidFill>
+                  <a:srgbClr val="A5335F"/>
+                </a:solidFill>
+                <a:latin typeface="Verdana"/>
+              </a:rPr>
+              <a:t>Le papier</a:t>
+            </a:r>
+          </a:p>
+        </p:txBody>
+      </p:sp>
+      <p:sp>
+        <p:nvSpPr>
+          <p:cNvPr id="12" name="TextBox 11"/>
+          <p:cNvSpPr txBox="1"/>
+          <p:nvPr/>
+        </p:nvSpPr>
+        <p:spPr>
+          <a:xfrm>
+            <a:off x="6498183" y="2499360"/>
+            <a:ext cx="4806543" cy="1089660"/>
+          </a:xfrm>
+          <a:prstGeom prst="rect">
+            <a:avLst/>
+          </a:prstGeom>
+          <a:noFill/>
+        </p:spPr>
+        <p:txBody>
+          <a:bodyPr wrap="square" lIns="0" rIns="0" tIns="0" bIns="0" anchor="t">
+            <a:spAutoFit/>
+          </a:bodyPr>
+          <a:lstStyle/>
+          <a:p>
+            <a:pPr algn="l">
+              <a:lnSpc>
+                <a:spcPct val="142000"/>
+              </a:lnSpc>
+            </a:pPr>
+            <a:r>
+              <a:rPr sz="1800" b="0" i="0">
+                <a:solidFill>
+                  <a:srgbClr val="3A3D40"/>
+                </a:solidFill>
+                <a:latin typeface="Verdana"/>
+              </a:rPr>
+              <a:t>1 264 fiches imprimables, noir et blanc. Un élève sans appareil fait la séance quand même.</a:t>
+            </a:r>
+          </a:p>
+        </p:txBody>
+      </p:sp>
+      <p:sp>
+        <p:nvSpPr>
+          <p:cNvPr id="13" name="Rounded Rectangle 12"/>
+          <p:cNvSpPr/>
+          <p:nvPr/>
+        </p:nvSpPr>
+        <p:spPr>
+          <a:xfrm>
+            <a:off x="566928" y="4027932"/>
+            <a:ext cx="5446623" cy="2052828"/>
+          </a:xfrm>
+          <a:prstGeom prst="roundRect">
+            <a:avLst>
+              <a:gd name="adj" fmla="val 7126"/>
+            </a:avLst>
+          </a:prstGeom>
+          <a:solidFill>
+            <a:srgbClr val="FFFFFF"/>
+          </a:solidFill>
+          <a:ln w="12700">
+            <a:solidFill>
+              <a:srgbClr val="EAEAE8"/>
+            </a:solidFill>
+          </a:ln>
+          <a:effectLst/>
+        </p:spPr>
+        <p:style>
+          <a:lnRef idx="1">
+            <a:schemeClr val="accent1"/>
+          </a:lnRef>
+          <a:fillRef idx="3">
+            <a:schemeClr val="accent1"/>
+          </a:fillRef>
+          <a:effectRef idx="2">
+            <a:schemeClr val="accent1"/>
+          </a:effectRef>
+          <a:fontRef idx="minor">
+            <a:schemeClr val="lt1"/>
+          </a:fontRef>
+        </p:style>
+        <p:txBody>
+          <a:bodyPr rtlCol="0" anchor="ctr"/>
+          <a:lstStyle/>
+          <a:p/>
+        </p:txBody>
+      </p:sp>
+      <p:sp>
+        <p:nvSpPr>
+          <p:cNvPr id="14" name="TextBox 13"/>
+          <p:cNvSpPr txBox="1"/>
+          <p:nvPr/>
+        </p:nvSpPr>
+        <p:spPr>
+          <a:xfrm>
+            <a:off x="886968" y="4302252"/>
+            <a:ext cx="4806543" cy="387096"/>
+          </a:xfrm>
+          <a:prstGeom prst="rect">
+            <a:avLst/>
+          </a:prstGeom>
+          <a:noFill/>
+        </p:spPr>
+        <p:txBody>
+          <a:bodyPr wrap="square" lIns="0" rIns="0" tIns="0" bIns="0" anchor="t">
+            <a:spAutoFit/>
+          </a:bodyPr>
+          <a:lstStyle/>
+          <a:p>
+            <a:pPr algn="l">
+              <a:lnSpc>
+                <a:spcPct val="118000"/>
+              </a:lnSpc>
+            </a:pPr>
+            <a:r>
+              <a:rPr sz="2400" b="1" i="0">
+                <a:solidFill>
+                  <a:srgbClr val="A5335F"/>
+                </a:solidFill>
+                <a:latin typeface="Verdana"/>
+              </a:rPr>
+              <a:t>La classe</a:t>
+            </a:r>
+          </a:p>
+        </p:txBody>
+      </p:sp>
+      <p:sp>
+        <p:nvSpPr>
+          <p:cNvPr id="15" name="TextBox 14"/>
+          <p:cNvSpPr txBox="1"/>
+          <p:nvPr/>
+        </p:nvSpPr>
+        <p:spPr>
+          <a:xfrm>
+            <a:off x="886968" y="4716780"/>
+            <a:ext cx="4806543" cy="1089660"/>
+          </a:xfrm>
+          <a:prstGeom prst="rect">
+            <a:avLst/>
+          </a:prstGeom>
+          <a:noFill/>
+        </p:spPr>
+        <p:txBody>
+          <a:bodyPr wrap="square" lIns="0" rIns="0" tIns="0" bIns="0" anchor="t">
+            <a:spAutoFit/>
+          </a:bodyPr>
+          <a:lstStyle/>
+          <a:p>
+            <a:pPr algn="l">
+              <a:lnSpc>
+                <a:spcPct val="142000"/>
+              </a:lnSpc>
+            </a:pPr>
+            <a:r>
+              <a:rPr sz="1800" b="0" i="0">
+                <a:solidFill>
+                  <a:srgbClr val="3A3D40"/>
+                </a:solidFill>
+                <a:latin typeface="Verdana"/>
+              </a:rPr>
+              <a:t>Le jeu de rôle a une moitié qui se joue à deux, en salle. Elle ne disparaît pas quand l'assistant est fermé.</a:t>
+            </a:r>
+          </a:p>
+        </p:txBody>
+      </p:sp>
+      <p:sp>
+        <p:nvSpPr>
+          <p:cNvPr id="16" name="Rounded Rectangle 15"/>
+          <p:cNvSpPr/>
+          <p:nvPr/>
+        </p:nvSpPr>
+        <p:spPr>
+          <a:xfrm>
+            <a:off x="6178143" y="4027932"/>
+            <a:ext cx="5446623" cy="2052828"/>
+          </a:xfrm>
+          <a:prstGeom prst="roundRect">
+            <a:avLst>
+              <a:gd name="adj" fmla="val 7126"/>
+            </a:avLst>
+          </a:prstGeom>
+          <a:solidFill>
+            <a:srgbClr val="FFFFFF"/>
+          </a:solidFill>
+          <a:ln w="12700">
+            <a:solidFill>
+              <a:srgbClr val="EAEAE8"/>
+            </a:solidFill>
+          </a:ln>
+          <a:effectLst/>
+        </p:spPr>
+        <p:style>
+          <a:lnRef idx="1">
+            <a:schemeClr val="accent1"/>
+          </a:lnRef>
+          <a:fillRef idx="3">
+            <a:schemeClr val="accent1"/>
+          </a:fillRef>
+          <a:effectRef idx="2">
+            <a:schemeClr val="accent1"/>
+          </a:effectRef>
+          <a:fontRef idx="minor">
+            <a:schemeClr val="lt1"/>
+          </a:fontRef>
+        </p:style>
+        <p:txBody>
+          <a:bodyPr rtlCol="0" anchor="ctr"/>
+          <a:lstStyle/>
+          <a:p/>
+        </p:txBody>
+      </p:sp>
+      <p:sp>
+        <p:nvSpPr>
+          <p:cNvPr id="17" name="TextBox 16"/>
+          <p:cNvSpPr txBox="1"/>
+          <p:nvPr/>
+        </p:nvSpPr>
+        <p:spPr>
+          <a:xfrm>
+            <a:off x="6498183" y="4302252"/>
+            <a:ext cx="4806543" cy="387096"/>
+          </a:xfrm>
+          <a:prstGeom prst="rect">
+            <a:avLst/>
+          </a:prstGeom>
+          <a:noFill/>
+        </p:spPr>
+        <p:txBody>
+          <a:bodyPr wrap="square" lIns="0" rIns="0" tIns="0" bIns="0" anchor="t">
+            <a:spAutoFit/>
+          </a:bodyPr>
+          <a:lstStyle/>
+          <a:p>
+            <a:pPr algn="l">
+              <a:lnSpc>
+                <a:spcPct val="118000"/>
+              </a:lnSpc>
+            </a:pPr>
+            <a:r>
+              <a:rPr sz="2400" b="1" i="0">
+                <a:solidFill>
+                  <a:srgbClr val="A5335F"/>
+                </a:solidFill>
+                <a:latin typeface="Verdana"/>
+              </a:rPr>
+              <a:t>Le droit de refuser</a:t>
+            </a:r>
+          </a:p>
+        </p:txBody>
+      </p:sp>
+      <p:sp>
+        <p:nvSpPr>
+          <p:cNvPr id="18" name="TextBox 17"/>
+          <p:cNvSpPr txBox="1"/>
+          <p:nvPr/>
+        </p:nvSpPr>
+        <p:spPr>
+          <a:xfrm>
+            <a:off x="6498183" y="4716780"/>
+            <a:ext cx="4806543" cy="1089660"/>
+          </a:xfrm>
+          <a:prstGeom prst="rect">
+            <a:avLst/>
+          </a:prstGeom>
+          <a:noFill/>
+        </p:spPr>
+        <p:txBody>
+          <a:bodyPr wrap="square" lIns="0" rIns="0" tIns="0" bIns="0" anchor="t">
+            <a:spAutoFit/>
+          </a:bodyPr>
+          <a:lstStyle/>
+          <a:p>
+            <a:pPr algn="l">
+              <a:lnSpc>
+                <a:spcPct val="142000"/>
+              </a:lnSpc>
+            </a:pPr>
+            <a:r>
+              <a:rPr sz="1800" b="0" i="0">
+                <a:solidFill>
+                  <a:srgbClr val="3A3D40"/>
+                </a:solidFill>
+                <a:latin typeface="Verdana"/>
+              </a:rPr>
+              <a:t>Un centre peut fermer l'assistant. Les 87 modules se replient : ce qui reste est un cours, pas une démo cassée.</a:t>
+            </a:r>
+          </a:p>
+        </p:txBody>
+      </p:sp>
+    </p:spTree>
+  </p:cSld>
+  <p:clrMapOvr>
+    <a:masterClrMapping/>
+  </p:clrMapOvr>
+</p:sld>
+</file>
+
+<file path=ppt/slides/slide21.xml><?xml version="1.0" encoding="utf-8"?>
+<p:sld xmlns:a="http://schemas.openxmlformats.org/drawingml/2006/main" xmlns:p="http://schemas.openxmlformats.org/presentationml/2006/main" xmlns:r="http://schemas.openxmlformats.org/officeDocument/2006/relationships">
+  <p:cSld>
+    <p:spTree>
+      <p:nvGrpSpPr>
+        <p:cNvPr id="1" name=""/>
+        <p:cNvGrpSpPr/>
+        <p:nvPr/>
+      </p:nvGrpSpPr>
+      <p:grpSpPr/>
+      <p:sp>
+        <p:nvSpPr>
+          <p:cNvPr id="2" name="Rectangle 1"/>
+          <p:cNvSpPr/>
+          <p:nvPr/>
+        </p:nvSpPr>
+        <p:spPr>
+          <a:xfrm>
+            <a:off x="0" y="0"/>
+            <a:ext cx="12191695" cy="6858000"/>
+          </a:xfrm>
+          <a:prstGeom prst="rect">
+            <a:avLst/>
+          </a:prstGeom>
+          <a:solidFill>
+            <a:srgbClr val="F7F7F5"/>
+          </a:solidFill>
+          <a:ln>
+            <a:noFill/>
+          </a:ln>
+          <a:effectLst/>
+        </p:spPr>
+        <p:style>
+          <a:lnRef idx="1">
+            <a:schemeClr val="accent1"/>
+          </a:lnRef>
+          <a:fillRef idx="3">
+            <a:schemeClr val="accent1"/>
+          </a:fillRef>
+          <a:effectRef idx="2">
+            <a:schemeClr val="accent1"/>
+          </a:effectRef>
+          <a:fontRef idx="minor">
+            <a:schemeClr val="lt1"/>
+          </a:fontRef>
+        </p:style>
+        <p:txBody>
+          <a:bodyPr rtlCol="0" anchor="ctr"/>
+          <a:lstStyle/>
+          <a:p/>
+        </p:txBody>
+      </p:sp>
+      <p:sp>
+        <p:nvSpPr>
+          <p:cNvPr id="3" name="TextBox 2"/>
+          <p:cNvSpPr txBox="1"/>
+          <p:nvPr/>
+        </p:nvSpPr>
+        <p:spPr>
+          <a:xfrm>
+            <a:off x="566928" y="6355080"/>
+            <a:ext cx="6400800" cy="219456"/>
+          </a:xfrm>
+          <a:prstGeom prst="rect">
+            <a:avLst/>
+          </a:prstGeom>
+          <a:noFill/>
+        </p:spPr>
+        <p:txBody>
+          <a:bodyPr wrap="square" lIns="0" rIns="0" tIns="0" bIns="0" anchor="t">
+            <a:spAutoFit/>
+          </a:bodyPr>
+          <a:lstStyle/>
+          <a:p>
+            <a:pPr algn="l">
+              <a:lnSpc>
+                <a:spcPct val="135000"/>
+              </a:lnSpc>
+            </a:pPr>
+            <a:r>
+              <a:rPr sz="1200" b="0" i="0">
+                <a:solidFill>
+                  <a:srgbClr val="6E7175"/>
+                </a:solidFill>
+                <a:latin typeface="Verdana"/>
+              </a:rPr>
+              <a:t>F1 · francis · présentation</a:t>
+            </a:r>
+          </a:p>
+        </p:txBody>
+      </p:sp>
+      <p:sp>
+        <p:nvSpPr>
+          <p:cNvPr id="4" name="TextBox 3"/>
+          <p:cNvSpPr txBox="1"/>
+          <p:nvPr/>
+        </p:nvSpPr>
+        <p:spPr>
+          <a:xfrm>
+            <a:off x="10710367" y="6355080"/>
+            <a:ext cx="914400" cy="219456"/>
+          </a:xfrm>
+          <a:prstGeom prst="rect">
+            <a:avLst/>
+          </a:prstGeom>
+          <a:noFill/>
+        </p:spPr>
+        <p:txBody>
+          <a:bodyPr wrap="square" lIns="0" rIns="0" tIns="0" bIns="0" anchor="t">
+            <a:spAutoFit/>
+          </a:bodyPr>
+          <a:lstStyle/>
+          <a:p>
+            <a:pPr algn="r">
+              <a:lnSpc>
+                <a:spcPct val="135000"/>
+              </a:lnSpc>
+            </a:pPr>
+            <a:r>
+              <a:rPr sz="1200" b="0" i="0">
+                <a:solidFill>
+                  <a:srgbClr val="6E7175"/>
+                </a:solidFill>
+                <a:latin typeface="Verdana"/>
+              </a:rPr>
+              <a:t>21</a:t>
+            </a:r>
+          </a:p>
+        </p:txBody>
+      </p:sp>
+      <p:sp>
+        <p:nvSpPr>
+          <p:cNvPr id="5" name="Rectangle 4"/>
+          <p:cNvSpPr/>
+          <p:nvPr/>
+        </p:nvSpPr>
+        <p:spPr>
+          <a:xfrm>
+            <a:off x="0" y="0"/>
+            <a:ext cx="12191695" cy="6858000"/>
+          </a:xfrm>
+          <a:prstGeom prst="rect">
+            <a:avLst/>
+          </a:prstGeom>
+          <a:solidFill>
+            <a:srgbClr val="17181A"/>
+          </a:solidFill>
+          <a:ln>
+            <a:noFill/>
+          </a:ln>
+          <a:effectLst/>
+        </p:spPr>
+        <p:style>
+          <a:lnRef idx="1">
+            <a:schemeClr val="accent1"/>
+          </a:lnRef>
+          <a:fillRef idx="3">
+            <a:schemeClr val="accent1"/>
+          </a:fillRef>
+          <a:effectRef idx="2">
+            <a:schemeClr val="accent1"/>
+          </a:effectRef>
+          <a:fontRef idx="minor">
+            <a:schemeClr val="lt1"/>
+          </a:fontRef>
+        </p:style>
+        <p:txBody>
+          <a:bodyPr rtlCol="0" anchor="ctr"/>
+          <a:lstStyle/>
+          <a:p/>
+        </p:txBody>
+      </p:sp>
+      <p:sp>
+        <p:nvSpPr>
+          <p:cNvPr id="6" name="TextBox 5"/>
+          <p:cNvSpPr txBox="1"/>
+          <p:nvPr/>
+        </p:nvSpPr>
+        <p:spPr>
+          <a:xfrm>
+            <a:off x="566928" y="1051560"/>
+            <a:ext cx="11057839" cy="274320"/>
+          </a:xfrm>
+          <a:prstGeom prst="rect">
+            <a:avLst/>
+          </a:prstGeom>
+          <a:noFill/>
+        </p:spPr>
+        <p:txBody>
+          <a:bodyPr wrap="square" lIns="0" rIns="0" tIns="0" bIns="0" anchor="t">
+            <a:spAutoFit/>
+          </a:bodyPr>
+          <a:lstStyle/>
+          <a:p>
+            <a:pPr algn="l">
+              <a:lnSpc>
+                <a:spcPct val="135000"/>
+              </a:lnSpc>
+            </a:pPr>
+            <a:r>
+              <a:rPr sz="1300" b="1" i="0" spc="156">
+                <a:solidFill>
+                  <a:srgbClr val="FFFFFF"/>
+                </a:solidFill>
+                <a:latin typeface="Verdana"/>
+              </a:rPr>
+              <a:t>BILLET DE SORTIE</a:t>
+            </a:r>
+          </a:p>
+        </p:txBody>
+      </p:sp>
+      <p:sp>
+        <p:nvSpPr>
+          <p:cNvPr id="7" name="TextBox 6"/>
+          <p:cNvSpPr txBox="1"/>
+          <p:nvPr/>
+        </p:nvSpPr>
+        <p:spPr>
+          <a:xfrm>
+            <a:off x="566928" y="1572768"/>
+            <a:ext cx="9777679" cy="2103120"/>
+          </a:xfrm>
+          <a:prstGeom prst="rect">
+            <a:avLst/>
+          </a:prstGeom>
+          <a:noFill/>
+        </p:spPr>
+        <p:txBody>
+          <a:bodyPr wrap="square" lIns="0" rIns="0" tIns="0" bIns="0" anchor="t">
+            <a:spAutoFit/>
+          </a:bodyPr>
+          <a:lstStyle/>
+          <a:p>
+            <a:pPr algn="l">
+              <a:lnSpc>
+                <a:spcPct val="125000"/>
+              </a:lnSpc>
+            </a:pPr>
+            <a:r>
+              <a:rPr sz="3100" b="1" i="0">
+                <a:solidFill>
+                  <a:srgbClr val="FFFFFF"/>
+                </a:solidFill>
+                <a:latin typeface="Verdana"/>
+              </a:rPr>
+              <a:t>La question à laquelle tout ceci essaie de répondre : qu'est-ce qu'un adulte fait, seul, un mardi soir, quand il veut apprendre le français ?</a:t>
+            </a:r>
+          </a:p>
+        </p:txBody>
+      </p:sp>
+      <p:sp>
+        <p:nvSpPr>
+          <p:cNvPr id="8" name="Rounded Rectangle 7"/>
+          <p:cNvSpPr/>
+          <p:nvPr/>
+        </p:nvSpPr>
+        <p:spPr>
+          <a:xfrm>
+            <a:off x="566928" y="3931920"/>
+            <a:ext cx="11057839" cy="666496"/>
+          </a:xfrm>
+          <a:prstGeom prst="roundRect">
+            <a:avLst>
+              <a:gd name="adj" fmla="val 13719"/>
+            </a:avLst>
+          </a:prstGeom>
+          <a:solidFill>
+            <a:srgbClr val="2A2C2F"/>
+          </a:solidFill>
+          <a:ln>
+            <a:noFill/>
+          </a:ln>
+          <a:effectLst/>
+        </p:spPr>
+        <p:style>
+          <a:lnRef idx="1">
+            <a:schemeClr val="accent1"/>
+          </a:lnRef>
+          <a:fillRef idx="3">
+            <a:schemeClr val="accent1"/>
+          </a:fillRef>
+          <a:effectRef idx="2">
+            <a:schemeClr val="accent1"/>
+          </a:effectRef>
+          <a:fontRef idx="minor">
+            <a:schemeClr val="lt1"/>
+          </a:fontRef>
+        </p:style>
+        <p:txBody>
+          <a:bodyPr rtlCol="0" anchor="ctr"/>
+          <a:lstStyle/>
+          <a:p/>
+        </p:txBody>
+      </p:sp>
+      <p:sp>
+        <p:nvSpPr>
+          <p:cNvPr id="9" name="TextBox 8"/>
+          <p:cNvSpPr txBox="1"/>
+          <p:nvPr/>
+        </p:nvSpPr>
+        <p:spPr>
+          <a:xfrm>
+            <a:off x="932688" y="4087368"/>
+            <a:ext cx="10051999" cy="392176"/>
+          </a:xfrm>
+          <a:prstGeom prst="rect">
+            <a:avLst/>
+          </a:prstGeom>
+          <a:noFill/>
+        </p:spPr>
+        <p:txBody>
+          <a:bodyPr wrap="square" lIns="0" rIns="0" tIns="0" bIns="0" anchor="t">
+            <a:spAutoFit/>
+          </a:bodyPr>
+          <a:lstStyle/>
+          <a:p>
+            <a:pPr algn="l">
+              <a:lnSpc>
+                <a:spcPct val="140000"/>
+              </a:lnSpc>
+            </a:pPr>
+            <a:r>
+              <a:rPr sz="2000" b="0" i="0">
+                <a:solidFill>
+                  <a:srgbClr val="FFFFFF"/>
+                </a:solidFill>
+                <a:latin typeface="Verdana"/>
+              </a:rPr>
+              <a:t>Il écoute. Il se trompe. Il recommence sans témoin.</a:t>
+            </a:r>
+          </a:p>
+        </p:txBody>
+      </p:sp>
+      <p:sp>
+        <p:nvSpPr>
+          <p:cNvPr id="10" name="Rounded Rectangle 9"/>
+          <p:cNvSpPr/>
+          <p:nvPr/>
+        </p:nvSpPr>
+        <p:spPr>
+          <a:xfrm>
+            <a:off x="566928" y="4680712"/>
+            <a:ext cx="11057839" cy="666496"/>
+          </a:xfrm>
+          <a:prstGeom prst="roundRect">
+            <a:avLst>
+              <a:gd name="adj" fmla="val 13719"/>
+            </a:avLst>
+          </a:prstGeom>
+          <a:solidFill>
+            <a:srgbClr val="2A2C2F"/>
+          </a:solidFill>
+          <a:ln>
+            <a:noFill/>
+          </a:ln>
+          <a:effectLst/>
+        </p:spPr>
+        <p:style>
+          <a:lnRef idx="1">
+            <a:schemeClr val="accent1"/>
+          </a:lnRef>
+          <a:fillRef idx="3">
+            <a:schemeClr val="accent1"/>
+          </a:fillRef>
+          <a:effectRef idx="2">
+            <a:schemeClr val="accent1"/>
+          </a:effectRef>
+          <a:fontRef idx="minor">
+            <a:schemeClr val="lt1"/>
+          </a:fontRef>
+        </p:style>
+        <p:txBody>
+          <a:bodyPr rtlCol="0" anchor="ctr"/>
+          <a:lstStyle/>
+          <a:p/>
+        </p:txBody>
+      </p:sp>
+      <p:sp>
+        <p:nvSpPr>
+          <p:cNvPr id="11" name="TextBox 10"/>
+          <p:cNvSpPr txBox="1"/>
+          <p:nvPr/>
+        </p:nvSpPr>
+        <p:spPr>
+          <a:xfrm>
+            <a:off x="932688" y="4836160"/>
+            <a:ext cx="10051999" cy="392176"/>
+          </a:xfrm>
+          <a:prstGeom prst="rect">
+            <a:avLst/>
+          </a:prstGeom>
+          <a:noFill/>
+        </p:spPr>
+        <p:txBody>
+          <a:bodyPr wrap="square" lIns="0" rIns="0" tIns="0" bIns="0" anchor="t">
+            <a:spAutoFit/>
+          </a:bodyPr>
+          <a:lstStyle/>
+          <a:p>
+            <a:pPr algn="l">
+              <a:lnSpc>
+                <a:spcPct val="140000"/>
+              </a:lnSpc>
+            </a:pPr>
+            <a:r>
+              <a:rPr sz="2000" b="0" i="0">
+                <a:solidFill>
+                  <a:srgbClr val="FFFFFF"/>
+                </a:solidFill>
+                <a:latin typeface="Verdana"/>
+              </a:rPr>
+              <a:t>Le lendemain, quelqu'un regarde ce qu'il a fait.</a:t>
+            </a:r>
+          </a:p>
+        </p:txBody>
+      </p:sp>
+      <p:sp>
+        <p:nvSpPr>
+          <p:cNvPr id="12" name="TextBox 11"/>
+          <p:cNvSpPr txBox="1"/>
+          <p:nvPr/>
+        </p:nvSpPr>
+        <p:spPr>
+          <a:xfrm>
+            <a:off x="566928" y="6355080"/>
+            <a:ext cx="6400800" cy="219456"/>
+          </a:xfrm>
+          <a:prstGeom prst="rect">
+            <a:avLst/>
+          </a:prstGeom>
+          <a:noFill/>
+        </p:spPr>
+        <p:txBody>
+          <a:bodyPr wrap="square" lIns="0" rIns="0" tIns="0" bIns="0" anchor="t">
+            <a:spAutoFit/>
+          </a:bodyPr>
+          <a:lstStyle/>
+          <a:p>
+            <a:pPr algn="l">
+              <a:lnSpc>
+                <a:spcPct val="135000"/>
+              </a:lnSpc>
+            </a:pPr>
+            <a:r>
+              <a:rPr sz="1200" b="0" i="0">
+                <a:solidFill>
+                  <a:srgbClr val="6E7175"/>
+                </a:solidFill>
+                <a:latin typeface="Verdana"/>
+              </a:rPr>
+              <a:t>F1 · francis · présentation</a:t>
+            </a:r>
+          </a:p>
+        </p:txBody>
+      </p:sp>
+    </p:spTree>
+  </p:cSld>
+  <p:clrMapOvr>
+    <a:masterClrMapping/>
+  </p:clrMapOvr>
+</p:sld>
+</file>
+
 <file path=ppt/slides/slide3.xml><?xml version="1.0" encoding="utf-8"?>
 <p:sld xmlns:a="http://schemas.openxmlformats.org/drawingml/2006/main" xmlns:p="http://schemas.openxmlformats.org/presentationml/2006/main" xmlns:r="http://schemas.openxmlformats.org/officeDocument/2006/relationships">
   <p:cSld>
@@ -10314,7 +12540,7 @@
                 </a:solidFill>
                 <a:latin typeface="Verdana"/>
               </a:rPr>
-              <a:t>COMMENT UN MODULE S'ÉCRIT</a:t>
+              <a:t>LE MÊME DIALOGUE</a:t>
             </a:r>
           </a:p>
         </p:txBody>
@@ -10353,25 +12579,64 @@
                 </a:solidFill>
                 <a:latin typeface="Verdana"/>
               </a:rPr>
-              <a:t>Quatre décisions, toujours dans cet ordre</a:t>
-            </a:r>
-          </a:p>
-        </p:txBody>
-      </p:sp>
-      <p:sp>
-        <p:nvSpPr>
-          <p:cNvPr id="7" name="Rounded Rectangle 6"/>
+              <a:t>Tel que l'élève l'entend</a:t>
+            </a:r>
+          </a:p>
+        </p:txBody>
+      </p:sp>
+      <p:sp>
+        <p:nvSpPr>
+          <p:cNvPr id="7" name="TextBox 6"/>
+          <p:cNvSpPr txBox="1"/>
+          <p:nvPr/>
+        </p:nvSpPr>
+        <p:spPr>
+          <a:xfrm>
+            <a:off x="566928" y="1645920"/>
+            <a:ext cx="11057839" cy="617220"/>
+          </a:xfrm>
+          <a:prstGeom prst="rect">
+            <a:avLst/>
+          </a:prstGeom>
+          <a:noFill/>
+        </p:spPr>
+        <p:txBody>
+          <a:bodyPr wrap="square" lIns="0" rIns="0" tIns="0" bIns="0" anchor="t">
+            <a:spAutoFit/>
+          </a:bodyPr>
+          <a:lstStyle/>
+          <a:p>
+            <a:pPr algn="l">
+              <a:lnSpc>
+                <a:spcPct val="135000"/>
+              </a:lnSpc>
+            </a:pPr>
+            <a:r>
+              <a:rPr sz="1800" b="0" i="0">
+                <a:solidFill>
+                  <a:srgbClr val="6E7175"/>
+                </a:solidFill>
+                <a:latin typeface="Verdana"/>
+              </a:rPr>
+              <a:t>Une voix par personnage, au débit qu'il choisit. Il réécoute une réplique quinze fois sans user la patience de personne.</a:t>
+            </a:r>
+          </a:p>
+        </p:txBody>
+      </p:sp>
+      <p:sp>
+        <p:nvSpPr>
+          <p:cNvPr id="8" name="Rounded Rectangle 7"/>
           <p:cNvSpPr/>
           <p:nvPr/>
         </p:nvSpPr>
         <p:spPr>
           <a:xfrm>
-            <a:off x="566928" y="1810512"/>
-            <a:ext cx="5446623" cy="2052828"/>
+            <a:off x="5209231" y="2372868"/>
+            <a:ext cx="1773232" cy="3799332"/>
           </a:xfrm>
           <a:prstGeom prst="roundRect">
             <a:avLst>
-              <a:gd name="adj" fmla="val 7126"/>
+              <a:gd name="adj" fmla="val 5156"/>
             </a:avLst>
           </a:prstGeom>
           <a:solidFill>
@@ -10379,7 +12644,7 @@
           </a:solidFill>
           <a:ln w="12700">
             <a:solidFill>
-              <a:srgbClr val="EAEAE8"/>
+              <a:srgbClr val="D6D6D2"/>
             </a:solidFill>
           </a:ln>
           <a:effectLst/>
@@ -10404,456 +12669,30 @@
           <a:p/>
         </p:txBody>
       </p:sp>
-      <p:sp>
-        <p:nvSpPr>
-          <p:cNvPr id="8" name="TextBox 7"/>
-          <p:cNvSpPr txBox="1"/>
-          <p:nvPr/>
-        </p:nvSpPr>
-        <p:spPr>
-          <a:xfrm>
-            <a:off x="886968" y="2084831"/>
-            <a:ext cx="4806543" cy="342138"/>
-          </a:xfrm>
-          <a:prstGeom prst="rect">
-            <a:avLst/>
-          </a:prstGeom>
-          <a:noFill/>
-        </p:spPr>
-        <p:txBody>
-          <a:bodyPr wrap="square" lIns="0" rIns="0" tIns="0" bIns="0" anchor="t">
-            <a:spAutoFit/>
-          </a:bodyPr>
-          <a:lstStyle/>
-          <a:p>
-            <a:pPr algn="l">
-              <a:lnSpc>
-                <a:spcPct val="118000"/>
-              </a:lnSpc>
-            </a:pPr>
-            <a:r>
-              <a:rPr sz="2100" b="1" i="0">
-                <a:solidFill>
-                  <a:srgbClr val="A5335F"/>
-                </a:solidFill>
-                <a:latin typeface="Verdana"/>
-              </a:rPr>
-              <a:t>La situation d'abord</a:t>
-            </a:r>
-          </a:p>
-        </p:txBody>
-      </p:sp>
-      <p:sp>
-        <p:nvSpPr>
-          <p:cNvPr id="9" name="TextBox 8"/>
-          <p:cNvSpPr txBox="1"/>
-          <p:nvPr/>
-        </p:nvSpPr>
-        <p:spPr>
-          <a:xfrm>
-            <a:off x="886968" y="2454402"/>
-            <a:ext cx="4806543" cy="1134618"/>
-          </a:xfrm>
-          <a:prstGeom prst="rect">
-            <a:avLst/>
-          </a:prstGeom>
-          <a:noFill/>
-        </p:spPr>
-        <p:txBody>
-          <a:bodyPr wrap="square" lIns="0" rIns="0" tIns="0" bIns="0" anchor="t">
-            <a:spAutoFit/>
-          </a:bodyPr>
-          <a:lstStyle/>
-          <a:p>
-            <a:pPr algn="l">
-              <a:lnSpc>
-                <a:spcPct val="142000"/>
-              </a:lnSpc>
-            </a:pPr>
-            <a:r>
-              <a:rPr sz="1500" b="0" i="0">
-                <a:solidFill>
-                  <a:srgbClr val="3A3D40"/>
-                </a:solidFill>
-                <a:latin typeface="Verdana"/>
-              </a:rPr>
-              <a:t>On prend une situation du programme — appeler un propriétaire, consulter un médecin, répondre à une offre d'emploi. Elle est déjà écrite, on ne la choisit pas.</a:t>
-            </a:r>
-          </a:p>
-        </p:txBody>
-      </p:sp>
-      <p:sp>
-        <p:nvSpPr>
-          <p:cNvPr id="10" name="Rounded Rectangle 9"/>
-          <p:cNvSpPr/>
-          <p:nvPr/>
-        </p:nvSpPr>
-        <p:spPr>
-          <a:xfrm>
-            <a:off x="6178143" y="1810512"/>
-            <a:ext cx="5446623" cy="2052828"/>
-          </a:xfrm>
-          <a:prstGeom prst="roundRect">
-            <a:avLst>
-              <a:gd name="adj" fmla="val 7126"/>
-            </a:avLst>
-          </a:prstGeom>
-          <a:solidFill>
-            <a:srgbClr val="FFFFFF"/>
-          </a:solidFill>
-          <a:ln w="12700">
-            <a:solidFill>
-              <a:srgbClr val="EAEAE8"/>
-            </a:solidFill>
-          </a:ln>
-          <a:effectLst/>
-        </p:spPr>
-        <p:style>
-          <a:lnRef idx="1">
-            <a:schemeClr val="accent1"/>
-          </a:lnRef>
-          <a:fillRef idx="3">
-            <a:schemeClr val="accent1"/>
-          </a:fillRef>
-          <a:effectRef idx="2">
-            <a:schemeClr val="accent1"/>
-          </a:effectRef>
-          <a:fontRef idx="minor">
-            <a:schemeClr val="lt1"/>
-          </a:fontRef>
-        </p:style>
-        <p:txBody>
-          <a:bodyPr rtlCol="0" anchor="ctr"/>
-          <a:lstStyle/>
-          <a:p/>
-        </p:txBody>
-      </p:sp>
-      <p:sp>
-        <p:nvSpPr>
-          <p:cNvPr id="11" name="TextBox 10"/>
-          <p:cNvSpPr txBox="1"/>
-          <p:nvPr/>
-        </p:nvSpPr>
-        <p:spPr>
-          <a:xfrm>
-            <a:off x="6498183" y="2084831"/>
-            <a:ext cx="4806543" cy="342138"/>
-          </a:xfrm>
-          <a:prstGeom prst="rect">
-            <a:avLst/>
-          </a:prstGeom>
-          <a:noFill/>
-        </p:spPr>
-        <p:txBody>
-          <a:bodyPr wrap="square" lIns="0" rIns="0" tIns="0" bIns="0" anchor="t">
-            <a:spAutoFit/>
-          </a:bodyPr>
-          <a:lstStyle/>
-          <a:p>
-            <a:pPr algn="l">
-              <a:lnSpc>
-                <a:spcPct val="118000"/>
-              </a:lnSpc>
-            </a:pPr>
-            <a:r>
-              <a:rPr sz="2100" b="1" i="0">
-                <a:solidFill>
-                  <a:srgbClr val="A5335F"/>
-                </a:solidFill>
-                <a:latin typeface="Verdana"/>
-              </a:rPr>
-              <a:t>Une personne, pas un exemple</a:t>
-            </a:r>
-          </a:p>
-        </p:txBody>
-      </p:sp>
-      <p:sp>
-        <p:nvSpPr>
-          <p:cNvPr id="12" name="TextBox 11"/>
-          <p:cNvSpPr txBox="1"/>
-          <p:nvPr/>
-        </p:nvSpPr>
-        <p:spPr>
-          <a:xfrm>
-            <a:off x="6498183" y="2454402"/>
-            <a:ext cx="4806543" cy="1134618"/>
-          </a:xfrm>
-          <a:prstGeom prst="rect">
-            <a:avLst/>
-          </a:prstGeom>
-          <a:noFill/>
-        </p:spPr>
-        <p:txBody>
-          <a:bodyPr wrap="square" lIns="0" rIns="0" tIns="0" bIns="0" anchor="t">
-            <a:spAutoFit/>
-          </a:bodyPr>
-          <a:lstStyle/>
-          <a:p>
-            <a:pPr algn="l">
-              <a:lnSpc>
-                <a:spcPct val="142000"/>
-              </a:lnSpc>
-            </a:pPr>
-            <a:r>
-              <a:rPr sz="1500" b="0" i="0">
-                <a:solidFill>
-                  <a:srgbClr val="3A3D40"/>
-                </a:solidFill>
-                <a:latin typeface="Verdana"/>
-              </a:rPr>
-              <a:t>Oksana loue le 4B. Elle a un nom, un logement, un problème qui dure depuis trois jours. Un dialogue entre « A » et « B » ne s'écoute pas deux fois.</a:t>
-            </a:r>
-          </a:p>
-        </p:txBody>
-      </p:sp>
-      <p:sp>
-        <p:nvSpPr>
-          <p:cNvPr id="13" name="Rounded Rectangle 12"/>
-          <p:cNvSpPr/>
-          <p:nvPr/>
-        </p:nvSpPr>
-        <p:spPr>
-          <a:xfrm>
-            <a:off x="566928" y="4027932"/>
-            <a:ext cx="5446623" cy="2052828"/>
-          </a:xfrm>
-          <a:prstGeom prst="roundRect">
-            <a:avLst>
-              <a:gd name="adj" fmla="val 7126"/>
-            </a:avLst>
-          </a:prstGeom>
-          <a:solidFill>
-            <a:srgbClr val="FFFFFF"/>
-          </a:solidFill>
-          <a:ln w="12700">
-            <a:solidFill>
-              <a:srgbClr val="EAEAE8"/>
-            </a:solidFill>
-          </a:ln>
-          <a:effectLst/>
-        </p:spPr>
-        <p:style>
-          <a:lnRef idx="1">
-            <a:schemeClr val="accent1"/>
-          </a:lnRef>
-          <a:fillRef idx="3">
-            <a:schemeClr val="accent1"/>
-          </a:fillRef>
-          <a:effectRef idx="2">
-            <a:schemeClr val="accent1"/>
-          </a:effectRef>
-          <a:fontRef idx="minor">
-            <a:schemeClr val="lt1"/>
-          </a:fontRef>
-        </p:style>
-        <p:txBody>
-          <a:bodyPr rtlCol="0" anchor="ctr"/>
-          <a:lstStyle/>
-          <a:p/>
-        </p:txBody>
-      </p:sp>
-      <p:sp>
-        <p:nvSpPr>
-          <p:cNvPr id="14" name="TextBox 13"/>
-          <p:cNvSpPr txBox="1"/>
-          <p:nvPr/>
-        </p:nvSpPr>
-        <p:spPr>
-          <a:xfrm>
-            <a:off x="886968" y="4302252"/>
-            <a:ext cx="4806543" cy="342138"/>
-          </a:xfrm>
-          <a:prstGeom prst="rect">
-            <a:avLst/>
-          </a:prstGeom>
-          <a:noFill/>
-        </p:spPr>
-        <p:txBody>
-          <a:bodyPr wrap="square" lIns="0" rIns="0" tIns="0" bIns="0" anchor="t">
-            <a:spAutoFit/>
-          </a:bodyPr>
-          <a:lstStyle/>
-          <a:p>
-            <a:pPr algn="l">
-              <a:lnSpc>
-                <a:spcPct val="118000"/>
-              </a:lnSpc>
-            </a:pPr>
-            <a:r>
-              <a:rPr sz="2100" b="1" i="0">
-                <a:solidFill>
-                  <a:srgbClr val="A5335F"/>
-                </a:solidFill>
-                <a:latin typeface="Verdana"/>
-              </a:rPr>
-              <a:t>Les savoirs viennent après</a:t>
-            </a:r>
-          </a:p>
-        </p:txBody>
-      </p:sp>
-      <p:sp>
-        <p:nvSpPr>
-          <p:cNvPr id="15" name="TextBox 14"/>
-          <p:cNvSpPr txBox="1"/>
-          <p:nvPr/>
-        </p:nvSpPr>
-        <p:spPr>
-          <a:xfrm>
-            <a:off x="886968" y="4671822"/>
-            <a:ext cx="4806543" cy="1134618"/>
-          </a:xfrm>
-          <a:prstGeom prst="rect">
-            <a:avLst/>
-          </a:prstGeom>
-          <a:noFill/>
-        </p:spPr>
-        <p:txBody>
-          <a:bodyPr wrap="square" lIns="0" rIns="0" tIns="0" bIns="0" anchor="t">
-            <a:spAutoFit/>
-          </a:bodyPr>
-          <a:lstStyle/>
-          <a:p>
-            <a:pPr algn="l">
-              <a:lnSpc>
-                <a:spcPct val="142000"/>
-              </a:lnSpc>
-            </a:pPr>
-            <a:r>
-              <a:rPr sz="1500" b="0" i="0">
-                <a:solidFill>
-                  <a:srgbClr val="3A3D40"/>
-                </a:solidFill>
-                <a:latin typeface="Verdana"/>
-              </a:rPr>
-              <a:t>On regarde ce que le dialogue a naturellement produit, et on va y chercher ce que le programme demande à ce niveau. L'inverse fabrique des phrases que personne ne dit.</a:t>
-            </a:r>
-          </a:p>
-        </p:txBody>
-      </p:sp>
-      <p:sp>
-        <p:nvSpPr>
-          <p:cNvPr id="16" name="Rounded Rectangle 15"/>
-          <p:cNvSpPr/>
-          <p:nvPr/>
-        </p:nvSpPr>
-        <p:spPr>
-          <a:xfrm>
-            <a:off x="6178143" y="4027932"/>
-            <a:ext cx="5446623" cy="2052828"/>
-          </a:xfrm>
-          <a:prstGeom prst="roundRect">
-            <a:avLst>
-              <a:gd name="adj" fmla="val 7126"/>
-            </a:avLst>
-          </a:prstGeom>
-          <a:solidFill>
-            <a:srgbClr val="FFFFFF"/>
-          </a:solidFill>
-          <a:ln w="12700">
-            <a:solidFill>
-              <a:srgbClr val="EAEAE8"/>
-            </a:solidFill>
-          </a:ln>
-          <a:effectLst/>
-        </p:spPr>
-        <p:style>
-          <a:lnRef idx="1">
-            <a:schemeClr val="accent1"/>
-          </a:lnRef>
-          <a:fillRef idx="3">
-            <a:schemeClr val="accent1"/>
-          </a:fillRef>
-          <a:effectRef idx="2">
-            <a:schemeClr val="accent1"/>
-          </a:effectRef>
-          <a:fontRef idx="minor">
-            <a:schemeClr val="lt1"/>
-          </a:fontRef>
-        </p:style>
-        <p:txBody>
-          <a:bodyPr rtlCol="0" anchor="ctr"/>
-          <a:lstStyle/>
-          <a:p/>
-        </p:txBody>
-      </p:sp>
-      <p:sp>
-        <p:nvSpPr>
-          <p:cNvPr id="17" name="TextBox 16"/>
-          <p:cNvSpPr txBox="1"/>
-          <p:nvPr/>
-        </p:nvSpPr>
-        <p:spPr>
-          <a:xfrm>
-            <a:off x="6498183" y="4302252"/>
-            <a:ext cx="4806543" cy="342138"/>
-          </a:xfrm>
-          <a:prstGeom prst="rect">
-            <a:avLst/>
-          </a:prstGeom>
-          <a:noFill/>
-        </p:spPr>
-        <p:txBody>
-          <a:bodyPr wrap="square" lIns="0" rIns="0" tIns="0" bIns="0" anchor="t">
-            <a:spAutoFit/>
-          </a:bodyPr>
-          <a:lstStyle/>
-          <a:p>
-            <a:pPr algn="l">
-              <a:lnSpc>
-                <a:spcPct val="118000"/>
-              </a:lnSpc>
-            </a:pPr>
-            <a:r>
-              <a:rPr sz="2100" b="1" i="0">
-                <a:solidFill>
-                  <a:srgbClr val="A5335F"/>
-                </a:solidFill>
-                <a:latin typeface="Verdana"/>
-              </a:rPr>
-              <a:t>Ce qui manque se rajoute</a:t>
-            </a:r>
-          </a:p>
-        </p:txBody>
-      </p:sp>
-      <p:sp>
-        <p:nvSpPr>
-          <p:cNvPr id="18" name="TextBox 17"/>
-          <p:cNvSpPr txBox="1"/>
-          <p:nvPr/>
-        </p:nvSpPr>
-        <p:spPr>
-          <a:xfrm>
-            <a:off x="6498183" y="4671822"/>
-            <a:ext cx="4806543" cy="1134618"/>
-          </a:xfrm>
-          <a:prstGeom prst="rect">
-            <a:avLst/>
-          </a:prstGeom>
-          <a:noFill/>
-        </p:spPr>
-        <p:txBody>
-          <a:bodyPr wrap="square" lIns="0" rIns="0" tIns="0" bIns="0" anchor="t">
-            <a:spAutoFit/>
-          </a:bodyPr>
-          <a:lstStyle/>
-          <a:p>
-            <a:pPr algn="l">
-              <a:lnSpc>
-                <a:spcPct val="142000"/>
-              </a:lnSpc>
-            </a:pPr>
-            <a:r>
-              <a:rPr sz="1500" b="0" i="0">
-                <a:solidFill>
-                  <a:srgbClr val="3A3D40"/>
-                </a:solidFill>
-                <a:latin typeface="Verdana"/>
-              </a:rPr>
-              <a:t>S'il manque un savoir obligatoire, on retouche la situation pour qu'il y tombe — jamais on ne colle un exercice hors sol à la fin.</a:t>
-            </a:r>
-          </a:p>
-        </p:txBody>
-      </p:sp>
+      <p:pic>
+        <p:nvPicPr>
+          <p:cNvPr id="9" name="Picture 8" descr="tel-05-dialogue.png"/>
+          <p:cNvPicPr>
+            <a:picLocks noChangeAspect="1"/>
+          </p:cNvPicPr>
+          <p:nvPr/>
+        </p:nvPicPr>
+        <p:blipFill>
+          <a:blip r:embed="rId2"/>
+          <a:stretch>
+            <a:fillRect/>
+          </a:stretch>
+        </p:blipFill>
+        <p:spPr>
+          <a:xfrm>
+            <a:off x="5227519" y="2391156"/>
+            <a:ext cx="1736656" cy="3762756"/>
+          </a:xfrm>
+          <a:prstGeom prst="rect">
+            <a:avLst/>
+          </a:prstGeom>
+        </p:spPr>
+      </p:pic>
     </p:spTree>
   </p:cSld>
   <p:clrMapOvr>
@@ -11026,7 +12865,7 @@
                 </a:solidFill>
                 <a:latin typeface="Verdana"/>
               </a:rPr>
-              <a:t>LE CHEMIN</a:t>
+              <a:t>COMMENT UN MODULE S'ÉCRIT</a:t>
             </a:r>
           </a:p>
         </p:txBody>
@@ -11065,7 +12904,7 @@
                 </a:solidFill>
                 <a:latin typeface="Verdana"/>
               </a:rPr>
-              <a:t>Ce que l'élève traverse, dans l'ordre</a:t>
+              <a:t>Quatre décisions, toujours dans cet ordre</a:t>
             </a:r>
           </a:p>
         </p:txBody>
@@ -11079,11 +12918,11 @@
         <p:spPr>
           <a:xfrm>
             <a:off x="566928" y="1810512"/>
-            <a:ext cx="11057839" cy="4005072"/>
+            <a:ext cx="5446623" cy="2052828"/>
           </a:xfrm>
           <a:prstGeom prst="roundRect">
             <a:avLst>
-              <a:gd name="adj" fmla="val 3652"/>
+              <a:gd name="adj" fmla="val 7126"/>
             </a:avLst>
           </a:prstGeom>
           <a:solidFill>
@@ -11124,8 +12963,8 @@
         </p:nvSpPr>
         <p:spPr>
           <a:xfrm>
-            <a:off x="932688" y="1975104"/>
-            <a:ext cx="3222650" cy="237744"/>
+            <a:off x="886968" y="2084831"/>
+            <a:ext cx="4806543" cy="342138"/>
           </a:xfrm>
           <a:prstGeom prst="rect">
             <a:avLst/>
@@ -11140,17 +12979,17 @@
           <a:p>
             <a:pPr algn="l">
               <a:lnSpc>
-                <a:spcPct val="135000"/>
-              </a:lnSpc>
-            </a:pPr>
-            <a:r>
-              <a:rPr sz="1300" b="1" i="0" spc="156">
-                <a:solidFill>
-                  <a:srgbClr val="6E7175"/>
-                </a:solidFill>
-                <a:latin typeface="Verdana"/>
-              </a:rPr>
-              <a:t>ÉTAPE</a:t>
+                <a:spcPct val="118000"/>
+              </a:lnSpc>
+            </a:pPr>
+            <a:r>
+              <a:rPr sz="2100" b="1" i="0">
+                <a:solidFill>
+                  <a:srgbClr val="A5335F"/>
+                </a:solidFill>
+                <a:latin typeface="Verdana"/>
+              </a:rPr>
+              <a:t>La situation d'abord</a:t>
             </a:r>
           </a:p>
         </p:txBody>
@@ -11163,8 +13002,8 @@
         </p:nvSpPr>
         <p:spPr>
           <a:xfrm>
-            <a:off x="4374794" y="1975104"/>
-            <a:ext cx="3222650" cy="237744"/>
+            <a:off x="886968" y="2454402"/>
+            <a:ext cx="4806543" cy="1134618"/>
           </a:xfrm>
           <a:prstGeom prst="rect">
             <a:avLst/>
@@ -11179,196 +13018,44 @@
           <a:p>
             <a:pPr algn="l">
               <a:lnSpc>
-                <a:spcPct val="135000"/>
-              </a:lnSpc>
-            </a:pPr>
-            <a:r>
-              <a:rPr sz="1300" b="1" i="0" spc="156">
-                <a:solidFill>
-                  <a:srgbClr val="6E7175"/>
-                </a:solidFill>
-                <a:latin typeface="Verdana"/>
-              </a:rPr>
-              <a:t>CE QU'IL Y FAIT</a:t>
-            </a:r>
-          </a:p>
-        </p:txBody>
-      </p:sp>
-      <p:sp>
-        <p:nvSpPr>
-          <p:cNvPr id="10" name="TextBox 9"/>
-          <p:cNvSpPr txBox="1"/>
-          <p:nvPr/>
-        </p:nvSpPr>
-        <p:spPr>
-          <a:xfrm>
-            <a:off x="7816900" y="1975104"/>
-            <a:ext cx="3222650" cy="237744"/>
-          </a:xfrm>
-          <a:prstGeom prst="rect">
-            <a:avLst/>
-          </a:prstGeom>
-          <a:noFill/>
-        </p:spPr>
-        <p:txBody>
-          <a:bodyPr wrap="square" lIns="0" rIns="0" tIns="0" bIns="0" anchor="t">
-            <a:spAutoFit/>
-          </a:bodyPr>
-          <a:lstStyle/>
-          <a:p>
-            <a:pPr algn="l">
-              <a:lnSpc>
-                <a:spcPct val="135000"/>
-              </a:lnSpc>
-            </a:pPr>
-            <a:r>
-              <a:rPr sz="1300" b="1" i="0" spc="156">
-                <a:solidFill>
-                  <a:srgbClr val="6E7175"/>
-                </a:solidFill>
-                <a:latin typeface="Verdana"/>
-              </a:rPr>
-              <a:t>CE QU'ON OBSERVE</a:t>
-            </a:r>
-          </a:p>
-        </p:txBody>
-      </p:sp>
-      <p:sp>
-        <p:nvSpPr>
-          <p:cNvPr id="11" name="TextBox 10"/>
-          <p:cNvSpPr txBox="1"/>
-          <p:nvPr/>
-        </p:nvSpPr>
-        <p:spPr>
-          <a:xfrm>
-            <a:off x="932688" y="2395728"/>
-            <a:ext cx="3222650" cy="640080"/>
-          </a:xfrm>
-          <a:prstGeom prst="rect">
-            <a:avLst/>
-          </a:prstGeom>
-          <a:noFill/>
-        </p:spPr>
-        <p:txBody>
-          <a:bodyPr wrap="square" lIns="0" rIns="0" tIns="0" bIns="0" anchor="t">
-            <a:spAutoFit/>
-          </a:bodyPr>
-          <a:lstStyle/>
-          <a:p>
-            <a:pPr algn="l">
-              <a:lnSpc>
-                <a:spcPct val="132000"/>
-              </a:lnSpc>
-            </a:pPr>
-            <a:r>
-              <a:rPr sz="1800" b="1" i="0">
-                <a:solidFill>
-                  <a:srgbClr val="A5335F"/>
-                </a:solidFill>
-                <a:latin typeface="Verdana"/>
-              </a:rPr>
-              <a:t>Je découvre</a:t>
-            </a:r>
-          </a:p>
-        </p:txBody>
-      </p:sp>
-      <p:sp>
-        <p:nvSpPr>
-          <p:cNvPr id="12" name="TextBox 11"/>
-          <p:cNvSpPr txBox="1"/>
-          <p:nvPr/>
-        </p:nvSpPr>
-        <p:spPr>
-          <a:xfrm>
-            <a:off x="4374794" y="2395728"/>
-            <a:ext cx="3222650" cy="640080"/>
-          </a:xfrm>
-          <a:prstGeom prst="rect">
-            <a:avLst/>
-          </a:prstGeom>
-          <a:noFill/>
-        </p:spPr>
-        <p:txBody>
-          <a:bodyPr wrap="square" lIns="0" rIns="0" tIns="0" bIns="0" anchor="t">
-            <a:spAutoFit/>
-          </a:bodyPr>
-          <a:lstStyle/>
-          <a:p>
-            <a:pPr algn="l">
-              <a:lnSpc>
-                <a:spcPct val="132000"/>
-              </a:lnSpc>
-            </a:pPr>
-            <a:r>
-              <a:rPr sz="1800" b="0" i="0">
+                <a:spcPct val="142000"/>
+              </a:lnSpc>
+            </a:pPr>
+            <a:r>
+              <a:rPr sz="1500" b="0" i="0">
                 <a:solidFill>
                   <a:srgbClr val="3A3D40"/>
                 </a:solidFill>
                 <a:latin typeface="Verdana"/>
               </a:rPr>
-              <a:t>Il écoute le dialogue, autant de fois qu'il veut</a:t>
-            </a:r>
-          </a:p>
-        </p:txBody>
-      </p:sp>
-      <p:sp>
-        <p:nvSpPr>
-          <p:cNvPr id="13" name="TextBox 12"/>
-          <p:cNvSpPr txBox="1"/>
-          <p:nvPr/>
-        </p:nvSpPr>
-        <p:spPr>
-          <a:xfrm>
-            <a:off x="7816900" y="2395728"/>
-            <a:ext cx="3222650" cy="640080"/>
-          </a:xfrm>
-          <a:prstGeom prst="rect">
-            <a:avLst/>
-          </a:prstGeom>
-          <a:noFill/>
-        </p:spPr>
-        <p:txBody>
-          <a:bodyPr wrap="square" lIns="0" rIns="0" tIns="0" bIns="0" anchor="t">
-            <a:spAutoFit/>
-          </a:bodyPr>
-          <a:lstStyle/>
-          <a:p>
-            <a:pPr algn="l">
-              <a:lnSpc>
-                <a:spcPct val="132000"/>
-              </a:lnSpc>
-            </a:pPr>
-            <a:r>
-              <a:rPr sz="1800" b="0" i="0">
-                <a:solidFill>
-                  <a:srgbClr val="3A3D40"/>
-                </a:solidFill>
-                <a:latin typeface="Verdana"/>
-              </a:rPr>
-              <a:t>s'il comprend la situation</a:t>
-            </a:r>
-          </a:p>
-        </p:txBody>
-      </p:sp>
-      <p:sp>
-        <p:nvSpPr>
-          <p:cNvPr id="14" name="Rectangle 13"/>
+              <a:t>On prend une situation du programme — appeler un propriétaire, consulter un médecin, répondre à une offre d'emploi. Elle est déjà écrite, on ne la choisit pas.</a:t>
+            </a:r>
+          </a:p>
+        </p:txBody>
+      </p:sp>
+      <p:sp>
+        <p:nvSpPr>
+          <p:cNvPr id="10" name="Rounded Rectangle 9"/>
           <p:cNvSpPr/>
           <p:nvPr/>
         </p:nvSpPr>
         <p:spPr>
           <a:xfrm>
-            <a:off x="932688" y="3108960"/>
-            <a:ext cx="10326319" cy="10058"/>
-          </a:xfrm>
-          <a:prstGeom prst="rect">
-            <a:avLst/>
+            <a:off x="6178143" y="1810512"/>
+            <a:ext cx="5446623" cy="2052828"/>
+          </a:xfrm>
+          <a:prstGeom prst="roundRect">
+            <a:avLst>
+              <a:gd name="adj" fmla="val 7126"/>
+            </a:avLst>
           </a:prstGeom>
           <a:solidFill>
-            <a:srgbClr val="EAEAE8"/>
+            <a:srgbClr val="FFFFFF"/>
           </a:solidFill>
-          <a:ln>
-            <a:noFill/>
+          <a:ln w="12700">
+            <a:solidFill>
+              <a:srgbClr val="EAEAE8"/>
+            </a:solidFill>
           </a:ln>
           <a:effectLst/>
         </p:spPr>
@@ -11394,14 +13081,14 @@
       </p:sp>
       <p:sp>
         <p:nvSpPr>
-          <p:cNvPr id="15" name="TextBox 14"/>
-          <p:cNvSpPr txBox="1"/>
-          <p:nvPr/>
-        </p:nvSpPr>
-        <p:spPr>
-          <a:xfrm>
-            <a:off x="932688" y="3236976"/>
-            <a:ext cx="3222650" cy="640080"/>
+          <p:cNvPr id="11" name="TextBox 10"/>
+          <p:cNvSpPr txBox="1"/>
+          <p:nvPr/>
+        </p:nvSpPr>
+        <p:spPr>
+          <a:xfrm>
+            <a:off x="6498183" y="2084831"/>
+            <a:ext cx="4806543" cy="342138"/>
           </a:xfrm>
           <a:prstGeom prst="rect">
             <a:avLst/>
@@ -11416,31 +13103,31 @@
           <a:p>
             <a:pPr algn="l">
               <a:lnSpc>
-                <a:spcPct val="132000"/>
-              </a:lnSpc>
-            </a:pPr>
-            <a:r>
-              <a:rPr sz="1800" b="1" i="0">
+                <a:spcPct val="118000"/>
+              </a:lnSpc>
+            </a:pPr>
+            <a:r>
+              <a:rPr sz="2100" b="1" i="0">
                 <a:solidFill>
                   <a:srgbClr val="A5335F"/>
                 </a:solidFill>
                 <a:latin typeface="Verdana"/>
               </a:rPr>
-              <a:t>Défi 1 à 3</a:t>
-            </a:r>
-          </a:p>
-        </p:txBody>
-      </p:sp>
-      <p:sp>
-        <p:nvSpPr>
-          <p:cNvPr id="16" name="TextBox 15"/>
-          <p:cNvSpPr txBox="1"/>
-          <p:nvPr/>
-        </p:nvSpPr>
-        <p:spPr>
-          <a:xfrm>
-            <a:off x="4374794" y="3236976"/>
-            <a:ext cx="3222650" cy="640080"/>
+              <a:t>Une personne, pas un exemple</a:t>
+            </a:r>
+          </a:p>
+        </p:txBody>
+      </p:sp>
+      <p:sp>
+        <p:nvSpPr>
+          <p:cNvPr id="12" name="TextBox 11"/>
+          <p:cNvSpPr txBox="1"/>
+          <p:nvPr/>
+        </p:nvSpPr>
+        <p:spPr>
+          <a:xfrm>
+            <a:off x="6498183" y="2454402"/>
+            <a:ext cx="4806543" cy="1134618"/>
           </a:xfrm>
           <a:prstGeom prst="rect">
             <a:avLst/>
@@ -11455,79 +13142,44 @@
           <a:p>
             <a:pPr algn="l">
               <a:lnSpc>
-                <a:spcPct val="132000"/>
-              </a:lnSpc>
-            </a:pPr>
-            <a:r>
-              <a:rPr sz="1800" b="0" i="0">
+                <a:spcPct val="142000"/>
+              </a:lnSpc>
+            </a:pPr>
+            <a:r>
+              <a:rPr sz="1500" b="0" i="0">
                 <a:solidFill>
                   <a:srgbClr val="3A3D40"/>
                 </a:solidFill>
                 <a:latin typeface="Verdana"/>
               </a:rPr>
-              <a:t>Il travaille un savoir à la fois, en exercices</a:t>
-            </a:r>
-          </a:p>
-        </p:txBody>
-      </p:sp>
-      <p:sp>
-        <p:nvSpPr>
-          <p:cNvPr id="17" name="TextBox 16"/>
-          <p:cNvSpPr txBox="1"/>
-          <p:nvPr/>
-        </p:nvSpPr>
-        <p:spPr>
-          <a:xfrm>
-            <a:off x="7816900" y="3236976"/>
-            <a:ext cx="3222650" cy="640080"/>
-          </a:xfrm>
-          <a:prstGeom prst="rect">
-            <a:avLst/>
-          </a:prstGeom>
-          <a:noFill/>
-        </p:spPr>
-        <p:txBody>
-          <a:bodyPr wrap="square" lIns="0" rIns="0" tIns="0" bIns="0" anchor="t">
-            <a:spAutoFit/>
-          </a:bodyPr>
-          <a:lstStyle/>
-          <a:p>
-            <a:pPr algn="l">
-              <a:lnSpc>
-                <a:spcPct val="132000"/>
-              </a:lnSpc>
-            </a:pPr>
-            <a:r>
-              <a:rPr sz="1800" b="0" i="0">
-                <a:solidFill>
-                  <a:srgbClr val="3A3D40"/>
-                </a:solidFill>
-                <a:latin typeface="Verdana"/>
-              </a:rPr>
-              <a:t>où il se trompe</a:t>
-            </a:r>
-          </a:p>
-        </p:txBody>
-      </p:sp>
-      <p:sp>
-        <p:nvSpPr>
-          <p:cNvPr id="18" name="Rectangle 17"/>
+              <a:t>Oksana loue le 4B. Elle a un nom, un logement, un problème qui dure depuis trois jours. Un dialogue entre « A » et « B » ne s'écoute pas deux fois.</a:t>
+            </a:r>
+          </a:p>
+        </p:txBody>
+      </p:sp>
+      <p:sp>
+        <p:nvSpPr>
+          <p:cNvPr id="13" name="Rounded Rectangle 12"/>
           <p:cNvSpPr/>
           <p:nvPr/>
         </p:nvSpPr>
         <p:spPr>
           <a:xfrm>
-            <a:off x="932688" y="3950208"/>
-            <a:ext cx="10326319" cy="10058"/>
-          </a:xfrm>
-          <a:prstGeom prst="rect">
-            <a:avLst/>
+            <a:off x="566928" y="4027932"/>
+            <a:ext cx="5446623" cy="2052828"/>
+          </a:xfrm>
+          <a:prstGeom prst="roundRect">
+            <a:avLst>
+              <a:gd name="adj" fmla="val 7126"/>
+            </a:avLst>
           </a:prstGeom>
           <a:solidFill>
-            <a:srgbClr val="EAEAE8"/>
+            <a:srgbClr val="FFFFFF"/>
           </a:solidFill>
-          <a:ln>
-            <a:noFill/>
+          <a:ln w="12700">
+            <a:solidFill>
+              <a:srgbClr val="EAEAE8"/>
+            </a:solidFill>
           </a:ln>
           <a:effectLst/>
         </p:spPr>
@@ -11553,14 +13205,14 @@
       </p:sp>
       <p:sp>
         <p:nvSpPr>
-          <p:cNvPr id="19" name="TextBox 18"/>
-          <p:cNvSpPr txBox="1"/>
-          <p:nvPr/>
-        </p:nvSpPr>
-        <p:spPr>
-          <a:xfrm>
-            <a:off x="932688" y="4078224"/>
-            <a:ext cx="3222650" cy="640080"/>
+          <p:cNvPr id="14" name="TextBox 13"/>
+          <p:cNvSpPr txBox="1"/>
+          <p:nvPr/>
+        </p:nvSpPr>
+        <p:spPr>
+          <a:xfrm>
+            <a:off x="886968" y="4302252"/>
+            <a:ext cx="4806543" cy="342138"/>
           </a:xfrm>
           <a:prstGeom prst="rect">
             <a:avLst/>
@@ -11575,31 +13227,31 @@
           <a:p>
             <a:pPr algn="l">
               <a:lnSpc>
-                <a:spcPct val="132000"/>
-              </a:lnSpc>
-            </a:pPr>
-            <a:r>
-              <a:rPr sz="1800" b="1" i="0">
+                <a:spcPct val="118000"/>
+              </a:lnSpc>
+            </a:pPr>
+            <a:r>
+              <a:rPr sz="2100" b="1" i="0">
                 <a:solidFill>
                   <a:srgbClr val="A5335F"/>
                 </a:solidFill>
                 <a:latin typeface="Verdana"/>
               </a:rPr>
-              <a:t>Je me lance</a:t>
-            </a:r>
-          </a:p>
-        </p:txBody>
-      </p:sp>
-      <p:sp>
-        <p:nvSpPr>
-          <p:cNvPr id="20" name="TextBox 19"/>
-          <p:cNvSpPr txBox="1"/>
-          <p:nvPr/>
-        </p:nvSpPr>
-        <p:spPr>
-          <a:xfrm>
-            <a:off x="4374794" y="4078224"/>
-            <a:ext cx="3222650" cy="640080"/>
+              <a:t>Les savoirs viennent après</a:t>
+            </a:r>
+          </a:p>
+        </p:txBody>
+      </p:sp>
+      <p:sp>
+        <p:nvSpPr>
+          <p:cNvPr id="15" name="TextBox 14"/>
+          <p:cNvSpPr txBox="1"/>
+          <p:nvPr/>
+        </p:nvSpPr>
+        <p:spPr>
+          <a:xfrm>
+            <a:off x="886968" y="4671822"/>
+            <a:ext cx="4806543" cy="1134618"/>
           </a:xfrm>
           <a:prstGeom prst="rect">
             <a:avLst/>
@@ -11614,79 +13266,44 @@
           <a:p>
             <a:pPr algn="l">
               <a:lnSpc>
-                <a:spcPct val="132000"/>
-              </a:lnSpc>
-            </a:pPr>
-            <a:r>
-              <a:rPr sz="1800" b="0" i="0">
+                <a:spcPct val="142000"/>
+              </a:lnSpc>
+            </a:pPr>
+            <a:r>
+              <a:rPr sz="1500" b="0" i="0">
                 <a:solidFill>
                   <a:srgbClr val="3A3D40"/>
                 </a:solidFill>
                 <a:latin typeface="Verdana"/>
               </a:rPr>
-              <a:t>Il produit — sa voix, puis un texte</a:t>
-            </a:r>
-          </a:p>
-        </p:txBody>
-      </p:sp>
-      <p:sp>
-        <p:nvSpPr>
-          <p:cNvPr id="21" name="TextBox 20"/>
-          <p:cNvSpPr txBox="1"/>
-          <p:nvPr/>
-        </p:nvSpPr>
-        <p:spPr>
-          <a:xfrm>
-            <a:off x="7816900" y="4078224"/>
-            <a:ext cx="3222650" cy="640080"/>
-          </a:xfrm>
-          <a:prstGeom prst="rect">
-            <a:avLst/>
-          </a:prstGeom>
-          <a:noFill/>
-        </p:spPr>
-        <p:txBody>
-          <a:bodyPr wrap="square" lIns="0" rIns="0" tIns="0" bIns="0" anchor="t">
-            <a:spAutoFit/>
-          </a:bodyPr>
-          <a:lstStyle/>
-          <a:p>
-            <a:pPr algn="l">
-              <a:lnSpc>
-                <a:spcPct val="132000"/>
-              </a:lnSpc>
-            </a:pPr>
-            <a:r>
-              <a:rPr sz="1800" b="0" i="0">
-                <a:solidFill>
-                  <a:srgbClr val="3A3D40"/>
-                </a:solidFill>
-                <a:latin typeface="Verdana"/>
-              </a:rPr>
-              <a:t>ce qu'il sait faire seul</a:t>
-            </a:r>
-          </a:p>
-        </p:txBody>
-      </p:sp>
-      <p:sp>
-        <p:nvSpPr>
-          <p:cNvPr id="22" name="Rectangle 21"/>
+              <a:t>On regarde ce que le dialogue a naturellement produit, et on va y chercher ce que le programme demande à ce niveau. L'inverse fabrique des phrases que personne ne dit.</a:t>
+            </a:r>
+          </a:p>
+        </p:txBody>
+      </p:sp>
+      <p:sp>
+        <p:nvSpPr>
+          <p:cNvPr id="16" name="Rounded Rectangle 15"/>
           <p:cNvSpPr/>
           <p:nvPr/>
         </p:nvSpPr>
         <p:spPr>
           <a:xfrm>
-            <a:off x="932688" y="4791456"/>
-            <a:ext cx="10326319" cy="10058"/>
-          </a:xfrm>
-          <a:prstGeom prst="rect">
-            <a:avLst/>
+            <a:off x="6178143" y="4027932"/>
+            <a:ext cx="5446623" cy="2052828"/>
+          </a:xfrm>
+          <a:prstGeom prst="roundRect">
+            <a:avLst>
+              <a:gd name="adj" fmla="val 7126"/>
+            </a:avLst>
           </a:prstGeom>
           <a:solidFill>
-            <a:srgbClr val="EAEAE8"/>
+            <a:srgbClr val="FFFFFF"/>
           </a:solidFill>
-          <a:ln>
-            <a:noFill/>
+          <a:ln w="12700">
+            <a:solidFill>
+              <a:srgbClr val="EAEAE8"/>
+            </a:solidFill>
           </a:ln>
           <a:effectLst/>
         </p:spPr>
@@ -11712,14 +13329,14 @@
       </p:sp>
       <p:sp>
         <p:nvSpPr>
-          <p:cNvPr id="23" name="TextBox 22"/>
-          <p:cNvSpPr txBox="1"/>
-          <p:nvPr/>
-        </p:nvSpPr>
-        <p:spPr>
-          <a:xfrm>
-            <a:off x="932688" y="4919472"/>
-            <a:ext cx="3222650" cy="640080"/>
+          <p:cNvPr id="17" name="TextBox 16"/>
+          <p:cNvSpPr txBox="1"/>
+          <p:nvPr/>
+        </p:nvSpPr>
+        <p:spPr>
+          <a:xfrm>
+            <a:off x="6498183" y="4302252"/>
+            <a:ext cx="4806543" cy="342138"/>
           </a:xfrm>
           <a:prstGeom prst="rect">
             <a:avLst/>
@@ -11734,31 +13351,31 @@
           <a:p>
             <a:pPr algn="l">
               <a:lnSpc>
-                <a:spcPct val="132000"/>
-              </a:lnSpc>
-            </a:pPr>
-            <a:r>
-              <a:rPr sz="1800" b="1" i="0">
+                <a:spcPct val="118000"/>
+              </a:lnSpc>
+            </a:pPr>
+            <a:r>
+              <a:rPr sz="2100" b="1" i="0">
                 <a:solidFill>
                   <a:srgbClr val="A5335F"/>
                 </a:solidFill>
                 <a:latin typeface="Verdana"/>
               </a:rPr>
-              <a:t>Je retiens des mots</a:t>
-            </a:r>
-          </a:p>
-        </p:txBody>
-      </p:sp>
-      <p:sp>
-        <p:nvSpPr>
-          <p:cNvPr id="24" name="TextBox 23"/>
-          <p:cNvSpPr txBox="1"/>
-          <p:nvPr/>
-        </p:nvSpPr>
-        <p:spPr>
-          <a:xfrm>
-            <a:off x="4374794" y="4919472"/>
-            <a:ext cx="3222650" cy="640080"/>
+              <a:t>Ce qui manque se rajoute</a:t>
+            </a:r>
+          </a:p>
+        </p:txBody>
+      </p:sp>
+      <p:sp>
+        <p:nvSpPr>
+          <p:cNvPr id="18" name="TextBox 17"/>
+          <p:cNvSpPr txBox="1"/>
+          <p:nvPr/>
+        </p:nvSpPr>
+        <p:spPr>
+          <a:xfrm>
+            <a:off x="6498183" y="4671822"/>
+            <a:ext cx="4806543" cy="1134618"/>
           </a:xfrm>
           <a:prstGeom prst="rect">
             <a:avLst/>
@@ -11773,56 +13390,17 @@
           <a:p>
             <a:pPr algn="l">
               <a:lnSpc>
-                <a:spcPct val="132000"/>
-              </a:lnSpc>
-            </a:pPr>
-            <a:r>
-              <a:rPr sz="1800" b="0" i="0">
+                <a:spcPct val="142000"/>
+              </a:lnSpc>
+            </a:pPr>
+            <a:r>
+              <a:rPr sz="1500" b="0" i="0">
                 <a:solidFill>
                   <a:srgbClr val="3A3D40"/>
                 </a:solidFill>
                 <a:latin typeface="Verdana"/>
               </a:rPr>
-              <a:t>Il reprend le vocabulaire de la situation</a:t>
-            </a:r>
-          </a:p>
-        </p:txBody>
-      </p:sp>
-      <p:sp>
-        <p:nvSpPr>
-          <p:cNvPr id="25" name="TextBox 24"/>
-          <p:cNvSpPr txBox="1"/>
-          <p:nvPr/>
-        </p:nvSpPr>
-        <p:spPr>
-          <a:xfrm>
-            <a:off x="7816900" y="4919472"/>
-            <a:ext cx="3222650" cy="640080"/>
-          </a:xfrm>
-          <a:prstGeom prst="rect">
-            <a:avLst/>
-          </a:prstGeom>
-          <a:noFill/>
-        </p:spPr>
-        <p:txBody>
-          <a:bodyPr wrap="square" lIns="0" rIns="0" tIns="0" bIns="0" anchor="t">
-            <a:spAutoFit/>
-          </a:bodyPr>
-          <a:lstStyle/>
-          <a:p>
-            <a:pPr algn="l">
-              <a:lnSpc>
-                <a:spcPct val="132000"/>
-              </a:lnSpc>
-            </a:pPr>
-            <a:r>
-              <a:rPr sz="1800" b="0" i="0">
-                <a:solidFill>
-                  <a:srgbClr val="3A3D40"/>
-                </a:solidFill>
-                <a:latin typeface="Verdana"/>
-              </a:rPr>
-              <a:t>ce qui reste une semaine après</a:t>
+              <a:t>S'il manque un savoir obligatoire, on retouche la situation pour qu'il y tombe — jamais on ne colle un exercice hors sol à la fin.</a:t>
             </a:r>
           </a:p>
         </p:txBody>
@@ -11999,110 +13577,64 @@
                 </a:solidFill>
                 <a:latin typeface="Verdana"/>
               </a:rPr>
-              <a:t>LA FORME DES EXERCICES</a:t>
-            </a:r>
-          </a:p>
-        </p:txBody>
-      </p:sp>
-      <p:sp>
-        <p:nvSpPr>
-          <p:cNvPr id="6" name="Rounded Rectangle 5"/>
+              <a:t>LE CHEMIN</a:t>
+            </a:r>
+          </a:p>
+        </p:txBody>
+      </p:sp>
+      <p:sp>
+        <p:nvSpPr>
+          <p:cNvPr id="6" name="TextBox 5"/>
+          <p:cNvSpPr txBox="1"/>
+          <p:nvPr/>
+        </p:nvSpPr>
+        <p:spPr>
+          <a:xfrm>
+            <a:off x="566928" y="749808"/>
+            <a:ext cx="11057839" cy="877824"/>
+          </a:xfrm>
+          <a:prstGeom prst="rect">
+            <a:avLst/>
+          </a:prstGeom>
+          <a:noFill/>
+        </p:spPr>
+        <p:txBody>
+          <a:bodyPr wrap="square" lIns="0" rIns="0" tIns="0" bIns="0" anchor="t">
+            <a:spAutoFit/>
+          </a:bodyPr>
+          <a:lstStyle/>
+          <a:p>
+            <a:pPr algn="l">
+              <a:lnSpc>
+                <a:spcPct val="115000"/>
+              </a:lnSpc>
+            </a:pPr>
+            <a:r>
+              <a:rPr sz="3400" b="1" i="0">
+                <a:solidFill>
+                  <a:srgbClr val="17181A"/>
+                </a:solidFill>
+                <a:latin typeface="Verdana"/>
+              </a:rPr>
+              <a:t>Ce que l'élève traverse, dans l'ordre</a:t>
+            </a:r>
+          </a:p>
+        </p:txBody>
+      </p:sp>
+      <p:sp>
+        <p:nvSpPr>
+          <p:cNvPr id="7" name="Rounded Rectangle 6"/>
           <p:cNvSpPr/>
           <p:nvPr/>
         </p:nvSpPr>
         <p:spPr>
           <a:xfrm>
-            <a:off x="566928" y="1225296"/>
-            <a:ext cx="11057839" cy="1441196"/>
+            <a:off x="566928" y="1810512"/>
+            <a:ext cx="11057839" cy="4005072"/>
           </a:xfrm>
           <a:prstGeom prst="roundRect">
             <a:avLst>
-              <a:gd name="adj" fmla="val 10151"/>
-            </a:avLst>
-          </a:prstGeom>
-          <a:solidFill>
-            <a:srgbClr val="FCE9F0"/>
-          </a:solidFill>
-          <a:ln w="12700">
-            <a:solidFill>
-              <a:srgbClr val="EAEAE8"/>
-            </a:solidFill>
-          </a:ln>
-          <a:effectLst/>
-        </p:spPr>
-        <p:style>
-          <a:lnRef idx="1">
-            <a:schemeClr val="accent1"/>
-          </a:lnRef>
-          <a:fillRef idx="3">
-            <a:schemeClr val="accent1"/>
-          </a:fillRef>
-          <a:effectRef idx="2">
-            <a:schemeClr val="accent1"/>
-          </a:effectRef>
-          <a:fontRef idx="minor">
-            <a:schemeClr val="lt1"/>
-          </a:fontRef>
-        </p:style>
-        <p:txBody>
-          <a:bodyPr rtlCol="0" anchor="ctr"/>
-          <a:lstStyle/>
-          <a:p/>
-        </p:txBody>
-      </p:sp>
-      <p:sp>
-        <p:nvSpPr>
-          <p:cNvPr id="7" name="TextBox 6"/>
-          <p:cNvSpPr txBox="1"/>
-          <p:nvPr/>
-        </p:nvSpPr>
-        <p:spPr>
-          <a:xfrm>
-            <a:off x="1298448" y="1682496"/>
-            <a:ext cx="9594799" cy="618235"/>
-          </a:xfrm>
-          <a:prstGeom prst="rect">
-            <a:avLst/>
-          </a:prstGeom>
-          <a:noFill/>
-        </p:spPr>
-        <p:txBody>
-          <a:bodyPr wrap="square" lIns="0" rIns="0" tIns="0" bIns="0" anchor="t">
-            <a:spAutoFit/>
-          </a:bodyPr>
-          <a:lstStyle/>
-          <a:p>
-            <a:pPr algn="l">
-              <a:lnSpc>
-                <a:spcPct val="122000"/>
-              </a:lnSpc>
-            </a:pPr>
-            <a:r>
-              <a:rPr sz="3400" b="1" i="0">
-                <a:solidFill>
-                  <a:srgbClr val="17181A"/>
-                </a:solidFill>
-                <a:latin typeface="Verdana"/>
-              </a:rPr>
-              <a:t>Sept familles, pas une de plus.</a:t>
-            </a:r>
-          </a:p>
-        </p:txBody>
-      </p:sp>
-      <p:sp>
-        <p:nvSpPr>
-          <p:cNvPr id="8" name="Rounded Rectangle 7"/>
-          <p:cNvSpPr/>
-          <p:nvPr/>
-        </p:nvSpPr>
-        <p:spPr>
-          <a:xfrm>
-            <a:off x="566928" y="2940812"/>
-            <a:ext cx="11057839" cy="2040128"/>
-          </a:xfrm>
-          <a:prstGeom prst="roundRect">
-            <a:avLst>
-              <a:gd name="adj" fmla="val 7171"/>
+              <a:gd name="adj" fmla="val 3652"/>
             </a:avLst>
           </a:prstGeom>
           <a:solidFill>
@@ -12137,14 +13669,53 @@
       </p:sp>
       <p:sp>
         <p:nvSpPr>
+          <p:cNvPr id="8" name="TextBox 7"/>
+          <p:cNvSpPr txBox="1"/>
+          <p:nvPr/>
+        </p:nvSpPr>
+        <p:spPr>
+          <a:xfrm>
+            <a:off x="932688" y="1975104"/>
+            <a:ext cx="3222650" cy="237744"/>
+          </a:xfrm>
+          <a:prstGeom prst="rect">
+            <a:avLst/>
+          </a:prstGeom>
+          <a:noFill/>
+        </p:spPr>
+        <p:txBody>
+          <a:bodyPr wrap="square" lIns="0" rIns="0" tIns="0" bIns="0" anchor="t">
+            <a:spAutoFit/>
+          </a:bodyPr>
+          <a:lstStyle/>
+          <a:p>
+            <a:pPr algn="l">
+              <a:lnSpc>
+                <a:spcPct val="135000"/>
+              </a:lnSpc>
+            </a:pPr>
+            <a:r>
+              <a:rPr sz="1300" b="1" i="0" spc="156">
+                <a:solidFill>
+                  <a:srgbClr val="6E7175"/>
+                </a:solidFill>
+                <a:latin typeface="Verdana"/>
+              </a:rPr>
+              <a:t>ÉTAPE</a:t>
+            </a:r>
+          </a:p>
+        </p:txBody>
+      </p:sp>
+      <p:sp>
+        <p:nvSpPr>
           <p:cNvPr id="9" name="TextBox 8"/>
           <p:cNvSpPr txBox="1"/>
           <p:nvPr/>
         </p:nvSpPr>
         <p:spPr>
           <a:xfrm>
-            <a:off x="969264" y="3215132"/>
-            <a:ext cx="10234879" cy="1582928"/>
+            <a:off x="4374794" y="1975104"/>
+            <a:ext cx="3222650" cy="237744"/>
           </a:xfrm>
           <a:prstGeom prst="rect">
             <a:avLst/>
@@ -12159,17 +13730,650 @@
           <a:p>
             <a:pPr algn="l">
               <a:lnSpc>
-                <a:spcPct val="145000"/>
-              </a:lnSpc>
-            </a:pPr>
-            <a:r>
-              <a:rPr sz="2000" b="0" i="0">
-                <a:solidFill>
-                  <a:srgbClr val="4B4F52"/>
-                </a:solidFill>
-                <a:latin typeface="Verdana"/>
-              </a:rPr>
-              <a:t>Vrai ou faux, associer, des cases à écrire, un texte à trous, des images, une question ouverte, un tableau. Un élève de francisation dépense beaucoup d'énergie à comprendre ce qu'on lui demande : il l'apprend une fois, puis il ne pense plus qu'au français.</a:t>
+                <a:spcPct val="135000"/>
+              </a:lnSpc>
+            </a:pPr>
+            <a:r>
+              <a:rPr sz="1300" b="1" i="0" spc="156">
+                <a:solidFill>
+                  <a:srgbClr val="6E7175"/>
+                </a:solidFill>
+                <a:latin typeface="Verdana"/>
+              </a:rPr>
+              <a:t>CE QU'IL Y FAIT</a:t>
+            </a:r>
+          </a:p>
+        </p:txBody>
+      </p:sp>
+      <p:sp>
+        <p:nvSpPr>
+          <p:cNvPr id="10" name="TextBox 9"/>
+          <p:cNvSpPr txBox="1"/>
+          <p:nvPr/>
+        </p:nvSpPr>
+        <p:spPr>
+          <a:xfrm>
+            <a:off x="7816900" y="1975104"/>
+            <a:ext cx="3222650" cy="237744"/>
+          </a:xfrm>
+          <a:prstGeom prst="rect">
+            <a:avLst/>
+          </a:prstGeom>
+          <a:noFill/>
+        </p:spPr>
+        <p:txBody>
+          <a:bodyPr wrap="square" lIns="0" rIns="0" tIns="0" bIns="0" anchor="t">
+            <a:spAutoFit/>
+          </a:bodyPr>
+          <a:lstStyle/>
+          <a:p>
+            <a:pPr algn="l">
+              <a:lnSpc>
+                <a:spcPct val="135000"/>
+              </a:lnSpc>
+            </a:pPr>
+            <a:r>
+              <a:rPr sz="1300" b="1" i="0" spc="156">
+                <a:solidFill>
+                  <a:srgbClr val="6E7175"/>
+                </a:solidFill>
+                <a:latin typeface="Verdana"/>
+              </a:rPr>
+              <a:t>CE QU'ON OBSERVE</a:t>
+            </a:r>
+          </a:p>
+        </p:txBody>
+      </p:sp>
+      <p:sp>
+        <p:nvSpPr>
+          <p:cNvPr id="11" name="TextBox 10"/>
+          <p:cNvSpPr txBox="1"/>
+          <p:nvPr/>
+        </p:nvSpPr>
+        <p:spPr>
+          <a:xfrm>
+            <a:off x="932688" y="2395728"/>
+            <a:ext cx="3222650" cy="640080"/>
+          </a:xfrm>
+          <a:prstGeom prst="rect">
+            <a:avLst/>
+          </a:prstGeom>
+          <a:noFill/>
+        </p:spPr>
+        <p:txBody>
+          <a:bodyPr wrap="square" lIns="0" rIns="0" tIns="0" bIns="0" anchor="t">
+            <a:spAutoFit/>
+          </a:bodyPr>
+          <a:lstStyle/>
+          <a:p>
+            <a:pPr algn="l">
+              <a:lnSpc>
+                <a:spcPct val="132000"/>
+              </a:lnSpc>
+            </a:pPr>
+            <a:r>
+              <a:rPr sz="1800" b="1" i="0">
+                <a:solidFill>
+                  <a:srgbClr val="A5335F"/>
+                </a:solidFill>
+                <a:latin typeface="Verdana"/>
+              </a:rPr>
+              <a:t>Je découvre</a:t>
+            </a:r>
+          </a:p>
+        </p:txBody>
+      </p:sp>
+      <p:sp>
+        <p:nvSpPr>
+          <p:cNvPr id="12" name="TextBox 11"/>
+          <p:cNvSpPr txBox="1"/>
+          <p:nvPr/>
+        </p:nvSpPr>
+        <p:spPr>
+          <a:xfrm>
+            <a:off x="4374794" y="2395728"/>
+            <a:ext cx="3222650" cy="640080"/>
+          </a:xfrm>
+          <a:prstGeom prst="rect">
+            <a:avLst/>
+          </a:prstGeom>
+          <a:noFill/>
+        </p:spPr>
+        <p:txBody>
+          <a:bodyPr wrap="square" lIns="0" rIns="0" tIns="0" bIns="0" anchor="t">
+            <a:spAutoFit/>
+          </a:bodyPr>
+          <a:lstStyle/>
+          <a:p>
+            <a:pPr algn="l">
+              <a:lnSpc>
+                <a:spcPct val="132000"/>
+              </a:lnSpc>
+            </a:pPr>
+            <a:r>
+              <a:rPr sz="1800" b="0" i="0">
+                <a:solidFill>
+                  <a:srgbClr val="3A3D40"/>
+                </a:solidFill>
+                <a:latin typeface="Verdana"/>
+              </a:rPr>
+              <a:t>Il écoute le dialogue, autant de fois qu'il veut</a:t>
+            </a:r>
+          </a:p>
+        </p:txBody>
+      </p:sp>
+      <p:sp>
+        <p:nvSpPr>
+          <p:cNvPr id="13" name="TextBox 12"/>
+          <p:cNvSpPr txBox="1"/>
+          <p:nvPr/>
+        </p:nvSpPr>
+        <p:spPr>
+          <a:xfrm>
+            <a:off x="7816900" y="2395728"/>
+            <a:ext cx="3222650" cy="640080"/>
+          </a:xfrm>
+          <a:prstGeom prst="rect">
+            <a:avLst/>
+          </a:prstGeom>
+          <a:noFill/>
+        </p:spPr>
+        <p:txBody>
+          <a:bodyPr wrap="square" lIns="0" rIns="0" tIns="0" bIns="0" anchor="t">
+            <a:spAutoFit/>
+          </a:bodyPr>
+          <a:lstStyle/>
+          <a:p>
+            <a:pPr algn="l">
+              <a:lnSpc>
+                <a:spcPct val="132000"/>
+              </a:lnSpc>
+            </a:pPr>
+            <a:r>
+              <a:rPr sz="1800" b="0" i="0">
+                <a:solidFill>
+                  <a:srgbClr val="3A3D40"/>
+                </a:solidFill>
+                <a:latin typeface="Verdana"/>
+              </a:rPr>
+              <a:t>s'il comprend la situation</a:t>
+            </a:r>
+          </a:p>
+        </p:txBody>
+      </p:sp>
+      <p:sp>
+        <p:nvSpPr>
+          <p:cNvPr id="14" name="Rectangle 13"/>
+          <p:cNvSpPr/>
+          <p:nvPr/>
+        </p:nvSpPr>
+        <p:spPr>
+          <a:xfrm>
+            <a:off x="932688" y="3108960"/>
+            <a:ext cx="10326319" cy="10058"/>
+          </a:xfrm>
+          <a:prstGeom prst="rect">
+            <a:avLst/>
+          </a:prstGeom>
+          <a:solidFill>
+            <a:srgbClr val="EAEAE8"/>
+          </a:solidFill>
+          <a:ln>
+            <a:noFill/>
+          </a:ln>
+          <a:effectLst/>
+        </p:spPr>
+        <p:style>
+          <a:lnRef idx="1">
+            <a:schemeClr val="accent1"/>
+          </a:lnRef>
+          <a:fillRef idx="3">
+            <a:schemeClr val="accent1"/>
+          </a:fillRef>
+          <a:effectRef idx="2">
+            <a:schemeClr val="accent1"/>
+          </a:effectRef>
+          <a:fontRef idx="minor">
+            <a:schemeClr val="lt1"/>
+          </a:fontRef>
+        </p:style>
+        <p:txBody>
+          <a:bodyPr rtlCol="0" anchor="ctr"/>
+          <a:lstStyle/>
+          <a:p/>
+        </p:txBody>
+      </p:sp>
+      <p:sp>
+        <p:nvSpPr>
+          <p:cNvPr id="15" name="TextBox 14"/>
+          <p:cNvSpPr txBox="1"/>
+          <p:nvPr/>
+        </p:nvSpPr>
+        <p:spPr>
+          <a:xfrm>
+            <a:off x="932688" y="3236976"/>
+            <a:ext cx="3222650" cy="640080"/>
+          </a:xfrm>
+          <a:prstGeom prst="rect">
+            <a:avLst/>
+          </a:prstGeom>
+          <a:noFill/>
+        </p:spPr>
+        <p:txBody>
+          <a:bodyPr wrap="square" lIns="0" rIns="0" tIns="0" bIns="0" anchor="t">
+            <a:spAutoFit/>
+          </a:bodyPr>
+          <a:lstStyle/>
+          <a:p>
+            <a:pPr algn="l">
+              <a:lnSpc>
+                <a:spcPct val="132000"/>
+              </a:lnSpc>
+            </a:pPr>
+            <a:r>
+              <a:rPr sz="1800" b="1" i="0">
+                <a:solidFill>
+                  <a:srgbClr val="A5335F"/>
+                </a:solidFill>
+                <a:latin typeface="Verdana"/>
+              </a:rPr>
+              <a:t>Défi 1 à 3</a:t>
+            </a:r>
+          </a:p>
+        </p:txBody>
+      </p:sp>
+      <p:sp>
+        <p:nvSpPr>
+          <p:cNvPr id="16" name="TextBox 15"/>
+          <p:cNvSpPr txBox="1"/>
+          <p:nvPr/>
+        </p:nvSpPr>
+        <p:spPr>
+          <a:xfrm>
+            <a:off x="4374794" y="3236976"/>
+            <a:ext cx="3222650" cy="640080"/>
+          </a:xfrm>
+          <a:prstGeom prst="rect">
+            <a:avLst/>
+          </a:prstGeom>
+          <a:noFill/>
+        </p:spPr>
+        <p:txBody>
+          <a:bodyPr wrap="square" lIns="0" rIns="0" tIns="0" bIns="0" anchor="t">
+            <a:spAutoFit/>
+          </a:bodyPr>
+          <a:lstStyle/>
+          <a:p>
+            <a:pPr algn="l">
+              <a:lnSpc>
+                <a:spcPct val="132000"/>
+              </a:lnSpc>
+            </a:pPr>
+            <a:r>
+              <a:rPr sz="1800" b="0" i="0">
+                <a:solidFill>
+                  <a:srgbClr val="3A3D40"/>
+                </a:solidFill>
+                <a:latin typeface="Verdana"/>
+              </a:rPr>
+              <a:t>Il travaille un savoir à la fois, en exercices</a:t>
+            </a:r>
+          </a:p>
+        </p:txBody>
+      </p:sp>
+      <p:sp>
+        <p:nvSpPr>
+          <p:cNvPr id="17" name="TextBox 16"/>
+          <p:cNvSpPr txBox="1"/>
+          <p:nvPr/>
+        </p:nvSpPr>
+        <p:spPr>
+          <a:xfrm>
+            <a:off x="7816900" y="3236976"/>
+            <a:ext cx="3222650" cy="640080"/>
+          </a:xfrm>
+          <a:prstGeom prst="rect">
+            <a:avLst/>
+          </a:prstGeom>
+          <a:noFill/>
+        </p:spPr>
+        <p:txBody>
+          <a:bodyPr wrap="square" lIns="0" rIns="0" tIns="0" bIns="0" anchor="t">
+            <a:spAutoFit/>
+          </a:bodyPr>
+          <a:lstStyle/>
+          <a:p>
+            <a:pPr algn="l">
+              <a:lnSpc>
+                <a:spcPct val="132000"/>
+              </a:lnSpc>
+            </a:pPr>
+            <a:r>
+              <a:rPr sz="1800" b="0" i="0">
+                <a:solidFill>
+                  <a:srgbClr val="3A3D40"/>
+                </a:solidFill>
+                <a:latin typeface="Verdana"/>
+              </a:rPr>
+              <a:t>où il se trompe</a:t>
+            </a:r>
+          </a:p>
+        </p:txBody>
+      </p:sp>
+      <p:sp>
+        <p:nvSpPr>
+          <p:cNvPr id="18" name="Rectangle 17"/>
+          <p:cNvSpPr/>
+          <p:nvPr/>
+        </p:nvSpPr>
+        <p:spPr>
+          <a:xfrm>
+            <a:off x="932688" y="3950208"/>
+            <a:ext cx="10326319" cy="10058"/>
+          </a:xfrm>
+          <a:prstGeom prst="rect">
+            <a:avLst/>
+          </a:prstGeom>
+          <a:solidFill>
+            <a:srgbClr val="EAEAE8"/>
+          </a:solidFill>
+          <a:ln>
+            <a:noFill/>
+          </a:ln>
+          <a:effectLst/>
+        </p:spPr>
+        <p:style>
+          <a:lnRef idx="1">
+            <a:schemeClr val="accent1"/>
+          </a:lnRef>
+          <a:fillRef idx="3">
+            <a:schemeClr val="accent1"/>
+          </a:fillRef>
+          <a:effectRef idx="2">
+            <a:schemeClr val="accent1"/>
+          </a:effectRef>
+          <a:fontRef idx="minor">
+            <a:schemeClr val="lt1"/>
+          </a:fontRef>
+        </p:style>
+        <p:txBody>
+          <a:bodyPr rtlCol="0" anchor="ctr"/>
+          <a:lstStyle/>
+          <a:p/>
+        </p:txBody>
+      </p:sp>
+      <p:sp>
+        <p:nvSpPr>
+          <p:cNvPr id="19" name="TextBox 18"/>
+          <p:cNvSpPr txBox="1"/>
+          <p:nvPr/>
+        </p:nvSpPr>
+        <p:spPr>
+          <a:xfrm>
+            <a:off x="932688" y="4078224"/>
+            <a:ext cx="3222650" cy="640080"/>
+          </a:xfrm>
+          <a:prstGeom prst="rect">
+            <a:avLst/>
+          </a:prstGeom>
+          <a:noFill/>
+        </p:spPr>
+        <p:txBody>
+          <a:bodyPr wrap="square" lIns="0" rIns="0" tIns="0" bIns="0" anchor="t">
+            <a:spAutoFit/>
+          </a:bodyPr>
+          <a:lstStyle/>
+          <a:p>
+            <a:pPr algn="l">
+              <a:lnSpc>
+                <a:spcPct val="132000"/>
+              </a:lnSpc>
+            </a:pPr>
+            <a:r>
+              <a:rPr sz="1800" b="1" i="0">
+                <a:solidFill>
+                  <a:srgbClr val="A5335F"/>
+                </a:solidFill>
+                <a:latin typeface="Verdana"/>
+              </a:rPr>
+              <a:t>Je me lance</a:t>
+            </a:r>
+          </a:p>
+        </p:txBody>
+      </p:sp>
+      <p:sp>
+        <p:nvSpPr>
+          <p:cNvPr id="20" name="TextBox 19"/>
+          <p:cNvSpPr txBox="1"/>
+          <p:nvPr/>
+        </p:nvSpPr>
+        <p:spPr>
+          <a:xfrm>
+            <a:off x="4374794" y="4078224"/>
+            <a:ext cx="3222650" cy="640080"/>
+          </a:xfrm>
+          <a:prstGeom prst="rect">
+            <a:avLst/>
+          </a:prstGeom>
+          <a:noFill/>
+        </p:spPr>
+        <p:txBody>
+          <a:bodyPr wrap="square" lIns="0" rIns="0" tIns="0" bIns="0" anchor="t">
+            <a:spAutoFit/>
+          </a:bodyPr>
+          <a:lstStyle/>
+          <a:p>
+            <a:pPr algn="l">
+              <a:lnSpc>
+                <a:spcPct val="132000"/>
+              </a:lnSpc>
+            </a:pPr>
+            <a:r>
+              <a:rPr sz="1800" b="0" i="0">
+                <a:solidFill>
+                  <a:srgbClr val="3A3D40"/>
+                </a:solidFill>
+                <a:latin typeface="Verdana"/>
+              </a:rPr>
+              <a:t>Il produit — sa voix, puis un texte</a:t>
+            </a:r>
+          </a:p>
+        </p:txBody>
+      </p:sp>
+      <p:sp>
+        <p:nvSpPr>
+          <p:cNvPr id="21" name="TextBox 20"/>
+          <p:cNvSpPr txBox="1"/>
+          <p:nvPr/>
+        </p:nvSpPr>
+        <p:spPr>
+          <a:xfrm>
+            <a:off x="7816900" y="4078224"/>
+            <a:ext cx="3222650" cy="640080"/>
+          </a:xfrm>
+          <a:prstGeom prst="rect">
+            <a:avLst/>
+          </a:prstGeom>
+          <a:noFill/>
+        </p:spPr>
+        <p:txBody>
+          <a:bodyPr wrap="square" lIns="0" rIns="0" tIns="0" bIns="0" anchor="t">
+            <a:spAutoFit/>
+          </a:bodyPr>
+          <a:lstStyle/>
+          <a:p>
+            <a:pPr algn="l">
+              <a:lnSpc>
+                <a:spcPct val="132000"/>
+              </a:lnSpc>
+            </a:pPr>
+            <a:r>
+              <a:rPr sz="1800" b="0" i="0">
+                <a:solidFill>
+                  <a:srgbClr val="3A3D40"/>
+                </a:solidFill>
+                <a:latin typeface="Verdana"/>
+              </a:rPr>
+              <a:t>ce qu'il sait faire seul</a:t>
+            </a:r>
+          </a:p>
+        </p:txBody>
+      </p:sp>
+      <p:sp>
+        <p:nvSpPr>
+          <p:cNvPr id="22" name="Rectangle 21"/>
+          <p:cNvSpPr/>
+          <p:nvPr/>
+        </p:nvSpPr>
+        <p:spPr>
+          <a:xfrm>
+            <a:off x="932688" y="4791456"/>
+            <a:ext cx="10326319" cy="10058"/>
+          </a:xfrm>
+          <a:prstGeom prst="rect">
+            <a:avLst/>
+          </a:prstGeom>
+          <a:solidFill>
+            <a:srgbClr val="EAEAE8"/>
+          </a:solidFill>
+          <a:ln>
+            <a:noFill/>
+          </a:ln>
+          <a:effectLst/>
+        </p:spPr>
+        <p:style>
+          <a:lnRef idx="1">
+            <a:schemeClr val="accent1"/>
+          </a:lnRef>
+          <a:fillRef idx="3">
+            <a:schemeClr val="accent1"/>
+          </a:fillRef>
+          <a:effectRef idx="2">
+            <a:schemeClr val="accent1"/>
+          </a:effectRef>
+          <a:fontRef idx="minor">
+            <a:schemeClr val="lt1"/>
+          </a:fontRef>
+        </p:style>
+        <p:txBody>
+          <a:bodyPr rtlCol="0" anchor="ctr"/>
+          <a:lstStyle/>
+          <a:p/>
+        </p:txBody>
+      </p:sp>
+      <p:sp>
+        <p:nvSpPr>
+          <p:cNvPr id="23" name="TextBox 22"/>
+          <p:cNvSpPr txBox="1"/>
+          <p:nvPr/>
+        </p:nvSpPr>
+        <p:spPr>
+          <a:xfrm>
+            <a:off x="932688" y="4919472"/>
+            <a:ext cx="3222650" cy="640080"/>
+          </a:xfrm>
+          <a:prstGeom prst="rect">
+            <a:avLst/>
+          </a:prstGeom>
+          <a:noFill/>
+        </p:spPr>
+        <p:txBody>
+          <a:bodyPr wrap="square" lIns="0" rIns="0" tIns="0" bIns="0" anchor="t">
+            <a:spAutoFit/>
+          </a:bodyPr>
+          <a:lstStyle/>
+          <a:p>
+            <a:pPr algn="l">
+              <a:lnSpc>
+                <a:spcPct val="132000"/>
+              </a:lnSpc>
+            </a:pPr>
+            <a:r>
+              <a:rPr sz="1800" b="1" i="0">
+                <a:solidFill>
+                  <a:srgbClr val="A5335F"/>
+                </a:solidFill>
+                <a:latin typeface="Verdana"/>
+              </a:rPr>
+              <a:t>Je retiens des mots</a:t>
+            </a:r>
+          </a:p>
+        </p:txBody>
+      </p:sp>
+      <p:sp>
+        <p:nvSpPr>
+          <p:cNvPr id="24" name="TextBox 23"/>
+          <p:cNvSpPr txBox="1"/>
+          <p:nvPr/>
+        </p:nvSpPr>
+        <p:spPr>
+          <a:xfrm>
+            <a:off x="4374794" y="4919472"/>
+            <a:ext cx="3222650" cy="640080"/>
+          </a:xfrm>
+          <a:prstGeom prst="rect">
+            <a:avLst/>
+          </a:prstGeom>
+          <a:noFill/>
+        </p:spPr>
+        <p:txBody>
+          <a:bodyPr wrap="square" lIns="0" rIns="0" tIns="0" bIns="0" anchor="t">
+            <a:spAutoFit/>
+          </a:bodyPr>
+          <a:lstStyle/>
+          <a:p>
+            <a:pPr algn="l">
+              <a:lnSpc>
+                <a:spcPct val="132000"/>
+              </a:lnSpc>
+            </a:pPr>
+            <a:r>
+              <a:rPr sz="1800" b="0" i="0">
+                <a:solidFill>
+                  <a:srgbClr val="3A3D40"/>
+                </a:solidFill>
+                <a:latin typeface="Verdana"/>
+              </a:rPr>
+              <a:t>Il reprend le vocabulaire de la situation</a:t>
+            </a:r>
+          </a:p>
+        </p:txBody>
+      </p:sp>
+      <p:sp>
+        <p:nvSpPr>
+          <p:cNvPr id="25" name="TextBox 24"/>
+          <p:cNvSpPr txBox="1"/>
+          <p:nvPr/>
+        </p:nvSpPr>
+        <p:spPr>
+          <a:xfrm>
+            <a:off x="7816900" y="4919472"/>
+            <a:ext cx="3222650" cy="640080"/>
+          </a:xfrm>
+          <a:prstGeom prst="rect">
+            <a:avLst/>
+          </a:prstGeom>
+          <a:noFill/>
+        </p:spPr>
+        <p:txBody>
+          <a:bodyPr wrap="square" lIns="0" rIns="0" tIns="0" bIns="0" anchor="t">
+            <a:spAutoFit/>
+          </a:bodyPr>
+          <a:lstStyle/>
+          <a:p>
+            <a:pPr algn="l">
+              <a:lnSpc>
+                <a:spcPct val="132000"/>
+              </a:lnSpc>
+            </a:pPr>
+            <a:r>
+              <a:rPr sz="1800" b="0" i="0">
+                <a:solidFill>
+                  <a:srgbClr val="3A3D40"/>
+                </a:solidFill>
+                <a:latin typeface="Verdana"/>
+              </a:rPr>
+              <a:t>ce qui reste une semaine après</a:t>
             </a:r>
           </a:p>
         </p:txBody>
@@ -12346,7 +14550,7 @@
                 </a:solidFill>
                 <a:latin typeface="Verdana"/>
               </a:rPr>
-              <a:t>LE MOMENT DE LA RÈGLE</a:t>
+              <a:t>LA FORME DES EXERCICES</a:t>
             </a:r>
           </a:p>
         </p:txBody>
@@ -12360,11 +14564,11 @@
         <p:spPr>
           <a:xfrm>
             <a:off x="566928" y="1225296"/>
-            <a:ext cx="11057839" cy="1967991"/>
+            <a:ext cx="11057839" cy="1441196"/>
           </a:xfrm>
           <a:prstGeom prst="roundRect">
             <a:avLst>
-              <a:gd name="adj" fmla="val 7434"/>
+              <a:gd name="adj" fmla="val 10151"/>
             </a:avLst>
           </a:prstGeom>
           <a:solidFill>
@@ -12406,7 +14610,7 @@
         <p:spPr>
           <a:xfrm>
             <a:off x="1298448" y="1682496"/>
-            <a:ext cx="9594799" cy="1145032"/>
+            <a:ext cx="9594799" cy="618235"/>
           </a:xfrm>
           <a:prstGeom prst="rect">
             <a:avLst/>
@@ -12431,7 +14635,7 @@
                 </a:solidFill>
                 <a:latin typeface="Verdana"/>
               </a:rPr>
-              <a:t>La règle arrive quand l'élève s'est trompé, jamais avant.</a:t>
+              <a:t>Sept familles, pas une de plus.</a:t>
             </a:r>
           </a:p>
         </p:txBody>
@@ -12444,12 +14648,12 @@
         </p:nvSpPr>
         <p:spPr>
           <a:xfrm>
-            <a:off x="566928" y="3467607"/>
-            <a:ext cx="11057839" cy="1671827"/>
+            <a:off x="566928" y="2940812"/>
+            <a:ext cx="11057839" cy="2040128"/>
           </a:xfrm>
           <a:prstGeom prst="roundRect">
             <a:avLst>
-              <a:gd name="adj" fmla="val 8751"/>
+              <a:gd name="adj" fmla="val 7171"/>
             </a:avLst>
           </a:prstGeom>
           <a:solidFill>
@@ -12490,8 +14694,8 @@
         </p:nvSpPr>
         <p:spPr>
           <a:xfrm>
-            <a:off x="969264" y="3741927"/>
-            <a:ext cx="10234879" cy="1214627"/>
+            <a:off x="969264" y="3215132"/>
+            <a:ext cx="10234879" cy="1582928"/>
           </a:xfrm>
           <a:prstGeom prst="rect">
             <a:avLst/>
@@ -12516,7 +14720,7 @@
                 </a:solidFill>
                 <a:latin typeface="Verdana"/>
               </a:rPr>
-              <a:t>Les mini-leçons ne sont pas en tête de module : elles s'ouvrent depuis l'exercice, au moment de l'erreur. Une règle lue avant d'en avoir eu besoin ne se retient pas — elle se recopie.</a:t>
+              <a:t>Vrai ou faux, associer, des cases à écrire, un texte à trous, des images, une question ouverte, un tableau. Un élève de francisation dépense beaucoup d'énergie à comprendre ce qu'on lui demande : il l'apprend une fois, puis il ne pense plus qu'au français.</a:t>
             </a:r>
           </a:p>
         </p:txBody>
@@ -12693,7 +14897,7 @@
                 </a:solidFill>
                 <a:latin typeface="Verdana"/>
               </a:rPr>
-              <a:t>CE QU'ON NOUS DIT</a:t>
+              <a:t>UNE DES SEPT FORMES</a:t>
             </a:r>
           </a:p>
         </p:txBody>
@@ -12732,33 +14936,72 @@
                 </a:solidFill>
                 <a:latin typeface="Verdana"/>
               </a:rPr>
-              <a:t>Le piège le plus fréquent</a:t>
-            </a:r>
-          </a:p>
-        </p:txBody>
-      </p:sp>
-      <p:sp>
-        <p:nvSpPr>
-          <p:cNvPr id="7" name="Rounded Rectangle 6"/>
+              <a:t>Des cases à écrire</a:t>
+            </a:r>
+          </a:p>
+        </p:txBody>
+      </p:sp>
+      <p:sp>
+        <p:nvSpPr>
+          <p:cNvPr id="7" name="TextBox 6"/>
+          <p:cNvSpPr txBox="1"/>
+          <p:nvPr/>
+        </p:nvSpPr>
+        <p:spPr>
+          <a:xfrm>
+            <a:off x="566928" y="1645920"/>
+            <a:ext cx="11057839" cy="617220"/>
+          </a:xfrm>
+          <a:prstGeom prst="rect">
+            <a:avLst/>
+          </a:prstGeom>
+          <a:noFill/>
+        </p:spPr>
+        <p:txBody>
+          <a:bodyPr wrap="square" lIns="0" rIns="0" tIns="0" bIns="0" anchor="t">
+            <a:spAutoFit/>
+          </a:bodyPr>
+          <a:lstStyle/>
+          <a:p>
+            <a:pPr algn="l">
+              <a:lnSpc>
+                <a:spcPct val="135000"/>
+              </a:lnSpc>
+            </a:pPr>
+            <a:r>
+              <a:rPr sz="1800" b="0" i="0">
+                <a:solidFill>
+                  <a:srgbClr val="6E7175"/>
+                </a:solidFill>
+                <a:latin typeface="Verdana"/>
+              </a:rPr>
+              <a:t>La même forme dans les 87 modules et les huit niveaux. L'élève l'apprend une fois, puis ne pense plus qu'au français.</a:t>
+            </a:r>
+          </a:p>
+        </p:txBody>
+      </p:sp>
+      <p:sp>
+        <p:nvSpPr>
+          <p:cNvPr id="8" name="Rounded Rectangle 7"/>
           <p:cNvSpPr/>
           <p:nvPr/>
         </p:nvSpPr>
         <p:spPr>
           <a:xfrm>
-            <a:off x="566928" y="1856232"/>
-            <a:ext cx="5428335" cy="2331720"/>
+            <a:off x="5209231" y="2372868"/>
+            <a:ext cx="1773232" cy="3799332"/>
           </a:xfrm>
           <a:prstGeom prst="roundRect">
             <a:avLst>
-              <a:gd name="adj" fmla="val 6274"/>
+              <a:gd name="adj" fmla="val 5156"/>
             </a:avLst>
           </a:prstGeom>
           <a:solidFill>
-            <a:srgbClr val="FFF6F5"/>
+            <a:srgbClr val="FFFFFF"/>
           </a:solidFill>
           <a:ln w="12700">
             <a:solidFill>
-              <a:srgbClr val="DC2626"/>
+              <a:srgbClr val="D6D6D2"/>
             </a:solidFill>
           </a:ln>
           <a:effectLst/>
@@ -12783,293 +15026,30 @@
           <a:p/>
         </p:txBody>
       </p:sp>
-      <p:sp>
-        <p:nvSpPr>
-          <p:cNvPr id="8" name="TextBox 7"/>
-          <p:cNvSpPr txBox="1"/>
-          <p:nvPr/>
-        </p:nvSpPr>
-        <p:spPr>
-          <a:xfrm>
-            <a:off x="932688" y="2130552"/>
-            <a:ext cx="4696815" cy="274320"/>
-          </a:xfrm>
-          <a:prstGeom prst="rect">
-            <a:avLst/>
-          </a:prstGeom>
-          <a:noFill/>
-        </p:spPr>
-        <p:txBody>
-          <a:bodyPr wrap="square" lIns="0" rIns="0" tIns="0" bIns="0" anchor="t">
-            <a:spAutoFit/>
-          </a:bodyPr>
-          <a:lstStyle/>
-          <a:p>
-            <a:pPr algn="l">
-              <a:lnSpc>
-                <a:spcPct val="135000"/>
-              </a:lnSpc>
-            </a:pPr>
-            <a:r>
-              <a:rPr sz="1300" b="1" i="0" spc="156">
-                <a:solidFill>
-                  <a:srgbClr val="B91C1C"/>
-                </a:solidFill>
-                <a:latin typeface="Verdana"/>
-              </a:rPr>
-              <a:t>ON ENTEND SOUVENT</a:t>
-            </a:r>
-          </a:p>
-        </p:txBody>
-      </p:sp>
-      <p:sp>
-        <p:nvSpPr>
-          <p:cNvPr id="9" name="TextBox 8"/>
-          <p:cNvSpPr txBox="1"/>
-          <p:nvPr/>
-        </p:nvSpPr>
-        <p:spPr>
-          <a:xfrm>
-            <a:off x="932688" y="2569464"/>
-            <a:ext cx="4696815" cy="1417320"/>
-          </a:xfrm>
-          <a:prstGeom prst="rect">
-            <a:avLst/>
-          </a:prstGeom>
-          <a:noFill/>
-        </p:spPr>
-        <p:txBody>
-          <a:bodyPr wrap="square" lIns="0" rIns="0" tIns="0" bIns="0" anchor="t">
-            <a:spAutoFit/>
-          </a:bodyPr>
-          <a:lstStyle/>
-          <a:p>
-            <a:pPr algn="l">
-              <a:lnSpc>
-                <a:spcPct val="130000"/>
-              </a:lnSpc>
-            </a:pPr>
-            <a:r>
-              <a:rPr sz="2500" b="1" i="0">
-                <a:solidFill>
-                  <a:srgbClr val="17181A"/>
-                </a:solidFill>
-                <a:latin typeface="Verdana"/>
-              </a:rPr>
-              <a:t>« Si la machine corrige tout de suite, l'élève ne cherche plus. »</a:t>
-            </a:r>
-          </a:p>
-        </p:txBody>
-      </p:sp>
-      <p:sp>
-        <p:nvSpPr>
-          <p:cNvPr id="10" name="Rounded Rectangle 9"/>
-          <p:cNvSpPr/>
-          <p:nvPr/>
-        </p:nvSpPr>
-        <p:spPr>
-          <a:xfrm>
-            <a:off x="6196431" y="1856232"/>
-            <a:ext cx="5428335" cy="2331720"/>
-          </a:xfrm>
-          <a:prstGeom prst="roundRect">
-            <a:avLst>
-              <a:gd name="adj" fmla="val 6274"/>
-            </a:avLst>
-          </a:prstGeom>
-          <a:solidFill>
-            <a:srgbClr val="E6F5EE"/>
-          </a:solidFill>
-          <a:ln w="12700">
-            <a:solidFill>
-              <a:srgbClr val="0A8F5B"/>
-            </a:solidFill>
-          </a:ln>
-          <a:effectLst/>
-        </p:spPr>
-        <p:style>
-          <a:lnRef idx="1">
-            <a:schemeClr val="accent1"/>
-          </a:lnRef>
-          <a:fillRef idx="3">
-            <a:schemeClr val="accent1"/>
-          </a:fillRef>
-          <a:effectRef idx="2">
-            <a:schemeClr val="accent1"/>
-          </a:effectRef>
-          <a:fontRef idx="minor">
-            <a:schemeClr val="lt1"/>
-          </a:fontRef>
-        </p:style>
-        <p:txBody>
-          <a:bodyPr rtlCol="0" anchor="ctr"/>
-          <a:lstStyle/>
-          <a:p/>
-        </p:txBody>
-      </p:sp>
-      <p:sp>
-        <p:nvSpPr>
-          <p:cNvPr id="11" name="TextBox 10"/>
-          <p:cNvSpPr txBox="1"/>
-          <p:nvPr/>
-        </p:nvSpPr>
-        <p:spPr>
-          <a:xfrm>
-            <a:off x="6562191" y="2130552"/>
-            <a:ext cx="4696815" cy="274320"/>
-          </a:xfrm>
-          <a:prstGeom prst="rect">
-            <a:avLst/>
-          </a:prstGeom>
-          <a:noFill/>
-        </p:spPr>
-        <p:txBody>
-          <a:bodyPr wrap="square" lIns="0" rIns="0" tIns="0" bIns="0" anchor="t">
-            <a:spAutoFit/>
-          </a:bodyPr>
-          <a:lstStyle/>
-          <a:p>
-            <a:pPr algn="l">
-              <a:lnSpc>
-                <a:spcPct val="135000"/>
-              </a:lnSpc>
-            </a:pPr>
-            <a:r>
-              <a:rPr sz="1300" b="1" i="0" spc="156">
-                <a:solidFill>
-                  <a:srgbClr val="07734A"/>
-                </a:solidFill>
-                <a:latin typeface="Verdana"/>
-              </a:rPr>
-              <a:t>IL FAUT DIRE PLUTÔT</a:t>
-            </a:r>
-          </a:p>
-        </p:txBody>
-      </p:sp>
-      <p:sp>
-        <p:nvSpPr>
-          <p:cNvPr id="12" name="TextBox 11"/>
-          <p:cNvSpPr txBox="1"/>
-          <p:nvPr/>
-        </p:nvSpPr>
-        <p:spPr>
-          <a:xfrm>
-            <a:off x="6562191" y="2569464"/>
-            <a:ext cx="4696815" cy="1417320"/>
-          </a:xfrm>
-          <a:prstGeom prst="rect">
-            <a:avLst/>
-          </a:prstGeom>
-          <a:noFill/>
-        </p:spPr>
-        <p:txBody>
-          <a:bodyPr wrap="square" lIns="0" rIns="0" tIns="0" bIns="0" anchor="t">
-            <a:spAutoFit/>
-          </a:bodyPr>
-          <a:lstStyle/>
-          <a:p>
-            <a:pPr algn="l">
-              <a:lnSpc>
-                <a:spcPct val="130000"/>
-              </a:lnSpc>
-            </a:pPr>
-            <a:r>
-              <a:rPr sz="2500" b="1" i="0">
-                <a:solidFill>
-                  <a:srgbClr val="17181A"/>
-                </a:solidFill>
-                <a:latin typeface="Verdana"/>
-              </a:rPr>
-              <a:t>« Elle ne donne pas la réponse au premier essai. »</a:t>
-            </a:r>
-          </a:p>
-        </p:txBody>
-      </p:sp>
-      <p:sp>
-        <p:nvSpPr>
-          <p:cNvPr id="13" name="Rounded Rectangle 12"/>
-          <p:cNvSpPr/>
-          <p:nvPr/>
-        </p:nvSpPr>
-        <p:spPr>
-          <a:xfrm>
-            <a:off x="566928" y="4462272"/>
-            <a:ext cx="11057839" cy="1618487"/>
-          </a:xfrm>
-          <a:prstGeom prst="roundRect">
-            <a:avLst>
-              <a:gd name="adj" fmla="val 9039"/>
-            </a:avLst>
-          </a:prstGeom>
-          <a:solidFill>
-            <a:srgbClr val="FFFFFF"/>
-          </a:solidFill>
-          <a:ln w="12700">
-            <a:solidFill>
-              <a:srgbClr val="EAEAE8"/>
-            </a:solidFill>
-          </a:ln>
-          <a:effectLst/>
-        </p:spPr>
-        <p:style>
-          <a:lnRef idx="1">
-            <a:schemeClr val="accent1"/>
-          </a:lnRef>
-          <a:fillRef idx="3">
-            <a:schemeClr val="accent1"/>
-          </a:fillRef>
-          <a:effectRef idx="2">
-            <a:schemeClr val="accent1"/>
-          </a:effectRef>
-          <a:fontRef idx="minor">
-            <a:schemeClr val="lt1"/>
-          </a:fontRef>
-        </p:style>
-        <p:txBody>
-          <a:bodyPr rtlCol="0" anchor="ctr"/>
-          <a:lstStyle/>
-          <a:p/>
-        </p:txBody>
-      </p:sp>
-      <p:sp>
-        <p:nvSpPr>
-          <p:cNvPr id="14" name="TextBox 13"/>
-          <p:cNvSpPr txBox="1"/>
-          <p:nvPr/>
-        </p:nvSpPr>
-        <p:spPr>
-          <a:xfrm>
-            <a:off x="969264" y="4736592"/>
-            <a:ext cx="10234879" cy="1518920"/>
-          </a:xfrm>
-          <a:prstGeom prst="rect">
-            <a:avLst/>
-          </a:prstGeom>
-          <a:noFill/>
-        </p:spPr>
-        <p:txBody>
-          <a:bodyPr wrap="square" lIns="0" rIns="0" tIns="0" bIns="0" anchor="t">
-            <a:spAutoFit/>
-          </a:bodyPr>
-          <a:lstStyle/>
-          <a:p>
-            <a:pPr algn="l">
-              <a:lnSpc>
-                <a:spcPct val="145000"/>
-              </a:lnSpc>
-            </a:pPr>
-            <a:r>
-              <a:rPr sz="2000" b="0" i="0">
-                <a:solidFill>
-                  <a:srgbClr val="4B4F52"/>
-                </a:solidFill>
-                <a:latin typeface="Verdana"/>
-              </a:rPr>
-              <a:t>Une réponse ouverte demande deux tentatives avant que la réponse attendue s'affiche. C'était une correction, pas un réglage d'origine : la première version donnait tout du premier coup, et on voyait des élèves valider n'importe quoi pour lire la solution.</a:t>
-            </a:r>
-          </a:p>
-        </p:txBody>
-      </p:sp>
+      <p:pic>
+        <p:nvPicPr>
+          <p:cNvPr id="9" name="Picture 8" descr="tel-09-cases-ecrire.png"/>
+          <p:cNvPicPr>
+            <a:picLocks noChangeAspect="1"/>
+          </p:cNvPicPr>
+          <p:nvPr/>
+        </p:nvPicPr>
+        <p:blipFill>
+          <a:blip r:embed="rId2"/>
+          <a:stretch>
+            <a:fillRect/>
+          </a:stretch>
+        </p:blipFill>
+        <p:spPr>
+          <a:xfrm>
+            <a:off x="5227519" y="2391156"/>
+            <a:ext cx="1736656" cy="3762756"/>
+          </a:xfrm>
+          <a:prstGeom prst="rect">
+            <a:avLst/>
+          </a:prstGeom>
+        </p:spPr>
+      </p:pic>
     </p:spTree>
   </p:cSld>
   <p:clrMapOvr>

--- a/assets/presentations/diaporamas/F1-la-logique-pedagogique.pptx
+++ b/assets/presentations/diaporamas/F1-la-logique-pedagogique.pptx
@@ -26,6 +26,8 @@
     <p:sldId id="274" r:id="rId26"/>
     <p:sldId id="275" r:id="rId27"/>
     <p:sldId id="276" r:id="rId28"/>
+    <p:sldId id="277" r:id="rId29"/>
+    <p:sldId id="278" r:id="rId30"/>
   </p:sldIdLst>
   <p:sldSz cx="12191695" cy="6858000" type="screen4x3"/>
   <p:notesSz cx="6858000" cy="9144000"/>
@@ -592,7 +594,7 @@
           <a:lstStyle/>
           <a:p>
             <a:r>
-              <a:t>C'est la décision la plus discutée du projet, et la plus facile à défendre en salle : demander qui, dans la salle, se souvient d'une règle apprise avant d'en avoir eu besoin.</a:t>
+              <a:t>Si on demande à voir les six autres, elles sont en images dans l'annexe A2.</a:t>
             </a:r>
           </a:p>
         </p:txBody>
@@ -662,7 +664,7 @@
           <a:lstStyle/>
           <a:p>
             <a:r>
-              <a:t>Dire que c'est une correction, pas une intention initiale. Un projet qui raconte n'avoir jamais eu tort n'est pas crédible devant des praticiens.</a:t>
+              <a:t>C'est la décision la plus discutée du projet, et la plus facile à défendre en salle : demander qui, dans la salle, se souvient d'une règle apprise avant d'en avoir eu besoin.</a:t>
             </a:r>
           </a:p>
         </p:txBody>
@@ -732,7 +734,7 @@
           <a:lstStyle/>
           <a:p>
             <a:r>
-              <a:t>Le point que les enseignants comprennent le plus vite : un élève adulte qui sait qu'on l'observe ne s'enregistre pas. Celui qui sait que personne n'écoute recommence jusqu'à être content.</a:t>
+              <a:t>Lire ce premier titre à voix haute — il dit toute la démarche. La leçon part de ce que l'élève croit, pas de la règle.</a:t>
             </a:r>
           </a:p>
         </p:txBody>
@@ -802,7 +804,7 @@
           <a:lstStyle/>
           <a:p>
             <a:r>
-              <a:t>Le point que les enseignants comprennent le plus vite : un adulte qui se sait observé ne s'enregistre pas.</a:t>
+              <a:t>Dire que c'est une correction, pas une intention initiale. Un projet qui raconte n'avoir jamais eu tort n'est pas crédible devant des praticiens.</a:t>
             </a:r>
           </a:p>
         </p:txBody>
@@ -872,7 +874,7 @@
           <a:lstStyle/>
           <a:p>
             <a:r>
-              <a:t>La phrase porteuse est le détail que les enseignants relèvent : c'est exactement ce qu'ils font en classe quand ils refusent de faire répéter un mot seul.</a:t>
+              <a:t>Le point que les enseignants comprennent le plus vite : un élève adulte qui sait qu'on l'observe ne s'enregistre pas. Celui qui sait que personne n'écoute recommence jusqu'à être content.</a:t>
             </a:r>
           </a:p>
         </p:txBody>
@@ -942,7 +944,7 @@
           <a:lstStyle/>
           <a:p>
             <a:r>
-              <a:t>Deux moteurs de mémorisation feraient deux progressions qui divergent. Et reconnaître n'est pas savoir : on écrit.</a:t>
+              <a:t>Le point que les enseignants comprennent le plus vite : un adulte qui se sait observé ne s'enregistre pas.</a:t>
             </a:r>
           </a:p>
         </p:txBody>
@@ -1012,7 +1014,7 @@
           <a:lstStyle/>
           <a:p>
             <a:r>
-              <a:t>Reconnaître n'est pas savoir. C'est la raison pour laquelle la carte demande d'écrire, ce qui est plus lent et plus coûteux.</a:t>
+              <a:t>La phrase porteuse est le détail que les enseignants relèvent : c'est exactement ce qu'ils font en classe quand ils refusent de faire répéter un mot seul.</a:t>
             </a:r>
           </a:p>
         </p:txBody>
@@ -1082,7 +1084,7 @@
           <a:lstStyle/>
           <a:p>
             <a:r>
-              <a:t>Ces trois refus sont écrits dans les consignes envoyées au modèle, pas dans une politique d'usage. Si on demande à voir, on peut montrer le fichier.</a:t>
+              <a:t>Deux moteurs de mémorisation feraient deux progressions qui divergent. Et reconnaître n'est pas savoir : on écrit.</a:t>
             </a:r>
           </a:p>
         </p:txBody>
@@ -1152,7 +1154,7 @@
           <a:lstStyle/>
           <a:p>
             <a:r>
-              <a:t>À dire fermement : ce n'est pas une fonctionnalité manquante. Diagnostiquer est le métier, et une machine qui range des élèves dans des cases se trompe sur ceux qui en ont le plus besoin.</a:t>
+              <a:t>Reconnaître n'est pas savoir. C'est la raison pour laquelle la carte demande d'écrire, ce qui est plus lent et plus coûteux.</a:t>
             </a:r>
           </a:p>
         </p:txBody>
@@ -1222,7 +1224,7 @@
           <a:lstStyle/>
           <a:p>
             <a:r>
-              <a:t>Insister : rien ici ne propose quoi que ce soit. Le diagnostic est le métier, et c'est un choix, pas une étape transitoire.</a:t>
+              <a:t>Ces trois refus sont écrits dans les consignes envoyées au modèle, pas dans une politique d'usage. Si on demande à voir, on peut montrer le fichier.</a:t>
             </a:r>
           </a:p>
         </p:txBody>
@@ -1362,7 +1364,7 @@
           <a:lstStyle/>
           <a:p>
             <a:r>
-              <a:t>Cette diapositive répond d'avance à « vous remplacez le professeur ». Ne pas la sauter même si personne n'a posé la question — surtout si personne ne l'a posée.</a:t>
+              <a:t>À dire fermement : ce n'est pas une fonctionnalité manquante. Diagnostiquer est le métier, et une machine qui range des élèves dans des cases se trompe sur ceux qui en ont le plus besoin.</a:t>
             </a:r>
           </a:p>
         </p:txBody>
@@ -1432,6 +1434,146 @@
           <a:lstStyle/>
           <a:p>
             <a:r>
+              <a:t>Insister : rien ici ne propose quoi que ce soit. Le diagnostic est le métier, et c'est un choix, pas une étape transitoire.</a:t>
+            </a:r>
+          </a:p>
+        </p:txBody>
+      </p:sp>
+      <p:sp>
+        <p:nvSpPr>
+          <p:cNvPr id="4" name="Slide Number Placeholder 3"/>
+          <p:cNvSpPr>
+            <a:spLocks noGrp="1"/>
+          </p:cNvSpPr>
+          <p:nvPr>
+            <p:ph type="sldNum" idx="5" sz="quarter"/>
+          </p:nvPr>
+        </p:nvSpPr>
+        <p:spPr/>
+      </p:sp>
+    </p:spTree>
+  </p:cSld>
+  <p:clrMapOvr>
+    <a:masterClrMapping/>
+  </p:clrMapOvr>
+</p:notes>
+</file>
+
+<file path=ppt/notesSlides/notesSlide22.xml><?xml version="1.0" encoding="utf-8"?>
+<p:notes xmlns:a="http://schemas.openxmlformats.org/drawingml/2006/main" xmlns:p="http://schemas.openxmlformats.org/presentationml/2006/main" xmlns:r="http://schemas.openxmlformats.org/officeDocument/2006/relationships">
+  <p:cSld>
+    <p:spTree>
+      <p:nvGrpSpPr>
+        <p:cNvPr id="1" name=""/>
+        <p:cNvGrpSpPr/>
+        <p:nvPr/>
+      </p:nvGrpSpPr>
+      <p:grpSpPr>
+        <a:xfrm>
+          <a:off x="0" y="0"/>
+          <a:ext cx="0" cy="0"/>
+          <a:chOff x="0" y="0"/>
+          <a:chExt cx="0" cy="0"/>
+        </a:xfrm>
+      </p:grpSpPr>
+      <p:sp>
+        <p:nvSpPr>
+          <p:cNvPr id="2" name="Slide Image Placeholder 1"/>
+          <p:cNvSpPr>
+            <a:spLocks noGrp="1"/>
+          </p:cNvSpPr>
+          <p:nvPr>
+            <p:ph type="sldImg" idx="2"/>
+          </p:nvPr>
+        </p:nvSpPr>
+        <p:spPr/>
+      </p:sp>
+      <p:sp>
+        <p:nvSpPr>
+          <p:cNvPr id="3" name="Notes Placeholder 2"/>
+          <p:cNvSpPr>
+            <a:spLocks noGrp="1"/>
+          </p:cNvSpPr>
+          <p:nvPr>
+            <p:ph type="body" idx="3" sz="quarter"/>
+          </p:nvPr>
+        </p:nvSpPr>
+        <p:spPr/>
+        <p:txBody>
+          <a:bodyPr/>
+          <a:lstStyle/>
+          <a:p>
+            <a:r>
+              <a:t>Cette diapositive répond d'avance à « vous remplacez le professeur ». Ne pas la sauter même si personne n'a posé la question — surtout si personne ne l'a posée.</a:t>
+            </a:r>
+          </a:p>
+        </p:txBody>
+      </p:sp>
+      <p:sp>
+        <p:nvSpPr>
+          <p:cNvPr id="4" name="Slide Number Placeholder 3"/>
+          <p:cNvSpPr>
+            <a:spLocks noGrp="1"/>
+          </p:cNvSpPr>
+          <p:nvPr>
+            <p:ph type="sldNum" idx="5" sz="quarter"/>
+          </p:nvPr>
+        </p:nvSpPr>
+        <p:spPr/>
+      </p:sp>
+    </p:spTree>
+  </p:cSld>
+  <p:clrMapOvr>
+    <a:masterClrMapping/>
+  </p:clrMapOvr>
+</p:notes>
+</file>
+
+<file path=ppt/notesSlides/notesSlide23.xml><?xml version="1.0" encoding="utf-8"?>
+<p:notes xmlns:a="http://schemas.openxmlformats.org/drawingml/2006/main" xmlns:p="http://schemas.openxmlformats.org/presentationml/2006/main" xmlns:r="http://schemas.openxmlformats.org/officeDocument/2006/relationships">
+  <p:cSld>
+    <p:spTree>
+      <p:nvGrpSpPr>
+        <p:cNvPr id="1" name=""/>
+        <p:cNvGrpSpPr/>
+        <p:nvPr/>
+      </p:nvGrpSpPr>
+      <p:grpSpPr>
+        <a:xfrm>
+          <a:off x="0" y="0"/>
+          <a:ext cx="0" cy="0"/>
+          <a:chOff x="0" y="0"/>
+          <a:chExt cx="0" cy="0"/>
+        </a:xfrm>
+      </p:grpSpPr>
+      <p:sp>
+        <p:nvSpPr>
+          <p:cNvPr id="2" name="Slide Image Placeholder 1"/>
+          <p:cNvSpPr>
+            <a:spLocks noGrp="1"/>
+          </p:cNvSpPr>
+          <p:nvPr>
+            <p:ph type="sldImg" idx="2"/>
+          </p:nvPr>
+        </p:nvSpPr>
+        <p:spPr/>
+      </p:sp>
+      <p:sp>
+        <p:nvSpPr>
+          <p:cNvPr id="3" name="Notes Placeholder 2"/>
+          <p:cNvSpPr>
+            <a:spLocks noGrp="1"/>
+          </p:cNvSpPr>
+          <p:nvPr>
+            <p:ph type="body" idx="3" sz="quarter"/>
+          </p:nvPr>
+        </p:nvSpPr>
+        <p:spPr/>
+        <p:txBody>
+          <a:bodyPr/>
+          <a:lstStyle/>
+          <a:p>
+            <a:r>
               <a:t>Terminer là-dessus et se taire. C'est la seule diapositive du diaporama qui ne contient aucun chiffre, et c'est voulu.</a:t>
             </a:r>
           </a:p>
@@ -1852,7 +1994,7 @@
           <a:lstStyle/>
           <a:p>
             <a:r>
-              <a:t>La contrainte a été tenue sur les 87 modules et les huit niveaux. Elle coûte cher à l'écriture — il faut faire entrer une intention dans une forme existante — et c'est l'élève qui encaisse la différence quand on ne la tient pas. Les sept sont montrées en images dans l'annexe A2.</a:t>
+              <a:t>Faire remarquer « Tu reprends où tu étais » : il s'arrête et revient quand il veut, et rien ne recommence à zéro.</a:t>
             </a:r>
           </a:p>
         </p:txBody>
@@ -1922,7 +2064,7 @@
           <a:lstStyle/>
           <a:p>
             <a:r>
-              <a:t>Si on demande à voir les six autres, elles sont en images dans l'annexe A2.</a:t>
+              <a:t>La contrainte a été tenue sur les 87 modules et les huit niveaux. Elle coûte cher à l'écriture — il faut faire entrer une intention dans une forme existante — et c'est l'élève qui encaisse la différence quand on ne la tient pas. Les sept sont montrées en images dans l'annexe A2.</a:t>
             </a:r>
           </a:p>
         </p:txBody>
@@ -5344,33 +5486,111 @@
                 </a:solidFill>
                 <a:latin typeface="Verdana"/>
               </a:rPr>
-              <a:t>LE MOMENT DE LA RÈGLE</a:t>
-            </a:r>
-          </a:p>
-        </p:txBody>
-      </p:sp>
-      <p:sp>
-        <p:nvSpPr>
-          <p:cNvPr id="6" name="Rounded Rectangle 5"/>
+              <a:t>UNE DES SEPT FORMES</a:t>
+            </a:r>
+          </a:p>
+        </p:txBody>
+      </p:sp>
+      <p:sp>
+        <p:nvSpPr>
+          <p:cNvPr id="6" name="TextBox 5"/>
+          <p:cNvSpPr txBox="1"/>
+          <p:nvPr/>
+        </p:nvSpPr>
+        <p:spPr>
+          <a:xfrm>
+            <a:off x="566928" y="749808"/>
+            <a:ext cx="11057839" cy="877824"/>
+          </a:xfrm>
+          <a:prstGeom prst="rect">
+            <a:avLst/>
+          </a:prstGeom>
+          <a:noFill/>
+        </p:spPr>
+        <p:txBody>
+          <a:bodyPr wrap="square" lIns="0" rIns="0" tIns="0" bIns="0" anchor="t">
+            <a:spAutoFit/>
+          </a:bodyPr>
+          <a:lstStyle/>
+          <a:p>
+            <a:pPr algn="l">
+              <a:lnSpc>
+                <a:spcPct val="115000"/>
+              </a:lnSpc>
+            </a:pPr>
+            <a:r>
+              <a:rPr sz="3400" b="1" i="0">
+                <a:solidFill>
+                  <a:srgbClr val="17181A"/>
+                </a:solidFill>
+                <a:latin typeface="Verdana"/>
+              </a:rPr>
+              <a:t>Des cases à écrire</a:t>
+            </a:r>
+          </a:p>
+        </p:txBody>
+      </p:sp>
+      <p:sp>
+        <p:nvSpPr>
+          <p:cNvPr id="7" name="TextBox 6"/>
+          <p:cNvSpPr txBox="1"/>
+          <p:nvPr/>
+        </p:nvSpPr>
+        <p:spPr>
+          <a:xfrm>
+            <a:off x="566928" y="1645920"/>
+            <a:ext cx="11057839" cy="617220"/>
+          </a:xfrm>
+          <a:prstGeom prst="rect">
+            <a:avLst/>
+          </a:prstGeom>
+          <a:noFill/>
+        </p:spPr>
+        <p:txBody>
+          <a:bodyPr wrap="square" lIns="0" rIns="0" tIns="0" bIns="0" anchor="t">
+            <a:spAutoFit/>
+          </a:bodyPr>
+          <a:lstStyle/>
+          <a:p>
+            <a:pPr algn="l">
+              <a:lnSpc>
+                <a:spcPct val="135000"/>
+              </a:lnSpc>
+            </a:pPr>
+            <a:r>
+              <a:rPr sz="1800" b="0" i="0">
+                <a:solidFill>
+                  <a:srgbClr val="6E7175"/>
+                </a:solidFill>
+                <a:latin typeface="Verdana"/>
+              </a:rPr>
+              <a:t>La même forme dans les 87 modules et les huit niveaux. L'élève l'apprend une fois, puis ne pense plus qu'au français.</a:t>
+            </a:r>
+          </a:p>
+        </p:txBody>
+      </p:sp>
+      <p:sp>
+        <p:nvSpPr>
+          <p:cNvPr id="8" name="Rounded Rectangle 7"/>
           <p:cNvSpPr/>
           <p:nvPr/>
         </p:nvSpPr>
         <p:spPr>
           <a:xfrm>
-            <a:off x="566928" y="1225296"/>
-            <a:ext cx="11057839" cy="1967991"/>
+            <a:off x="5209231" y="2372868"/>
+            <a:ext cx="1773232" cy="3799332"/>
           </a:xfrm>
           <a:prstGeom prst="roundRect">
             <a:avLst>
-              <a:gd name="adj" fmla="val 7434"/>
+              <a:gd name="adj" fmla="val 5156"/>
             </a:avLst>
           </a:prstGeom>
           <a:solidFill>
-            <a:srgbClr val="FCE9F0"/>
+            <a:srgbClr val="FFFFFF"/>
           </a:solidFill>
           <a:ln w="12700">
             <a:solidFill>
-              <a:srgbClr val="EAEAE8"/>
+              <a:srgbClr val="D6D6D2"/>
             </a:solidFill>
           </a:ln>
           <a:effectLst/>
@@ -5395,130 +5615,30 @@
           <a:p/>
         </p:txBody>
       </p:sp>
-      <p:sp>
-        <p:nvSpPr>
-          <p:cNvPr id="7" name="TextBox 6"/>
-          <p:cNvSpPr txBox="1"/>
-          <p:nvPr/>
-        </p:nvSpPr>
-        <p:spPr>
-          <a:xfrm>
-            <a:off x="1298448" y="1682496"/>
-            <a:ext cx="9594799" cy="1145032"/>
-          </a:xfrm>
-          <a:prstGeom prst="rect">
-            <a:avLst/>
-          </a:prstGeom>
-          <a:noFill/>
-        </p:spPr>
-        <p:txBody>
-          <a:bodyPr wrap="square" lIns="0" rIns="0" tIns="0" bIns="0" anchor="t">
-            <a:spAutoFit/>
-          </a:bodyPr>
-          <a:lstStyle/>
-          <a:p>
-            <a:pPr algn="l">
-              <a:lnSpc>
-                <a:spcPct val="122000"/>
-              </a:lnSpc>
-            </a:pPr>
-            <a:r>
-              <a:rPr sz="3400" b="1" i="0">
-                <a:solidFill>
-                  <a:srgbClr val="17181A"/>
-                </a:solidFill>
-                <a:latin typeface="Verdana"/>
-              </a:rPr>
-              <a:t>La règle arrive quand l'élève s'est trompé, jamais avant.</a:t>
-            </a:r>
-          </a:p>
-        </p:txBody>
-      </p:sp>
-      <p:sp>
-        <p:nvSpPr>
-          <p:cNvPr id="8" name="Rounded Rectangle 7"/>
-          <p:cNvSpPr/>
-          <p:nvPr/>
-        </p:nvSpPr>
-        <p:spPr>
-          <a:xfrm>
-            <a:off x="566928" y="3467607"/>
-            <a:ext cx="11057839" cy="1671827"/>
-          </a:xfrm>
-          <a:prstGeom prst="roundRect">
-            <a:avLst>
-              <a:gd name="adj" fmla="val 8751"/>
-            </a:avLst>
-          </a:prstGeom>
-          <a:solidFill>
-            <a:srgbClr val="FFFFFF"/>
-          </a:solidFill>
-          <a:ln w="12700">
-            <a:solidFill>
-              <a:srgbClr val="EAEAE8"/>
-            </a:solidFill>
-          </a:ln>
-          <a:effectLst/>
-        </p:spPr>
-        <p:style>
-          <a:lnRef idx="1">
-            <a:schemeClr val="accent1"/>
-          </a:lnRef>
-          <a:fillRef idx="3">
-            <a:schemeClr val="accent1"/>
-          </a:fillRef>
-          <a:effectRef idx="2">
-            <a:schemeClr val="accent1"/>
-          </a:effectRef>
-          <a:fontRef idx="minor">
-            <a:schemeClr val="lt1"/>
-          </a:fontRef>
-        </p:style>
-        <p:txBody>
-          <a:bodyPr rtlCol="0" anchor="ctr"/>
-          <a:lstStyle/>
-          <a:p/>
-        </p:txBody>
-      </p:sp>
-      <p:sp>
-        <p:nvSpPr>
-          <p:cNvPr id="9" name="TextBox 8"/>
-          <p:cNvSpPr txBox="1"/>
-          <p:nvPr/>
-        </p:nvSpPr>
-        <p:spPr>
-          <a:xfrm>
-            <a:off x="969264" y="3741927"/>
-            <a:ext cx="10234879" cy="1214627"/>
-          </a:xfrm>
-          <a:prstGeom prst="rect">
-            <a:avLst/>
-          </a:prstGeom>
-          <a:noFill/>
-        </p:spPr>
-        <p:txBody>
-          <a:bodyPr wrap="square" lIns="0" rIns="0" tIns="0" bIns="0" anchor="t">
-            <a:spAutoFit/>
-          </a:bodyPr>
-          <a:lstStyle/>
-          <a:p>
-            <a:pPr algn="l">
-              <a:lnSpc>
-                <a:spcPct val="145000"/>
-              </a:lnSpc>
-            </a:pPr>
-            <a:r>
-              <a:rPr sz="2000" b="0" i="0">
-                <a:solidFill>
-                  <a:srgbClr val="4B4F52"/>
-                </a:solidFill>
-                <a:latin typeface="Verdana"/>
-              </a:rPr>
-              <a:t>Les mini-leçons ne sont pas en tête de module : elles s'ouvrent depuis l'exercice, au moment de l'erreur. Une règle lue avant d'en avoir eu besoin ne se retient pas — elle se recopie.</a:t>
-            </a:r>
-          </a:p>
-        </p:txBody>
-      </p:sp>
+      <p:pic>
+        <p:nvPicPr>
+          <p:cNvPr id="9" name="Picture 8" descr="tel-09-cases-ecrire.png"/>
+          <p:cNvPicPr>
+            <a:picLocks noChangeAspect="1"/>
+          </p:cNvPicPr>
+          <p:nvPr/>
+        </p:nvPicPr>
+        <p:blipFill>
+          <a:blip r:embed="rId2"/>
+          <a:stretch>
+            <a:fillRect/>
+          </a:stretch>
+        </p:blipFill>
+        <p:spPr>
+          <a:xfrm>
+            <a:off x="5227519" y="2391156"/>
+            <a:ext cx="1736656" cy="3762756"/>
+          </a:xfrm>
+          <a:prstGeom prst="rect">
+            <a:avLst/>
+          </a:prstGeom>
+        </p:spPr>
+      </p:pic>
     </p:spTree>
   </p:cSld>
   <p:clrMapOvr>
@@ -5691,72 +5811,33 @@
                 </a:solidFill>
                 <a:latin typeface="Verdana"/>
               </a:rPr>
-              <a:t>CE QU'ON NOUS DIT</a:t>
-            </a:r>
-          </a:p>
-        </p:txBody>
-      </p:sp>
-      <p:sp>
-        <p:nvSpPr>
-          <p:cNvPr id="6" name="TextBox 5"/>
-          <p:cNvSpPr txBox="1"/>
-          <p:nvPr/>
-        </p:nvSpPr>
-        <p:spPr>
-          <a:xfrm>
-            <a:off x="566928" y="749808"/>
-            <a:ext cx="11057839" cy="877824"/>
-          </a:xfrm>
-          <a:prstGeom prst="rect">
-            <a:avLst/>
-          </a:prstGeom>
-          <a:noFill/>
-        </p:spPr>
-        <p:txBody>
-          <a:bodyPr wrap="square" lIns="0" rIns="0" tIns="0" bIns="0" anchor="t">
-            <a:spAutoFit/>
-          </a:bodyPr>
-          <a:lstStyle/>
-          <a:p>
-            <a:pPr algn="l">
-              <a:lnSpc>
-                <a:spcPct val="115000"/>
-              </a:lnSpc>
-            </a:pPr>
-            <a:r>
-              <a:rPr sz="3400" b="1" i="0">
-                <a:solidFill>
-                  <a:srgbClr val="17181A"/>
-                </a:solidFill>
-                <a:latin typeface="Verdana"/>
-              </a:rPr>
-              <a:t>Le piège le plus fréquent</a:t>
-            </a:r>
-          </a:p>
-        </p:txBody>
-      </p:sp>
-      <p:sp>
-        <p:nvSpPr>
-          <p:cNvPr id="7" name="Rounded Rectangle 6"/>
+              <a:t>LE MOMENT DE LA RÈGLE</a:t>
+            </a:r>
+          </a:p>
+        </p:txBody>
+      </p:sp>
+      <p:sp>
+        <p:nvSpPr>
+          <p:cNvPr id="6" name="Rounded Rectangle 5"/>
           <p:cNvSpPr/>
           <p:nvPr/>
         </p:nvSpPr>
         <p:spPr>
           <a:xfrm>
-            <a:off x="566928" y="1856232"/>
-            <a:ext cx="5428335" cy="2331720"/>
+            <a:off x="566928" y="1225296"/>
+            <a:ext cx="11057839" cy="1967991"/>
           </a:xfrm>
           <a:prstGeom prst="roundRect">
             <a:avLst>
-              <a:gd name="adj" fmla="val 6274"/>
+              <a:gd name="adj" fmla="val 7434"/>
             </a:avLst>
           </a:prstGeom>
           <a:solidFill>
-            <a:srgbClr val="FFF6F5"/>
+            <a:srgbClr val="FCE9F0"/>
           </a:solidFill>
           <a:ln w="12700">
             <a:solidFill>
-              <a:srgbClr val="DC2626"/>
+              <a:srgbClr val="EAEAE8"/>
             </a:solidFill>
           </a:ln>
           <a:effectLst/>
@@ -5783,14 +5864,14 @@
       </p:sp>
       <p:sp>
         <p:nvSpPr>
-          <p:cNvPr id="8" name="TextBox 7"/>
-          <p:cNvSpPr txBox="1"/>
-          <p:nvPr/>
-        </p:nvSpPr>
-        <p:spPr>
-          <a:xfrm>
-            <a:off x="932688" y="2130552"/>
-            <a:ext cx="4696815" cy="274320"/>
+          <p:cNvPr id="7" name="TextBox 6"/>
+          <p:cNvSpPr txBox="1"/>
+          <p:nvPr/>
+        </p:nvSpPr>
+        <p:spPr>
+          <a:xfrm>
+            <a:off x="1298448" y="1682496"/>
+            <a:ext cx="9594799" cy="1145032"/>
           </a:xfrm>
           <a:prstGeom prst="rect">
             <a:avLst/>
@@ -5805,198 +5886,35 @@
           <a:p>
             <a:pPr algn="l">
               <a:lnSpc>
-                <a:spcPct val="135000"/>
-              </a:lnSpc>
-            </a:pPr>
-            <a:r>
-              <a:rPr sz="1300" b="1" i="0" spc="156">
-                <a:solidFill>
-                  <a:srgbClr val="B91C1C"/>
-                </a:solidFill>
-                <a:latin typeface="Verdana"/>
-              </a:rPr>
-              <a:t>ON ENTEND SOUVENT</a:t>
-            </a:r>
-          </a:p>
-        </p:txBody>
-      </p:sp>
-      <p:sp>
-        <p:nvSpPr>
-          <p:cNvPr id="9" name="TextBox 8"/>
-          <p:cNvSpPr txBox="1"/>
-          <p:nvPr/>
-        </p:nvSpPr>
-        <p:spPr>
-          <a:xfrm>
-            <a:off x="932688" y="2569464"/>
-            <a:ext cx="4696815" cy="1417320"/>
-          </a:xfrm>
-          <a:prstGeom prst="rect">
-            <a:avLst/>
-          </a:prstGeom>
-          <a:noFill/>
-        </p:spPr>
-        <p:txBody>
-          <a:bodyPr wrap="square" lIns="0" rIns="0" tIns="0" bIns="0" anchor="t">
-            <a:spAutoFit/>
-          </a:bodyPr>
-          <a:lstStyle/>
-          <a:p>
-            <a:pPr algn="l">
-              <a:lnSpc>
-                <a:spcPct val="130000"/>
-              </a:lnSpc>
-            </a:pPr>
-            <a:r>
-              <a:rPr sz="2500" b="1" i="0">
+                <a:spcPct val="122000"/>
+              </a:lnSpc>
+            </a:pPr>
+            <a:r>
+              <a:rPr sz="3400" b="1" i="0">
                 <a:solidFill>
                   <a:srgbClr val="17181A"/>
                 </a:solidFill>
                 <a:latin typeface="Verdana"/>
               </a:rPr>
-              <a:t>« Si la machine corrige tout de suite, l'élève ne cherche plus. »</a:t>
-            </a:r>
-          </a:p>
-        </p:txBody>
-      </p:sp>
-      <p:sp>
-        <p:nvSpPr>
-          <p:cNvPr id="10" name="Rounded Rectangle 9"/>
+              <a:t>La règle arrive quand l'élève s'est trompé, jamais avant.</a:t>
+            </a:r>
+          </a:p>
+        </p:txBody>
+      </p:sp>
+      <p:sp>
+        <p:nvSpPr>
+          <p:cNvPr id="8" name="Rounded Rectangle 7"/>
           <p:cNvSpPr/>
           <p:nvPr/>
         </p:nvSpPr>
         <p:spPr>
           <a:xfrm>
-            <a:off x="6196431" y="1856232"/>
-            <a:ext cx="5428335" cy="2331720"/>
+            <a:off x="566928" y="3467607"/>
+            <a:ext cx="11057839" cy="1671827"/>
           </a:xfrm>
           <a:prstGeom prst="roundRect">
             <a:avLst>
-              <a:gd name="adj" fmla="val 6274"/>
-            </a:avLst>
-          </a:prstGeom>
-          <a:solidFill>
-            <a:srgbClr val="E6F5EE"/>
-          </a:solidFill>
-          <a:ln w="12700">
-            <a:solidFill>
-              <a:srgbClr val="0A8F5B"/>
-            </a:solidFill>
-          </a:ln>
-          <a:effectLst/>
-        </p:spPr>
-        <p:style>
-          <a:lnRef idx="1">
-            <a:schemeClr val="accent1"/>
-          </a:lnRef>
-          <a:fillRef idx="3">
-            <a:schemeClr val="accent1"/>
-          </a:fillRef>
-          <a:effectRef idx="2">
-            <a:schemeClr val="accent1"/>
-          </a:effectRef>
-          <a:fontRef idx="minor">
-            <a:schemeClr val="lt1"/>
-          </a:fontRef>
-        </p:style>
-        <p:txBody>
-          <a:bodyPr rtlCol="0" anchor="ctr"/>
-          <a:lstStyle/>
-          <a:p/>
-        </p:txBody>
-      </p:sp>
-      <p:sp>
-        <p:nvSpPr>
-          <p:cNvPr id="11" name="TextBox 10"/>
-          <p:cNvSpPr txBox="1"/>
-          <p:nvPr/>
-        </p:nvSpPr>
-        <p:spPr>
-          <a:xfrm>
-            <a:off x="6562191" y="2130552"/>
-            <a:ext cx="4696815" cy="274320"/>
-          </a:xfrm>
-          <a:prstGeom prst="rect">
-            <a:avLst/>
-          </a:prstGeom>
-          <a:noFill/>
-        </p:spPr>
-        <p:txBody>
-          <a:bodyPr wrap="square" lIns="0" rIns="0" tIns="0" bIns="0" anchor="t">
-            <a:spAutoFit/>
-          </a:bodyPr>
-          <a:lstStyle/>
-          <a:p>
-            <a:pPr algn="l">
-              <a:lnSpc>
-                <a:spcPct val="135000"/>
-              </a:lnSpc>
-            </a:pPr>
-            <a:r>
-              <a:rPr sz="1300" b="1" i="0" spc="156">
-                <a:solidFill>
-                  <a:srgbClr val="07734A"/>
-                </a:solidFill>
-                <a:latin typeface="Verdana"/>
-              </a:rPr>
-              <a:t>IL FAUT DIRE PLUTÔT</a:t>
-            </a:r>
-          </a:p>
-        </p:txBody>
-      </p:sp>
-      <p:sp>
-        <p:nvSpPr>
-          <p:cNvPr id="12" name="TextBox 11"/>
-          <p:cNvSpPr txBox="1"/>
-          <p:nvPr/>
-        </p:nvSpPr>
-        <p:spPr>
-          <a:xfrm>
-            <a:off x="6562191" y="2569464"/>
-            <a:ext cx="4696815" cy="1417320"/>
-          </a:xfrm>
-          <a:prstGeom prst="rect">
-            <a:avLst/>
-          </a:prstGeom>
-          <a:noFill/>
-        </p:spPr>
-        <p:txBody>
-          <a:bodyPr wrap="square" lIns="0" rIns="0" tIns="0" bIns="0" anchor="t">
-            <a:spAutoFit/>
-          </a:bodyPr>
-          <a:lstStyle/>
-          <a:p>
-            <a:pPr algn="l">
-              <a:lnSpc>
-                <a:spcPct val="130000"/>
-              </a:lnSpc>
-            </a:pPr>
-            <a:r>
-              <a:rPr sz="2500" b="1" i="0">
-                <a:solidFill>
-                  <a:srgbClr val="17181A"/>
-                </a:solidFill>
-                <a:latin typeface="Verdana"/>
-              </a:rPr>
-              <a:t>« Elle ne donne pas la réponse au premier essai. »</a:t>
-            </a:r>
-          </a:p>
-        </p:txBody>
-      </p:sp>
-      <p:sp>
-        <p:nvSpPr>
-          <p:cNvPr id="13" name="Rounded Rectangle 12"/>
-          <p:cNvSpPr/>
-          <p:nvPr/>
-        </p:nvSpPr>
-        <p:spPr>
-          <a:xfrm>
-            <a:off x="566928" y="4462272"/>
-            <a:ext cx="11057839" cy="1618487"/>
-          </a:xfrm>
-          <a:prstGeom prst="roundRect">
-            <a:avLst>
-              <a:gd name="adj" fmla="val 9039"/>
+              <a:gd name="adj" fmla="val 8751"/>
             </a:avLst>
           </a:prstGeom>
           <a:solidFill>
@@ -6031,14 +5949,14 @@
       </p:sp>
       <p:sp>
         <p:nvSpPr>
-          <p:cNvPr id="14" name="TextBox 13"/>
-          <p:cNvSpPr txBox="1"/>
-          <p:nvPr/>
-        </p:nvSpPr>
-        <p:spPr>
-          <a:xfrm>
-            <a:off x="969264" y="4736592"/>
-            <a:ext cx="10234879" cy="1518920"/>
+          <p:cNvPr id="9" name="TextBox 8"/>
+          <p:cNvSpPr txBox="1"/>
+          <p:nvPr/>
+        </p:nvSpPr>
+        <p:spPr>
+          <a:xfrm>
+            <a:off x="969264" y="3741927"/>
+            <a:ext cx="10234879" cy="1214627"/>
           </a:xfrm>
           <a:prstGeom prst="rect">
             <a:avLst/>
@@ -6063,7 +5981,7 @@
                 </a:solidFill>
                 <a:latin typeface="Verdana"/>
               </a:rPr>
-              <a:t>Une réponse ouverte demande deux tentatives avant que la réponse attendue s'affiche. C'était une correction, pas un réglage d'origine : la première version donnait tout du premier coup, et on voyait des élèves valider n'importe quoi pour lire la solution.</a:t>
+              <a:t>Les mini-leçons ne sont pas en tête de module : elles s'ouvrent depuis l'exercice, au moment de l'erreur. Une règle lue avant d'en avoir eu besoin ne se retient pas — elle se recopie.</a:t>
             </a:r>
           </a:p>
         </p:txBody>
@@ -6240,33 +6158,111 @@
                 </a:solidFill>
                 <a:latin typeface="Verdana"/>
               </a:rPr>
-              <a:t>LA CORRECTION ET L'ENVOI</a:t>
-            </a:r>
-          </a:p>
-        </p:txBody>
-      </p:sp>
-      <p:sp>
-        <p:nvSpPr>
-          <p:cNvPr id="6" name="Rounded Rectangle 5"/>
+              <a:t>AU MOMENT DE L'ERREUR</a:t>
+            </a:r>
+          </a:p>
+        </p:txBody>
+      </p:sp>
+      <p:sp>
+        <p:nvSpPr>
+          <p:cNvPr id="6" name="TextBox 5"/>
+          <p:cNvSpPr txBox="1"/>
+          <p:nvPr/>
+        </p:nvSpPr>
+        <p:spPr>
+          <a:xfrm>
+            <a:off x="566928" y="749808"/>
+            <a:ext cx="11057839" cy="877824"/>
+          </a:xfrm>
+          <a:prstGeom prst="rect">
+            <a:avLst/>
+          </a:prstGeom>
+          <a:noFill/>
+        </p:spPr>
+        <p:txBody>
+          <a:bodyPr wrap="square" lIns="0" rIns="0" tIns="0" bIns="0" anchor="t">
+            <a:spAutoFit/>
+          </a:bodyPr>
+          <a:lstStyle/>
+          <a:p>
+            <a:pPr algn="l">
+              <a:lnSpc>
+                <a:spcPct val="115000"/>
+              </a:lnSpc>
+            </a:pPr>
+            <a:r>
+              <a:rPr sz="3400" b="1" i="0">
+                <a:solidFill>
+                  <a:srgbClr val="17181A"/>
+                </a:solidFill>
+                <a:latin typeface="Verdana"/>
+              </a:rPr>
+              <a:t>La mini-leçon s'ouvre là</a:t>
+            </a:r>
+          </a:p>
+        </p:txBody>
+      </p:sp>
+      <p:sp>
+        <p:nvSpPr>
+          <p:cNvPr id="7" name="TextBox 6"/>
+          <p:cNvSpPr txBox="1"/>
+          <p:nvPr/>
+        </p:nvSpPr>
+        <p:spPr>
+          <a:xfrm>
+            <a:off x="566928" y="1645920"/>
+            <a:ext cx="11057839" cy="617220"/>
+          </a:xfrm>
+          <a:prstGeom prst="rect">
+            <a:avLst/>
+          </a:prstGeom>
+          <a:noFill/>
+        </p:spPr>
+        <p:txBody>
+          <a:bodyPr wrap="square" lIns="0" rIns="0" tIns="0" bIns="0" anchor="t">
+            <a:spAutoFit/>
+          </a:bodyPr>
+          <a:lstStyle/>
+          <a:p>
+            <a:pPr algn="l">
+              <a:lnSpc>
+                <a:spcPct val="135000"/>
+              </a:lnSpc>
+            </a:pPr>
+            <a:r>
+              <a:rPr sz="1800" b="0" i="0">
+                <a:solidFill>
+                  <a:srgbClr val="6E7175"/>
+                </a:solidFill>
+                <a:latin typeface="Verdana"/>
+              </a:rPr>
+              <a:t>Elle n'est pas en tête de module : elle s'ouvre depuis l'exercice. Sa première section s'appelle « L'erreur de départ à corriger ».</a:t>
+            </a:r>
+          </a:p>
+        </p:txBody>
+      </p:sp>
+      <p:sp>
+        <p:nvSpPr>
+          <p:cNvPr id="8" name="Rounded Rectangle 7"/>
           <p:cNvSpPr/>
           <p:nvPr/>
         </p:nvSpPr>
         <p:spPr>
           <a:xfrm>
-            <a:off x="566928" y="1225296"/>
-            <a:ext cx="11057839" cy="1967991"/>
+            <a:off x="4572457" y="2372868"/>
+            <a:ext cx="3046780" cy="3799332"/>
           </a:xfrm>
           <a:prstGeom prst="roundRect">
             <a:avLst>
-              <a:gd name="adj" fmla="val 7434"/>
+              <a:gd name="adj" fmla="val 3001"/>
             </a:avLst>
           </a:prstGeom>
           <a:solidFill>
-            <a:srgbClr val="FCE9F0"/>
+            <a:srgbClr val="FFFFFF"/>
           </a:solidFill>
           <a:ln w="12700">
             <a:solidFill>
-              <a:srgbClr val="EAEAE8"/>
+              <a:srgbClr val="D6D6D2"/>
             </a:solidFill>
           </a:ln>
           <a:effectLst/>
@@ -6291,130 +6287,30 @@
           <a:p/>
         </p:txBody>
       </p:sp>
-      <p:sp>
-        <p:nvSpPr>
-          <p:cNvPr id="7" name="TextBox 6"/>
-          <p:cNvSpPr txBox="1"/>
-          <p:nvPr/>
-        </p:nvSpPr>
-        <p:spPr>
-          <a:xfrm>
-            <a:off x="1298448" y="1682496"/>
-            <a:ext cx="9594799" cy="1145032"/>
-          </a:xfrm>
-          <a:prstGeom prst="rect">
-            <a:avLst/>
-          </a:prstGeom>
-          <a:noFill/>
-        </p:spPr>
-        <p:txBody>
-          <a:bodyPr wrap="square" lIns="0" rIns="0" tIns="0" bIns="0" anchor="t">
-            <a:spAutoFit/>
-          </a:bodyPr>
-          <a:lstStyle/>
-          <a:p>
-            <a:pPr algn="l">
-              <a:lnSpc>
-                <a:spcPct val="122000"/>
-              </a:lnSpc>
-            </a:pPr>
-            <a:r>
-              <a:rPr sz="3400" b="1" i="0">
-                <a:solidFill>
-                  <a:srgbClr val="17181A"/>
-                </a:solidFill>
-                <a:latin typeface="Verdana"/>
-              </a:rPr>
-              <a:t>La correction est privée. L'envoi est un geste.</a:t>
-            </a:r>
-          </a:p>
-        </p:txBody>
-      </p:sp>
-      <p:sp>
-        <p:nvSpPr>
-          <p:cNvPr id="8" name="Rounded Rectangle 7"/>
-          <p:cNvSpPr/>
-          <p:nvPr/>
-        </p:nvSpPr>
-        <p:spPr>
-          <a:xfrm>
-            <a:off x="566928" y="3467607"/>
-            <a:ext cx="11057839" cy="1671827"/>
-          </a:xfrm>
-          <a:prstGeom prst="roundRect">
-            <a:avLst>
-              <a:gd name="adj" fmla="val 8751"/>
-            </a:avLst>
-          </a:prstGeom>
-          <a:solidFill>
-            <a:srgbClr val="FFFFFF"/>
-          </a:solidFill>
-          <a:ln w="12700">
-            <a:solidFill>
-              <a:srgbClr val="EAEAE8"/>
-            </a:solidFill>
-          </a:ln>
-          <a:effectLst/>
-        </p:spPr>
-        <p:style>
-          <a:lnRef idx="1">
-            <a:schemeClr val="accent1"/>
-          </a:lnRef>
-          <a:fillRef idx="3">
-            <a:schemeClr val="accent1"/>
-          </a:fillRef>
-          <a:effectRef idx="2">
-            <a:schemeClr val="accent1"/>
-          </a:effectRef>
-          <a:fontRef idx="minor">
-            <a:schemeClr val="lt1"/>
-          </a:fontRef>
-        </p:style>
-        <p:txBody>
-          <a:bodyPr rtlCol="0" anchor="ctr"/>
-          <a:lstStyle/>
-          <a:p/>
-        </p:txBody>
-      </p:sp>
-      <p:sp>
-        <p:nvSpPr>
-          <p:cNvPr id="9" name="TextBox 8"/>
-          <p:cNvSpPr txBox="1"/>
-          <p:nvPr/>
-        </p:nvSpPr>
-        <p:spPr>
-          <a:xfrm>
-            <a:off x="969264" y="3741927"/>
-            <a:ext cx="10234879" cy="1214627"/>
-          </a:xfrm>
-          <a:prstGeom prst="rect">
-            <a:avLst/>
-          </a:prstGeom>
-          <a:noFill/>
-        </p:spPr>
-        <p:txBody>
-          <a:bodyPr wrap="square" lIns="0" rIns="0" tIns="0" bIns="0" anchor="t">
-            <a:spAutoFit/>
-          </a:bodyPr>
-          <a:lstStyle/>
-          <a:p>
-            <a:pPr algn="l">
-              <a:lnSpc>
-                <a:spcPct val="145000"/>
-              </a:lnSpc>
-            </a:pPr>
-            <a:r>
-              <a:rPr sz="2000" b="0" i="0">
-                <a:solidFill>
-                  <a:srgbClr val="4B4F52"/>
-                </a:solidFill>
-                <a:latin typeface="Verdana"/>
-              </a:rPr>
-              <a:t>Quand un élève fait relire son texte ou son enregistrement, rien n'est gardé et rien ne part. L'enseignant reçoit ce que l'élève décide de lui envoyer, quand il le décide. C'est ce qui permet de recommencer douze fois.</a:t>
-            </a:r>
-          </a:p>
-        </p:txBody>
-      </p:sp>
+      <p:pic>
+        <p:nvPicPr>
+          <p:cNvPr id="9" name="Picture 8" descr="cas-14-minilecon.png"/>
+          <p:cNvPicPr>
+            <a:picLocks noChangeAspect="1"/>
+          </p:cNvPicPr>
+          <p:nvPr/>
+        </p:nvPicPr>
+        <p:blipFill>
+          <a:blip r:embed="rId2"/>
+          <a:stretch>
+            <a:fillRect/>
+          </a:stretch>
+        </p:blipFill>
+        <p:spPr>
+          <a:xfrm>
+            <a:off x="4590745" y="2391156"/>
+            <a:ext cx="3010204" cy="3762756"/>
+          </a:xfrm>
+          <a:prstGeom prst="rect">
+            <a:avLst/>
+          </a:prstGeom>
+        </p:spPr>
+      </p:pic>
     </p:spTree>
   </p:cSld>
   <p:clrMapOvr>
@@ -6587,7 +6483,7 @@
                 </a:solidFill>
                 <a:latin typeface="Verdana"/>
               </a:rPr>
-              <a:t>RIEN NE PART SANS LUI</a:t>
+              <a:t>CE QU'ON NOUS DIT</a:t>
             </a:r>
           </a:p>
         </p:txBody>
@@ -6626,64 +6522,273 @@
                 </a:solidFill>
                 <a:latin typeface="Verdana"/>
               </a:rPr>
-              <a:t>La relecture, puis l'envoi</a:t>
-            </a:r>
-          </a:p>
-        </p:txBody>
-      </p:sp>
-      <p:sp>
-        <p:nvSpPr>
-          <p:cNvPr id="7" name="TextBox 6"/>
-          <p:cNvSpPr txBox="1"/>
-          <p:nvPr/>
-        </p:nvSpPr>
-        <p:spPr>
-          <a:xfrm>
-            <a:off x="566928" y="1645920"/>
-            <a:ext cx="11057839" cy="617220"/>
-          </a:xfrm>
-          <a:prstGeom prst="rect">
-            <a:avLst/>
-          </a:prstGeom>
-          <a:noFill/>
-        </p:spPr>
-        <p:txBody>
-          <a:bodyPr wrap="square" lIns="0" rIns="0" tIns="0" bIns="0" anchor="t">
-            <a:spAutoFit/>
-          </a:bodyPr>
-          <a:lstStyle/>
-          <a:p>
-            <a:pPr algn="l">
-              <a:lnSpc>
-                <a:spcPct val="135000"/>
-              </a:lnSpc>
-            </a:pPr>
-            <a:r>
-              <a:rPr sz="1800" b="0" i="0">
-                <a:solidFill>
-                  <a:srgbClr val="6E7175"/>
-                </a:solidFill>
-                <a:latin typeface="Verdana"/>
-              </a:rPr>
-              <a:t>La correction s'affiche et n'est gardée nulle part. Le bouton d'envoi est un geste distinct, et il appartient à l'élève.</a:t>
-            </a:r>
-          </a:p>
-        </p:txBody>
-      </p:sp>
-      <p:sp>
-        <p:nvSpPr>
-          <p:cNvPr id="8" name="Rounded Rectangle 7"/>
+              <a:t>Le piège le plus fréquent</a:t>
+            </a:r>
+          </a:p>
+        </p:txBody>
+      </p:sp>
+      <p:sp>
+        <p:nvSpPr>
+          <p:cNvPr id="7" name="Rounded Rectangle 6"/>
           <p:cNvSpPr/>
           <p:nvPr/>
         </p:nvSpPr>
         <p:spPr>
           <a:xfrm>
-            <a:off x="5325008" y="2372868"/>
-            <a:ext cx="1541678" cy="3799332"/>
+            <a:off x="566928" y="1856232"/>
+            <a:ext cx="5428335" cy="2331720"/>
           </a:xfrm>
           <a:prstGeom prst="roundRect">
             <a:avLst>
-              <a:gd name="adj" fmla="val 5931"/>
+              <a:gd name="adj" fmla="val 6274"/>
+            </a:avLst>
+          </a:prstGeom>
+          <a:solidFill>
+            <a:srgbClr val="FFF6F5"/>
+          </a:solidFill>
+          <a:ln w="12700">
+            <a:solidFill>
+              <a:srgbClr val="DC2626"/>
+            </a:solidFill>
+          </a:ln>
+          <a:effectLst/>
+        </p:spPr>
+        <p:style>
+          <a:lnRef idx="1">
+            <a:schemeClr val="accent1"/>
+          </a:lnRef>
+          <a:fillRef idx="3">
+            <a:schemeClr val="accent1"/>
+          </a:fillRef>
+          <a:effectRef idx="2">
+            <a:schemeClr val="accent1"/>
+          </a:effectRef>
+          <a:fontRef idx="minor">
+            <a:schemeClr val="lt1"/>
+          </a:fontRef>
+        </p:style>
+        <p:txBody>
+          <a:bodyPr rtlCol="0" anchor="ctr"/>
+          <a:lstStyle/>
+          <a:p/>
+        </p:txBody>
+      </p:sp>
+      <p:sp>
+        <p:nvSpPr>
+          <p:cNvPr id="8" name="TextBox 7"/>
+          <p:cNvSpPr txBox="1"/>
+          <p:nvPr/>
+        </p:nvSpPr>
+        <p:spPr>
+          <a:xfrm>
+            <a:off x="932688" y="2130552"/>
+            <a:ext cx="4696815" cy="274320"/>
+          </a:xfrm>
+          <a:prstGeom prst="rect">
+            <a:avLst/>
+          </a:prstGeom>
+          <a:noFill/>
+        </p:spPr>
+        <p:txBody>
+          <a:bodyPr wrap="square" lIns="0" rIns="0" tIns="0" bIns="0" anchor="t">
+            <a:spAutoFit/>
+          </a:bodyPr>
+          <a:lstStyle/>
+          <a:p>
+            <a:pPr algn="l">
+              <a:lnSpc>
+                <a:spcPct val="135000"/>
+              </a:lnSpc>
+            </a:pPr>
+            <a:r>
+              <a:rPr sz="1300" b="1" i="0" spc="156">
+                <a:solidFill>
+                  <a:srgbClr val="B91C1C"/>
+                </a:solidFill>
+                <a:latin typeface="Verdana"/>
+              </a:rPr>
+              <a:t>ON ENTEND SOUVENT</a:t>
+            </a:r>
+          </a:p>
+        </p:txBody>
+      </p:sp>
+      <p:sp>
+        <p:nvSpPr>
+          <p:cNvPr id="9" name="TextBox 8"/>
+          <p:cNvSpPr txBox="1"/>
+          <p:nvPr/>
+        </p:nvSpPr>
+        <p:spPr>
+          <a:xfrm>
+            <a:off x="932688" y="2569464"/>
+            <a:ext cx="4696815" cy="1417320"/>
+          </a:xfrm>
+          <a:prstGeom prst="rect">
+            <a:avLst/>
+          </a:prstGeom>
+          <a:noFill/>
+        </p:spPr>
+        <p:txBody>
+          <a:bodyPr wrap="square" lIns="0" rIns="0" tIns="0" bIns="0" anchor="t">
+            <a:spAutoFit/>
+          </a:bodyPr>
+          <a:lstStyle/>
+          <a:p>
+            <a:pPr algn="l">
+              <a:lnSpc>
+                <a:spcPct val="130000"/>
+              </a:lnSpc>
+            </a:pPr>
+            <a:r>
+              <a:rPr sz="2500" b="1" i="0">
+                <a:solidFill>
+                  <a:srgbClr val="17181A"/>
+                </a:solidFill>
+                <a:latin typeface="Verdana"/>
+              </a:rPr>
+              <a:t>« Si la machine corrige tout de suite, l'élève ne cherche plus. »</a:t>
+            </a:r>
+          </a:p>
+        </p:txBody>
+      </p:sp>
+      <p:sp>
+        <p:nvSpPr>
+          <p:cNvPr id="10" name="Rounded Rectangle 9"/>
+          <p:cNvSpPr/>
+          <p:nvPr/>
+        </p:nvSpPr>
+        <p:spPr>
+          <a:xfrm>
+            <a:off x="6196431" y="1856232"/>
+            <a:ext cx="5428335" cy="2331720"/>
+          </a:xfrm>
+          <a:prstGeom prst="roundRect">
+            <a:avLst>
+              <a:gd name="adj" fmla="val 6274"/>
+            </a:avLst>
+          </a:prstGeom>
+          <a:solidFill>
+            <a:srgbClr val="E6F5EE"/>
+          </a:solidFill>
+          <a:ln w="12700">
+            <a:solidFill>
+              <a:srgbClr val="0A8F5B"/>
+            </a:solidFill>
+          </a:ln>
+          <a:effectLst/>
+        </p:spPr>
+        <p:style>
+          <a:lnRef idx="1">
+            <a:schemeClr val="accent1"/>
+          </a:lnRef>
+          <a:fillRef idx="3">
+            <a:schemeClr val="accent1"/>
+          </a:fillRef>
+          <a:effectRef idx="2">
+            <a:schemeClr val="accent1"/>
+          </a:effectRef>
+          <a:fontRef idx="minor">
+            <a:schemeClr val="lt1"/>
+          </a:fontRef>
+        </p:style>
+        <p:txBody>
+          <a:bodyPr rtlCol="0" anchor="ctr"/>
+          <a:lstStyle/>
+          <a:p/>
+        </p:txBody>
+      </p:sp>
+      <p:sp>
+        <p:nvSpPr>
+          <p:cNvPr id="11" name="TextBox 10"/>
+          <p:cNvSpPr txBox="1"/>
+          <p:nvPr/>
+        </p:nvSpPr>
+        <p:spPr>
+          <a:xfrm>
+            <a:off x="6562191" y="2130552"/>
+            <a:ext cx="4696815" cy="274320"/>
+          </a:xfrm>
+          <a:prstGeom prst="rect">
+            <a:avLst/>
+          </a:prstGeom>
+          <a:noFill/>
+        </p:spPr>
+        <p:txBody>
+          <a:bodyPr wrap="square" lIns="0" rIns="0" tIns="0" bIns="0" anchor="t">
+            <a:spAutoFit/>
+          </a:bodyPr>
+          <a:lstStyle/>
+          <a:p>
+            <a:pPr algn="l">
+              <a:lnSpc>
+                <a:spcPct val="135000"/>
+              </a:lnSpc>
+            </a:pPr>
+            <a:r>
+              <a:rPr sz="1300" b="1" i="0" spc="156">
+                <a:solidFill>
+                  <a:srgbClr val="07734A"/>
+                </a:solidFill>
+                <a:latin typeface="Verdana"/>
+              </a:rPr>
+              <a:t>IL FAUT DIRE PLUTÔT</a:t>
+            </a:r>
+          </a:p>
+        </p:txBody>
+      </p:sp>
+      <p:sp>
+        <p:nvSpPr>
+          <p:cNvPr id="12" name="TextBox 11"/>
+          <p:cNvSpPr txBox="1"/>
+          <p:nvPr/>
+        </p:nvSpPr>
+        <p:spPr>
+          <a:xfrm>
+            <a:off x="6562191" y="2569464"/>
+            <a:ext cx="4696815" cy="1417320"/>
+          </a:xfrm>
+          <a:prstGeom prst="rect">
+            <a:avLst/>
+          </a:prstGeom>
+          <a:noFill/>
+        </p:spPr>
+        <p:txBody>
+          <a:bodyPr wrap="square" lIns="0" rIns="0" tIns="0" bIns="0" anchor="t">
+            <a:spAutoFit/>
+          </a:bodyPr>
+          <a:lstStyle/>
+          <a:p>
+            <a:pPr algn="l">
+              <a:lnSpc>
+                <a:spcPct val="130000"/>
+              </a:lnSpc>
+            </a:pPr>
+            <a:r>
+              <a:rPr sz="2500" b="1" i="0">
+                <a:solidFill>
+                  <a:srgbClr val="17181A"/>
+                </a:solidFill>
+                <a:latin typeface="Verdana"/>
+              </a:rPr>
+              <a:t>« Elle ne donne pas la réponse au premier essai. »</a:t>
+            </a:r>
+          </a:p>
+        </p:txBody>
+      </p:sp>
+      <p:sp>
+        <p:nvSpPr>
+          <p:cNvPr id="13" name="Rounded Rectangle 12"/>
+          <p:cNvSpPr/>
+          <p:nvPr/>
+        </p:nvSpPr>
+        <p:spPr>
+          <a:xfrm>
+            <a:off x="566928" y="4462272"/>
+            <a:ext cx="11057839" cy="1618487"/>
+          </a:xfrm>
+          <a:prstGeom prst="roundRect">
+            <a:avLst>
+              <a:gd name="adj" fmla="val 9039"/>
             </a:avLst>
           </a:prstGeom>
           <a:solidFill>
@@ -6691,7 +6796,7 @@
           </a:solidFill>
           <a:ln w="12700">
             <a:solidFill>
-              <a:srgbClr val="D6D6D2"/>
+              <a:srgbClr val="EAEAE8"/>
             </a:solidFill>
           </a:ln>
           <a:effectLst/>
@@ -6716,30 +6821,45 @@
           <a:p/>
         </p:txBody>
       </p:sp>
-      <p:pic>
-        <p:nvPicPr>
-          <p:cNvPr id="9" name="Picture 8" descr="cas-09-production-avec-ia.png"/>
-          <p:cNvPicPr>
-            <a:picLocks noChangeAspect="1"/>
-          </p:cNvPicPr>
-          <p:nvPr/>
-        </p:nvPicPr>
-        <p:blipFill>
-          <a:blip r:embed="rId2"/>
-          <a:stretch>
-            <a:fillRect/>
-          </a:stretch>
-        </p:blipFill>
-        <p:spPr>
-          <a:xfrm>
-            <a:off x="5343296" y="2391156"/>
-            <a:ext cx="1505102" cy="3762756"/>
-          </a:xfrm>
-          <a:prstGeom prst="rect">
-            <a:avLst/>
-          </a:prstGeom>
-        </p:spPr>
-      </p:pic>
+      <p:sp>
+        <p:nvSpPr>
+          <p:cNvPr id="14" name="TextBox 13"/>
+          <p:cNvSpPr txBox="1"/>
+          <p:nvPr/>
+        </p:nvSpPr>
+        <p:spPr>
+          <a:xfrm>
+            <a:off x="969264" y="4736592"/>
+            <a:ext cx="10234879" cy="1518920"/>
+          </a:xfrm>
+          <a:prstGeom prst="rect">
+            <a:avLst/>
+          </a:prstGeom>
+          <a:noFill/>
+        </p:spPr>
+        <p:txBody>
+          <a:bodyPr wrap="square" lIns="0" rIns="0" tIns="0" bIns="0" anchor="t">
+            <a:spAutoFit/>
+          </a:bodyPr>
+          <a:lstStyle/>
+          <a:p>
+            <a:pPr algn="l">
+              <a:lnSpc>
+                <a:spcPct val="145000"/>
+              </a:lnSpc>
+            </a:pPr>
+            <a:r>
+              <a:rPr sz="2000" b="0" i="0">
+                <a:solidFill>
+                  <a:srgbClr val="4B4F52"/>
+                </a:solidFill>
+                <a:latin typeface="Verdana"/>
+              </a:rPr>
+              <a:t>Une réponse ouverte demande deux tentatives avant que la réponse attendue s'affiche. C'était une correction, pas un réglage d'origine : la première version donnait tout du premier coup, et on voyait des élèves valider n'importe quoi pour lire la solution.</a:t>
+            </a:r>
+          </a:p>
+        </p:txBody>
+      </p:sp>
     </p:spTree>
   </p:cSld>
   <p:clrMapOvr>
@@ -6912,64 +7032,110 @@
                 </a:solidFill>
                 <a:latin typeface="Verdana"/>
               </a:rPr>
-              <a:t>ÉCOUTER</a:t>
-            </a:r>
-          </a:p>
-        </p:txBody>
-      </p:sp>
-      <p:sp>
-        <p:nvSpPr>
-          <p:cNvPr id="6" name="TextBox 5"/>
-          <p:cNvSpPr txBox="1"/>
-          <p:nvPr/>
-        </p:nvSpPr>
-        <p:spPr>
-          <a:xfrm>
-            <a:off x="566928" y="749808"/>
-            <a:ext cx="11057839" cy="877824"/>
-          </a:xfrm>
-          <a:prstGeom prst="rect">
-            <a:avLst/>
-          </a:prstGeom>
-          <a:noFill/>
-        </p:spPr>
-        <p:txBody>
-          <a:bodyPr wrap="square" lIns="0" rIns="0" tIns="0" bIns="0" anchor="t">
-            <a:spAutoFit/>
-          </a:bodyPr>
-          <a:lstStyle/>
-          <a:p>
-            <a:pPr algn="l">
-              <a:lnSpc>
-                <a:spcPct val="115000"/>
-              </a:lnSpc>
-            </a:pPr>
-            <a:r>
-              <a:rPr sz="2900" b="1" i="0">
-                <a:solidFill>
-                  <a:srgbClr val="17181A"/>
-                </a:solidFill>
-                <a:latin typeface="Verdana"/>
-              </a:rPr>
-              <a:t>Ce qu'il a fallu pour que l'oral serve à quelque chose</a:t>
-            </a:r>
-          </a:p>
-        </p:txBody>
-      </p:sp>
-      <p:sp>
-        <p:nvSpPr>
-          <p:cNvPr id="7" name="Rounded Rectangle 6"/>
+              <a:t>LA CORRECTION ET L'ENVOI</a:t>
+            </a:r>
+          </a:p>
+        </p:txBody>
+      </p:sp>
+      <p:sp>
+        <p:nvSpPr>
+          <p:cNvPr id="6" name="Rounded Rectangle 5"/>
           <p:cNvSpPr/>
           <p:nvPr/>
         </p:nvSpPr>
         <p:spPr>
           <a:xfrm>
-            <a:off x="566928" y="1810512"/>
-            <a:ext cx="5446623" cy="2052828"/>
+            <a:off x="566928" y="1225296"/>
+            <a:ext cx="11057839" cy="1967991"/>
           </a:xfrm>
           <a:prstGeom prst="roundRect">
             <a:avLst>
-              <a:gd name="adj" fmla="val 7126"/>
+              <a:gd name="adj" fmla="val 7434"/>
+            </a:avLst>
+          </a:prstGeom>
+          <a:solidFill>
+            <a:srgbClr val="FCE9F0"/>
+          </a:solidFill>
+          <a:ln w="12700">
+            <a:solidFill>
+              <a:srgbClr val="EAEAE8"/>
+            </a:solidFill>
+          </a:ln>
+          <a:effectLst/>
+        </p:spPr>
+        <p:style>
+          <a:lnRef idx="1">
+            <a:schemeClr val="accent1"/>
+          </a:lnRef>
+          <a:fillRef idx="3">
+            <a:schemeClr val="accent1"/>
+          </a:fillRef>
+          <a:effectRef idx="2">
+            <a:schemeClr val="accent1"/>
+          </a:effectRef>
+          <a:fontRef idx="minor">
+            <a:schemeClr val="lt1"/>
+          </a:fontRef>
+        </p:style>
+        <p:txBody>
+          <a:bodyPr rtlCol="0" anchor="ctr"/>
+          <a:lstStyle/>
+          <a:p/>
+        </p:txBody>
+      </p:sp>
+      <p:sp>
+        <p:nvSpPr>
+          <p:cNvPr id="7" name="TextBox 6"/>
+          <p:cNvSpPr txBox="1"/>
+          <p:nvPr/>
+        </p:nvSpPr>
+        <p:spPr>
+          <a:xfrm>
+            <a:off x="1298448" y="1682496"/>
+            <a:ext cx="9594799" cy="1145032"/>
+          </a:xfrm>
+          <a:prstGeom prst="rect">
+            <a:avLst/>
+          </a:prstGeom>
+          <a:noFill/>
+        </p:spPr>
+        <p:txBody>
+          <a:bodyPr wrap="square" lIns="0" rIns="0" tIns="0" bIns="0" anchor="t">
+            <a:spAutoFit/>
+          </a:bodyPr>
+          <a:lstStyle/>
+          <a:p>
+            <a:pPr algn="l">
+              <a:lnSpc>
+                <a:spcPct val="122000"/>
+              </a:lnSpc>
+            </a:pPr>
+            <a:r>
+              <a:rPr sz="3400" b="1" i="0">
+                <a:solidFill>
+                  <a:srgbClr val="17181A"/>
+                </a:solidFill>
+                <a:latin typeface="Verdana"/>
+              </a:rPr>
+              <a:t>La correction est privée. L'envoi est un geste.</a:t>
+            </a:r>
+          </a:p>
+        </p:txBody>
+      </p:sp>
+      <p:sp>
+        <p:nvSpPr>
+          <p:cNvPr id="8" name="Rounded Rectangle 7"/>
+          <p:cNvSpPr/>
+          <p:nvPr/>
+        </p:nvSpPr>
+        <p:spPr>
+          <a:xfrm>
+            <a:off x="566928" y="3467607"/>
+            <a:ext cx="11057839" cy="1671827"/>
+          </a:xfrm>
+          <a:prstGeom prst="roundRect">
+            <a:avLst>
+              <a:gd name="adj" fmla="val 8751"/>
             </a:avLst>
           </a:prstGeom>
           <a:solidFill>
@@ -7004,14 +7170,14 @@
       </p:sp>
       <p:sp>
         <p:nvSpPr>
-          <p:cNvPr id="8" name="TextBox 7"/>
-          <p:cNvSpPr txBox="1"/>
-          <p:nvPr/>
-        </p:nvSpPr>
-        <p:spPr>
-          <a:xfrm>
-            <a:off x="886968" y="2084831"/>
-            <a:ext cx="4806543" cy="387096"/>
+          <p:cNvPr id="9" name="TextBox 8"/>
+          <p:cNvSpPr txBox="1"/>
+          <p:nvPr/>
+        </p:nvSpPr>
+        <p:spPr>
+          <a:xfrm>
+            <a:off x="969264" y="3741927"/>
+            <a:ext cx="10234879" cy="1214627"/>
           </a:xfrm>
           <a:prstGeom prst="rect">
             <a:avLst/>
@@ -7026,428 +7192,17 @@
           <a:p>
             <a:pPr algn="l">
               <a:lnSpc>
-                <a:spcPct val="118000"/>
-              </a:lnSpc>
-            </a:pPr>
-            <a:r>
-              <a:rPr sz="2400" b="1" i="0">
-                <a:solidFill>
-                  <a:srgbClr val="A5335F"/>
-                </a:solidFill>
-                <a:latin typeface="Verdana"/>
-              </a:rPr>
-              <a:t>Une voix par personnage</a:t>
-            </a:r>
-          </a:p>
-        </p:txBody>
-      </p:sp>
-      <p:sp>
-        <p:nvSpPr>
-          <p:cNvPr id="9" name="TextBox 8"/>
-          <p:cNvSpPr txBox="1"/>
-          <p:nvPr/>
-        </p:nvSpPr>
-        <p:spPr>
-          <a:xfrm>
-            <a:off x="886968" y="2499360"/>
-            <a:ext cx="4806543" cy="1089660"/>
-          </a:xfrm>
-          <a:prstGeom prst="rect">
-            <a:avLst/>
-          </a:prstGeom>
-          <a:noFill/>
-        </p:spPr>
-        <p:txBody>
-          <a:bodyPr wrap="square" lIns="0" rIns="0" tIns="0" bIns="0" anchor="t">
-            <a:spAutoFit/>
-          </a:bodyPr>
-          <a:lstStyle/>
-          <a:p>
-            <a:pPr algn="l">
-              <a:lnSpc>
-                <a:spcPct val="142000"/>
-              </a:lnSpc>
-            </a:pPr>
-            <a:r>
-              <a:rPr sz="1800" b="0" i="0">
-                <a:solidFill>
-                  <a:srgbClr val="3A3D40"/>
-                </a:solidFill>
-                <a:latin typeface="Verdana"/>
-              </a:rPr>
-              <a:t>Oksana et Bertrand ne sonnent pas pareil. Sans ça, l'élève ne sait pas qui parle et n'entend qu'un texte lu.</a:t>
-            </a:r>
-          </a:p>
-        </p:txBody>
-      </p:sp>
-      <p:sp>
-        <p:nvSpPr>
-          <p:cNvPr id="10" name="Rounded Rectangle 9"/>
-          <p:cNvSpPr/>
-          <p:nvPr/>
-        </p:nvSpPr>
-        <p:spPr>
-          <a:xfrm>
-            <a:off x="6178143" y="1810512"/>
-            <a:ext cx="5446623" cy="2052828"/>
-          </a:xfrm>
-          <a:prstGeom prst="roundRect">
-            <a:avLst>
-              <a:gd name="adj" fmla="val 7126"/>
-            </a:avLst>
-          </a:prstGeom>
-          <a:solidFill>
-            <a:srgbClr val="FFFFFF"/>
-          </a:solidFill>
-          <a:ln w="12700">
-            <a:solidFill>
-              <a:srgbClr val="EAEAE8"/>
-            </a:solidFill>
-          </a:ln>
-          <a:effectLst/>
-        </p:spPr>
-        <p:style>
-          <a:lnRef idx="1">
-            <a:schemeClr val="accent1"/>
-          </a:lnRef>
-          <a:fillRef idx="3">
-            <a:schemeClr val="accent1"/>
-          </a:fillRef>
-          <a:effectRef idx="2">
-            <a:schemeClr val="accent1"/>
-          </a:effectRef>
-          <a:fontRef idx="minor">
-            <a:schemeClr val="lt1"/>
-          </a:fontRef>
-        </p:style>
-        <p:txBody>
-          <a:bodyPr rtlCol="0" anchor="ctr"/>
-          <a:lstStyle/>
-          <a:p/>
-        </p:txBody>
-      </p:sp>
-      <p:sp>
-        <p:nvSpPr>
-          <p:cNvPr id="11" name="TextBox 10"/>
-          <p:cNvSpPr txBox="1"/>
-          <p:nvPr/>
-        </p:nvSpPr>
-        <p:spPr>
-          <a:xfrm>
-            <a:off x="6498183" y="2084831"/>
-            <a:ext cx="4806543" cy="387096"/>
-          </a:xfrm>
-          <a:prstGeom prst="rect">
-            <a:avLst/>
-          </a:prstGeom>
-          <a:noFill/>
-        </p:spPr>
-        <p:txBody>
-          <a:bodyPr wrap="square" lIns="0" rIns="0" tIns="0" bIns="0" anchor="t">
-            <a:spAutoFit/>
-          </a:bodyPr>
-          <a:lstStyle/>
-          <a:p>
-            <a:pPr algn="l">
-              <a:lnSpc>
-                <a:spcPct val="118000"/>
-              </a:lnSpc>
-            </a:pPr>
-            <a:r>
-              <a:rPr sz="2400" b="1" i="0">
-                <a:solidFill>
-                  <a:srgbClr val="A5335F"/>
-                </a:solidFill>
-                <a:latin typeface="Verdana"/>
-              </a:rPr>
-              <a:t>Un débit ralenti à la source</a:t>
-            </a:r>
-          </a:p>
-        </p:txBody>
-      </p:sp>
-      <p:sp>
-        <p:nvSpPr>
-          <p:cNvPr id="12" name="TextBox 11"/>
-          <p:cNvSpPr txBox="1"/>
-          <p:nvPr/>
-        </p:nvSpPr>
-        <p:spPr>
-          <a:xfrm>
-            <a:off x="6498183" y="2499360"/>
-            <a:ext cx="4806543" cy="1089660"/>
-          </a:xfrm>
-          <a:prstGeom prst="rect">
-            <a:avLst/>
-          </a:prstGeom>
-          <a:noFill/>
-        </p:spPr>
-        <p:txBody>
-          <a:bodyPr wrap="square" lIns="0" rIns="0" tIns="0" bIns="0" anchor="t">
-            <a:spAutoFit/>
-          </a:bodyPr>
-          <a:lstStyle/>
-          <a:p>
-            <a:pPr algn="l">
-              <a:lnSpc>
-                <a:spcPct val="142000"/>
-              </a:lnSpc>
-            </a:pPr>
-            <a:r>
-              <a:rPr sz="1800" b="0" i="0">
-                <a:solidFill>
-                  <a:srgbClr val="3A3D40"/>
-                </a:solidFill>
-                <a:latin typeface="Verdana"/>
-              </a:rPr>
-              <a:t>La voix enseignante est synthétisée plus lentement, pas étirée après coup — l'étirement dégrade le son et s'entend.</a:t>
-            </a:r>
-          </a:p>
-        </p:txBody>
-      </p:sp>
-      <p:sp>
-        <p:nvSpPr>
-          <p:cNvPr id="13" name="Rounded Rectangle 12"/>
-          <p:cNvSpPr/>
-          <p:nvPr/>
-        </p:nvSpPr>
-        <p:spPr>
-          <a:xfrm>
-            <a:off x="566928" y="4027932"/>
-            <a:ext cx="5446623" cy="2052828"/>
-          </a:xfrm>
-          <a:prstGeom prst="roundRect">
-            <a:avLst>
-              <a:gd name="adj" fmla="val 7126"/>
-            </a:avLst>
-          </a:prstGeom>
-          <a:solidFill>
-            <a:srgbClr val="FFFFFF"/>
-          </a:solidFill>
-          <a:ln w="12700">
-            <a:solidFill>
-              <a:srgbClr val="EAEAE8"/>
-            </a:solidFill>
-          </a:ln>
-          <a:effectLst/>
-        </p:spPr>
-        <p:style>
-          <a:lnRef idx="1">
-            <a:schemeClr val="accent1"/>
-          </a:lnRef>
-          <a:fillRef idx="3">
-            <a:schemeClr val="accent1"/>
-          </a:fillRef>
-          <a:effectRef idx="2">
-            <a:schemeClr val="accent1"/>
-          </a:effectRef>
-          <a:fontRef idx="minor">
-            <a:schemeClr val="lt1"/>
-          </a:fontRef>
-        </p:style>
-        <p:txBody>
-          <a:bodyPr rtlCol="0" anchor="ctr"/>
-          <a:lstStyle/>
-          <a:p/>
-        </p:txBody>
-      </p:sp>
-      <p:sp>
-        <p:nvSpPr>
-          <p:cNvPr id="14" name="TextBox 13"/>
-          <p:cNvSpPr txBox="1"/>
-          <p:nvPr/>
-        </p:nvSpPr>
-        <p:spPr>
-          <a:xfrm>
-            <a:off x="886968" y="4302252"/>
-            <a:ext cx="4806543" cy="387096"/>
-          </a:xfrm>
-          <a:prstGeom prst="rect">
-            <a:avLst/>
-          </a:prstGeom>
-          <a:noFill/>
-        </p:spPr>
-        <p:txBody>
-          <a:bodyPr wrap="square" lIns="0" rIns="0" tIns="0" bIns="0" anchor="t">
-            <a:spAutoFit/>
-          </a:bodyPr>
-          <a:lstStyle/>
-          <a:p>
-            <a:pPr algn="l">
-              <a:lnSpc>
-                <a:spcPct val="118000"/>
-              </a:lnSpc>
-            </a:pPr>
-            <a:r>
-              <a:rPr sz="2400" b="1" i="0">
-                <a:solidFill>
-                  <a:srgbClr val="A5335F"/>
-                </a:solidFill>
-                <a:latin typeface="Verdana"/>
-              </a:rPr>
-              <a:t>Réécouter ne coûte rien</a:t>
-            </a:r>
-          </a:p>
-        </p:txBody>
-      </p:sp>
-      <p:sp>
-        <p:nvSpPr>
-          <p:cNvPr id="15" name="TextBox 14"/>
-          <p:cNvSpPr txBox="1"/>
-          <p:nvPr/>
-        </p:nvSpPr>
-        <p:spPr>
-          <a:xfrm>
-            <a:off x="886968" y="4716780"/>
-            <a:ext cx="4806543" cy="1089660"/>
-          </a:xfrm>
-          <a:prstGeom prst="rect">
-            <a:avLst/>
-          </a:prstGeom>
-          <a:noFill/>
-        </p:spPr>
-        <p:txBody>
-          <a:bodyPr wrap="square" lIns="0" rIns="0" tIns="0" bIns="0" anchor="t">
-            <a:spAutoFit/>
-          </a:bodyPr>
-          <a:lstStyle/>
-          <a:p>
-            <a:pPr algn="l">
-              <a:lnSpc>
-                <a:spcPct val="142000"/>
-              </a:lnSpc>
-            </a:pPr>
-            <a:r>
-              <a:rPr sz="1800" b="0" i="0">
-                <a:solidFill>
-                  <a:srgbClr val="3A3D40"/>
-                </a:solidFill>
-                <a:latin typeface="Verdana"/>
-              </a:rPr>
-              <a:t>21 403 pistes audio, dans le module. L'élève réécoute une réplique quinze fois sans user la patience de personne.</a:t>
-            </a:r>
-          </a:p>
-        </p:txBody>
-      </p:sp>
-      <p:sp>
-        <p:nvSpPr>
-          <p:cNvPr id="16" name="Rounded Rectangle 15"/>
-          <p:cNvSpPr/>
-          <p:nvPr/>
-        </p:nvSpPr>
-        <p:spPr>
-          <a:xfrm>
-            <a:off x="6178143" y="4027932"/>
-            <a:ext cx="5446623" cy="2052828"/>
-          </a:xfrm>
-          <a:prstGeom prst="roundRect">
-            <a:avLst>
-              <a:gd name="adj" fmla="val 7126"/>
-            </a:avLst>
-          </a:prstGeom>
-          <a:solidFill>
-            <a:srgbClr val="FFFFFF"/>
-          </a:solidFill>
-          <a:ln w="12700">
-            <a:solidFill>
-              <a:srgbClr val="EAEAE8"/>
-            </a:solidFill>
-          </a:ln>
-          <a:effectLst/>
-        </p:spPr>
-        <p:style>
-          <a:lnRef idx="1">
-            <a:schemeClr val="accent1"/>
-          </a:lnRef>
-          <a:fillRef idx="3">
-            <a:schemeClr val="accent1"/>
-          </a:fillRef>
-          <a:effectRef idx="2">
-            <a:schemeClr val="accent1"/>
-          </a:effectRef>
-          <a:fontRef idx="minor">
-            <a:schemeClr val="lt1"/>
-          </a:fontRef>
-        </p:style>
-        <p:txBody>
-          <a:bodyPr rtlCol="0" anchor="ctr"/>
-          <a:lstStyle/>
-          <a:p/>
-        </p:txBody>
-      </p:sp>
-      <p:sp>
-        <p:nvSpPr>
-          <p:cNvPr id="17" name="TextBox 16"/>
-          <p:cNvSpPr txBox="1"/>
-          <p:nvPr/>
-        </p:nvSpPr>
-        <p:spPr>
-          <a:xfrm>
-            <a:off x="6498183" y="4302252"/>
-            <a:ext cx="4806543" cy="387096"/>
-          </a:xfrm>
-          <a:prstGeom prst="rect">
-            <a:avLst/>
-          </a:prstGeom>
-          <a:noFill/>
-        </p:spPr>
-        <p:txBody>
-          <a:bodyPr wrap="square" lIns="0" rIns="0" tIns="0" bIns="0" anchor="t">
-            <a:spAutoFit/>
-          </a:bodyPr>
-          <a:lstStyle/>
-          <a:p>
-            <a:pPr algn="l">
-              <a:lnSpc>
-                <a:spcPct val="118000"/>
-              </a:lnSpc>
-            </a:pPr>
-            <a:r>
-              <a:rPr sz="2400" b="1" i="0">
-                <a:solidFill>
-                  <a:srgbClr val="A5335F"/>
-                </a:solidFill>
-                <a:latin typeface="Verdana"/>
-              </a:rPr>
-              <a:t>Le mot dans une phrase</a:t>
-            </a:r>
-          </a:p>
-        </p:txBody>
-      </p:sp>
-      <p:sp>
-        <p:nvSpPr>
-          <p:cNvPr id="18" name="TextBox 17"/>
-          <p:cNvSpPr txBox="1"/>
-          <p:nvPr/>
-        </p:nvSpPr>
-        <p:spPr>
-          <a:xfrm>
-            <a:off x="6498183" y="4716780"/>
-            <a:ext cx="4806543" cy="1089660"/>
-          </a:xfrm>
-          <a:prstGeom prst="rect">
-            <a:avLst/>
-          </a:prstGeom>
-          <a:noFill/>
-        </p:spPr>
-        <p:txBody>
-          <a:bodyPr wrap="square" lIns="0" rIns="0" tIns="0" bIns="0" anchor="t">
-            <a:spAutoFit/>
-          </a:bodyPr>
-          <a:lstStyle/>
-          <a:p>
-            <a:pPr algn="l">
-              <a:lnSpc>
-                <a:spcPct val="142000"/>
-              </a:lnSpc>
-            </a:pPr>
-            <a:r>
-              <a:rPr sz="1800" b="0" i="0">
-                <a:solidFill>
-                  <a:srgbClr val="3A3D40"/>
-                </a:solidFill>
-                <a:latin typeface="Verdana"/>
-              </a:rPr>
-              <a:t>Un mot isolé se prononce mal et s'oublie. Chaque mot du vocabulaire est enregistré dans une phrase porteuse.</a:t>
+                <a:spcPct val="145000"/>
+              </a:lnSpc>
+            </a:pPr>
+            <a:r>
+              <a:rPr sz="2000" b="0" i="0">
+                <a:solidFill>
+                  <a:srgbClr val="4B4F52"/>
+                </a:solidFill>
+                <a:latin typeface="Verdana"/>
+              </a:rPr>
+              <a:t>Quand un élève fait relire son texte ou son enregistrement, rien n'est gardé et rien ne part. L'enseignant reçoit ce que l'élève décide de lui envoyer, quand il le décide. C'est ce qui permet de recommencer douze fois.</a:t>
             </a:r>
           </a:p>
         </p:txBody>
@@ -7624,33 +7379,111 @@
                 </a:solidFill>
                 <a:latin typeface="Verdana"/>
               </a:rPr>
-              <a:t>LE VOCABULAIRE</a:t>
-            </a:r>
-          </a:p>
-        </p:txBody>
-      </p:sp>
-      <p:sp>
-        <p:nvSpPr>
-          <p:cNvPr id="6" name="Rounded Rectangle 5"/>
+              <a:t>RIEN NE PART SANS LUI</a:t>
+            </a:r>
+          </a:p>
+        </p:txBody>
+      </p:sp>
+      <p:sp>
+        <p:nvSpPr>
+          <p:cNvPr id="6" name="TextBox 5"/>
+          <p:cNvSpPr txBox="1"/>
+          <p:nvPr/>
+        </p:nvSpPr>
+        <p:spPr>
+          <a:xfrm>
+            <a:off x="566928" y="749808"/>
+            <a:ext cx="11057839" cy="877824"/>
+          </a:xfrm>
+          <a:prstGeom prst="rect">
+            <a:avLst/>
+          </a:prstGeom>
+          <a:noFill/>
+        </p:spPr>
+        <p:txBody>
+          <a:bodyPr wrap="square" lIns="0" rIns="0" tIns="0" bIns="0" anchor="t">
+            <a:spAutoFit/>
+          </a:bodyPr>
+          <a:lstStyle/>
+          <a:p>
+            <a:pPr algn="l">
+              <a:lnSpc>
+                <a:spcPct val="115000"/>
+              </a:lnSpc>
+            </a:pPr>
+            <a:r>
+              <a:rPr sz="3400" b="1" i="0">
+                <a:solidFill>
+                  <a:srgbClr val="17181A"/>
+                </a:solidFill>
+                <a:latin typeface="Verdana"/>
+              </a:rPr>
+              <a:t>La relecture, puis l'envoi</a:t>
+            </a:r>
+          </a:p>
+        </p:txBody>
+      </p:sp>
+      <p:sp>
+        <p:nvSpPr>
+          <p:cNvPr id="7" name="TextBox 6"/>
+          <p:cNvSpPr txBox="1"/>
+          <p:nvPr/>
+        </p:nvSpPr>
+        <p:spPr>
+          <a:xfrm>
+            <a:off x="566928" y="1645920"/>
+            <a:ext cx="11057839" cy="617220"/>
+          </a:xfrm>
+          <a:prstGeom prst="rect">
+            <a:avLst/>
+          </a:prstGeom>
+          <a:noFill/>
+        </p:spPr>
+        <p:txBody>
+          <a:bodyPr wrap="square" lIns="0" rIns="0" tIns="0" bIns="0" anchor="t">
+            <a:spAutoFit/>
+          </a:bodyPr>
+          <a:lstStyle/>
+          <a:p>
+            <a:pPr algn="l">
+              <a:lnSpc>
+                <a:spcPct val="135000"/>
+              </a:lnSpc>
+            </a:pPr>
+            <a:r>
+              <a:rPr sz="1800" b="0" i="0">
+                <a:solidFill>
+                  <a:srgbClr val="6E7175"/>
+                </a:solidFill>
+                <a:latin typeface="Verdana"/>
+              </a:rPr>
+              <a:t>La correction s'affiche et n'est gardée nulle part. Le bouton d'envoi est un geste distinct, et il appartient à l'élève.</a:t>
+            </a:r>
+          </a:p>
+        </p:txBody>
+      </p:sp>
+      <p:sp>
+        <p:nvSpPr>
+          <p:cNvPr id="8" name="Rounded Rectangle 7"/>
           <p:cNvSpPr/>
           <p:nvPr/>
         </p:nvSpPr>
         <p:spPr>
           <a:xfrm>
-            <a:off x="566928" y="1225296"/>
-            <a:ext cx="11057839" cy="1967991"/>
+            <a:off x="5325008" y="2372868"/>
+            <a:ext cx="1541678" cy="3799332"/>
           </a:xfrm>
           <a:prstGeom prst="roundRect">
             <a:avLst>
-              <a:gd name="adj" fmla="val 7434"/>
+              <a:gd name="adj" fmla="val 5931"/>
             </a:avLst>
           </a:prstGeom>
           <a:solidFill>
-            <a:srgbClr val="FCE9F0"/>
+            <a:srgbClr val="FFFFFF"/>
           </a:solidFill>
           <a:ln w="12700">
             <a:solidFill>
-              <a:srgbClr val="EAEAE8"/>
+              <a:srgbClr val="D6D6D2"/>
             </a:solidFill>
           </a:ln>
           <a:effectLst/>
@@ -7675,130 +7508,30 @@
           <a:p/>
         </p:txBody>
       </p:sp>
-      <p:sp>
-        <p:nvSpPr>
-          <p:cNvPr id="7" name="TextBox 6"/>
-          <p:cNvSpPr txBox="1"/>
-          <p:nvPr/>
-        </p:nvSpPr>
-        <p:spPr>
-          <a:xfrm>
-            <a:off x="1298448" y="1682496"/>
-            <a:ext cx="9594799" cy="1145032"/>
-          </a:xfrm>
-          <a:prstGeom prst="rect">
-            <a:avLst/>
-          </a:prstGeom>
-          <a:noFill/>
-        </p:spPr>
-        <p:txBody>
-          <a:bodyPr wrap="square" lIns="0" rIns="0" tIns="0" bIns="0" anchor="t">
-            <a:spAutoFit/>
-          </a:bodyPr>
-          <a:lstStyle/>
-          <a:p>
-            <a:pPr algn="l">
-              <a:lnSpc>
-                <a:spcPct val="122000"/>
-              </a:lnSpc>
-            </a:pPr>
-            <a:r>
-              <a:rPr sz="3400" b="1" i="0">
-                <a:solidFill>
-                  <a:srgbClr val="17181A"/>
-                </a:solidFill>
-                <a:latin typeface="Verdana"/>
-              </a:rPr>
-              <a:t>Une seule porte d'entrée dans la progression.</a:t>
-            </a:r>
-          </a:p>
-        </p:txBody>
-      </p:sp>
-      <p:sp>
-        <p:nvSpPr>
-          <p:cNvPr id="8" name="Rounded Rectangle 7"/>
-          <p:cNvSpPr/>
-          <p:nvPr/>
-        </p:nvSpPr>
-        <p:spPr>
-          <a:xfrm>
-            <a:off x="566928" y="3467607"/>
-            <a:ext cx="11057839" cy="2040128"/>
-          </a:xfrm>
-          <a:prstGeom prst="roundRect">
-            <a:avLst>
-              <a:gd name="adj" fmla="val 7171"/>
-            </a:avLst>
-          </a:prstGeom>
-          <a:solidFill>
-            <a:srgbClr val="FFFFFF"/>
-          </a:solidFill>
-          <a:ln w="12700">
-            <a:solidFill>
-              <a:srgbClr val="EAEAE8"/>
-            </a:solidFill>
-          </a:ln>
-          <a:effectLst/>
-        </p:spPr>
-        <p:style>
-          <a:lnRef idx="1">
-            <a:schemeClr val="accent1"/>
-          </a:lnRef>
-          <a:fillRef idx="3">
-            <a:schemeClr val="accent1"/>
-          </a:fillRef>
-          <a:effectRef idx="2">
-            <a:schemeClr val="accent1"/>
-          </a:effectRef>
-          <a:fontRef idx="minor">
-            <a:schemeClr val="lt1"/>
-          </a:fontRef>
-        </p:style>
-        <p:txBody>
-          <a:bodyPr rtlCol="0" anchor="ctr"/>
-          <a:lstStyle/>
-          <a:p/>
-        </p:txBody>
-      </p:sp>
-      <p:sp>
-        <p:nvSpPr>
-          <p:cNvPr id="9" name="TextBox 8"/>
-          <p:cNvSpPr txBox="1"/>
-          <p:nvPr/>
-        </p:nvSpPr>
-        <p:spPr>
-          <a:xfrm>
-            <a:off x="969264" y="3741927"/>
-            <a:ext cx="10234879" cy="1582928"/>
-          </a:xfrm>
-          <a:prstGeom prst="rect">
-            <a:avLst/>
-          </a:prstGeom>
-          <a:noFill/>
-        </p:spPr>
-        <p:txBody>
-          <a:bodyPr wrap="square" lIns="0" rIns="0" tIns="0" bIns="0" anchor="t">
-            <a:spAutoFit/>
-          </a:bodyPr>
-          <a:lstStyle/>
-          <a:p>
-            <a:pPr algn="l">
-              <a:lnSpc>
-                <a:spcPct val="145000"/>
-              </a:lnSpc>
-            </a:pPr>
-            <a:r>
-              <a:rPr sz="2000" b="0" i="0">
-                <a:solidFill>
-                  <a:srgbClr val="4B4F52"/>
-                </a:solidFill>
-                <a:latin typeface="Verdana"/>
-              </a:rPr>
-              <a:t>La section « Je retiens des mots » d'un module n'enregistre rien : elle fait travailler. C'est l'atelier de cartes mémoire, en répétition espacée, qui fait monter un mot d'une boîte à l'autre — et l'élève y **écrit** le mot, il ne le reconnaît pas dans une liste.</a:t>
-            </a:r>
-          </a:p>
-        </p:txBody>
-      </p:sp>
+      <p:pic>
+        <p:nvPicPr>
+          <p:cNvPr id="9" name="Picture 8" descr="cas-09-production-avec-ia.png"/>
+          <p:cNvPicPr>
+            <a:picLocks noChangeAspect="1"/>
+          </p:cNvPicPr>
+          <p:nvPr/>
+        </p:nvPicPr>
+        <p:blipFill>
+          <a:blip r:embed="rId2"/>
+          <a:stretch>
+            <a:fillRect/>
+          </a:stretch>
+        </p:blipFill>
+        <p:spPr>
+          <a:xfrm>
+            <a:off x="5343296" y="2391156"/>
+            <a:ext cx="1505102" cy="3762756"/>
+          </a:xfrm>
+          <a:prstGeom prst="rect">
+            <a:avLst/>
+          </a:prstGeom>
+        </p:spPr>
+      </p:pic>
     </p:spTree>
   </p:cSld>
   <p:clrMapOvr>
@@ -7971,7 +7704,7 @@
                 </a:solidFill>
                 <a:latin typeface="Verdana"/>
               </a:rPr>
-              <a:t>UNE SEULE PORTE D'ENTRÉE</a:t>
+              <a:t>ÉCOUTER</a:t>
             </a:r>
           </a:p>
         </p:txBody>
@@ -8004,70 +7737,31 @@
               </a:lnSpc>
             </a:pPr>
             <a:r>
-              <a:rPr sz="3400" b="1" i="0">
+              <a:rPr sz="2900" b="1" i="0">
                 <a:solidFill>
                   <a:srgbClr val="17181A"/>
                 </a:solidFill>
                 <a:latin typeface="Verdana"/>
               </a:rPr>
-              <a:t>Les cartes mémoire</a:t>
-            </a:r>
-          </a:p>
-        </p:txBody>
-      </p:sp>
-      <p:sp>
-        <p:nvSpPr>
-          <p:cNvPr id="7" name="TextBox 6"/>
-          <p:cNvSpPr txBox="1"/>
-          <p:nvPr/>
-        </p:nvSpPr>
-        <p:spPr>
-          <a:xfrm>
-            <a:off x="566928" y="1645920"/>
-            <a:ext cx="11057839" cy="617220"/>
-          </a:xfrm>
-          <a:prstGeom prst="rect">
-            <a:avLst/>
-          </a:prstGeom>
-          <a:noFill/>
-        </p:spPr>
-        <p:txBody>
-          <a:bodyPr wrap="square" lIns="0" rIns="0" tIns="0" bIns="0" anchor="t">
-            <a:spAutoFit/>
-          </a:bodyPr>
-          <a:lstStyle/>
-          <a:p>
-            <a:pPr algn="l">
-              <a:lnSpc>
-                <a:spcPct val="135000"/>
-              </a:lnSpc>
-            </a:pPr>
-            <a:r>
-              <a:rPr sz="1800" b="0" i="0">
-                <a:solidFill>
-                  <a:srgbClr val="6E7175"/>
-                </a:solidFill>
-                <a:latin typeface="Verdana"/>
-              </a:rPr>
-              <a:t>L'élève écrit le mot à partir de sa définition — il ne le reconnaît pas dans une liste. Sept boîtes, en répétition espacée.</a:t>
-            </a:r>
-          </a:p>
-        </p:txBody>
-      </p:sp>
-      <p:sp>
-        <p:nvSpPr>
-          <p:cNvPr id="8" name="Rounded Rectangle 7"/>
+              <a:t>Ce qu'il a fallu pour que l'oral serve à quelque chose</a:t>
+            </a:r>
+          </a:p>
+        </p:txBody>
+      </p:sp>
+      <p:sp>
+        <p:nvSpPr>
+          <p:cNvPr id="7" name="Rounded Rectangle 6"/>
           <p:cNvSpPr/>
           <p:nvPr/>
         </p:nvSpPr>
         <p:spPr>
           <a:xfrm>
-            <a:off x="5209231" y="2372868"/>
-            <a:ext cx="1773232" cy="3799332"/>
+            <a:off x="566928" y="1810512"/>
+            <a:ext cx="5446623" cy="2052828"/>
           </a:xfrm>
           <a:prstGeom prst="roundRect">
             <a:avLst>
-              <a:gd name="adj" fmla="val 5156"/>
+              <a:gd name="adj" fmla="val 7126"/>
             </a:avLst>
           </a:prstGeom>
           <a:solidFill>
@@ -8075,7 +7769,7 @@
           </a:solidFill>
           <a:ln w="12700">
             <a:solidFill>
-              <a:srgbClr val="D6D6D2"/>
+              <a:srgbClr val="EAEAE8"/>
             </a:solidFill>
           </a:ln>
           <a:effectLst/>
@@ -8100,30 +7794,456 @@
           <a:p/>
         </p:txBody>
       </p:sp>
-      <p:pic>
-        <p:nvPicPr>
-          <p:cNvPr id="9" name="Picture 8" descr="tel-15-cartes-memoire.png"/>
-          <p:cNvPicPr>
-            <a:picLocks noChangeAspect="1"/>
-          </p:cNvPicPr>
-          <p:nvPr/>
-        </p:nvPicPr>
-        <p:blipFill>
-          <a:blip r:embed="rId2"/>
-          <a:stretch>
-            <a:fillRect/>
-          </a:stretch>
-        </p:blipFill>
-        <p:spPr>
-          <a:xfrm>
-            <a:off x="5227519" y="2391156"/>
-            <a:ext cx="1736656" cy="3762756"/>
-          </a:xfrm>
-          <a:prstGeom prst="rect">
-            <a:avLst/>
-          </a:prstGeom>
-        </p:spPr>
-      </p:pic>
+      <p:sp>
+        <p:nvSpPr>
+          <p:cNvPr id="8" name="TextBox 7"/>
+          <p:cNvSpPr txBox="1"/>
+          <p:nvPr/>
+        </p:nvSpPr>
+        <p:spPr>
+          <a:xfrm>
+            <a:off x="886968" y="2084831"/>
+            <a:ext cx="4806543" cy="387096"/>
+          </a:xfrm>
+          <a:prstGeom prst="rect">
+            <a:avLst/>
+          </a:prstGeom>
+          <a:noFill/>
+        </p:spPr>
+        <p:txBody>
+          <a:bodyPr wrap="square" lIns="0" rIns="0" tIns="0" bIns="0" anchor="t">
+            <a:spAutoFit/>
+          </a:bodyPr>
+          <a:lstStyle/>
+          <a:p>
+            <a:pPr algn="l">
+              <a:lnSpc>
+                <a:spcPct val="118000"/>
+              </a:lnSpc>
+            </a:pPr>
+            <a:r>
+              <a:rPr sz="2400" b="1" i="0">
+                <a:solidFill>
+                  <a:srgbClr val="A5335F"/>
+                </a:solidFill>
+                <a:latin typeface="Verdana"/>
+              </a:rPr>
+              <a:t>Une voix par personnage</a:t>
+            </a:r>
+          </a:p>
+        </p:txBody>
+      </p:sp>
+      <p:sp>
+        <p:nvSpPr>
+          <p:cNvPr id="9" name="TextBox 8"/>
+          <p:cNvSpPr txBox="1"/>
+          <p:nvPr/>
+        </p:nvSpPr>
+        <p:spPr>
+          <a:xfrm>
+            <a:off x="886968" y="2499360"/>
+            <a:ext cx="4806543" cy="1089660"/>
+          </a:xfrm>
+          <a:prstGeom prst="rect">
+            <a:avLst/>
+          </a:prstGeom>
+          <a:noFill/>
+        </p:spPr>
+        <p:txBody>
+          <a:bodyPr wrap="square" lIns="0" rIns="0" tIns="0" bIns="0" anchor="t">
+            <a:spAutoFit/>
+          </a:bodyPr>
+          <a:lstStyle/>
+          <a:p>
+            <a:pPr algn="l">
+              <a:lnSpc>
+                <a:spcPct val="142000"/>
+              </a:lnSpc>
+            </a:pPr>
+            <a:r>
+              <a:rPr sz="1800" b="0" i="0">
+                <a:solidFill>
+                  <a:srgbClr val="3A3D40"/>
+                </a:solidFill>
+                <a:latin typeface="Verdana"/>
+              </a:rPr>
+              <a:t>Oksana et Bertrand ne sonnent pas pareil. Sans ça, l'élève ne sait pas qui parle et n'entend qu'un texte lu.</a:t>
+            </a:r>
+          </a:p>
+        </p:txBody>
+      </p:sp>
+      <p:sp>
+        <p:nvSpPr>
+          <p:cNvPr id="10" name="Rounded Rectangle 9"/>
+          <p:cNvSpPr/>
+          <p:nvPr/>
+        </p:nvSpPr>
+        <p:spPr>
+          <a:xfrm>
+            <a:off x="6178143" y="1810512"/>
+            <a:ext cx="5446623" cy="2052828"/>
+          </a:xfrm>
+          <a:prstGeom prst="roundRect">
+            <a:avLst>
+              <a:gd name="adj" fmla="val 7126"/>
+            </a:avLst>
+          </a:prstGeom>
+          <a:solidFill>
+            <a:srgbClr val="FFFFFF"/>
+          </a:solidFill>
+          <a:ln w="12700">
+            <a:solidFill>
+              <a:srgbClr val="EAEAE8"/>
+            </a:solidFill>
+          </a:ln>
+          <a:effectLst/>
+        </p:spPr>
+        <p:style>
+          <a:lnRef idx="1">
+            <a:schemeClr val="accent1"/>
+          </a:lnRef>
+          <a:fillRef idx="3">
+            <a:schemeClr val="accent1"/>
+          </a:fillRef>
+          <a:effectRef idx="2">
+            <a:schemeClr val="accent1"/>
+          </a:effectRef>
+          <a:fontRef idx="minor">
+            <a:schemeClr val="lt1"/>
+          </a:fontRef>
+        </p:style>
+        <p:txBody>
+          <a:bodyPr rtlCol="0" anchor="ctr"/>
+          <a:lstStyle/>
+          <a:p/>
+        </p:txBody>
+      </p:sp>
+      <p:sp>
+        <p:nvSpPr>
+          <p:cNvPr id="11" name="TextBox 10"/>
+          <p:cNvSpPr txBox="1"/>
+          <p:nvPr/>
+        </p:nvSpPr>
+        <p:spPr>
+          <a:xfrm>
+            <a:off x="6498183" y="2084831"/>
+            <a:ext cx="4806543" cy="387096"/>
+          </a:xfrm>
+          <a:prstGeom prst="rect">
+            <a:avLst/>
+          </a:prstGeom>
+          <a:noFill/>
+        </p:spPr>
+        <p:txBody>
+          <a:bodyPr wrap="square" lIns="0" rIns="0" tIns="0" bIns="0" anchor="t">
+            <a:spAutoFit/>
+          </a:bodyPr>
+          <a:lstStyle/>
+          <a:p>
+            <a:pPr algn="l">
+              <a:lnSpc>
+                <a:spcPct val="118000"/>
+              </a:lnSpc>
+            </a:pPr>
+            <a:r>
+              <a:rPr sz="2400" b="1" i="0">
+                <a:solidFill>
+                  <a:srgbClr val="A5335F"/>
+                </a:solidFill>
+                <a:latin typeface="Verdana"/>
+              </a:rPr>
+              <a:t>Un débit ralenti à la source</a:t>
+            </a:r>
+          </a:p>
+        </p:txBody>
+      </p:sp>
+      <p:sp>
+        <p:nvSpPr>
+          <p:cNvPr id="12" name="TextBox 11"/>
+          <p:cNvSpPr txBox="1"/>
+          <p:nvPr/>
+        </p:nvSpPr>
+        <p:spPr>
+          <a:xfrm>
+            <a:off x="6498183" y="2499360"/>
+            <a:ext cx="4806543" cy="1089660"/>
+          </a:xfrm>
+          <a:prstGeom prst="rect">
+            <a:avLst/>
+          </a:prstGeom>
+          <a:noFill/>
+        </p:spPr>
+        <p:txBody>
+          <a:bodyPr wrap="square" lIns="0" rIns="0" tIns="0" bIns="0" anchor="t">
+            <a:spAutoFit/>
+          </a:bodyPr>
+          <a:lstStyle/>
+          <a:p>
+            <a:pPr algn="l">
+              <a:lnSpc>
+                <a:spcPct val="142000"/>
+              </a:lnSpc>
+            </a:pPr>
+            <a:r>
+              <a:rPr sz="1800" b="0" i="0">
+                <a:solidFill>
+                  <a:srgbClr val="3A3D40"/>
+                </a:solidFill>
+                <a:latin typeface="Verdana"/>
+              </a:rPr>
+              <a:t>La voix enseignante est synthétisée plus lentement, pas étirée après coup — l'étirement dégrade le son et s'entend.</a:t>
+            </a:r>
+          </a:p>
+        </p:txBody>
+      </p:sp>
+      <p:sp>
+        <p:nvSpPr>
+          <p:cNvPr id="13" name="Rounded Rectangle 12"/>
+          <p:cNvSpPr/>
+          <p:nvPr/>
+        </p:nvSpPr>
+        <p:spPr>
+          <a:xfrm>
+            <a:off x="566928" y="4027932"/>
+            <a:ext cx="5446623" cy="2052828"/>
+          </a:xfrm>
+          <a:prstGeom prst="roundRect">
+            <a:avLst>
+              <a:gd name="adj" fmla="val 7126"/>
+            </a:avLst>
+          </a:prstGeom>
+          <a:solidFill>
+            <a:srgbClr val="FFFFFF"/>
+          </a:solidFill>
+          <a:ln w="12700">
+            <a:solidFill>
+              <a:srgbClr val="EAEAE8"/>
+            </a:solidFill>
+          </a:ln>
+          <a:effectLst/>
+        </p:spPr>
+        <p:style>
+          <a:lnRef idx="1">
+            <a:schemeClr val="accent1"/>
+          </a:lnRef>
+          <a:fillRef idx="3">
+            <a:schemeClr val="accent1"/>
+          </a:fillRef>
+          <a:effectRef idx="2">
+            <a:schemeClr val="accent1"/>
+          </a:effectRef>
+          <a:fontRef idx="minor">
+            <a:schemeClr val="lt1"/>
+          </a:fontRef>
+        </p:style>
+        <p:txBody>
+          <a:bodyPr rtlCol="0" anchor="ctr"/>
+          <a:lstStyle/>
+          <a:p/>
+        </p:txBody>
+      </p:sp>
+      <p:sp>
+        <p:nvSpPr>
+          <p:cNvPr id="14" name="TextBox 13"/>
+          <p:cNvSpPr txBox="1"/>
+          <p:nvPr/>
+        </p:nvSpPr>
+        <p:spPr>
+          <a:xfrm>
+            <a:off x="886968" y="4302252"/>
+            <a:ext cx="4806543" cy="387096"/>
+          </a:xfrm>
+          <a:prstGeom prst="rect">
+            <a:avLst/>
+          </a:prstGeom>
+          <a:noFill/>
+        </p:spPr>
+        <p:txBody>
+          <a:bodyPr wrap="square" lIns="0" rIns="0" tIns="0" bIns="0" anchor="t">
+            <a:spAutoFit/>
+          </a:bodyPr>
+          <a:lstStyle/>
+          <a:p>
+            <a:pPr algn="l">
+              <a:lnSpc>
+                <a:spcPct val="118000"/>
+              </a:lnSpc>
+            </a:pPr>
+            <a:r>
+              <a:rPr sz="2400" b="1" i="0">
+                <a:solidFill>
+                  <a:srgbClr val="A5335F"/>
+                </a:solidFill>
+                <a:latin typeface="Verdana"/>
+              </a:rPr>
+              <a:t>Réécouter ne coûte rien</a:t>
+            </a:r>
+          </a:p>
+        </p:txBody>
+      </p:sp>
+      <p:sp>
+        <p:nvSpPr>
+          <p:cNvPr id="15" name="TextBox 14"/>
+          <p:cNvSpPr txBox="1"/>
+          <p:nvPr/>
+        </p:nvSpPr>
+        <p:spPr>
+          <a:xfrm>
+            <a:off x="886968" y="4716780"/>
+            <a:ext cx="4806543" cy="1089660"/>
+          </a:xfrm>
+          <a:prstGeom prst="rect">
+            <a:avLst/>
+          </a:prstGeom>
+          <a:noFill/>
+        </p:spPr>
+        <p:txBody>
+          <a:bodyPr wrap="square" lIns="0" rIns="0" tIns="0" bIns="0" anchor="t">
+            <a:spAutoFit/>
+          </a:bodyPr>
+          <a:lstStyle/>
+          <a:p>
+            <a:pPr algn="l">
+              <a:lnSpc>
+                <a:spcPct val="142000"/>
+              </a:lnSpc>
+            </a:pPr>
+            <a:r>
+              <a:rPr sz="1800" b="0" i="0">
+                <a:solidFill>
+                  <a:srgbClr val="3A3D40"/>
+                </a:solidFill>
+                <a:latin typeface="Verdana"/>
+              </a:rPr>
+              <a:t>21 403 pistes audio, dans le module. L'élève réécoute une réplique quinze fois sans user la patience de personne.</a:t>
+            </a:r>
+          </a:p>
+        </p:txBody>
+      </p:sp>
+      <p:sp>
+        <p:nvSpPr>
+          <p:cNvPr id="16" name="Rounded Rectangle 15"/>
+          <p:cNvSpPr/>
+          <p:nvPr/>
+        </p:nvSpPr>
+        <p:spPr>
+          <a:xfrm>
+            <a:off x="6178143" y="4027932"/>
+            <a:ext cx="5446623" cy="2052828"/>
+          </a:xfrm>
+          <a:prstGeom prst="roundRect">
+            <a:avLst>
+              <a:gd name="adj" fmla="val 7126"/>
+            </a:avLst>
+          </a:prstGeom>
+          <a:solidFill>
+            <a:srgbClr val="FFFFFF"/>
+          </a:solidFill>
+          <a:ln w="12700">
+            <a:solidFill>
+              <a:srgbClr val="EAEAE8"/>
+            </a:solidFill>
+          </a:ln>
+          <a:effectLst/>
+        </p:spPr>
+        <p:style>
+          <a:lnRef idx="1">
+            <a:schemeClr val="accent1"/>
+          </a:lnRef>
+          <a:fillRef idx="3">
+            <a:schemeClr val="accent1"/>
+          </a:fillRef>
+          <a:effectRef idx="2">
+            <a:schemeClr val="accent1"/>
+          </a:effectRef>
+          <a:fontRef idx="minor">
+            <a:schemeClr val="lt1"/>
+          </a:fontRef>
+        </p:style>
+        <p:txBody>
+          <a:bodyPr rtlCol="0" anchor="ctr"/>
+          <a:lstStyle/>
+          <a:p/>
+        </p:txBody>
+      </p:sp>
+      <p:sp>
+        <p:nvSpPr>
+          <p:cNvPr id="17" name="TextBox 16"/>
+          <p:cNvSpPr txBox="1"/>
+          <p:nvPr/>
+        </p:nvSpPr>
+        <p:spPr>
+          <a:xfrm>
+            <a:off x="6498183" y="4302252"/>
+            <a:ext cx="4806543" cy="387096"/>
+          </a:xfrm>
+          <a:prstGeom prst="rect">
+            <a:avLst/>
+          </a:prstGeom>
+          <a:noFill/>
+        </p:spPr>
+        <p:txBody>
+          <a:bodyPr wrap="square" lIns="0" rIns="0" tIns="0" bIns="0" anchor="t">
+            <a:spAutoFit/>
+          </a:bodyPr>
+          <a:lstStyle/>
+          <a:p>
+            <a:pPr algn="l">
+              <a:lnSpc>
+                <a:spcPct val="118000"/>
+              </a:lnSpc>
+            </a:pPr>
+            <a:r>
+              <a:rPr sz="2400" b="1" i="0">
+                <a:solidFill>
+                  <a:srgbClr val="A5335F"/>
+                </a:solidFill>
+                <a:latin typeface="Verdana"/>
+              </a:rPr>
+              <a:t>Le mot dans une phrase</a:t>
+            </a:r>
+          </a:p>
+        </p:txBody>
+      </p:sp>
+      <p:sp>
+        <p:nvSpPr>
+          <p:cNvPr id="18" name="TextBox 17"/>
+          <p:cNvSpPr txBox="1"/>
+          <p:nvPr/>
+        </p:nvSpPr>
+        <p:spPr>
+          <a:xfrm>
+            <a:off x="6498183" y="4716780"/>
+            <a:ext cx="4806543" cy="1089660"/>
+          </a:xfrm>
+          <a:prstGeom prst="rect">
+            <a:avLst/>
+          </a:prstGeom>
+          <a:noFill/>
+        </p:spPr>
+        <p:txBody>
+          <a:bodyPr wrap="square" lIns="0" rIns="0" tIns="0" bIns="0" anchor="t">
+            <a:spAutoFit/>
+          </a:bodyPr>
+          <a:lstStyle/>
+          <a:p>
+            <a:pPr algn="l">
+              <a:lnSpc>
+                <a:spcPct val="142000"/>
+              </a:lnSpc>
+            </a:pPr>
+            <a:r>
+              <a:rPr sz="1800" b="0" i="0">
+                <a:solidFill>
+                  <a:srgbClr val="3A3D40"/>
+                </a:solidFill>
+                <a:latin typeface="Verdana"/>
+              </a:rPr>
+              <a:t>Un mot isolé se prononce mal et s'oublie. Chaque mot du vocabulaire est enregistré dans une phrase porteuse.</a:t>
+            </a:r>
+          </a:p>
+        </p:txBody>
+      </p:sp>
     </p:spTree>
   </p:cSld>
   <p:clrMapOvr>
@@ -8296,72 +8416,33 @@
                 </a:solidFill>
                 <a:latin typeface="Verdana"/>
               </a:rPr>
-              <a:t>LA QUESTION QUI VIENT TOUJOURS</a:t>
-            </a:r>
-          </a:p>
-        </p:txBody>
-      </p:sp>
-      <p:sp>
-        <p:nvSpPr>
-          <p:cNvPr id="6" name="TextBox 5"/>
-          <p:cNvSpPr txBox="1"/>
-          <p:nvPr/>
-        </p:nvSpPr>
-        <p:spPr>
-          <a:xfrm>
-            <a:off x="566928" y="749808"/>
-            <a:ext cx="11057839" cy="877824"/>
-          </a:xfrm>
-          <a:prstGeom prst="rect">
-            <a:avLst/>
-          </a:prstGeom>
-          <a:noFill/>
-        </p:spPr>
-        <p:txBody>
-          <a:bodyPr wrap="square" lIns="0" rIns="0" tIns="0" bIns="0" anchor="t">
-            <a:spAutoFit/>
-          </a:bodyPr>
-          <a:lstStyle/>
-          <a:p>
-            <a:pPr algn="l">
-              <a:lnSpc>
-                <a:spcPct val="115000"/>
-              </a:lnSpc>
-            </a:pPr>
-            <a:r>
-              <a:rPr sz="3400" b="1" i="0">
-                <a:solidFill>
-                  <a:srgbClr val="17181A"/>
-                </a:solidFill>
-                <a:latin typeface="Verdana"/>
-              </a:rPr>
-              <a:t>Le piège le plus fréquent</a:t>
-            </a:r>
-          </a:p>
-        </p:txBody>
-      </p:sp>
-      <p:sp>
-        <p:nvSpPr>
-          <p:cNvPr id="7" name="Rounded Rectangle 6"/>
+              <a:t>LE VOCABULAIRE</a:t>
+            </a:r>
+          </a:p>
+        </p:txBody>
+      </p:sp>
+      <p:sp>
+        <p:nvSpPr>
+          <p:cNvPr id="6" name="Rounded Rectangle 5"/>
           <p:cNvSpPr/>
           <p:nvPr/>
         </p:nvSpPr>
         <p:spPr>
           <a:xfrm>
-            <a:off x="566928" y="1856232"/>
-            <a:ext cx="5428335" cy="2331720"/>
+            <a:off x="566928" y="1225296"/>
+            <a:ext cx="11057839" cy="1967991"/>
           </a:xfrm>
           <a:prstGeom prst="roundRect">
             <a:avLst>
-              <a:gd name="adj" fmla="val 6274"/>
+              <a:gd name="adj" fmla="val 7434"/>
             </a:avLst>
           </a:prstGeom>
           <a:solidFill>
-            <a:srgbClr val="FFF6F5"/>
+            <a:srgbClr val="FCE9F0"/>
           </a:solidFill>
           <a:ln w="12700">
             <a:solidFill>
-              <a:srgbClr val="DC2626"/>
+              <a:srgbClr val="EAEAE8"/>
             </a:solidFill>
           </a:ln>
           <a:effectLst/>
@@ -8388,14 +8469,14 @@
       </p:sp>
       <p:sp>
         <p:nvSpPr>
-          <p:cNvPr id="8" name="TextBox 7"/>
-          <p:cNvSpPr txBox="1"/>
-          <p:nvPr/>
-        </p:nvSpPr>
-        <p:spPr>
-          <a:xfrm>
-            <a:off x="932688" y="2130552"/>
-            <a:ext cx="4696815" cy="274320"/>
+          <p:cNvPr id="7" name="TextBox 6"/>
+          <p:cNvSpPr txBox="1"/>
+          <p:nvPr/>
+        </p:nvSpPr>
+        <p:spPr>
+          <a:xfrm>
+            <a:off x="1298448" y="1682496"/>
+            <a:ext cx="9594799" cy="1145032"/>
           </a:xfrm>
           <a:prstGeom prst="rect">
             <a:avLst/>
@@ -8410,198 +8491,35 @@
           <a:p>
             <a:pPr algn="l">
               <a:lnSpc>
-                <a:spcPct val="135000"/>
-              </a:lnSpc>
-            </a:pPr>
-            <a:r>
-              <a:rPr sz="1300" b="1" i="0" spc="156">
-                <a:solidFill>
-                  <a:srgbClr val="B91C1C"/>
-                </a:solidFill>
-                <a:latin typeface="Verdana"/>
-              </a:rPr>
-              <a:t>ON ENTEND SOUVENT</a:t>
-            </a:r>
-          </a:p>
-        </p:txBody>
-      </p:sp>
-      <p:sp>
-        <p:nvSpPr>
-          <p:cNvPr id="9" name="TextBox 8"/>
-          <p:cNvSpPr txBox="1"/>
-          <p:nvPr/>
-        </p:nvSpPr>
-        <p:spPr>
-          <a:xfrm>
-            <a:off x="932688" y="2569464"/>
-            <a:ext cx="4696815" cy="1417320"/>
-          </a:xfrm>
-          <a:prstGeom prst="rect">
-            <a:avLst/>
-          </a:prstGeom>
-          <a:noFill/>
-        </p:spPr>
-        <p:txBody>
-          <a:bodyPr wrap="square" lIns="0" rIns="0" tIns="0" bIns="0" anchor="t">
-            <a:spAutoFit/>
-          </a:bodyPr>
-          <a:lstStyle/>
-          <a:p>
-            <a:pPr algn="l">
-              <a:lnSpc>
-                <a:spcPct val="130000"/>
-              </a:lnSpc>
-            </a:pPr>
-            <a:r>
-              <a:rPr sz="2500" b="1" i="0">
+                <a:spcPct val="122000"/>
+              </a:lnSpc>
+            </a:pPr>
+            <a:r>
+              <a:rPr sz="3400" b="1" i="0">
                 <a:solidFill>
                   <a:srgbClr val="17181A"/>
                 </a:solidFill>
                 <a:latin typeface="Verdana"/>
               </a:rPr>
-              <a:t>« Votre assistant va faire les exercices à leur place. »</a:t>
-            </a:r>
-          </a:p>
-        </p:txBody>
-      </p:sp>
-      <p:sp>
-        <p:nvSpPr>
-          <p:cNvPr id="10" name="Rounded Rectangle 9"/>
+              <a:t>Une seule porte d'entrée dans la progression.</a:t>
+            </a:r>
+          </a:p>
+        </p:txBody>
+      </p:sp>
+      <p:sp>
+        <p:nvSpPr>
+          <p:cNvPr id="8" name="Rounded Rectangle 7"/>
           <p:cNvSpPr/>
           <p:nvPr/>
         </p:nvSpPr>
         <p:spPr>
           <a:xfrm>
-            <a:off x="6196431" y="1856232"/>
-            <a:ext cx="5428335" cy="2331720"/>
+            <a:off x="566928" y="3467607"/>
+            <a:ext cx="11057839" cy="2040128"/>
           </a:xfrm>
           <a:prstGeom prst="roundRect">
             <a:avLst>
-              <a:gd name="adj" fmla="val 6274"/>
-            </a:avLst>
-          </a:prstGeom>
-          <a:solidFill>
-            <a:srgbClr val="E6F5EE"/>
-          </a:solidFill>
-          <a:ln w="12700">
-            <a:solidFill>
-              <a:srgbClr val="0A8F5B"/>
-            </a:solidFill>
-          </a:ln>
-          <a:effectLst/>
-        </p:spPr>
-        <p:style>
-          <a:lnRef idx="1">
-            <a:schemeClr val="accent1"/>
-          </a:lnRef>
-          <a:fillRef idx="3">
-            <a:schemeClr val="accent1"/>
-          </a:fillRef>
-          <a:effectRef idx="2">
-            <a:schemeClr val="accent1"/>
-          </a:effectRef>
-          <a:fontRef idx="minor">
-            <a:schemeClr val="lt1"/>
-          </a:fontRef>
-        </p:style>
-        <p:txBody>
-          <a:bodyPr rtlCol="0" anchor="ctr"/>
-          <a:lstStyle/>
-          <a:p/>
-        </p:txBody>
-      </p:sp>
-      <p:sp>
-        <p:nvSpPr>
-          <p:cNvPr id="11" name="TextBox 10"/>
-          <p:cNvSpPr txBox="1"/>
-          <p:nvPr/>
-        </p:nvSpPr>
-        <p:spPr>
-          <a:xfrm>
-            <a:off x="6562191" y="2130552"/>
-            <a:ext cx="4696815" cy="274320"/>
-          </a:xfrm>
-          <a:prstGeom prst="rect">
-            <a:avLst/>
-          </a:prstGeom>
-          <a:noFill/>
-        </p:spPr>
-        <p:txBody>
-          <a:bodyPr wrap="square" lIns="0" rIns="0" tIns="0" bIns="0" anchor="t">
-            <a:spAutoFit/>
-          </a:bodyPr>
-          <a:lstStyle/>
-          <a:p>
-            <a:pPr algn="l">
-              <a:lnSpc>
-                <a:spcPct val="135000"/>
-              </a:lnSpc>
-            </a:pPr>
-            <a:r>
-              <a:rPr sz="1300" b="1" i="0" spc="156">
-                <a:solidFill>
-                  <a:srgbClr val="07734A"/>
-                </a:solidFill>
-                <a:latin typeface="Verdana"/>
-              </a:rPr>
-              <a:t>IL FAUT DIRE PLUTÔT</a:t>
-            </a:r>
-          </a:p>
-        </p:txBody>
-      </p:sp>
-      <p:sp>
-        <p:nvSpPr>
-          <p:cNvPr id="12" name="TextBox 11"/>
-          <p:cNvSpPr txBox="1"/>
-          <p:nvPr/>
-        </p:nvSpPr>
-        <p:spPr>
-          <a:xfrm>
-            <a:off x="6562191" y="2569464"/>
-            <a:ext cx="4696815" cy="1417320"/>
-          </a:xfrm>
-          <a:prstGeom prst="rect">
-            <a:avLst/>
-          </a:prstGeom>
-          <a:noFill/>
-        </p:spPr>
-        <p:txBody>
-          <a:bodyPr wrap="square" lIns="0" rIns="0" tIns="0" bIns="0" anchor="t">
-            <a:spAutoFit/>
-          </a:bodyPr>
-          <a:lstStyle/>
-          <a:p>
-            <a:pPr algn="l">
-              <a:lnSpc>
-                <a:spcPct val="130000"/>
-              </a:lnSpc>
-            </a:pPr>
-            <a:r>
-              <a:rPr sz="2500" b="1" i="0">
-                <a:solidFill>
-                  <a:srgbClr val="17181A"/>
-                </a:solidFill>
-                <a:latin typeface="Verdana"/>
-              </a:rPr>
-              <a:t>« Il a interdiction de donner une réponse. »</a:t>
-            </a:r>
-          </a:p>
-        </p:txBody>
-      </p:sp>
-      <p:sp>
-        <p:nvSpPr>
-          <p:cNvPr id="13" name="Rounded Rectangle 12"/>
-          <p:cNvSpPr/>
-          <p:nvPr/>
-        </p:nvSpPr>
-        <p:spPr>
-          <a:xfrm>
-            <a:off x="566928" y="4462272"/>
-            <a:ext cx="11057839" cy="1618487"/>
-          </a:xfrm>
-          <a:prstGeom prst="roundRect">
-            <a:avLst>
-              <a:gd name="adj" fmla="val 9039"/>
+              <a:gd name="adj" fmla="val 7171"/>
             </a:avLst>
           </a:prstGeom>
           <a:solidFill>
@@ -8636,14 +8554,14 @@
       </p:sp>
       <p:sp>
         <p:nvSpPr>
-          <p:cNvPr id="14" name="TextBox 13"/>
-          <p:cNvSpPr txBox="1"/>
-          <p:nvPr/>
-        </p:nvSpPr>
-        <p:spPr>
-          <a:xfrm>
-            <a:off x="969264" y="4736592"/>
-            <a:ext cx="10234879" cy="1150620"/>
+          <p:cNvPr id="9" name="TextBox 8"/>
+          <p:cNvSpPr txBox="1"/>
+          <p:nvPr/>
+        </p:nvSpPr>
+        <p:spPr>
+          <a:xfrm>
+            <a:off x="969264" y="3741927"/>
+            <a:ext cx="10234879" cy="1582928"/>
           </a:xfrm>
           <a:prstGeom prst="rect">
             <a:avLst/>
@@ -8668,7 +8586,7 @@
                 </a:solidFill>
                 <a:latin typeface="Verdana"/>
               </a:rPr>
-              <a:t>Il cite la phrase du dialogue où se trouve l'information, puis repose une question plus facile. La traduction s'ajoute sous le français et ne le remplace jamais ; « simplifier » reformule en français, il ne traduit pas.</a:t>
+              <a:t>La section « Je retiens des mots » d'un module n'enregistre rien : elle fait travailler. C'est l'atelier de cartes mémoire, en répétition espacée, qui fait monter un mot d'une boîte à l'autre — et l'élève y **écrit** le mot, il ne le reconnaît pas dans une liste.</a:t>
             </a:r>
           </a:p>
         </p:txBody>
@@ -8845,33 +8763,111 @@
                 </a:solidFill>
                 <a:latin typeface="Verdana"/>
               </a:rPr>
-              <a:t>QUI DÉCIDE</a:t>
-            </a:r>
-          </a:p>
-        </p:txBody>
-      </p:sp>
-      <p:sp>
-        <p:nvSpPr>
-          <p:cNvPr id="6" name="Rounded Rectangle 5"/>
+              <a:t>UNE SEULE PORTE D'ENTRÉE</a:t>
+            </a:r>
+          </a:p>
+        </p:txBody>
+      </p:sp>
+      <p:sp>
+        <p:nvSpPr>
+          <p:cNvPr id="6" name="TextBox 5"/>
+          <p:cNvSpPr txBox="1"/>
+          <p:nvPr/>
+        </p:nvSpPr>
+        <p:spPr>
+          <a:xfrm>
+            <a:off x="566928" y="749808"/>
+            <a:ext cx="11057839" cy="877824"/>
+          </a:xfrm>
+          <a:prstGeom prst="rect">
+            <a:avLst/>
+          </a:prstGeom>
+          <a:noFill/>
+        </p:spPr>
+        <p:txBody>
+          <a:bodyPr wrap="square" lIns="0" rIns="0" tIns="0" bIns="0" anchor="t">
+            <a:spAutoFit/>
+          </a:bodyPr>
+          <a:lstStyle/>
+          <a:p>
+            <a:pPr algn="l">
+              <a:lnSpc>
+                <a:spcPct val="115000"/>
+              </a:lnSpc>
+            </a:pPr>
+            <a:r>
+              <a:rPr sz="3400" b="1" i="0">
+                <a:solidFill>
+                  <a:srgbClr val="17181A"/>
+                </a:solidFill>
+                <a:latin typeface="Verdana"/>
+              </a:rPr>
+              <a:t>Les cartes mémoire</a:t>
+            </a:r>
+          </a:p>
+        </p:txBody>
+      </p:sp>
+      <p:sp>
+        <p:nvSpPr>
+          <p:cNvPr id="7" name="TextBox 6"/>
+          <p:cNvSpPr txBox="1"/>
+          <p:nvPr/>
+        </p:nvSpPr>
+        <p:spPr>
+          <a:xfrm>
+            <a:off x="566928" y="1645920"/>
+            <a:ext cx="11057839" cy="617220"/>
+          </a:xfrm>
+          <a:prstGeom prst="rect">
+            <a:avLst/>
+          </a:prstGeom>
+          <a:noFill/>
+        </p:spPr>
+        <p:txBody>
+          <a:bodyPr wrap="square" lIns="0" rIns="0" tIns="0" bIns="0" anchor="t">
+            <a:spAutoFit/>
+          </a:bodyPr>
+          <a:lstStyle/>
+          <a:p>
+            <a:pPr algn="l">
+              <a:lnSpc>
+                <a:spcPct val="135000"/>
+              </a:lnSpc>
+            </a:pPr>
+            <a:r>
+              <a:rPr sz="1800" b="0" i="0">
+                <a:solidFill>
+                  <a:srgbClr val="6E7175"/>
+                </a:solidFill>
+                <a:latin typeface="Verdana"/>
+              </a:rPr>
+              <a:t>L'élève écrit le mot à partir de sa définition — il ne le reconnaît pas dans une liste. Sept boîtes, en répétition espacée.</a:t>
+            </a:r>
+          </a:p>
+        </p:txBody>
+      </p:sp>
+      <p:sp>
+        <p:nvSpPr>
+          <p:cNvPr id="8" name="Rounded Rectangle 7"/>
           <p:cNvSpPr/>
           <p:nvPr/>
         </p:nvSpPr>
         <p:spPr>
           <a:xfrm>
-            <a:off x="566928" y="1225296"/>
-            <a:ext cx="11057839" cy="1967991"/>
+            <a:off x="5209231" y="2372868"/>
+            <a:ext cx="1773232" cy="3799332"/>
           </a:xfrm>
           <a:prstGeom prst="roundRect">
             <a:avLst>
-              <a:gd name="adj" fmla="val 7434"/>
+              <a:gd name="adj" fmla="val 5156"/>
             </a:avLst>
           </a:prstGeom>
           <a:solidFill>
-            <a:srgbClr val="FCE9F0"/>
+            <a:srgbClr val="FFFFFF"/>
           </a:solidFill>
           <a:ln w="12700">
             <a:solidFill>
-              <a:srgbClr val="EAEAE8"/>
+              <a:srgbClr val="D6D6D2"/>
             </a:solidFill>
           </a:ln>
           <a:effectLst/>
@@ -8896,130 +8892,30 @@
           <a:p/>
         </p:txBody>
       </p:sp>
-      <p:sp>
-        <p:nvSpPr>
-          <p:cNvPr id="7" name="TextBox 6"/>
-          <p:cNvSpPr txBox="1"/>
-          <p:nvPr/>
-        </p:nvSpPr>
-        <p:spPr>
-          <a:xfrm>
-            <a:off x="1298448" y="1682496"/>
-            <a:ext cx="9594799" cy="1145032"/>
-          </a:xfrm>
-          <a:prstGeom prst="rect">
-            <a:avLst/>
-          </a:prstGeom>
-          <a:noFill/>
-        </p:spPr>
-        <p:txBody>
-          <a:bodyPr wrap="square" lIns="0" rIns="0" tIns="0" bIns="0" anchor="t">
-            <a:spAutoFit/>
-          </a:bodyPr>
-          <a:lstStyle/>
-          <a:p>
-            <a:pPr algn="l">
-              <a:lnSpc>
-                <a:spcPct val="122000"/>
-              </a:lnSpc>
-            </a:pPr>
-            <a:r>
-              <a:rPr sz="3400" b="1" i="0">
-                <a:solidFill>
-                  <a:srgbClr val="17181A"/>
-                </a:solidFill>
-                <a:latin typeface="Verdana"/>
-              </a:rPr>
-              <a:t>Aucun parcours n'est suggéré automatiquement à un élève.</a:t>
-            </a:r>
-          </a:p>
-        </p:txBody>
-      </p:sp>
-      <p:sp>
-        <p:nvSpPr>
-          <p:cNvPr id="8" name="Rounded Rectangle 7"/>
-          <p:cNvSpPr/>
-          <p:nvPr/>
-        </p:nvSpPr>
-        <p:spPr>
-          <a:xfrm>
-            <a:off x="566928" y="3467607"/>
-            <a:ext cx="11057839" cy="1671827"/>
-          </a:xfrm>
-          <a:prstGeom prst="roundRect">
-            <a:avLst>
-              <a:gd name="adj" fmla="val 8751"/>
-            </a:avLst>
-          </a:prstGeom>
-          <a:solidFill>
-            <a:srgbClr val="FFFFFF"/>
-          </a:solidFill>
-          <a:ln w="12700">
-            <a:solidFill>
-              <a:srgbClr val="EAEAE8"/>
-            </a:solidFill>
-          </a:ln>
-          <a:effectLst/>
-        </p:spPr>
-        <p:style>
-          <a:lnRef idx="1">
-            <a:schemeClr val="accent1"/>
-          </a:lnRef>
-          <a:fillRef idx="3">
-            <a:schemeClr val="accent1"/>
-          </a:fillRef>
-          <a:effectRef idx="2">
-            <a:schemeClr val="accent1"/>
-          </a:effectRef>
-          <a:fontRef idx="minor">
-            <a:schemeClr val="lt1"/>
-          </a:fontRef>
-        </p:style>
-        <p:txBody>
-          <a:bodyPr rtlCol="0" anchor="ctr"/>
-          <a:lstStyle/>
-          <a:p/>
-        </p:txBody>
-      </p:sp>
-      <p:sp>
-        <p:nvSpPr>
-          <p:cNvPr id="9" name="TextBox 8"/>
-          <p:cNvSpPr txBox="1"/>
-          <p:nvPr/>
-        </p:nvSpPr>
-        <p:spPr>
-          <a:xfrm>
-            <a:off x="969264" y="3741927"/>
-            <a:ext cx="10234879" cy="1214627"/>
-          </a:xfrm>
-          <a:prstGeom prst="rect">
-            <a:avLst/>
-          </a:prstGeom>
-          <a:noFill/>
-        </p:spPr>
-        <p:txBody>
-          <a:bodyPr wrap="square" lIns="0" rIns="0" tIns="0" bIns="0" anchor="t">
-            <a:spAutoFit/>
-          </a:bodyPr>
-          <a:lstStyle/>
-          <a:p>
-            <a:pPr algn="l">
-              <a:lnSpc>
-                <a:spcPct val="145000"/>
-              </a:lnSpc>
-            </a:pPr>
-            <a:r>
-              <a:rPr sz="2000" b="0" i="0">
-                <a:solidFill>
-                  <a:srgbClr val="4B4F52"/>
-                </a:solidFill>
-                <a:latin typeface="Verdana"/>
-              </a:rPr>
-              <a:t>Le portail dit ce qu'un élève a fait et où il s'est trompé. Il ne conclut rien et ne propose rien. C'est l'enseignant qui envoie une mini-leçon de dix minutes à qui en a besoin — un choix, pas une étape transitoire vers l'automatisation.</a:t>
-            </a:r>
-          </a:p>
-        </p:txBody>
-      </p:sp>
+      <p:pic>
+        <p:nvPicPr>
+          <p:cNvPr id="9" name="Picture 8" descr="tel-15-cartes-memoire.png"/>
+          <p:cNvPicPr>
+            <a:picLocks noChangeAspect="1"/>
+          </p:cNvPicPr>
+          <p:nvPr/>
+        </p:nvPicPr>
+        <p:blipFill>
+          <a:blip r:embed="rId2"/>
+          <a:stretch>
+            <a:fillRect/>
+          </a:stretch>
+        </p:blipFill>
+        <p:spPr>
+          <a:xfrm>
+            <a:off x="5227519" y="2391156"/>
+            <a:ext cx="1736656" cy="3762756"/>
+          </a:xfrm>
+          <a:prstGeom prst="rect">
+            <a:avLst/>
+          </a:prstGeom>
+        </p:spPr>
+      </p:pic>
     </p:spTree>
   </p:cSld>
   <p:clrMapOvr>
@@ -9192,7 +9088,7 @@
                 </a:solidFill>
                 <a:latin typeface="Verdana"/>
               </a:rPr>
-              <a:t>CE QUE L'ENSEIGNANT VOIT</a:t>
+              <a:t>LA QUESTION QUI VIENT TOUJOURS</a:t>
             </a:r>
           </a:p>
         </p:txBody>
@@ -9231,64 +9127,273 @@
                 </a:solidFill>
                 <a:latin typeface="Verdana"/>
               </a:rPr>
-              <a:t>Le dossier d'un élève</a:t>
-            </a:r>
-          </a:p>
-        </p:txBody>
-      </p:sp>
-      <p:sp>
-        <p:nvSpPr>
-          <p:cNvPr id="7" name="TextBox 6"/>
-          <p:cNvSpPr txBox="1"/>
-          <p:nvPr/>
-        </p:nvSpPr>
-        <p:spPr>
-          <a:xfrm>
-            <a:off x="566928" y="1645920"/>
-            <a:ext cx="11057839" cy="617220"/>
-          </a:xfrm>
-          <a:prstGeom prst="rect">
-            <a:avLst/>
-          </a:prstGeom>
-          <a:noFill/>
-        </p:spPr>
-        <p:txBody>
-          <a:bodyPr wrap="square" lIns="0" rIns="0" tIns="0" bIns="0" anchor="t">
-            <a:spAutoFit/>
-          </a:bodyPr>
-          <a:lstStyle/>
-          <a:p>
-            <a:pPr algn="l">
-              <a:lnSpc>
-                <a:spcPct val="135000"/>
-              </a:lnSpc>
-            </a:pPr>
-            <a:r>
-              <a:rPr sz="1800" b="0" i="0">
-                <a:solidFill>
-                  <a:srgbClr val="6E7175"/>
-                </a:solidFill>
-                <a:latin typeface="Verdana"/>
-              </a:rPr>
-              <a:t>Où il en est, où il s'est trompé, ce qu'il a remis. Aucune conclusion, aucune suggestion de parcours : c'est lui qui tranche.</a:t>
-            </a:r>
-          </a:p>
-        </p:txBody>
-      </p:sp>
-      <p:sp>
-        <p:nvSpPr>
-          <p:cNvPr id="8" name="Rounded Rectangle 7"/>
+              <a:t>Le piège le plus fréquent</a:t>
+            </a:r>
+          </a:p>
+        </p:txBody>
+      </p:sp>
+      <p:sp>
+        <p:nvSpPr>
+          <p:cNvPr id="7" name="Rounded Rectangle 6"/>
           <p:cNvSpPr/>
           <p:nvPr/>
         </p:nvSpPr>
         <p:spPr>
           <a:xfrm>
-            <a:off x="4881003" y="2372868"/>
-            <a:ext cx="2429688" cy="3799332"/>
+            <a:off x="566928" y="1856232"/>
+            <a:ext cx="5428335" cy="2331720"/>
           </a:xfrm>
           <a:prstGeom prst="roundRect">
             <a:avLst>
-              <a:gd name="adj" fmla="val 3763"/>
+              <a:gd name="adj" fmla="val 6274"/>
+            </a:avLst>
+          </a:prstGeom>
+          <a:solidFill>
+            <a:srgbClr val="FFF6F5"/>
+          </a:solidFill>
+          <a:ln w="12700">
+            <a:solidFill>
+              <a:srgbClr val="DC2626"/>
+            </a:solidFill>
+          </a:ln>
+          <a:effectLst/>
+        </p:spPr>
+        <p:style>
+          <a:lnRef idx="1">
+            <a:schemeClr val="accent1"/>
+          </a:lnRef>
+          <a:fillRef idx="3">
+            <a:schemeClr val="accent1"/>
+          </a:fillRef>
+          <a:effectRef idx="2">
+            <a:schemeClr val="accent1"/>
+          </a:effectRef>
+          <a:fontRef idx="minor">
+            <a:schemeClr val="lt1"/>
+          </a:fontRef>
+        </p:style>
+        <p:txBody>
+          <a:bodyPr rtlCol="0" anchor="ctr"/>
+          <a:lstStyle/>
+          <a:p/>
+        </p:txBody>
+      </p:sp>
+      <p:sp>
+        <p:nvSpPr>
+          <p:cNvPr id="8" name="TextBox 7"/>
+          <p:cNvSpPr txBox="1"/>
+          <p:nvPr/>
+        </p:nvSpPr>
+        <p:spPr>
+          <a:xfrm>
+            <a:off x="932688" y="2130552"/>
+            <a:ext cx="4696815" cy="274320"/>
+          </a:xfrm>
+          <a:prstGeom prst="rect">
+            <a:avLst/>
+          </a:prstGeom>
+          <a:noFill/>
+        </p:spPr>
+        <p:txBody>
+          <a:bodyPr wrap="square" lIns="0" rIns="0" tIns="0" bIns="0" anchor="t">
+            <a:spAutoFit/>
+          </a:bodyPr>
+          <a:lstStyle/>
+          <a:p>
+            <a:pPr algn="l">
+              <a:lnSpc>
+                <a:spcPct val="135000"/>
+              </a:lnSpc>
+            </a:pPr>
+            <a:r>
+              <a:rPr sz="1300" b="1" i="0" spc="156">
+                <a:solidFill>
+                  <a:srgbClr val="B91C1C"/>
+                </a:solidFill>
+                <a:latin typeface="Verdana"/>
+              </a:rPr>
+              <a:t>ON ENTEND SOUVENT</a:t>
+            </a:r>
+          </a:p>
+        </p:txBody>
+      </p:sp>
+      <p:sp>
+        <p:nvSpPr>
+          <p:cNvPr id="9" name="TextBox 8"/>
+          <p:cNvSpPr txBox="1"/>
+          <p:nvPr/>
+        </p:nvSpPr>
+        <p:spPr>
+          <a:xfrm>
+            <a:off x="932688" y="2569464"/>
+            <a:ext cx="4696815" cy="1417320"/>
+          </a:xfrm>
+          <a:prstGeom prst="rect">
+            <a:avLst/>
+          </a:prstGeom>
+          <a:noFill/>
+        </p:spPr>
+        <p:txBody>
+          <a:bodyPr wrap="square" lIns="0" rIns="0" tIns="0" bIns="0" anchor="t">
+            <a:spAutoFit/>
+          </a:bodyPr>
+          <a:lstStyle/>
+          <a:p>
+            <a:pPr algn="l">
+              <a:lnSpc>
+                <a:spcPct val="130000"/>
+              </a:lnSpc>
+            </a:pPr>
+            <a:r>
+              <a:rPr sz="2500" b="1" i="0">
+                <a:solidFill>
+                  <a:srgbClr val="17181A"/>
+                </a:solidFill>
+                <a:latin typeface="Verdana"/>
+              </a:rPr>
+              <a:t>« Votre assistant va faire les exercices à leur place. »</a:t>
+            </a:r>
+          </a:p>
+        </p:txBody>
+      </p:sp>
+      <p:sp>
+        <p:nvSpPr>
+          <p:cNvPr id="10" name="Rounded Rectangle 9"/>
+          <p:cNvSpPr/>
+          <p:nvPr/>
+        </p:nvSpPr>
+        <p:spPr>
+          <a:xfrm>
+            <a:off x="6196431" y="1856232"/>
+            <a:ext cx="5428335" cy="2331720"/>
+          </a:xfrm>
+          <a:prstGeom prst="roundRect">
+            <a:avLst>
+              <a:gd name="adj" fmla="val 6274"/>
+            </a:avLst>
+          </a:prstGeom>
+          <a:solidFill>
+            <a:srgbClr val="E6F5EE"/>
+          </a:solidFill>
+          <a:ln w="12700">
+            <a:solidFill>
+              <a:srgbClr val="0A8F5B"/>
+            </a:solidFill>
+          </a:ln>
+          <a:effectLst/>
+        </p:spPr>
+        <p:style>
+          <a:lnRef idx="1">
+            <a:schemeClr val="accent1"/>
+          </a:lnRef>
+          <a:fillRef idx="3">
+            <a:schemeClr val="accent1"/>
+          </a:fillRef>
+          <a:effectRef idx="2">
+            <a:schemeClr val="accent1"/>
+          </a:effectRef>
+          <a:fontRef idx="minor">
+            <a:schemeClr val="lt1"/>
+          </a:fontRef>
+        </p:style>
+        <p:txBody>
+          <a:bodyPr rtlCol="0" anchor="ctr"/>
+          <a:lstStyle/>
+          <a:p/>
+        </p:txBody>
+      </p:sp>
+      <p:sp>
+        <p:nvSpPr>
+          <p:cNvPr id="11" name="TextBox 10"/>
+          <p:cNvSpPr txBox="1"/>
+          <p:nvPr/>
+        </p:nvSpPr>
+        <p:spPr>
+          <a:xfrm>
+            <a:off x="6562191" y="2130552"/>
+            <a:ext cx="4696815" cy="274320"/>
+          </a:xfrm>
+          <a:prstGeom prst="rect">
+            <a:avLst/>
+          </a:prstGeom>
+          <a:noFill/>
+        </p:spPr>
+        <p:txBody>
+          <a:bodyPr wrap="square" lIns="0" rIns="0" tIns="0" bIns="0" anchor="t">
+            <a:spAutoFit/>
+          </a:bodyPr>
+          <a:lstStyle/>
+          <a:p>
+            <a:pPr algn="l">
+              <a:lnSpc>
+                <a:spcPct val="135000"/>
+              </a:lnSpc>
+            </a:pPr>
+            <a:r>
+              <a:rPr sz="1300" b="1" i="0" spc="156">
+                <a:solidFill>
+                  <a:srgbClr val="07734A"/>
+                </a:solidFill>
+                <a:latin typeface="Verdana"/>
+              </a:rPr>
+              <a:t>IL FAUT DIRE PLUTÔT</a:t>
+            </a:r>
+          </a:p>
+        </p:txBody>
+      </p:sp>
+      <p:sp>
+        <p:nvSpPr>
+          <p:cNvPr id="12" name="TextBox 11"/>
+          <p:cNvSpPr txBox="1"/>
+          <p:nvPr/>
+        </p:nvSpPr>
+        <p:spPr>
+          <a:xfrm>
+            <a:off x="6562191" y="2569464"/>
+            <a:ext cx="4696815" cy="1417320"/>
+          </a:xfrm>
+          <a:prstGeom prst="rect">
+            <a:avLst/>
+          </a:prstGeom>
+          <a:noFill/>
+        </p:spPr>
+        <p:txBody>
+          <a:bodyPr wrap="square" lIns="0" rIns="0" tIns="0" bIns="0" anchor="t">
+            <a:spAutoFit/>
+          </a:bodyPr>
+          <a:lstStyle/>
+          <a:p>
+            <a:pPr algn="l">
+              <a:lnSpc>
+                <a:spcPct val="130000"/>
+              </a:lnSpc>
+            </a:pPr>
+            <a:r>
+              <a:rPr sz="2500" b="1" i="0">
+                <a:solidFill>
+                  <a:srgbClr val="17181A"/>
+                </a:solidFill>
+                <a:latin typeface="Verdana"/>
+              </a:rPr>
+              <a:t>« Il a interdiction de donner une réponse. »</a:t>
+            </a:r>
+          </a:p>
+        </p:txBody>
+      </p:sp>
+      <p:sp>
+        <p:nvSpPr>
+          <p:cNvPr id="13" name="Rounded Rectangle 12"/>
+          <p:cNvSpPr/>
+          <p:nvPr/>
+        </p:nvSpPr>
+        <p:spPr>
+          <a:xfrm>
+            <a:off x="566928" y="4462272"/>
+            <a:ext cx="11057839" cy="1618487"/>
+          </a:xfrm>
+          <a:prstGeom prst="roundRect">
+            <a:avLst>
+              <a:gd name="adj" fmla="val 9039"/>
             </a:avLst>
           </a:prstGeom>
           <a:solidFill>
@@ -9296,7 +9401,7 @@
           </a:solidFill>
           <a:ln w="12700">
             <a:solidFill>
-              <a:srgbClr val="D6D6D2"/>
+              <a:srgbClr val="EAEAE8"/>
             </a:solidFill>
           </a:ln>
           <a:effectLst/>
@@ -9321,30 +9426,45 @@
           <a:p/>
         </p:txBody>
       </p:sp>
-      <p:pic>
-        <p:nvPicPr>
-          <p:cNvPr id="9" name="Picture 8" descr="cas-03-fiche-eleve.png"/>
-          <p:cNvPicPr>
-            <a:picLocks noChangeAspect="1"/>
-          </p:cNvPicPr>
-          <p:nvPr/>
-        </p:nvPicPr>
-        <p:blipFill>
-          <a:blip r:embed="rId2"/>
-          <a:stretch>
-            <a:fillRect/>
-          </a:stretch>
-        </p:blipFill>
-        <p:spPr>
-          <a:xfrm>
-            <a:off x="4899291" y="2391156"/>
-            <a:ext cx="2393112" cy="3762756"/>
-          </a:xfrm>
-          <a:prstGeom prst="rect">
-            <a:avLst/>
-          </a:prstGeom>
-        </p:spPr>
-      </p:pic>
+      <p:sp>
+        <p:nvSpPr>
+          <p:cNvPr id="14" name="TextBox 13"/>
+          <p:cNvSpPr txBox="1"/>
+          <p:nvPr/>
+        </p:nvSpPr>
+        <p:spPr>
+          <a:xfrm>
+            <a:off x="969264" y="4736592"/>
+            <a:ext cx="10234879" cy="1150620"/>
+          </a:xfrm>
+          <a:prstGeom prst="rect">
+            <a:avLst/>
+          </a:prstGeom>
+          <a:noFill/>
+        </p:spPr>
+        <p:txBody>
+          <a:bodyPr wrap="square" lIns="0" rIns="0" tIns="0" bIns="0" anchor="t">
+            <a:spAutoFit/>
+          </a:bodyPr>
+          <a:lstStyle/>
+          <a:p>
+            <a:pPr algn="l">
+              <a:lnSpc>
+                <a:spcPct val="145000"/>
+              </a:lnSpc>
+            </a:pPr>
+            <a:r>
+              <a:rPr sz="2000" b="0" i="0">
+                <a:solidFill>
+                  <a:srgbClr val="4B4F52"/>
+                </a:solidFill>
+                <a:latin typeface="Verdana"/>
+              </a:rPr>
+              <a:t>Il cite la phrase du dialogue où se trouve l'information, puis repose une question plus facile. La traduction s'ajoute sous le français et ne le remplace jamais ; « simplifier » reformule en français, il ne traduit pas.</a:t>
+            </a:r>
+          </a:p>
+        </p:txBody>
+      </p:sp>
     </p:spTree>
   </p:cSld>
   <p:clrMapOvr>
@@ -10405,64 +10525,110 @@
                 </a:solidFill>
                 <a:latin typeface="Verdana"/>
               </a:rPr>
-              <a:t>CE QU'ON N'A PAS RETIRÉ</a:t>
-            </a:r>
-          </a:p>
-        </p:txBody>
-      </p:sp>
-      <p:sp>
-        <p:nvSpPr>
-          <p:cNvPr id="6" name="TextBox 5"/>
-          <p:cNvSpPr txBox="1"/>
-          <p:nvPr/>
-        </p:nvSpPr>
-        <p:spPr>
-          <a:xfrm>
-            <a:off x="566928" y="749808"/>
-            <a:ext cx="11057839" cy="877824"/>
-          </a:xfrm>
-          <a:prstGeom prst="rect">
-            <a:avLst/>
-          </a:prstGeom>
-          <a:noFill/>
-        </p:spPr>
-        <p:txBody>
-          <a:bodyPr wrap="square" lIns="0" rIns="0" tIns="0" bIns="0" anchor="t">
-            <a:spAutoFit/>
-          </a:bodyPr>
-          <a:lstStyle/>
-          <a:p>
-            <a:pPr algn="l">
-              <a:lnSpc>
-                <a:spcPct val="115000"/>
-              </a:lnSpc>
-            </a:pPr>
-            <a:r>
-              <a:rPr sz="3400" b="1" i="0">
-                <a:solidFill>
-                  <a:srgbClr val="17181A"/>
-                </a:solidFill>
-                <a:latin typeface="Verdana"/>
-              </a:rPr>
-              <a:t>Quatre choses qui restent, et c'est délibéré</a:t>
-            </a:r>
-          </a:p>
-        </p:txBody>
-      </p:sp>
-      <p:sp>
-        <p:nvSpPr>
-          <p:cNvPr id="7" name="Rounded Rectangle 6"/>
+              <a:t>QUI DÉCIDE</a:t>
+            </a:r>
+          </a:p>
+        </p:txBody>
+      </p:sp>
+      <p:sp>
+        <p:nvSpPr>
+          <p:cNvPr id="6" name="Rounded Rectangle 5"/>
           <p:cNvSpPr/>
           <p:nvPr/>
         </p:nvSpPr>
         <p:spPr>
           <a:xfrm>
-            <a:off x="566928" y="1810512"/>
-            <a:ext cx="5446623" cy="2052828"/>
+            <a:off x="566928" y="1225296"/>
+            <a:ext cx="11057839" cy="1967991"/>
           </a:xfrm>
           <a:prstGeom prst="roundRect">
             <a:avLst>
-              <a:gd name="adj" fmla="val 7126"/>
+              <a:gd name="adj" fmla="val 7434"/>
+            </a:avLst>
+          </a:prstGeom>
+          <a:solidFill>
+            <a:srgbClr val="FCE9F0"/>
+          </a:solidFill>
+          <a:ln w="12700">
+            <a:solidFill>
+              <a:srgbClr val="EAEAE8"/>
+            </a:solidFill>
+          </a:ln>
+          <a:effectLst/>
+        </p:spPr>
+        <p:style>
+          <a:lnRef idx="1">
+            <a:schemeClr val="accent1"/>
+          </a:lnRef>
+          <a:fillRef idx="3">
+            <a:schemeClr val="accent1"/>
+          </a:fillRef>
+          <a:effectRef idx="2">
+            <a:schemeClr val="accent1"/>
+          </a:effectRef>
+          <a:fontRef idx="minor">
+            <a:schemeClr val="lt1"/>
+          </a:fontRef>
+        </p:style>
+        <p:txBody>
+          <a:bodyPr rtlCol="0" anchor="ctr"/>
+          <a:lstStyle/>
+          <a:p/>
+        </p:txBody>
+      </p:sp>
+      <p:sp>
+        <p:nvSpPr>
+          <p:cNvPr id="7" name="TextBox 6"/>
+          <p:cNvSpPr txBox="1"/>
+          <p:nvPr/>
+        </p:nvSpPr>
+        <p:spPr>
+          <a:xfrm>
+            <a:off x="1298448" y="1682496"/>
+            <a:ext cx="9594799" cy="1145032"/>
+          </a:xfrm>
+          <a:prstGeom prst="rect">
+            <a:avLst/>
+          </a:prstGeom>
+          <a:noFill/>
+        </p:spPr>
+        <p:txBody>
+          <a:bodyPr wrap="square" lIns="0" rIns="0" tIns="0" bIns="0" anchor="t">
+            <a:spAutoFit/>
+          </a:bodyPr>
+          <a:lstStyle/>
+          <a:p>
+            <a:pPr algn="l">
+              <a:lnSpc>
+                <a:spcPct val="122000"/>
+              </a:lnSpc>
+            </a:pPr>
+            <a:r>
+              <a:rPr sz="3400" b="1" i="0">
+                <a:solidFill>
+                  <a:srgbClr val="17181A"/>
+                </a:solidFill>
+                <a:latin typeface="Verdana"/>
+              </a:rPr>
+              <a:t>Aucun parcours n'est suggéré automatiquement à un élève.</a:t>
+            </a:r>
+          </a:p>
+        </p:txBody>
+      </p:sp>
+      <p:sp>
+        <p:nvSpPr>
+          <p:cNvPr id="8" name="Rounded Rectangle 7"/>
+          <p:cNvSpPr/>
+          <p:nvPr/>
+        </p:nvSpPr>
+        <p:spPr>
+          <a:xfrm>
+            <a:off x="566928" y="3467607"/>
+            <a:ext cx="11057839" cy="1671827"/>
+          </a:xfrm>
+          <a:prstGeom prst="roundRect">
+            <a:avLst>
+              <a:gd name="adj" fmla="val 8751"/>
             </a:avLst>
           </a:prstGeom>
           <a:solidFill>
@@ -10497,14 +10663,14 @@
       </p:sp>
       <p:sp>
         <p:nvSpPr>
-          <p:cNvPr id="8" name="TextBox 7"/>
-          <p:cNvSpPr txBox="1"/>
-          <p:nvPr/>
-        </p:nvSpPr>
-        <p:spPr>
-          <a:xfrm>
-            <a:off x="886968" y="2084831"/>
-            <a:ext cx="4806543" cy="387096"/>
+          <p:cNvPr id="9" name="TextBox 8"/>
+          <p:cNvSpPr txBox="1"/>
+          <p:nvPr/>
+        </p:nvSpPr>
+        <p:spPr>
+          <a:xfrm>
+            <a:off x="969264" y="3741927"/>
+            <a:ext cx="10234879" cy="1214627"/>
           </a:xfrm>
           <a:prstGeom prst="rect">
             <a:avLst/>
@@ -10519,428 +10685,17 @@
           <a:p>
             <a:pPr algn="l">
               <a:lnSpc>
-                <a:spcPct val="118000"/>
-              </a:lnSpc>
-            </a:pPr>
-            <a:r>
-              <a:rPr sz="2400" b="1" i="0">
-                <a:solidFill>
-                  <a:srgbClr val="A5335F"/>
-                </a:solidFill>
-                <a:latin typeface="Verdana"/>
-              </a:rPr>
-              <a:t>L'enseignant</a:t>
-            </a:r>
-          </a:p>
-        </p:txBody>
-      </p:sp>
-      <p:sp>
-        <p:nvSpPr>
-          <p:cNvPr id="9" name="TextBox 8"/>
-          <p:cNvSpPr txBox="1"/>
-          <p:nvPr/>
-        </p:nvSpPr>
-        <p:spPr>
-          <a:xfrm>
-            <a:off x="886968" y="2499360"/>
-            <a:ext cx="4806543" cy="1089660"/>
-          </a:xfrm>
-          <a:prstGeom prst="rect">
-            <a:avLst/>
-          </a:prstGeom>
-          <a:noFill/>
-        </p:spPr>
-        <p:txBody>
-          <a:bodyPr wrap="square" lIns="0" rIns="0" tIns="0" bIns="0" anchor="t">
-            <a:spAutoFit/>
-          </a:bodyPr>
-          <a:lstStyle/>
-          <a:p>
-            <a:pPr algn="l">
-              <a:lnSpc>
-                <a:spcPct val="142000"/>
-              </a:lnSpc>
-            </a:pPr>
-            <a:r>
-              <a:rPr sz="1800" b="0" i="0">
-                <a:solidFill>
-                  <a:srgbClr val="3A3D40"/>
-                </a:solidFill>
-                <a:latin typeface="Verdana"/>
-              </a:rPr>
-              <a:t>Rien ne s'ouvre tout seul à un élève. C'est l'enseignant qui date un module, choisit la séance, lit les productions.</a:t>
-            </a:r>
-          </a:p>
-        </p:txBody>
-      </p:sp>
-      <p:sp>
-        <p:nvSpPr>
-          <p:cNvPr id="10" name="Rounded Rectangle 9"/>
-          <p:cNvSpPr/>
-          <p:nvPr/>
-        </p:nvSpPr>
-        <p:spPr>
-          <a:xfrm>
-            <a:off x="6178143" y="1810512"/>
-            <a:ext cx="5446623" cy="2052828"/>
-          </a:xfrm>
-          <a:prstGeom prst="roundRect">
-            <a:avLst>
-              <a:gd name="adj" fmla="val 7126"/>
-            </a:avLst>
-          </a:prstGeom>
-          <a:solidFill>
-            <a:srgbClr val="FFFFFF"/>
-          </a:solidFill>
-          <a:ln w="12700">
-            <a:solidFill>
-              <a:srgbClr val="EAEAE8"/>
-            </a:solidFill>
-          </a:ln>
-          <a:effectLst/>
-        </p:spPr>
-        <p:style>
-          <a:lnRef idx="1">
-            <a:schemeClr val="accent1"/>
-          </a:lnRef>
-          <a:fillRef idx="3">
-            <a:schemeClr val="accent1"/>
-          </a:fillRef>
-          <a:effectRef idx="2">
-            <a:schemeClr val="accent1"/>
-          </a:effectRef>
-          <a:fontRef idx="minor">
-            <a:schemeClr val="lt1"/>
-          </a:fontRef>
-        </p:style>
-        <p:txBody>
-          <a:bodyPr rtlCol="0" anchor="ctr"/>
-          <a:lstStyle/>
-          <a:p/>
-        </p:txBody>
-      </p:sp>
-      <p:sp>
-        <p:nvSpPr>
-          <p:cNvPr id="11" name="TextBox 10"/>
-          <p:cNvSpPr txBox="1"/>
-          <p:nvPr/>
-        </p:nvSpPr>
-        <p:spPr>
-          <a:xfrm>
-            <a:off x="6498183" y="2084831"/>
-            <a:ext cx="4806543" cy="387096"/>
-          </a:xfrm>
-          <a:prstGeom prst="rect">
-            <a:avLst/>
-          </a:prstGeom>
-          <a:noFill/>
-        </p:spPr>
-        <p:txBody>
-          <a:bodyPr wrap="square" lIns="0" rIns="0" tIns="0" bIns="0" anchor="t">
-            <a:spAutoFit/>
-          </a:bodyPr>
-          <a:lstStyle/>
-          <a:p>
-            <a:pPr algn="l">
-              <a:lnSpc>
-                <a:spcPct val="118000"/>
-              </a:lnSpc>
-            </a:pPr>
-            <a:r>
-              <a:rPr sz="2400" b="1" i="0">
-                <a:solidFill>
-                  <a:srgbClr val="A5335F"/>
-                </a:solidFill>
-                <a:latin typeface="Verdana"/>
-              </a:rPr>
-              <a:t>Le papier</a:t>
-            </a:r>
-          </a:p>
-        </p:txBody>
-      </p:sp>
-      <p:sp>
-        <p:nvSpPr>
-          <p:cNvPr id="12" name="TextBox 11"/>
-          <p:cNvSpPr txBox="1"/>
-          <p:nvPr/>
-        </p:nvSpPr>
-        <p:spPr>
-          <a:xfrm>
-            <a:off x="6498183" y="2499360"/>
-            <a:ext cx="4806543" cy="1089660"/>
-          </a:xfrm>
-          <a:prstGeom prst="rect">
-            <a:avLst/>
-          </a:prstGeom>
-          <a:noFill/>
-        </p:spPr>
-        <p:txBody>
-          <a:bodyPr wrap="square" lIns="0" rIns="0" tIns="0" bIns="0" anchor="t">
-            <a:spAutoFit/>
-          </a:bodyPr>
-          <a:lstStyle/>
-          <a:p>
-            <a:pPr algn="l">
-              <a:lnSpc>
-                <a:spcPct val="142000"/>
-              </a:lnSpc>
-            </a:pPr>
-            <a:r>
-              <a:rPr sz="1800" b="0" i="0">
-                <a:solidFill>
-                  <a:srgbClr val="3A3D40"/>
-                </a:solidFill>
-                <a:latin typeface="Verdana"/>
-              </a:rPr>
-              <a:t>1 264 fiches imprimables, noir et blanc. Un élève sans appareil fait la séance quand même.</a:t>
-            </a:r>
-          </a:p>
-        </p:txBody>
-      </p:sp>
-      <p:sp>
-        <p:nvSpPr>
-          <p:cNvPr id="13" name="Rounded Rectangle 12"/>
-          <p:cNvSpPr/>
-          <p:nvPr/>
-        </p:nvSpPr>
-        <p:spPr>
-          <a:xfrm>
-            <a:off x="566928" y="4027932"/>
-            <a:ext cx="5446623" cy="2052828"/>
-          </a:xfrm>
-          <a:prstGeom prst="roundRect">
-            <a:avLst>
-              <a:gd name="adj" fmla="val 7126"/>
-            </a:avLst>
-          </a:prstGeom>
-          <a:solidFill>
-            <a:srgbClr val="FFFFFF"/>
-          </a:solidFill>
-          <a:ln w="12700">
-            <a:solidFill>
-              <a:srgbClr val="EAEAE8"/>
-            </a:solidFill>
-          </a:ln>
-          <a:effectLst/>
-        </p:spPr>
-        <p:style>
-          <a:lnRef idx="1">
-            <a:schemeClr val="accent1"/>
-          </a:lnRef>
-          <a:fillRef idx="3">
-            <a:schemeClr val="accent1"/>
-          </a:fillRef>
-          <a:effectRef idx="2">
-            <a:schemeClr val="accent1"/>
-          </a:effectRef>
-          <a:fontRef idx="minor">
-            <a:schemeClr val="lt1"/>
-          </a:fontRef>
-        </p:style>
-        <p:txBody>
-          <a:bodyPr rtlCol="0" anchor="ctr"/>
-          <a:lstStyle/>
-          <a:p/>
-        </p:txBody>
-      </p:sp>
-      <p:sp>
-        <p:nvSpPr>
-          <p:cNvPr id="14" name="TextBox 13"/>
-          <p:cNvSpPr txBox="1"/>
-          <p:nvPr/>
-        </p:nvSpPr>
-        <p:spPr>
-          <a:xfrm>
-            <a:off x="886968" y="4302252"/>
-            <a:ext cx="4806543" cy="387096"/>
-          </a:xfrm>
-          <a:prstGeom prst="rect">
-            <a:avLst/>
-          </a:prstGeom>
-          <a:noFill/>
-        </p:spPr>
-        <p:txBody>
-          <a:bodyPr wrap="square" lIns="0" rIns="0" tIns="0" bIns="0" anchor="t">
-            <a:spAutoFit/>
-          </a:bodyPr>
-          <a:lstStyle/>
-          <a:p>
-            <a:pPr algn="l">
-              <a:lnSpc>
-                <a:spcPct val="118000"/>
-              </a:lnSpc>
-            </a:pPr>
-            <a:r>
-              <a:rPr sz="2400" b="1" i="0">
-                <a:solidFill>
-                  <a:srgbClr val="A5335F"/>
-                </a:solidFill>
-                <a:latin typeface="Verdana"/>
-              </a:rPr>
-              <a:t>La classe</a:t>
-            </a:r>
-          </a:p>
-        </p:txBody>
-      </p:sp>
-      <p:sp>
-        <p:nvSpPr>
-          <p:cNvPr id="15" name="TextBox 14"/>
-          <p:cNvSpPr txBox="1"/>
-          <p:nvPr/>
-        </p:nvSpPr>
-        <p:spPr>
-          <a:xfrm>
-            <a:off x="886968" y="4716780"/>
-            <a:ext cx="4806543" cy="1089660"/>
-          </a:xfrm>
-          <a:prstGeom prst="rect">
-            <a:avLst/>
-          </a:prstGeom>
-          <a:noFill/>
-        </p:spPr>
-        <p:txBody>
-          <a:bodyPr wrap="square" lIns="0" rIns="0" tIns="0" bIns="0" anchor="t">
-            <a:spAutoFit/>
-          </a:bodyPr>
-          <a:lstStyle/>
-          <a:p>
-            <a:pPr algn="l">
-              <a:lnSpc>
-                <a:spcPct val="142000"/>
-              </a:lnSpc>
-            </a:pPr>
-            <a:r>
-              <a:rPr sz="1800" b="0" i="0">
-                <a:solidFill>
-                  <a:srgbClr val="3A3D40"/>
-                </a:solidFill>
-                <a:latin typeface="Verdana"/>
-              </a:rPr>
-              <a:t>Le jeu de rôle a une moitié qui se joue à deux, en salle. Elle ne disparaît pas quand l'assistant est fermé.</a:t>
-            </a:r>
-          </a:p>
-        </p:txBody>
-      </p:sp>
-      <p:sp>
-        <p:nvSpPr>
-          <p:cNvPr id="16" name="Rounded Rectangle 15"/>
-          <p:cNvSpPr/>
-          <p:nvPr/>
-        </p:nvSpPr>
-        <p:spPr>
-          <a:xfrm>
-            <a:off x="6178143" y="4027932"/>
-            <a:ext cx="5446623" cy="2052828"/>
-          </a:xfrm>
-          <a:prstGeom prst="roundRect">
-            <a:avLst>
-              <a:gd name="adj" fmla="val 7126"/>
-            </a:avLst>
-          </a:prstGeom>
-          <a:solidFill>
-            <a:srgbClr val="FFFFFF"/>
-          </a:solidFill>
-          <a:ln w="12700">
-            <a:solidFill>
-              <a:srgbClr val="EAEAE8"/>
-            </a:solidFill>
-          </a:ln>
-          <a:effectLst/>
-        </p:spPr>
-        <p:style>
-          <a:lnRef idx="1">
-            <a:schemeClr val="accent1"/>
-          </a:lnRef>
-          <a:fillRef idx="3">
-            <a:schemeClr val="accent1"/>
-          </a:fillRef>
-          <a:effectRef idx="2">
-            <a:schemeClr val="accent1"/>
-          </a:effectRef>
-          <a:fontRef idx="minor">
-            <a:schemeClr val="lt1"/>
-          </a:fontRef>
-        </p:style>
-        <p:txBody>
-          <a:bodyPr rtlCol="0" anchor="ctr"/>
-          <a:lstStyle/>
-          <a:p/>
-        </p:txBody>
-      </p:sp>
-      <p:sp>
-        <p:nvSpPr>
-          <p:cNvPr id="17" name="TextBox 16"/>
-          <p:cNvSpPr txBox="1"/>
-          <p:nvPr/>
-        </p:nvSpPr>
-        <p:spPr>
-          <a:xfrm>
-            <a:off x="6498183" y="4302252"/>
-            <a:ext cx="4806543" cy="387096"/>
-          </a:xfrm>
-          <a:prstGeom prst="rect">
-            <a:avLst/>
-          </a:prstGeom>
-          <a:noFill/>
-        </p:spPr>
-        <p:txBody>
-          <a:bodyPr wrap="square" lIns="0" rIns="0" tIns="0" bIns="0" anchor="t">
-            <a:spAutoFit/>
-          </a:bodyPr>
-          <a:lstStyle/>
-          <a:p>
-            <a:pPr algn="l">
-              <a:lnSpc>
-                <a:spcPct val="118000"/>
-              </a:lnSpc>
-            </a:pPr>
-            <a:r>
-              <a:rPr sz="2400" b="1" i="0">
-                <a:solidFill>
-                  <a:srgbClr val="A5335F"/>
-                </a:solidFill>
-                <a:latin typeface="Verdana"/>
-              </a:rPr>
-              <a:t>Le droit de refuser</a:t>
-            </a:r>
-          </a:p>
-        </p:txBody>
-      </p:sp>
-      <p:sp>
-        <p:nvSpPr>
-          <p:cNvPr id="18" name="TextBox 17"/>
-          <p:cNvSpPr txBox="1"/>
-          <p:nvPr/>
-        </p:nvSpPr>
-        <p:spPr>
-          <a:xfrm>
-            <a:off x="6498183" y="4716780"/>
-            <a:ext cx="4806543" cy="1089660"/>
-          </a:xfrm>
-          <a:prstGeom prst="rect">
-            <a:avLst/>
-          </a:prstGeom>
-          <a:noFill/>
-        </p:spPr>
-        <p:txBody>
-          <a:bodyPr wrap="square" lIns="0" rIns="0" tIns="0" bIns="0" anchor="t">
-            <a:spAutoFit/>
-          </a:bodyPr>
-          <a:lstStyle/>
-          <a:p>
-            <a:pPr algn="l">
-              <a:lnSpc>
-                <a:spcPct val="142000"/>
-              </a:lnSpc>
-            </a:pPr>
-            <a:r>
-              <a:rPr sz="1800" b="0" i="0">
-                <a:solidFill>
-                  <a:srgbClr val="3A3D40"/>
-                </a:solidFill>
-                <a:latin typeface="Verdana"/>
-              </a:rPr>
-              <a:t>Un centre peut fermer l'assistant. Les 87 modules se replient : ce qui reste est un cours, pas une démo cassée.</a:t>
+                <a:spcPct val="145000"/>
+              </a:lnSpc>
+            </a:pPr>
+            <a:r>
+              <a:rPr sz="2000" b="0" i="0">
+                <a:solidFill>
+                  <a:srgbClr val="4B4F52"/>
+                </a:solidFill>
+                <a:latin typeface="Verdana"/>
+              </a:rPr>
+              <a:t>Le portail dit ce qu'un élève a fait et où il s'est trompé. Il ne conclut rien et ne propose rien. C'est l'enseignant qui envoie une mini-leçon de dix minutes à qui en a besoin — un choix, pas une étape transitoire vers l'automatisation.</a:t>
             </a:r>
           </a:p>
         </p:txBody>
@@ -11079,6 +10834,1043 @@
                 <a:latin typeface="Verdana"/>
               </a:rPr>
               <a:t>21</a:t>
+            </a:r>
+          </a:p>
+        </p:txBody>
+      </p:sp>
+      <p:sp>
+        <p:nvSpPr>
+          <p:cNvPr id="5" name="TextBox 4"/>
+          <p:cNvSpPr txBox="1"/>
+          <p:nvPr/>
+        </p:nvSpPr>
+        <p:spPr>
+          <a:xfrm>
+            <a:off x="566928" y="420624"/>
+            <a:ext cx="11057839" cy="237744"/>
+          </a:xfrm>
+          <a:prstGeom prst="rect">
+            <a:avLst/>
+          </a:prstGeom>
+          <a:noFill/>
+        </p:spPr>
+        <p:txBody>
+          <a:bodyPr wrap="square" lIns="0" rIns="0" tIns="0" bIns="0" anchor="t">
+            <a:spAutoFit/>
+          </a:bodyPr>
+          <a:lstStyle/>
+          <a:p>
+            <a:pPr algn="l">
+              <a:lnSpc>
+                <a:spcPct val="135000"/>
+              </a:lnSpc>
+            </a:pPr>
+            <a:r>
+              <a:rPr sz="1300" b="1" i="0" spc="156">
+                <a:solidFill>
+                  <a:srgbClr val="A5335F"/>
+                </a:solidFill>
+                <a:latin typeface="Verdana"/>
+              </a:rPr>
+              <a:t>CE QUE L'ENSEIGNANT VOIT</a:t>
+            </a:r>
+          </a:p>
+        </p:txBody>
+      </p:sp>
+      <p:sp>
+        <p:nvSpPr>
+          <p:cNvPr id="6" name="TextBox 5"/>
+          <p:cNvSpPr txBox="1"/>
+          <p:nvPr/>
+        </p:nvSpPr>
+        <p:spPr>
+          <a:xfrm>
+            <a:off x="566928" y="749808"/>
+            <a:ext cx="11057839" cy="877824"/>
+          </a:xfrm>
+          <a:prstGeom prst="rect">
+            <a:avLst/>
+          </a:prstGeom>
+          <a:noFill/>
+        </p:spPr>
+        <p:txBody>
+          <a:bodyPr wrap="square" lIns="0" rIns="0" tIns="0" bIns="0" anchor="t">
+            <a:spAutoFit/>
+          </a:bodyPr>
+          <a:lstStyle/>
+          <a:p>
+            <a:pPr algn="l">
+              <a:lnSpc>
+                <a:spcPct val="115000"/>
+              </a:lnSpc>
+            </a:pPr>
+            <a:r>
+              <a:rPr sz="3400" b="1" i="0">
+                <a:solidFill>
+                  <a:srgbClr val="17181A"/>
+                </a:solidFill>
+                <a:latin typeface="Verdana"/>
+              </a:rPr>
+              <a:t>Le dossier d'un élève</a:t>
+            </a:r>
+          </a:p>
+        </p:txBody>
+      </p:sp>
+      <p:sp>
+        <p:nvSpPr>
+          <p:cNvPr id="7" name="TextBox 6"/>
+          <p:cNvSpPr txBox="1"/>
+          <p:nvPr/>
+        </p:nvSpPr>
+        <p:spPr>
+          <a:xfrm>
+            <a:off x="566928" y="1645920"/>
+            <a:ext cx="11057839" cy="617220"/>
+          </a:xfrm>
+          <a:prstGeom prst="rect">
+            <a:avLst/>
+          </a:prstGeom>
+          <a:noFill/>
+        </p:spPr>
+        <p:txBody>
+          <a:bodyPr wrap="square" lIns="0" rIns="0" tIns="0" bIns="0" anchor="t">
+            <a:spAutoFit/>
+          </a:bodyPr>
+          <a:lstStyle/>
+          <a:p>
+            <a:pPr algn="l">
+              <a:lnSpc>
+                <a:spcPct val="135000"/>
+              </a:lnSpc>
+            </a:pPr>
+            <a:r>
+              <a:rPr sz="1800" b="0" i="0">
+                <a:solidFill>
+                  <a:srgbClr val="6E7175"/>
+                </a:solidFill>
+                <a:latin typeface="Verdana"/>
+              </a:rPr>
+              <a:t>Où il en est, où il s'est trompé, ce qu'il a remis. Aucune conclusion, aucune suggestion de parcours : c'est lui qui tranche.</a:t>
+            </a:r>
+          </a:p>
+        </p:txBody>
+      </p:sp>
+      <p:sp>
+        <p:nvSpPr>
+          <p:cNvPr id="8" name="Rounded Rectangle 7"/>
+          <p:cNvSpPr/>
+          <p:nvPr/>
+        </p:nvSpPr>
+        <p:spPr>
+          <a:xfrm>
+            <a:off x="4881003" y="2372868"/>
+            <a:ext cx="2429688" cy="3799332"/>
+          </a:xfrm>
+          <a:prstGeom prst="roundRect">
+            <a:avLst>
+              <a:gd name="adj" fmla="val 3763"/>
+            </a:avLst>
+          </a:prstGeom>
+          <a:solidFill>
+            <a:srgbClr val="FFFFFF"/>
+          </a:solidFill>
+          <a:ln w="12700">
+            <a:solidFill>
+              <a:srgbClr val="D6D6D2"/>
+            </a:solidFill>
+          </a:ln>
+          <a:effectLst/>
+        </p:spPr>
+        <p:style>
+          <a:lnRef idx="1">
+            <a:schemeClr val="accent1"/>
+          </a:lnRef>
+          <a:fillRef idx="3">
+            <a:schemeClr val="accent1"/>
+          </a:fillRef>
+          <a:effectRef idx="2">
+            <a:schemeClr val="accent1"/>
+          </a:effectRef>
+          <a:fontRef idx="minor">
+            <a:schemeClr val="lt1"/>
+          </a:fontRef>
+        </p:style>
+        <p:txBody>
+          <a:bodyPr rtlCol="0" anchor="ctr"/>
+          <a:lstStyle/>
+          <a:p/>
+        </p:txBody>
+      </p:sp>
+      <p:pic>
+        <p:nvPicPr>
+          <p:cNvPr id="9" name="Picture 8" descr="cas-03-fiche-eleve.png"/>
+          <p:cNvPicPr>
+            <a:picLocks noChangeAspect="1"/>
+          </p:cNvPicPr>
+          <p:nvPr/>
+        </p:nvPicPr>
+        <p:blipFill>
+          <a:blip r:embed="rId2"/>
+          <a:stretch>
+            <a:fillRect/>
+          </a:stretch>
+        </p:blipFill>
+        <p:spPr>
+          <a:xfrm>
+            <a:off x="4899291" y="2391156"/>
+            <a:ext cx="2393112" cy="3762756"/>
+          </a:xfrm>
+          <a:prstGeom prst="rect">
+            <a:avLst/>
+          </a:prstGeom>
+        </p:spPr>
+      </p:pic>
+    </p:spTree>
+  </p:cSld>
+  <p:clrMapOvr>
+    <a:masterClrMapping/>
+  </p:clrMapOvr>
+</p:sld>
+</file>
+
+<file path=ppt/slides/slide22.xml><?xml version="1.0" encoding="utf-8"?>
+<p:sld xmlns:a="http://schemas.openxmlformats.org/drawingml/2006/main" xmlns:p="http://schemas.openxmlformats.org/presentationml/2006/main" xmlns:r="http://schemas.openxmlformats.org/officeDocument/2006/relationships">
+  <p:cSld>
+    <p:spTree>
+      <p:nvGrpSpPr>
+        <p:cNvPr id="1" name=""/>
+        <p:cNvGrpSpPr/>
+        <p:nvPr/>
+      </p:nvGrpSpPr>
+      <p:grpSpPr/>
+      <p:sp>
+        <p:nvSpPr>
+          <p:cNvPr id="2" name="Rectangle 1"/>
+          <p:cNvSpPr/>
+          <p:nvPr/>
+        </p:nvSpPr>
+        <p:spPr>
+          <a:xfrm>
+            <a:off x="0" y="0"/>
+            <a:ext cx="12191695" cy="6858000"/>
+          </a:xfrm>
+          <a:prstGeom prst="rect">
+            <a:avLst/>
+          </a:prstGeom>
+          <a:solidFill>
+            <a:srgbClr val="F7F7F5"/>
+          </a:solidFill>
+          <a:ln>
+            <a:noFill/>
+          </a:ln>
+          <a:effectLst/>
+        </p:spPr>
+        <p:style>
+          <a:lnRef idx="1">
+            <a:schemeClr val="accent1"/>
+          </a:lnRef>
+          <a:fillRef idx="3">
+            <a:schemeClr val="accent1"/>
+          </a:fillRef>
+          <a:effectRef idx="2">
+            <a:schemeClr val="accent1"/>
+          </a:effectRef>
+          <a:fontRef idx="minor">
+            <a:schemeClr val="lt1"/>
+          </a:fontRef>
+        </p:style>
+        <p:txBody>
+          <a:bodyPr rtlCol="0" anchor="ctr"/>
+          <a:lstStyle/>
+          <a:p/>
+        </p:txBody>
+      </p:sp>
+      <p:sp>
+        <p:nvSpPr>
+          <p:cNvPr id="3" name="TextBox 2"/>
+          <p:cNvSpPr txBox="1"/>
+          <p:nvPr/>
+        </p:nvSpPr>
+        <p:spPr>
+          <a:xfrm>
+            <a:off x="566928" y="6355080"/>
+            <a:ext cx="6400800" cy="219456"/>
+          </a:xfrm>
+          <a:prstGeom prst="rect">
+            <a:avLst/>
+          </a:prstGeom>
+          <a:noFill/>
+        </p:spPr>
+        <p:txBody>
+          <a:bodyPr wrap="square" lIns="0" rIns="0" tIns="0" bIns="0" anchor="t">
+            <a:spAutoFit/>
+          </a:bodyPr>
+          <a:lstStyle/>
+          <a:p>
+            <a:pPr algn="l">
+              <a:lnSpc>
+                <a:spcPct val="135000"/>
+              </a:lnSpc>
+            </a:pPr>
+            <a:r>
+              <a:rPr sz="1200" b="0" i="0">
+                <a:solidFill>
+                  <a:srgbClr val="6E7175"/>
+                </a:solidFill>
+                <a:latin typeface="Verdana"/>
+              </a:rPr>
+              <a:t>F1 · francis · présentation</a:t>
+            </a:r>
+          </a:p>
+        </p:txBody>
+      </p:sp>
+      <p:sp>
+        <p:nvSpPr>
+          <p:cNvPr id="4" name="TextBox 3"/>
+          <p:cNvSpPr txBox="1"/>
+          <p:nvPr/>
+        </p:nvSpPr>
+        <p:spPr>
+          <a:xfrm>
+            <a:off x="10710367" y="6355080"/>
+            <a:ext cx="914400" cy="219456"/>
+          </a:xfrm>
+          <a:prstGeom prst="rect">
+            <a:avLst/>
+          </a:prstGeom>
+          <a:noFill/>
+        </p:spPr>
+        <p:txBody>
+          <a:bodyPr wrap="square" lIns="0" rIns="0" tIns="0" bIns="0" anchor="t">
+            <a:spAutoFit/>
+          </a:bodyPr>
+          <a:lstStyle/>
+          <a:p>
+            <a:pPr algn="r">
+              <a:lnSpc>
+                <a:spcPct val="135000"/>
+              </a:lnSpc>
+            </a:pPr>
+            <a:r>
+              <a:rPr sz="1200" b="0" i="0">
+                <a:solidFill>
+                  <a:srgbClr val="6E7175"/>
+                </a:solidFill>
+                <a:latin typeface="Verdana"/>
+              </a:rPr>
+              <a:t>22</a:t>
+            </a:r>
+          </a:p>
+        </p:txBody>
+      </p:sp>
+      <p:sp>
+        <p:nvSpPr>
+          <p:cNvPr id="5" name="TextBox 4"/>
+          <p:cNvSpPr txBox="1"/>
+          <p:nvPr/>
+        </p:nvSpPr>
+        <p:spPr>
+          <a:xfrm>
+            <a:off x="566928" y="420624"/>
+            <a:ext cx="11057839" cy="237744"/>
+          </a:xfrm>
+          <a:prstGeom prst="rect">
+            <a:avLst/>
+          </a:prstGeom>
+          <a:noFill/>
+        </p:spPr>
+        <p:txBody>
+          <a:bodyPr wrap="square" lIns="0" rIns="0" tIns="0" bIns="0" anchor="t">
+            <a:spAutoFit/>
+          </a:bodyPr>
+          <a:lstStyle/>
+          <a:p>
+            <a:pPr algn="l">
+              <a:lnSpc>
+                <a:spcPct val="135000"/>
+              </a:lnSpc>
+            </a:pPr>
+            <a:r>
+              <a:rPr sz="1300" b="1" i="0" spc="156">
+                <a:solidFill>
+                  <a:srgbClr val="A5335F"/>
+                </a:solidFill>
+                <a:latin typeface="Verdana"/>
+              </a:rPr>
+              <a:t>CE QU'ON N'A PAS RETIRÉ</a:t>
+            </a:r>
+          </a:p>
+        </p:txBody>
+      </p:sp>
+      <p:sp>
+        <p:nvSpPr>
+          <p:cNvPr id="6" name="TextBox 5"/>
+          <p:cNvSpPr txBox="1"/>
+          <p:nvPr/>
+        </p:nvSpPr>
+        <p:spPr>
+          <a:xfrm>
+            <a:off x="566928" y="749808"/>
+            <a:ext cx="11057839" cy="877824"/>
+          </a:xfrm>
+          <a:prstGeom prst="rect">
+            <a:avLst/>
+          </a:prstGeom>
+          <a:noFill/>
+        </p:spPr>
+        <p:txBody>
+          <a:bodyPr wrap="square" lIns="0" rIns="0" tIns="0" bIns="0" anchor="t">
+            <a:spAutoFit/>
+          </a:bodyPr>
+          <a:lstStyle/>
+          <a:p>
+            <a:pPr algn="l">
+              <a:lnSpc>
+                <a:spcPct val="115000"/>
+              </a:lnSpc>
+            </a:pPr>
+            <a:r>
+              <a:rPr sz="3400" b="1" i="0">
+                <a:solidFill>
+                  <a:srgbClr val="17181A"/>
+                </a:solidFill>
+                <a:latin typeface="Verdana"/>
+              </a:rPr>
+              <a:t>Quatre choses qui restent, et c'est délibéré</a:t>
+            </a:r>
+          </a:p>
+        </p:txBody>
+      </p:sp>
+      <p:sp>
+        <p:nvSpPr>
+          <p:cNvPr id="7" name="Rounded Rectangle 6"/>
+          <p:cNvSpPr/>
+          <p:nvPr/>
+        </p:nvSpPr>
+        <p:spPr>
+          <a:xfrm>
+            <a:off x="566928" y="1810512"/>
+            <a:ext cx="5446623" cy="2052828"/>
+          </a:xfrm>
+          <a:prstGeom prst="roundRect">
+            <a:avLst>
+              <a:gd name="adj" fmla="val 7126"/>
+            </a:avLst>
+          </a:prstGeom>
+          <a:solidFill>
+            <a:srgbClr val="FFFFFF"/>
+          </a:solidFill>
+          <a:ln w="12700">
+            <a:solidFill>
+              <a:srgbClr val="EAEAE8"/>
+            </a:solidFill>
+          </a:ln>
+          <a:effectLst/>
+        </p:spPr>
+        <p:style>
+          <a:lnRef idx="1">
+            <a:schemeClr val="accent1"/>
+          </a:lnRef>
+          <a:fillRef idx="3">
+            <a:schemeClr val="accent1"/>
+          </a:fillRef>
+          <a:effectRef idx="2">
+            <a:schemeClr val="accent1"/>
+          </a:effectRef>
+          <a:fontRef idx="minor">
+            <a:schemeClr val="lt1"/>
+          </a:fontRef>
+        </p:style>
+        <p:txBody>
+          <a:bodyPr rtlCol="0" anchor="ctr"/>
+          <a:lstStyle/>
+          <a:p/>
+        </p:txBody>
+      </p:sp>
+      <p:sp>
+        <p:nvSpPr>
+          <p:cNvPr id="8" name="TextBox 7"/>
+          <p:cNvSpPr txBox="1"/>
+          <p:nvPr/>
+        </p:nvSpPr>
+        <p:spPr>
+          <a:xfrm>
+            <a:off x="886968" y="2084831"/>
+            <a:ext cx="4806543" cy="387096"/>
+          </a:xfrm>
+          <a:prstGeom prst="rect">
+            <a:avLst/>
+          </a:prstGeom>
+          <a:noFill/>
+        </p:spPr>
+        <p:txBody>
+          <a:bodyPr wrap="square" lIns="0" rIns="0" tIns="0" bIns="0" anchor="t">
+            <a:spAutoFit/>
+          </a:bodyPr>
+          <a:lstStyle/>
+          <a:p>
+            <a:pPr algn="l">
+              <a:lnSpc>
+                <a:spcPct val="118000"/>
+              </a:lnSpc>
+            </a:pPr>
+            <a:r>
+              <a:rPr sz="2400" b="1" i="0">
+                <a:solidFill>
+                  <a:srgbClr val="A5335F"/>
+                </a:solidFill>
+                <a:latin typeface="Verdana"/>
+              </a:rPr>
+              <a:t>L'enseignant</a:t>
+            </a:r>
+          </a:p>
+        </p:txBody>
+      </p:sp>
+      <p:sp>
+        <p:nvSpPr>
+          <p:cNvPr id="9" name="TextBox 8"/>
+          <p:cNvSpPr txBox="1"/>
+          <p:nvPr/>
+        </p:nvSpPr>
+        <p:spPr>
+          <a:xfrm>
+            <a:off x="886968" y="2499360"/>
+            <a:ext cx="4806543" cy="1089660"/>
+          </a:xfrm>
+          <a:prstGeom prst="rect">
+            <a:avLst/>
+          </a:prstGeom>
+          <a:noFill/>
+        </p:spPr>
+        <p:txBody>
+          <a:bodyPr wrap="square" lIns="0" rIns="0" tIns="0" bIns="0" anchor="t">
+            <a:spAutoFit/>
+          </a:bodyPr>
+          <a:lstStyle/>
+          <a:p>
+            <a:pPr algn="l">
+              <a:lnSpc>
+                <a:spcPct val="142000"/>
+              </a:lnSpc>
+            </a:pPr>
+            <a:r>
+              <a:rPr sz="1800" b="0" i="0">
+                <a:solidFill>
+                  <a:srgbClr val="3A3D40"/>
+                </a:solidFill>
+                <a:latin typeface="Verdana"/>
+              </a:rPr>
+              <a:t>Rien ne s'ouvre tout seul à un élève. C'est l'enseignant qui date un module, choisit la séance, lit les productions.</a:t>
+            </a:r>
+          </a:p>
+        </p:txBody>
+      </p:sp>
+      <p:sp>
+        <p:nvSpPr>
+          <p:cNvPr id="10" name="Rounded Rectangle 9"/>
+          <p:cNvSpPr/>
+          <p:nvPr/>
+        </p:nvSpPr>
+        <p:spPr>
+          <a:xfrm>
+            <a:off x="6178143" y="1810512"/>
+            <a:ext cx="5446623" cy="2052828"/>
+          </a:xfrm>
+          <a:prstGeom prst="roundRect">
+            <a:avLst>
+              <a:gd name="adj" fmla="val 7126"/>
+            </a:avLst>
+          </a:prstGeom>
+          <a:solidFill>
+            <a:srgbClr val="FFFFFF"/>
+          </a:solidFill>
+          <a:ln w="12700">
+            <a:solidFill>
+              <a:srgbClr val="EAEAE8"/>
+            </a:solidFill>
+          </a:ln>
+          <a:effectLst/>
+        </p:spPr>
+        <p:style>
+          <a:lnRef idx="1">
+            <a:schemeClr val="accent1"/>
+          </a:lnRef>
+          <a:fillRef idx="3">
+            <a:schemeClr val="accent1"/>
+          </a:fillRef>
+          <a:effectRef idx="2">
+            <a:schemeClr val="accent1"/>
+          </a:effectRef>
+          <a:fontRef idx="minor">
+            <a:schemeClr val="lt1"/>
+          </a:fontRef>
+        </p:style>
+        <p:txBody>
+          <a:bodyPr rtlCol="0" anchor="ctr"/>
+          <a:lstStyle/>
+          <a:p/>
+        </p:txBody>
+      </p:sp>
+      <p:sp>
+        <p:nvSpPr>
+          <p:cNvPr id="11" name="TextBox 10"/>
+          <p:cNvSpPr txBox="1"/>
+          <p:nvPr/>
+        </p:nvSpPr>
+        <p:spPr>
+          <a:xfrm>
+            <a:off x="6498183" y="2084831"/>
+            <a:ext cx="4806543" cy="387096"/>
+          </a:xfrm>
+          <a:prstGeom prst="rect">
+            <a:avLst/>
+          </a:prstGeom>
+          <a:noFill/>
+        </p:spPr>
+        <p:txBody>
+          <a:bodyPr wrap="square" lIns="0" rIns="0" tIns="0" bIns="0" anchor="t">
+            <a:spAutoFit/>
+          </a:bodyPr>
+          <a:lstStyle/>
+          <a:p>
+            <a:pPr algn="l">
+              <a:lnSpc>
+                <a:spcPct val="118000"/>
+              </a:lnSpc>
+            </a:pPr>
+            <a:r>
+              <a:rPr sz="2400" b="1" i="0">
+                <a:solidFill>
+                  <a:srgbClr val="A5335F"/>
+                </a:solidFill>
+                <a:latin typeface="Verdana"/>
+              </a:rPr>
+              <a:t>Le papier</a:t>
+            </a:r>
+          </a:p>
+        </p:txBody>
+      </p:sp>
+      <p:sp>
+        <p:nvSpPr>
+          <p:cNvPr id="12" name="TextBox 11"/>
+          <p:cNvSpPr txBox="1"/>
+          <p:nvPr/>
+        </p:nvSpPr>
+        <p:spPr>
+          <a:xfrm>
+            <a:off x="6498183" y="2499360"/>
+            <a:ext cx="4806543" cy="1089660"/>
+          </a:xfrm>
+          <a:prstGeom prst="rect">
+            <a:avLst/>
+          </a:prstGeom>
+          <a:noFill/>
+        </p:spPr>
+        <p:txBody>
+          <a:bodyPr wrap="square" lIns="0" rIns="0" tIns="0" bIns="0" anchor="t">
+            <a:spAutoFit/>
+          </a:bodyPr>
+          <a:lstStyle/>
+          <a:p>
+            <a:pPr algn="l">
+              <a:lnSpc>
+                <a:spcPct val="142000"/>
+              </a:lnSpc>
+            </a:pPr>
+            <a:r>
+              <a:rPr sz="1800" b="0" i="0">
+                <a:solidFill>
+                  <a:srgbClr val="3A3D40"/>
+                </a:solidFill>
+                <a:latin typeface="Verdana"/>
+              </a:rPr>
+              <a:t>1 264 fiches imprimables, noir et blanc. Un élève sans appareil fait la séance quand même.</a:t>
+            </a:r>
+          </a:p>
+        </p:txBody>
+      </p:sp>
+      <p:sp>
+        <p:nvSpPr>
+          <p:cNvPr id="13" name="Rounded Rectangle 12"/>
+          <p:cNvSpPr/>
+          <p:nvPr/>
+        </p:nvSpPr>
+        <p:spPr>
+          <a:xfrm>
+            <a:off x="566928" y="4027932"/>
+            <a:ext cx="5446623" cy="2052828"/>
+          </a:xfrm>
+          <a:prstGeom prst="roundRect">
+            <a:avLst>
+              <a:gd name="adj" fmla="val 7126"/>
+            </a:avLst>
+          </a:prstGeom>
+          <a:solidFill>
+            <a:srgbClr val="FFFFFF"/>
+          </a:solidFill>
+          <a:ln w="12700">
+            <a:solidFill>
+              <a:srgbClr val="EAEAE8"/>
+            </a:solidFill>
+          </a:ln>
+          <a:effectLst/>
+        </p:spPr>
+        <p:style>
+          <a:lnRef idx="1">
+            <a:schemeClr val="accent1"/>
+          </a:lnRef>
+          <a:fillRef idx="3">
+            <a:schemeClr val="accent1"/>
+          </a:fillRef>
+          <a:effectRef idx="2">
+            <a:schemeClr val="accent1"/>
+          </a:effectRef>
+          <a:fontRef idx="minor">
+            <a:schemeClr val="lt1"/>
+          </a:fontRef>
+        </p:style>
+        <p:txBody>
+          <a:bodyPr rtlCol="0" anchor="ctr"/>
+          <a:lstStyle/>
+          <a:p/>
+        </p:txBody>
+      </p:sp>
+      <p:sp>
+        <p:nvSpPr>
+          <p:cNvPr id="14" name="TextBox 13"/>
+          <p:cNvSpPr txBox="1"/>
+          <p:nvPr/>
+        </p:nvSpPr>
+        <p:spPr>
+          <a:xfrm>
+            <a:off x="886968" y="4302252"/>
+            <a:ext cx="4806543" cy="387096"/>
+          </a:xfrm>
+          <a:prstGeom prst="rect">
+            <a:avLst/>
+          </a:prstGeom>
+          <a:noFill/>
+        </p:spPr>
+        <p:txBody>
+          <a:bodyPr wrap="square" lIns="0" rIns="0" tIns="0" bIns="0" anchor="t">
+            <a:spAutoFit/>
+          </a:bodyPr>
+          <a:lstStyle/>
+          <a:p>
+            <a:pPr algn="l">
+              <a:lnSpc>
+                <a:spcPct val="118000"/>
+              </a:lnSpc>
+            </a:pPr>
+            <a:r>
+              <a:rPr sz="2400" b="1" i="0">
+                <a:solidFill>
+                  <a:srgbClr val="A5335F"/>
+                </a:solidFill>
+                <a:latin typeface="Verdana"/>
+              </a:rPr>
+              <a:t>La classe</a:t>
+            </a:r>
+          </a:p>
+        </p:txBody>
+      </p:sp>
+      <p:sp>
+        <p:nvSpPr>
+          <p:cNvPr id="15" name="TextBox 14"/>
+          <p:cNvSpPr txBox="1"/>
+          <p:nvPr/>
+        </p:nvSpPr>
+        <p:spPr>
+          <a:xfrm>
+            <a:off x="886968" y="4716780"/>
+            <a:ext cx="4806543" cy="1089660"/>
+          </a:xfrm>
+          <a:prstGeom prst="rect">
+            <a:avLst/>
+          </a:prstGeom>
+          <a:noFill/>
+        </p:spPr>
+        <p:txBody>
+          <a:bodyPr wrap="square" lIns="0" rIns="0" tIns="0" bIns="0" anchor="t">
+            <a:spAutoFit/>
+          </a:bodyPr>
+          <a:lstStyle/>
+          <a:p>
+            <a:pPr algn="l">
+              <a:lnSpc>
+                <a:spcPct val="142000"/>
+              </a:lnSpc>
+            </a:pPr>
+            <a:r>
+              <a:rPr sz="1800" b="0" i="0">
+                <a:solidFill>
+                  <a:srgbClr val="3A3D40"/>
+                </a:solidFill>
+                <a:latin typeface="Verdana"/>
+              </a:rPr>
+              <a:t>Le jeu de rôle a une moitié qui se joue à deux, en salle. Elle ne disparaît pas quand l'assistant est fermé.</a:t>
+            </a:r>
+          </a:p>
+        </p:txBody>
+      </p:sp>
+      <p:sp>
+        <p:nvSpPr>
+          <p:cNvPr id="16" name="Rounded Rectangle 15"/>
+          <p:cNvSpPr/>
+          <p:nvPr/>
+        </p:nvSpPr>
+        <p:spPr>
+          <a:xfrm>
+            <a:off x="6178143" y="4027932"/>
+            <a:ext cx="5446623" cy="2052828"/>
+          </a:xfrm>
+          <a:prstGeom prst="roundRect">
+            <a:avLst>
+              <a:gd name="adj" fmla="val 7126"/>
+            </a:avLst>
+          </a:prstGeom>
+          <a:solidFill>
+            <a:srgbClr val="FFFFFF"/>
+          </a:solidFill>
+          <a:ln w="12700">
+            <a:solidFill>
+              <a:srgbClr val="EAEAE8"/>
+            </a:solidFill>
+          </a:ln>
+          <a:effectLst/>
+        </p:spPr>
+        <p:style>
+          <a:lnRef idx="1">
+            <a:schemeClr val="accent1"/>
+          </a:lnRef>
+          <a:fillRef idx="3">
+            <a:schemeClr val="accent1"/>
+          </a:fillRef>
+          <a:effectRef idx="2">
+            <a:schemeClr val="accent1"/>
+          </a:effectRef>
+          <a:fontRef idx="minor">
+            <a:schemeClr val="lt1"/>
+          </a:fontRef>
+        </p:style>
+        <p:txBody>
+          <a:bodyPr rtlCol="0" anchor="ctr"/>
+          <a:lstStyle/>
+          <a:p/>
+        </p:txBody>
+      </p:sp>
+      <p:sp>
+        <p:nvSpPr>
+          <p:cNvPr id="17" name="TextBox 16"/>
+          <p:cNvSpPr txBox="1"/>
+          <p:nvPr/>
+        </p:nvSpPr>
+        <p:spPr>
+          <a:xfrm>
+            <a:off x="6498183" y="4302252"/>
+            <a:ext cx="4806543" cy="387096"/>
+          </a:xfrm>
+          <a:prstGeom prst="rect">
+            <a:avLst/>
+          </a:prstGeom>
+          <a:noFill/>
+        </p:spPr>
+        <p:txBody>
+          <a:bodyPr wrap="square" lIns="0" rIns="0" tIns="0" bIns="0" anchor="t">
+            <a:spAutoFit/>
+          </a:bodyPr>
+          <a:lstStyle/>
+          <a:p>
+            <a:pPr algn="l">
+              <a:lnSpc>
+                <a:spcPct val="118000"/>
+              </a:lnSpc>
+            </a:pPr>
+            <a:r>
+              <a:rPr sz="2400" b="1" i="0">
+                <a:solidFill>
+                  <a:srgbClr val="A5335F"/>
+                </a:solidFill>
+                <a:latin typeface="Verdana"/>
+              </a:rPr>
+              <a:t>Le droit de refuser</a:t>
+            </a:r>
+          </a:p>
+        </p:txBody>
+      </p:sp>
+      <p:sp>
+        <p:nvSpPr>
+          <p:cNvPr id="18" name="TextBox 17"/>
+          <p:cNvSpPr txBox="1"/>
+          <p:nvPr/>
+        </p:nvSpPr>
+        <p:spPr>
+          <a:xfrm>
+            <a:off x="6498183" y="4716780"/>
+            <a:ext cx="4806543" cy="1089660"/>
+          </a:xfrm>
+          <a:prstGeom prst="rect">
+            <a:avLst/>
+          </a:prstGeom>
+          <a:noFill/>
+        </p:spPr>
+        <p:txBody>
+          <a:bodyPr wrap="square" lIns="0" rIns="0" tIns="0" bIns="0" anchor="t">
+            <a:spAutoFit/>
+          </a:bodyPr>
+          <a:lstStyle/>
+          <a:p>
+            <a:pPr algn="l">
+              <a:lnSpc>
+                <a:spcPct val="142000"/>
+              </a:lnSpc>
+            </a:pPr>
+            <a:r>
+              <a:rPr sz="1800" b="0" i="0">
+                <a:solidFill>
+                  <a:srgbClr val="3A3D40"/>
+                </a:solidFill>
+                <a:latin typeface="Verdana"/>
+              </a:rPr>
+              <a:t>Un centre peut fermer l'assistant. Les 87 modules se replient : ce qui reste est un cours, pas une démo cassée.</a:t>
+            </a:r>
+          </a:p>
+        </p:txBody>
+      </p:sp>
+    </p:spTree>
+  </p:cSld>
+  <p:clrMapOvr>
+    <a:masterClrMapping/>
+  </p:clrMapOvr>
+</p:sld>
+</file>
+
+<file path=ppt/slides/slide23.xml><?xml version="1.0" encoding="utf-8"?>
+<p:sld xmlns:a="http://schemas.openxmlformats.org/drawingml/2006/main" xmlns:p="http://schemas.openxmlformats.org/presentationml/2006/main" xmlns:r="http://schemas.openxmlformats.org/officeDocument/2006/relationships">
+  <p:cSld>
+    <p:spTree>
+      <p:nvGrpSpPr>
+        <p:cNvPr id="1" name=""/>
+        <p:cNvGrpSpPr/>
+        <p:nvPr/>
+      </p:nvGrpSpPr>
+      <p:grpSpPr/>
+      <p:sp>
+        <p:nvSpPr>
+          <p:cNvPr id="2" name="Rectangle 1"/>
+          <p:cNvSpPr/>
+          <p:nvPr/>
+        </p:nvSpPr>
+        <p:spPr>
+          <a:xfrm>
+            <a:off x="0" y="0"/>
+            <a:ext cx="12191695" cy="6858000"/>
+          </a:xfrm>
+          <a:prstGeom prst="rect">
+            <a:avLst/>
+          </a:prstGeom>
+          <a:solidFill>
+            <a:srgbClr val="F7F7F5"/>
+          </a:solidFill>
+          <a:ln>
+            <a:noFill/>
+          </a:ln>
+          <a:effectLst/>
+        </p:spPr>
+        <p:style>
+          <a:lnRef idx="1">
+            <a:schemeClr val="accent1"/>
+          </a:lnRef>
+          <a:fillRef idx="3">
+            <a:schemeClr val="accent1"/>
+          </a:fillRef>
+          <a:effectRef idx="2">
+            <a:schemeClr val="accent1"/>
+          </a:effectRef>
+          <a:fontRef idx="minor">
+            <a:schemeClr val="lt1"/>
+          </a:fontRef>
+        </p:style>
+        <p:txBody>
+          <a:bodyPr rtlCol="0" anchor="ctr"/>
+          <a:lstStyle/>
+          <a:p/>
+        </p:txBody>
+      </p:sp>
+      <p:sp>
+        <p:nvSpPr>
+          <p:cNvPr id="3" name="TextBox 2"/>
+          <p:cNvSpPr txBox="1"/>
+          <p:nvPr/>
+        </p:nvSpPr>
+        <p:spPr>
+          <a:xfrm>
+            <a:off x="566928" y="6355080"/>
+            <a:ext cx="6400800" cy="219456"/>
+          </a:xfrm>
+          <a:prstGeom prst="rect">
+            <a:avLst/>
+          </a:prstGeom>
+          <a:noFill/>
+        </p:spPr>
+        <p:txBody>
+          <a:bodyPr wrap="square" lIns="0" rIns="0" tIns="0" bIns="0" anchor="t">
+            <a:spAutoFit/>
+          </a:bodyPr>
+          <a:lstStyle/>
+          <a:p>
+            <a:pPr algn="l">
+              <a:lnSpc>
+                <a:spcPct val="135000"/>
+              </a:lnSpc>
+            </a:pPr>
+            <a:r>
+              <a:rPr sz="1200" b="0" i="0">
+                <a:solidFill>
+                  <a:srgbClr val="6E7175"/>
+                </a:solidFill>
+                <a:latin typeface="Verdana"/>
+              </a:rPr>
+              <a:t>F1 · francis · présentation</a:t>
+            </a:r>
+          </a:p>
+        </p:txBody>
+      </p:sp>
+      <p:sp>
+        <p:nvSpPr>
+          <p:cNvPr id="4" name="TextBox 3"/>
+          <p:cNvSpPr txBox="1"/>
+          <p:nvPr/>
+        </p:nvSpPr>
+        <p:spPr>
+          <a:xfrm>
+            <a:off x="10710367" y="6355080"/>
+            <a:ext cx="914400" cy="219456"/>
+          </a:xfrm>
+          <a:prstGeom prst="rect">
+            <a:avLst/>
+          </a:prstGeom>
+          <a:noFill/>
+        </p:spPr>
+        <p:txBody>
+          <a:bodyPr wrap="square" lIns="0" rIns="0" tIns="0" bIns="0" anchor="t">
+            <a:spAutoFit/>
+          </a:bodyPr>
+          <a:lstStyle/>
+          <a:p>
+            <a:pPr algn="r">
+              <a:lnSpc>
+                <a:spcPct val="135000"/>
+              </a:lnSpc>
+            </a:pPr>
+            <a:r>
+              <a:rPr sz="1200" b="0" i="0">
+                <a:solidFill>
+                  <a:srgbClr val="6E7175"/>
+                </a:solidFill>
+                <a:latin typeface="Verdana"/>
+              </a:rPr>
+              <a:t>23</a:t>
             </a:r>
           </a:p>
         </p:txBody>
@@ -14550,33 +15342,111 @@
                 </a:solidFill>
                 <a:latin typeface="Verdana"/>
               </a:rPr>
-              <a:t>LA FORME DES EXERCICES</a:t>
-            </a:r>
-          </a:p>
-        </p:txBody>
-      </p:sp>
-      <p:sp>
-        <p:nvSpPr>
-          <p:cNvPr id="6" name="Rounded Rectangle 5"/>
+              <a:t>LE CHEMIN, À L'ÉCRAN</a:t>
+            </a:r>
+          </a:p>
+        </p:txBody>
+      </p:sp>
+      <p:sp>
+        <p:nvSpPr>
+          <p:cNvPr id="6" name="TextBox 5"/>
+          <p:cNvSpPr txBox="1"/>
+          <p:nvPr/>
+        </p:nvSpPr>
+        <p:spPr>
+          <a:xfrm>
+            <a:off x="566928" y="749808"/>
+            <a:ext cx="11057839" cy="877824"/>
+          </a:xfrm>
+          <a:prstGeom prst="rect">
+            <a:avLst/>
+          </a:prstGeom>
+          <a:noFill/>
+        </p:spPr>
+        <p:txBody>
+          <a:bodyPr wrap="square" lIns="0" rIns="0" tIns="0" bIns="0" anchor="t">
+            <a:spAutoFit/>
+          </a:bodyPr>
+          <a:lstStyle/>
+          <a:p>
+            <a:pPr algn="l">
+              <a:lnSpc>
+                <a:spcPct val="115000"/>
+              </a:lnSpc>
+            </a:pPr>
+            <a:r>
+              <a:rPr sz="3400" b="1" i="0">
+                <a:solidFill>
+                  <a:srgbClr val="17181A"/>
+                </a:solidFill>
+                <a:latin typeface="Verdana"/>
+              </a:rPr>
+              <a:t>Les sections d'un module</a:t>
+            </a:r>
+          </a:p>
+        </p:txBody>
+      </p:sp>
+      <p:sp>
+        <p:nvSpPr>
+          <p:cNvPr id="7" name="TextBox 6"/>
+          <p:cNvSpPr txBox="1"/>
+          <p:nvPr/>
+        </p:nvSpPr>
+        <p:spPr>
+          <a:xfrm>
+            <a:off x="566928" y="1645920"/>
+            <a:ext cx="11057839" cy="617220"/>
+          </a:xfrm>
+          <a:prstGeom prst="rect">
+            <a:avLst/>
+          </a:prstGeom>
+          <a:noFill/>
+        </p:spPr>
+        <p:txBody>
+          <a:bodyPr wrap="square" lIns="0" rIns="0" tIns="0" bIns="0" anchor="t">
+            <a:spAutoFit/>
+          </a:bodyPr>
+          <a:lstStyle/>
+          <a:p>
+            <a:pPr algn="l">
+              <a:lnSpc>
+                <a:spcPct val="135000"/>
+              </a:lnSpc>
+            </a:pPr>
+            <a:r>
+              <a:rPr sz="1800" b="0" i="0">
+                <a:solidFill>
+                  <a:srgbClr val="6E7175"/>
+                </a:solidFill>
+                <a:latin typeface="Verdana"/>
+              </a:rPr>
+              <a:t>Les six étapes sont là, tout le temps, dans le même ordre. L'élève sait où il en est sans qu'on le lui dise.</a:t>
+            </a:r>
+          </a:p>
+        </p:txBody>
+      </p:sp>
+      <p:sp>
+        <p:nvSpPr>
+          <p:cNvPr id="8" name="Rounded Rectangle 7"/>
           <p:cNvSpPr/>
           <p:nvPr/>
         </p:nvSpPr>
         <p:spPr>
           <a:xfrm>
-            <a:off x="566928" y="1225296"/>
-            <a:ext cx="11057839" cy="1441196"/>
+            <a:off x="5209231" y="2372868"/>
+            <a:ext cx="1773232" cy="3799332"/>
           </a:xfrm>
           <a:prstGeom prst="roundRect">
             <a:avLst>
-              <a:gd name="adj" fmla="val 10151"/>
+              <a:gd name="adj" fmla="val 5156"/>
             </a:avLst>
           </a:prstGeom>
           <a:solidFill>
-            <a:srgbClr val="FCE9F0"/>
+            <a:srgbClr val="FFFFFF"/>
           </a:solidFill>
           <a:ln w="12700">
             <a:solidFill>
-              <a:srgbClr val="EAEAE8"/>
+              <a:srgbClr val="D6D6D2"/>
             </a:solidFill>
           </a:ln>
           <a:effectLst/>
@@ -14601,130 +15471,30 @@
           <a:p/>
         </p:txBody>
       </p:sp>
-      <p:sp>
-        <p:nvSpPr>
-          <p:cNvPr id="7" name="TextBox 6"/>
-          <p:cNvSpPr txBox="1"/>
-          <p:nvPr/>
-        </p:nvSpPr>
-        <p:spPr>
-          <a:xfrm>
-            <a:off x="1298448" y="1682496"/>
-            <a:ext cx="9594799" cy="618235"/>
-          </a:xfrm>
-          <a:prstGeom prst="rect">
-            <a:avLst/>
-          </a:prstGeom>
-          <a:noFill/>
-        </p:spPr>
-        <p:txBody>
-          <a:bodyPr wrap="square" lIns="0" rIns="0" tIns="0" bIns="0" anchor="t">
-            <a:spAutoFit/>
-          </a:bodyPr>
-          <a:lstStyle/>
-          <a:p>
-            <a:pPr algn="l">
-              <a:lnSpc>
-                <a:spcPct val="122000"/>
-              </a:lnSpc>
-            </a:pPr>
-            <a:r>
-              <a:rPr sz="3400" b="1" i="0">
-                <a:solidFill>
-                  <a:srgbClr val="17181A"/>
-                </a:solidFill>
-                <a:latin typeface="Verdana"/>
-              </a:rPr>
-              <a:t>Sept familles, pas une de plus.</a:t>
-            </a:r>
-          </a:p>
-        </p:txBody>
-      </p:sp>
-      <p:sp>
-        <p:nvSpPr>
-          <p:cNvPr id="8" name="Rounded Rectangle 7"/>
-          <p:cNvSpPr/>
-          <p:nvPr/>
-        </p:nvSpPr>
-        <p:spPr>
-          <a:xfrm>
-            <a:off x="566928" y="2940812"/>
-            <a:ext cx="11057839" cy="2040128"/>
-          </a:xfrm>
-          <a:prstGeom prst="roundRect">
-            <a:avLst>
-              <a:gd name="adj" fmla="val 7171"/>
-            </a:avLst>
-          </a:prstGeom>
-          <a:solidFill>
-            <a:srgbClr val="FFFFFF"/>
-          </a:solidFill>
-          <a:ln w="12700">
-            <a:solidFill>
-              <a:srgbClr val="EAEAE8"/>
-            </a:solidFill>
-          </a:ln>
-          <a:effectLst/>
-        </p:spPr>
-        <p:style>
-          <a:lnRef idx="1">
-            <a:schemeClr val="accent1"/>
-          </a:lnRef>
-          <a:fillRef idx="3">
-            <a:schemeClr val="accent1"/>
-          </a:fillRef>
-          <a:effectRef idx="2">
-            <a:schemeClr val="accent1"/>
-          </a:effectRef>
-          <a:fontRef idx="minor">
-            <a:schemeClr val="lt1"/>
-          </a:fontRef>
-        </p:style>
-        <p:txBody>
-          <a:bodyPr rtlCol="0" anchor="ctr"/>
-          <a:lstStyle/>
-          <a:p/>
-        </p:txBody>
-      </p:sp>
-      <p:sp>
-        <p:nvSpPr>
-          <p:cNvPr id="9" name="TextBox 8"/>
-          <p:cNvSpPr txBox="1"/>
-          <p:nvPr/>
-        </p:nvSpPr>
-        <p:spPr>
-          <a:xfrm>
-            <a:off x="969264" y="3215132"/>
-            <a:ext cx="10234879" cy="1582928"/>
-          </a:xfrm>
-          <a:prstGeom prst="rect">
-            <a:avLst/>
-          </a:prstGeom>
-          <a:noFill/>
-        </p:spPr>
-        <p:txBody>
-          <a:bodyPr wrap="square" lIns="0" rIns="0" tIns="0" bIns="0" anchor="t">
-            <a:spAutoFit/>
-          </a:bodyPr>
-          <a:lstStyle/>
-          <a:p>
-            <a:pPr algn="l">
-              <a:lnSpc>
-                <a:spcPct val="145000"/>
-              </a:lnSpc>
-            </a:pPr>
-            <a:r>
-              <a:rPr sz="2000" b="0" i="0">
-                <a:solidFill>
-                  <a:srgbClr val="4B4F52"/>
-                </a:solidFill>
-                <a:latin typeface="Verdana"/>
-              </a:rPr>
-              <a:t>Vrai ou faux, associer, des cases à écrire, un texte à trous, des images, une question ouverte, un tableau. Un élève de francisation dépense beaucoup d'énergie à comprendre ce qu'on lui demande : il l'apprend une fois, puis il ne pense plus qu'au français.</a:t>
-            </a:r>
-          </a:p>
-        </p:txBody>
-      </p:sp>
+      <p:pic>
+        <p:nvPicPr>
+          <p:cNvPr id="9" name="Picture 8" descr="tel-04-module-tete.png"/>
+          <p:cNvPicPr>
+            <a:picLocks noChangeAspect="1"/>
+          </p:cNvPicPr>
+          <p:nvPr/>
+        </p:nvPicPr>
+        <p:blipFill>
+          <a:blip r:embed="rId2"/>
+          <a:stretch>
+            <a:fillRect/>
+          </a:stretch>
+        </p:blipFill>
+        <p:spPr>
+          <a:xfrm>
+            <a:off x="5227519" y="2391156"/>
+            <a:ext cx="1736656" cy="3762756"/>
+          </a:xfrm>
+          <a:prstGeom prst="rect">
+            <a:avLst/>
+          </a:prstGeom>
+        </p:spPr>
+      </p:pic>
     </p:spTree>
   </p:cSld>
   <p:clrMapOvr>
@@ -14897,21 +15667,67 @@
                 </a:solidFill>
                 <a:latin typeface="Verdana"/>
               </a:rPr>
-              <a:t>UNE DES SEPT FORMES</a:t>
-            </a:r>
-          </a:p>
-        </p:txBody>
-      </p:sp>
-      <p:sp>
-        <p:nvSpPr>
-          <p:cNvPr id="6" name="TextBox 5"/>
-          <p:cNvSpPr txBox="1"/>
-          <p:nvPr/>
-        </p:nvSpPr>
-        <p:spPr>
-          <a:xfrm>
-            <a:off x="566928" y="749808"/>
-            <a:ext cx="11057839" cy="877824"/>
+              <a:t>LA FORME DES EXERCICES</a:t>
+            </a:r>
+          </a:p>
+        </p:txBody>
+      </p:sp>
+      <p:sp>
+        <p:nvSpPr>
+          <p:cNvPr id="6" name="Rounded Rectangle 5"/>
+          <p:cNvSpPr/>
+          <p:nvPr/>
+        </p:nvSpPr>
+        <p:spPr>
+          <a:xfrm>
+            <a:off x="566928" y="1225296"/>
+            <a:ext cx="11057839" cy="1441196"/>
+          </a:xfrm>
+          <a:prstGeom prst="roundRect">
+            <a:avLst>
+              <a:gd name="adj" fmla="val 10151"/>
+            </a:avLst>
+          </a:prstGeom>
+          <a:solidFill>
+            <a:srgbClr val="FCE9F0"/>
+          </a:solidFill>
+          <a:ln w="12700">
+            <a:solidFill>
+              <a:srgbClr val="EAEAE8"/>
+            </a:solidFill>
+          </a:ln>
+          <a:effectLst/>
+        </p:spPr>
+        <p:style>
+          <a:lnRef idx="1">
+            <a:schemeClr val="accent1"/>
+          </a:lnRef>
+          <a:fillRef idx="3">
+            <a:schemeClr val="accent1"/>
+          </a:fillRef>
+          <a:effectRef idx="2">
+            <a:schemeClr val="accent1"/>
+          </a:effectRef>
+          <a:fontRef idx="minor">
+            <a:schemeClr val="lt1"/>
+          </a:fontRef>
+        </p:style>
+        <p:txBody>
+          <a:bodyPr rtlCol="0" anchor="ctr"/>
+          <a:lstStyle/>
+          <a:p/>
+        </p:txBody>
+      </p:sp>
+      <p:sp>
+        <p:nvSpPr>
+          <p:cNvPr id="7" name="TextBox 6"/>
+          <p:cNvSpPr txBox="1"/>
+          <p:nvPr/>
+        </p:nvSpPr>
+        <p:spPr>
+          <a:xfrm>
+            <a:off x="1298448" y="1682496"/>
+            <a:ext cx="9594799" cy="618235"/>
           </a:xfrm>
           <a:prstGeom prst="rect">
             <a:avLst/>
@@ -14926,7 +15742,7 @@
           <a:p>
             <a:pPr algn="l">
               <a:lnSpc>
-                <a:spcPct val="115000"/>
+                <a:spcPct val="122000"/>
               </a:lnSpc>
             </a:pPr>
             <a:r>
@@ -14936,46 +15752,7 @@
                 </a:solidFill>
                 <a:latin typeface="Verdana"/>
               </a:rPr>
-              <a:t>Des cases à écrire</a:t>
-            </a:r>
-          </a:p>
-        </p:txBody>
-      </p:sp>
-      <p:sp>
-        <p:nvSpPr>
-          <p:cNvPr id="7" name="TextBox 6"/>
-          <p:cNvSpPr txBox="1"/>
-          <p:nvPr/>
-        </p:nvSpPr>
-        <p:spPr>
-          <a:xfrm>
-            <a:off x="566928" y="1645920"/>
-            <a:ext cx="11057839" cy="617220"/>
-          </a:xfrm>
-          <a:prstGeom prst="rect">
-            <a:avLst/>
-          </a:prstGeom>
-          <a:noFill/>
-        </p:spPr>
-        <p:txBody>
-          <a:bodyPr wrap="square" lIns="0" rIns="0" tIns="0" bIns="0" anchor="t">
-            <a:spAutoFit/>
-          </a:bodyPr>
-          <a:lstStyle/>
-          <a:p>
-            <a:pPr algn="l">
-              <a:lnSpc>
-                <a:spcPct val="135000"/>
-              </a:lnSpc>
-            </a:pPr>
-            <a:r>
-              <a:rPr sz="1800" b="0" i="0">
-                <a:solidFill>
-                  <a:srgbClr val="6E7175"/>
-                </a:solidFill>
-                <a:latin typeface="Verdana"/>
-              </a:rPr>
-              <a:t>La même forme dans les 87 modules et les huit niveaux. L'élève l'apprend une fois, puis ne pense plus qu'au français.</a:t>
+              <a:t>Sept familles, pas une de plus.</a:t>
             </a:r>
           </a:p>
         </p:txBody>
@@ -14988,12 +15765,12 @@
         </p:nvSpPr>
         <p:spPr>
           <a:xfrm>
-            <a:off x="5209231" y="2372868"/>
-            <a:ext cx="1773232" cy="3799332"/>
+            <a:off x="566928" y="2940812"/>
+            <a:ext cx="11057839" cy="2040128"/>
           </a:xfrm>
           <a:prstGeom prst="roundRect">
             <a:avLst>
-              <a:gd name="adj" fmla="val 5156"/>
+              <a:gd name="adj" fmla="val 7171"/>
             </a:avLst>
           </a:prstGeom>
           <a:solidFill>
@@ -15001,7 +15778,7 @@
           </a:solidFill>
           <a:ln w="12700">
             <a:solidFill>
-              <a:srgbClr val="D6D6D2"/>
+              <a:srgbClr val="EAEAE8"/>
             </a:solidFill>
           </a:ln>
           <a:effectLst/>
@@ -15026,30 +15803,45 @@
           <a:p/>
         </p:txBody>
       </p:sp>
-      <p:pic>
-        <p:nvPicPr>
-          <p:cNvPr id="9" name="Picture 8" descr="tel-09-cases-ecrire.png"/>
-          <p:cNvPicPr>
-            <a:picLocks noChangeAspect="1"/>
-          </p:cNvPicPr>
-          <p:nvPr/>
-        </p:nvPicPr>
-        <p:blipFill>
-          <a:blip r:embed="rId2"/>
-          <a:stretch>
-            <a:fillRect/>
-          </a:stretch>
-        </p:blipFill>
-        <p:spPr>
-          <a:xfrm>
-            <a:off x="5227519" y="2391156"/>
-            <a:ext cx="1736656" cy="3762756"/>
-          </a:xfrm>
-          <a:prstGeom prst="rect">
-            <a:avLst/>
-          </a:prstGeom>
-        </p:spPr>
-      </p:pic>
+      <p:sp>
+        <p:nvSpPr>
+          <p:cNvPr id="9" name="TextBox 8"/>
+          <p:cNvSpPr txBox="1"/>
+          <p:nvPr/>
+        </p:nvSpPr>
+        <p:spPr>
+          <a:xfrm>
+            <a:off x="969264" y="3215132"/>
+            <a:ext cx="10234879" cy="1582928"/>
+          </a:xfrm>
+          <a:prstGeom prst="rect">
+            <a:avLst/>
+          </a:prstGeom>
+          <a:noFill/>
+        </p:spPr>
+        <p:txBody>
+          <a:bodyPr wrap="square" lIns="0" rIns="0" tIns="0" bIns="0" anchor="t">
+            <a:spAutoFit/>
+          </a:bodyPr>
+          <a:lstStyle/>
+          <a:p>
+            <a:pPr algn="l">
+              <a:lnSpc>
+                <a:spcPct val="145000"/>
+              </a:lnSpc>
+            </a:pPr>
+            <a:r>
+              <a:rPr sz="2000" b="0" i="0">
+                <a:solidFill>
+                  <a:srgbClr val="4B4F52"/>
+                </a:solidFill>
+                <a:latin typeface="Verdana"/>
+              </a:rPr>
+              <a:t>Vrai ou faux, associer, des cases à écrire, un texte à trous, des images, une question ouverte, un tableau. Un élève de francisation dépense beaucoup d'énergie à comprendre ce qu'on lui demande : il l'apprend une fois, puis il ne pense plus qu'au français.</a:t>
+            </a:r>
+          </a:p>
+        </p:txBody>
+      </p:sp>
     </p:spTree>
   </p:cSld>
   <p:clrMapOvr>
